--- a/slides/Summit_Demo_Deck.pptx
+++ b/slides/Summit_Demo_Deck.pptx
@@ -3215,7 +3215,7 @@
                 </a:solidFill>
                 <a:latin typeface="Calibri"/>
               </a:rPr>
-              <a:t>NetBox Cloud  ·  Event-Driven Ansible  ·  AAP Controller</a:t>
+              <a:t>NetBox Cloud  ·  Ansible Automation Platform</a:t>
             </a:r>
           </a:p>
         </p:txBody>
@@ -3392,7 +3392,7 @@
         <p:spPr>
           <a:xfrm>
             <a:off x="457200" y="228600"/>
-            <a:ext cx="10058400" cy="640080"/>
+            <a:ext cx="10058400" cy="685800"/>
           </a:xfrm>
           <a:prstGeom prst="rect">
             <a:avLst/>
@@ -3413,53 +3413,43 @@
                 </a:solidFill>
                 <a:latin typeface="Calibri"/>
               </a:rPr>
-              <a:t>Key Messages</a:t>
-            </a:r>
-          </a:p>
-        </p:txBody>
-      </p:sp>
-      <p:sp>
-        <p:nvSpPr>
-          <p:cNvPr id="4" name="Rectangle 3"/>
-          <p:cNvSpPr/>
-          <p:nvPr/>
-        </p:nvSpPr>
-        <p:spPr>
-          <a:xfrm>
-            <a:off x="457200" y="1005840"/>
-            <a:ext cx="5394960" cy="2011680"/>
-          </a:xfrm>
-          <a:prstGeom prst="rect">
-            <a:avLst/>
-          </a:prstGeom>
-          <a:solidFill>
-            <a:srgbClr val="142A3E"/>
-          </a:solidFill>
-          <a:ln w="19050">
-            <a:solidFill>
-              <a:srgbClr val="EF4444"/>
-            </a:solidFill>
-          </a:ln>
-        </p:spPr>
-        <p:style>
-          <a:lnRef idx="1">
-            <a:schemeClr val="accent1"/>
-          </a:lnRef>
-          <a:fillRef idx="3">
-            <a:schemeClr val="accent1"/>
-          </a:fillRef>
-          <a:effectRef idx="2">
-            <a:schemeClr val="accent1"/>
-          </a:effectRef>
-          <a:fontRef idx="minor">
-            <a:schemeClr val="lt1"/>
-          </a:fontRef>
-        </p:style>
-        <p:txBody>
-          <a:bodyPr rtlCol="0" anchor="ctr"/>
-          <a:lstStyle/>
-          <a:p>
-            <a:pPr algn="ctr"/>
+              <a:t>The Playbook: Driven Entirely by NetBox Data</a:t>
+            </a:r>
+          </a:p>
+        </p:txBody>
+      </p:sp>
+      <p:sp>
+        <p:nvSpPr>
+          <p:cNvPr id="4" name="TextBox 3"/>
+          <p:cNvSpPr txBox="1"/>
+          <p:nvPr/>
+        </p:nvSpPr>
+        <p:spPr>
+          <a:xfrm>
+            <a:off x="548640" y="1097280"/>
+            <a:ext cx="10515600" cy="502920"/>
+          </a:xfrm>
+          <a:prstGeom prst="rect">
+            <a:avLst/>
+          </a:prstGeom>
+          <a:noFill/>
+        </p:spPr>
+        <p:txBody>
+          <a:bodyPr wrap="square">
+            <a:spAutoFit/>
+          </a:bodyPr>
+          <a:lstStyle/>
+          <a:p>
+            <a:pPr algn="l"/>
+            <a:r>
+              <a:rPr sz="2200" b="0" i="0">
+                <a:solidFill>
+                  <a:srgbClr val="FFFFFF"/>
+                </a:solidFill>
+                <a:latin typeface="Calibri"/>
+              </a:rPr>
+              <a:t>•  Input: just the failed circuit CID (e.g. IPLC-GB-AT-PRI)</a:t>
+            </a:r>
           </a:p>
         </p:txBody>
       </p:sp>
@@ -3471,29 +3461,29 @@
         </p:nvSpPr>
         <p:spPr>
           <a:xfrm>
-            <a:off x="640080" y="1143000"/>
-            <a:ext cx="5029200" cy="1005840"/>
-          </a:xfrm>
-          <a:prstGeom prst="rect">
-            <a:avLst/>
-          </a:prstGeom>
-          <a:noFill/>
-        </p:spPr>
-        <p:txBody>
-          <a:bodyPr wrap="square">
-            <a:spAutoFit/>
-          </a:bodyPr>
-          <a:lstStyle/>
-          <a:p>
-            <a:pPr algn="ctr"/>
-            <a:r>
-              <a:rPr sz="5200" b="1" i="0">
-                <a:solidFill>
-                  <a:srgbClr val="EF4444"/>
-                </a:solidFill>
-                <a:latin typeface="Calibri"/>
-              </a:rPr>
-              <a:t>~45 min</a:t>
+            <a:off x="548640" y="1627632"/>
+            <a:ext cx="10515600" cy="502920"/>
+          </a:xfrm>
+          <a:prstGeom prst="rect">
+            <a:avLst/>
+          </a:prstGeom>
+          <a:noFill/>
+        </p:spPr>
+        <p:txBody>
+          <a:bodyPr wrap="square">
+            <a:spAutoFit/>
+          </a:bodyPr>
+          <a:lstStyle/>
+          <a:p>
+            <a:pPr algn="l"/>
+            <a:r>
+              <a:rPr sz="2200" b="0" i="0">
+                <a:solidFill>
+                  <a:srgbClr val="FFFFFF"/>
+                </a:solidFill>
+                <a:latin typeface="Calibri"/>
+              </a:rPr>
+              <a:t>•  Discovers A-side and Z-side sites from circuit terminations in NetBox</a:t>
             </a:r>
           </a:p>
         </p:txBody>
@@ -3506,75 +3496,65 @@
         </p:nvSpPr>
         <p:spPr>
           <a:xfrm>
-            <a:off x="640080" y="1920240"/>
-            <a:ext cx="5029200" cy="457200"/>
-          </a:xfrm>
-          <a:prstGeom prst="rect">
-            <a:avLst/>
-          </a:prstGeom>
-          <a:noFill/>
-        </p:spPr>
-        <p:txBody>
-          <a:bodyPr wrap="square">
-            <a:spAutoFit/>
-          </a:bodyPr>
-          <a:lstStyle/>
-          <a:p>
-            <a:pPr algn="ctr"/>
-            <a:r>
-              <a:rPr sz="1800" b="0" i="0">
-                <a:solidFill>
-                  <a:srgbClr val="B0BCCC"/>
-                </a:solidFill>
-                <a:latin typeface="Calibri"/>
-              </a:rPr>
-              <a:t>Manual failover</a:t>
-            </a:r>
-          </a:p>
-        </p:txBody>
-      </p:sp>
-      <p:sp>
-        <p:nvSpPr>
-          <p:cNvPr id="7" name="Rectangle 6"/>
-          <p:cNvSpPr/>
-          <p:nvPr/>
-        </p:nvSpPr>
-        <p:spPr>
-          <a:xfrm>
-            <a:off x="6217920" y="1005840"/>
-            <a:ext cx="5394960" cy="2011680"/>
-          </a:xfrm>
-          <a:prstGeom prst="rect">
-            <a:avLst/>
-          </a:prstGeom>
-          <a:solidFill>
-            <a:srgbClr val="142A3E"/>
-          </a:solidFill>
-          <a:ln w="19050">
-            <a:solidFill>
-              <a:srgbClr val="22C55E"/>
-            </a:solidFill>
-          </a:ln>
-        </p:spPr>
-        <p:style>
-          <a:lnRef idx="1">
-            <a:schemeClr val="accent1"/>
-          </a:lnRef>
-          <a:fillRef idx="3">
-            <a:schemeClr val="accent1"/>
-          </a:fillRef>
-          <a:effectRef idx="2">
-            <a:schemeClr val="accent1"/>
-          </a:effectRef>
-          <a:fontRef idx="minor">
-            <a:schemeClr val="lt1"/>
-          </a:fontRef>
-        </p:style>
-        <p:txBody>
-          <a:bodyPr rtlCol="0" anchor="ctr"/>
-          <a:lstStyle/>
-          <a:p>
-            <a:pPr algn="ctr"/>
+            <a:off x="548640" y="2157984"/>
+            <a:ext cx="10515600" cy="502920"/>
+          </a:xfrm>
+          <a:prstGeom prst="rect">
+            <a:avLst/>
+          </a:prstGeom>
+          <a:noFill/>
+        </p:spPr>
+        <p:txBody>
+          <a:bodyPr wrap="square">
+            <a:spAutoFit/>
+          </a:bodyPr>
+          <a:lstStyle/>
+          <a:p>
+            <a:pPr algn="l"/>
+            <a:r>
+              <a:rPr sz="2200" b="0" i="0">
+                <a:solidFill>
+                  <a:srgbClr val="FFFFFF"/>
+                </a:solidFill>
+                <a:latin typeface="Calibri"/>
+              </a:rPr>
+              <a:t>•  Finds all active circuits between those two sites tagged for failover</a:t>
+            </a:r>
+          </a:p>
+        </p:txBody>
+      </p:sp>
+      <p:sp>
+        <p:nvSpPr>
+          <p:cNvPr id="7" name="TextBox 6"/>
+          <p:cNvSpPr txBox="1"/>
+          <p:nvPr/>
+        </p:nvSpPr>
+        <p:spPr>
+          <a:xfrm>
+            <a:off x="548640" y="2688336"/>
+            <a:ext cx="10515600" cy="502920"/>
+          </a:xfrm>
+          <a:prstGeom prst="rect">
+            <a:avLst/>
+          </a:prstGeom>
+          <a:noFill/>
+        </p:spPr>
+        <p:txBody>
+          <a:bodyPr wrap="square">
+            <a:spAutoFit/>
+          </a:bodyPr>
+          <a:lstStyle/>
+          <a:p>
+            <a:pPr algn="l"/>
+            <a:r>
+              <a:rPr sz="2200" b="0" i="0">
+                <a:solidFill>
+                  <a:srgbClr val="FFFFFF"/>
+                </a:solidFill>
+                <a:latin typeface="Calibri"/>
+              </a:rPr>
+              <a:t>•  Selects the best backup by highest committed bandwidth</a:t>
+            </a:r>
           </a:p>
         </p:txBody>
       </p:sp>
@@ -3586,29 +3566,29 @@
         </p:nvSpPr>
         <p:spPr>
           <a:xfrm>
-            <a:off x="6400800" y="1143000"/>
-            <a:ext cx="5029200" cy="1005840"/>
-          </a:xfrm>
-          <a:prstGeom prst="rect">
-            <a:avLst/>
-          </a:prstGeom>
-          <a:noFill/>
-        </p:spPr>
-        <p:txBody>
-          <a:bodyPr wrap="square">
-            <a:spAutoFit/>
-          </a:bodyPr>
-          <a:lstStyle/>
-          <a:p>
-            <a:pPr algn="ctr"/>
-            <a:r>
-              <a:rPr sz="5200" b="1" i="0">
-                <a:solidFill>
-                  <a:srgbClr val="22C55E"/>
-                </a:solidFill>
-                <a:latin typeface="Calibri"/>
-              </a:rPr>
-              <a:t>&lt; 30 sec</a:t>
+            <a:off x="548640" y="3218688"/>
+            <a:ext cx="10515600" cy="502920"/>
+          </a:xfrm>
+          <a:prstGeom prst="rect">
+            <a:avLst/>
+          </a:prstGeom>
+          <a:noFill/>
+        </p:spPr>
+        <p:txBody>
+          <a:bodyPr wrap="square">
+            <a:spAutoFit/>
+          </a:bodyPr>
+          <a:lstStyle/>
+          <a:p>
+            <a:pPr algn="l"/>
+            <a:r>
+              <a:rPr sz="2200" b="0" i="0">
+                <a:solidFill>
+                  <a:srgbClr val="FFFFFF"/>
+                </a:solidFill>
+                <a:latin typeface="Calibri"/>
+              </a:rPr>
+              <a:t>•  No hardcoded backup mappings — add a new circuit to NetBox and it is automatically considered</a:t>
             </a:r>
           </a:p>
         </p:txBody>
@@ -3621,29 +3601,29 @@
         </p:nvSpPr>
         <p:spPr>
           <a:xfrm>
-            <a:off x="6400800" y="1920240"/>
-            <a:ext cx="5029200" cy="457200"/>
-          </a:xfrm>
-          <a:prstGeom prst="rect">
-            <a:avLst/>
-          </a:prstGeom>
-          <a:noFill/>
-        </p:spPr>
-        <p:txBody>
-          <a:bodyPr wrap="square">
-            <a:spAutoFit/>
-          </a:bodyPr>
-          <a:lstStyle/>
-          <a:p>
-            <a:pPr algn="ctr"/>
-            <a:r>
-              <a:rPr sz="1800" b="0" i="0">
-                <a:solidFill>
-                  <a:srgbClr val="B0BCCC"/>
-                </a:solidFill>
-                <a:latin typeface="Calibri"/>
-              </a:rPr>
-              <a:t>Automated failover</a:t>
+            <a:off x="548640" y="3749040"/>
+            <a:ext cx="10515600" cy="502920"/>
+          </a:xfrm>
+          <a:prstGeom prst="rect">
+            <a:avLst/>
+          </a:prstGeom>
+          <a:noFill/>
+        </p:spPr>
+        <p:txBody>
+          <a:bodyPr wrap="square">
+            <a:spAutoFit/>
+          </a:bodyPr>
+          <a:lstStyle/>
+          <a:p>
+            <a:pPr algn="l"/>
+            <a:r>
+              <a:rPr sz="2200" b="0" i="0">
+                <a:solidFill>
+                  <a:srgbClr val="FFFFFF"/>
+                </a:solidFill>
+                <a:latin typeface="Calibri"/>
+              </a:rPr>
+              <a:t>•  Pushes router config changes to all routers at both ends</a:t>
             </a:r>
           </a:p>
         </p:txBody>
@@ -3656,29 +3636,29 @@
         </p:nvSpPr>
         <p:spPr>
           <a:xfrm>
-            <a:off x="457200" y="3246120"/>
-            <a:ext cx="11247120" cy="438912"/>
-          </a:xfrm>
-          <a:prstGeom prst="rect">
-            <a:avLst/>
-          </a:prstGeom>
-          <a:noFill/>
-        </p:spPr>
-        <p:txBody>
-          <a:bodyPr wrap="square">
-            <a:spAutoFit/>
-          </a:bodyPr>
-          <a:lstStyle/>
-          <a:p>
-            <a:pPr algn="l"/>
-            <a:r>
-              <a:rPr sz="1800" b="0" i="0">
+            <a:off x="548640" y="4279392"/>
+            <a:ext cx="10515600" cy="502920"/>
+          </a:xfrm>
+          <a:prstGeom prst="rect">
+            <a:avLst/>
+          </a:prstGeom>
+          <a:noFill/>
+        </p:spPr>
+        <p:txBody>
+          <a:bodyPr wrap="square">
+            <a:spAutoFit/>
+          </a:bodyPr>
+          <a:lstStyle/>
+          <a:p>
+            <a:pPr algn="l"/>
+            <a:r>
+              <a:rPr sz="2200" b="0" i="0">
                 <a:solidFill>
                   <a:srgbClr val="FFFFFF"/>
                 </a:solidFill>
                 <a:latin typeface="Calibri"/>
               </a:rPr>
-              <a:t>✦  NetBox is not just a CMDB — it is an active source of truth that drives automation</a:t>
+              <a:t>•  Writes back to NetBox: primary → offline, backup → active</a:t>
             </a:r>
           </a:p>
         </p:txBody>
@@ -3691,141 +3671,36 @@
         </p:nvSpPr>
         <p:spPr>
           <a:xfrm>
-            <a:off x="457200" y="3721608"/>
-            <a:ext cx="11247120" cy="438912"/>
-          </a:xfrm>
-          <a:prstGeom prst="rect">
-            <a:avLst/>
-          </a:prstGeom>
-          <a:noFill/>
-        </p:spPr>
-        <p:txBody>
-          <a:bodyPr wrap="square">
-            <a:spAutoFit/>
-          </a:bodyPr>
-          <a:lstStyle/>
-          <a:p>
-            <a:pPr algn="l"/>
-            <a:r>
-              <a:rPr sz="1800" b="0" i="0">
+            <a:off x="548640" y="4809744"/>
+            <a:ext cx="10515600" cy="502920"/>
+          </a:xfrm>
+          <a:prstGeom prst="rect">
+            <a:avLst/>
+          </a:prstGeom>
+          <a:noFill/>
+        </p:spPr>
+        <p:txBody>
+          <a:bodyPr wrap="square">
+            <a:spAutoFit/>
+          </a:bodyPr>
+          <a:lstStyle/>
+          <a:p>
+            <a:pPr algn="l"/>
+            <a:r>
+              <a:rPr sz="2200" b="0" i="0">
                 <a:solidFill>
                   <a:srgbClr val="FFFFFF"/>
                 </a:solidFill>
                 <a:latin typeface="Calibri"/>
               </a:rPr>
-              <a:t>✦  EDA eliminates polling: the moment a circuit changes, the response is already running</a:t>
-            </a:r>
-          </a:p>
-        </p:txBody>
-      </p:sp>
-      <p:sp>
-        <p:nvSpPr>
-          <p:cNvPr id="12" name="TextBox 11"/>
-          <p:cNvSpPr txBox="1"/>
-          <p:nvPr/>
-        </p:nvSpPr>
-        <p:spPr>
-          <a:xfrm>
-            <a:off x="457200" y="4197096"/>
-            <a:ext cx="11247120" cy="438912"/>
-          </a:xfrm>
-          <a:prstGeom prst="rect">
-            <a:avLst/>
-          </a:prstGeom>
-          <a:noFill/>
-        </p:spPr>
-        <p:txBody>
-          <a:bodyPr wrap="square">
-            <a:spAutoFit/>
-          </a:bodyPr>
-          <a:lstStyle/>
-          <a:p>
-            <a:pPr algn="l"/>
-            <a:r>
-              <a:rPr sz="1800" b="0" i="0">
-                <a:solidFill>
-                  <a:srgbClr val="FFFFFF"/>
-                </a:solidFill>
-                <a:latin typeface="Calibri"/>
-              </a:rPr>
-              <a:t>✦  The playbook discovers backup paths dynamically — it works for any circuit, any site</a:t>
-            </a:r>
-          </a:p>
-        </p:txBody>
-      </p:sp>
-      <p:sp>
-        <p:nvSpPr>
-          <p:cNvPr id="13" name="TextBox 12"/>
-          <p:cNvSpPr txBox="1"/>
-          <p:nvPr/>
-        </p:nvSpPr>
-        <p:spPr>
-          <a:xfrm>
-            <a:off x="457200" y="4672584"/>
-            <a:ext cx="11247120" cy="438912"/>
-          </a:xfrm>
-          <a:prstGeom prst="rect">
-            <a:avLst/>
-          </a:prstGeom>
-          <a:noFill/>
-        </p:spPr>
-        <p:txBody>
-          <a:bodyPr wrap="square">
-            <a:spAutoFit/>
-          </a:bodyPr>
-          <a:lstStyle/>
-          <a:p>
-            <a:pPr algn="l"/>
-            <a:r>
-              <a:rPr sz="1800" b="0" i="0">
-                <a:solidFill>
-                  <a:srgbClr val="FFFFFF"/>
-                </a:solidFill>
-                <a:latin typeface="Calibri"/>
-              </a:rPr>
-              <a:t>✦  Every failover is logged in NetBox, captured in AAP job history, and published as a report</a:t>
-            </a:r>
-          </a:p>
-        </p:txBody>
-      </p:sp>
-      <p:sp>
-        <p:nvSpPr>
-          <p:cNvPr id="14" name="TextBox 13"/>
-          <p:cNvSpPr txBox="1"/>
-          <p:nvPr/>
-        </p:nvSpPr>
-        <p:spPr>
-          <a:xfrm>
-            <a:off x="457200" y="5148072"/>
-            <a:ext cx="11247120" cy="438912"/>
-          </a:xfrm>
-          <a:prstGeom prst="rect">
-            <a:avLst/>
-          </a:prstGeom>
-          <a:noFill/>
-        </p:spPr>
-        <p:txBody>
-          <a:bodyPr wrap="square">
-            <a:spAutoFit/>
-          </a:bodyPr>
-          <a:lstStyle/>
-          <a:p>
-            <a:pPr algn="l"/>
-            <a:r>
-              <a:rPr sz="1800" b="0" i="0">
-                <a:solidFill>
-                  <a:srgbClr val="FFFFFF"/>
-                </a:solidFill>
-                <a:latin typeface="Calibri"/>
-              </a:rPr>
-              <a:t>✦  MCP lets Claude query live NetBox data — confirm outcomes in natural language</a:t>
+              <a:t>•  Generates and publishes the HTML failover incident report</a:t>
             </a:r>
           </a:p>
         </p:txBody>
       </p:sp>
       <p:pic>
         <p:nvPicPr>
-          <p:cNvPr id="15" name="Picture 14" descr="netbox_logo_bright.png"/>
+          <p:cNvPr id="12" name="Picture 11" descr="netbox_logo_bright.png"/>
           <p:cNvPicPr>
             <a:picLocks noChangeAspect="1"/>
           </p:cNvPicPr>
@@ -3925,7 +3800,7 @@
         <p:spPr>
           <a:xfrm>
             <a:off x="457200" y="228600"/>
-            <a:ext cx="10058400" cy="685800"/>
+            <a:ext cx="10058400" cy="640080"/>
           </a:xfrm>
           <a:prstGeom prst="rect">
             <a:avLst/>
@@ -3946,56 +3821,286 @@
                 </a:solidFill>
                 <a:latin typeface="Calibri"/>
               </a:rPr>
-              <a:t>Resetting the Demo</a:t>
-            </a:r>
-          </a:p>
-        </p:txBody>
-      </p:sp>
-      <p:sp>
-        <p:nvSpPr>
-          <p:cNvPr id="4" name="TextBox 3"/>
-          <p:cNvSpPr txBox="1"/>
-          <p:nvPr/>
-        </p:nvSpPr>
-        <p:spPr>
-          <a:xfrm>
-            <a:off x="548640" y="1097280"/>
-            <a:ext cx="10515600" cy="502920"/>
-          </a:xfrm>
-          <a:prstGeom prst="rect">
-            <a:avLst/>
-          </a:prstGeom>
-          <a:noFill/>
-        </p:spPr>
-        <p:txBody>
-          <a:bodyPr wrap="square">
-            <a:spAutoFit/>
-          </a:bodyPr>
-          <a:lstStyle/>
-          <a:p>
-            <a:pPr algn="l"/>
-            <a:r>
-              <a:rPr sz="2200" b="0" i="0">
+              <a:t>The Business Case</a:t>
+            </a:r>
+          </a:p>
+        </p:txBody>
+      </p:sp>
+      <p:sp>
+        <p:nvSpPr>
+          <p:cNvPr id="4" name="Rectangle 3"/>
+          <p:cNvSpPr/>
+          <p:nvPr/>
+        </p:nvSpPr>
+        <p:spPr>
+          <a:xfrm>
+            <a:off x="457200" y="1005840"/>
+            <a:ext cx="5394960" cy="2011680"/>
+          </a:xfrm>
+          <a:prstGeom prst="rect">
+            <a:avLst/>
+          </a:prstGeom>
+          <a:solidFill>
+            <a:srgbClr val="142A3E"/>
+          </a:solidFill>
+          <a:ln w="19050">
+            <a:solidFill>
+              <a:srgbClr val="EF4444"/>
+            </a:solidFill>
+          </a:ln>
+        </p:spPr>
+        <p:style>
+          <a:lnRef idx="1">
+            <a:schemeClr val="accent1"/>
+          </a:lnRef>
+          <a:fillRef idx="3">
+            <a:schemeClr val="accent1"/>
+          </a:fillRef>
+          <a:effectRef idx="2">
+            <a:schemeClr val="accent1"/>
+          </a:effectRef>
+          <a:fontRef idx="minor">
+            <a:schemeClr val="lt1"/>
+          </a:fontRef>
+        </p:style>
+        <p:txBody>
+          <a:bodyPr rtlCol="0" anchor="ctr"/>
+          <a:lstStyle/>
+          <a:p>
+            <a:pPr algn="ctr"/>
+          </a:p>
+        </p:txBody>
+      </p:sp>
+      <p:sp>
+        <p:nvSpPr>
+          <p:cNvPr id="5" name="TextBox 4"/>
+          <p:cNvSpPr txBox="1"/>
+          <p:nvPr/>
+        </p:nvSpPr>
+        <p:spPr>
+          <a:xfrm>
+            <a:off x="640080" y="1143000"/>
+            <a:ext cx="5029200" cy="1005840"/>
+          </a:xfrm>
+          <a:prstGeom prst="rect">
+            <a:avLst/>
+          </a:prstGeom>
+          <a:noFill/>
+        </p:spPr>
+        <p:txBody>
+          <a:bodyPr wrap="square">
+            <a:spAutoFit/>
+          </a:bodyPr>
+          <a:lstStyle/>
+          <a:p>
+            <a:pPr algn="ctr"/>
+            <a:r>
+              <a:rPr sz="5200" b="1" i="0">
+                <a:solidFill>
+                  <a:srgbClr val="EF4444"/>
+                </a:solidFill>
+                <a:latin typeface="Calibri"/>
+              </a:rPr>
+              <a:t>~45 min</a:t>
+            </a:r>
+          </a:p>
+        </p:txBody>
+      </p:sp>
+      <p:sp>
+        <p:nvSpPr>
+          <p:cNvPr id="6" name="TextBox 5"/>
+          <p:cNvSpPr txBox="1"/>
+          <p:nvPr/>
+        </p:nvSpPr>
+        <p:spPr>
+          <a:xfrm>
+            <a:off x="640080" y="1920240"/>
+            <a:ext cx="5029200" cy="457200"/>
+          </a:xfrm>
+          <a:prstGeom prst="rect">
+            <a:avLst/>
+          </a:prstGeom>
+          <a:noFill/>
+        </p:spPr>
+        <p:txBody>
+          <a:bodyPr wrap="square">
+            <a:spAutoFit/>
+          </a:bodyPr>
+          <a:lstStyle/>
+          <a:p>
+            <a:pPr algn="ctr"/>
+            <a:r>
+              <a:rPr sz="1800" b="0" i="0">
+                <a:solidFill>
+                  <a:srgbClr val="B0BCCC"/>
+                </a:solidFill>
+                <a:latin typeface="Calibri"/>
+              </a:rPr>
+              <a:t>Manual failover</a:t>
+            </a:r>
+          </a:p>
+        </p:txBody>
+      </p:sp>
+      <p:sp>
+        <p:nvSpPr>
+          <p:cNvPr id="7" name="Rectangle 6"/>
+          <p:cNvSpPr/>
+          <p:nvPr/>
+        </p:nvSpPr>
+        <p:spPr>
+          <a:xfrm>
+            <a:off x="6217920" y="1005840"/>
+            <a:ext cx="5394960" cy="2011680"/>
+          </a:xfrm>
+          <a:prstGeom prst="rect">
+            <a:avLst/>
+          </a:prstGeom>
+          <a:solidFill>
+            <a:srgbClr val="142A3E"/>
+          </a:solidFill>
+          <a:ln w="19050">
+            <a:solidFill>
+              <a:srgbClr val="22C55E"/>
+            </a:solidFill>
+          </a:ln>
+        </p:spPr>
+        <p:style>
+          <a:lnRef idx="1">
+            <a:schemeClr val="accent1"/>
+          </a:lnRef>
+          <a:fillRef idx="3">
+            <a:schemeClr val="accent1"/>
+          </a:fillRef>
+          <a:effectRef idx="2">
+            <a:schemeClr val="accent1"/>
+          </a:effectRef>
+          <a:fontRef idx="minor">
+            <a:schemeClr val="lt1"/>
+          </a:fontRef>
+        </p:style>
+        <p:txBody>
+          <a:bodyPr rtlCol="0" anchor="ctr"/>
+          <a:lstStyle/>
+          <a:p>
+            <a:pPr algn="ctr"/>
+          </a:p>
+        </p:txBody>
+      </p:sp>
+      <p:sp>
+        <p:nvSpPr>
+          <p:cNvPr id="8" name="TextBox 7"/>
+          <p:cNvSpPr txBox="1"/>
+          <p:nvPr/>
+        </p:nvSpPr>
+        <p:spPr>
+          <a:xfrm>
+            <a:off x="6400800" y="1143000"/>
+            <a:ext cx="5029200" cy="1005840"/>
+          </a:xfrm>
+          <a:prstGeom prst="rect">
+            <a:avLst/>
+          </a:prstGeom>
+          <a:noFill/>
+        </p:spPr>
+        <p:txBody>
+          <a:bodyPr wrap="square">
+            <a:spAutoFit/>
+          </a:bodyPr>
+          <a:lstStyle/>
+          <a:p>
+            <a:pPr algn="ctr"/>
+            <a:r>
+              <a:rPr sz="5200" b="1" i="0">
+                <a:solidFill>
+                  <a:srgbClr val="22C55E"/>
+                </a:solidFill>
+                <a:latin typeface="Calibri"/>
+              </a:rPr>
+              <a:t>&lt; 30 sec</a:t>
+            </a:r>
+          </a:p>
+        </p:txBody>
+      </p:sp>
+      <p:sp>
+        <p:nvSpPr>
+          <p:cNvPr id="9" name="TextBox 8"/>
+          <p:cNvSpPr txBox="1"/>
+          <p:nvPr/>
+        </p:nvSpPr>
+        <p:spPr>
+          <a:xfrm>
+            <a:off x="6400800" y="1920240"/>
+            <a:ext cx="5029200" cy="457200"/>
+          </a:xfrm>
+          <a:prstGeom prst="rect">
+            <a:avLst/>
+          </a:prstGeom>
+          <a:noFill/>
+        </p:spPr>
+        <p:txBody>
+          <a:bodyPr wrap="square">
+            <a:spAutoFit/>
+          </a:bodyPr>
+          <a:lstStyle/>
+          <a:p>
+            <a:pPr algn="ctr"/>
+            <a:r>
+              <a:rPr sz="1800" b="0" i="0">
+                <a:solidFill>
+                  <a:srgbClr val="B0BCCC"/>
+                </a:solidFill>
+                <a:latin typeface="Calibri"/>
+              </a:rPr>
+              <a:t>Automated failover</a:t>
+            </a:r>
+          </a:p>
+        </p:txBody>
+      </p:sp>
+      <p:sp>
+        <p:nvSpPr>
+          <p:cNvPr id="10" name="TextBox 9"/>
+          <p:cNvSpPr txBox="1"/>
+          <p:nvPr/>
+        </p:nvSpPr>
+        <p:spPr>
+          <a:xfrm>
+            <a:off x="457200" y="3246120"/>
+            <a:ext cx="11247120" cy="438912"/>
+          </a:xfrm>
+          <a:prstGeom prst="rect">
+            <a:avLst/>
+          </a:prstGeom>
+          <a:noFill/>
+        </p:spPr>
+        <p:txBody>
+          <a:bodyPr wrap="square">
+            <a:spAutoFit/>
+          </a:bodyPr>
+          <a:lstStyle/>
+          <a:p>
+            <a:pPr algn="l"/>
+            <a:r>
+              <a:rPr sz="1800" b="0" i="0">
                 <a:solidFill>
                   <a:srgbClr val="FFFFFF"/>
                 </a:solidFill>
                 <a:latin typeface="Calibri"/>
               </a:rPr>
-              <a:t>•  Run ./reset.sh from the project root</a:t>
-            </a:r>
-          </a:p>
-        </p:txBody>
-      </p:sp>
-      <p:sp>
-        <p:nvSpPr>
-          <p:cNvPr id="5" name="TextBox 4"/>
-          <p:cNvSpPr txBox="1"/>
-          <p:nvPr/>
-        </p:nvSpPr>
-        <p:spPr>
-          <a:xfrm>
-            <a:off x="548640" y="1627632"/>
-            <a:ext cx="10515600" cy="502920"/>
+              <a:t>❖  NetBox is not just a CMDB — it is an active source of truth that drives automation</a:t>
+            </a:r>
+          </a:p>
+        </p:txBody>
+      </p:sp>
+      <p:sp>
+        <p:nvSpPr>
+          <p:cNvPr id="11" name="TextBox 10"/>
+          <p:cNvSpPr txBox="1"/>
+          <p:nvPr/>
+        </p:nvSpPr>
+        <p:spPr>
+          <a:xfrm>
+            <a:off x="457200" y="3721608"/>
+            <a:ext cx="11247120" cy="438912"/>
           </a:xfrm>
           <a:prstGeom prst="rect">
             <a:avLst/>
@@ -4012,25 +4117,25 @@
             <a:r>
               <a:rPr sz="1800" b="0" i="0">
                 <a:solidFill>
-                  <a:srgbClr val="B0BCCC"/>
-                </a:solidFill>
-                <a:latin typeface="Calibri"/>
-              </a:rPr>
-              <a:t>    •  Queries all circuits tagged 'dd' that are not active</a:t>
-            </a:r>
-          </a:p>
-        </p:txBody>
-      </p:sp>
-      <p:sp>
-        <p:nvSpPr>
-          <p:cNvPr id="6" name="TextBox 5"/>
-          <p:cNvSpPr txBox="1"/>
-          <p:nvPr/>
-        </p:nvSpPr>
-        <p:spPr>
-          <a:xfrm>
-            <a:off x="548640" y="2084832"/>
-            <a:ext cx="10515600" cy="502920"/>
+                  <a:srgbClr val="FFFFFF"/>
+                </a:solidFill>
+                <a:latin typeface="Calibri"/>
+              </a:rPr>
+              <a:t>❖  The moment a circuit changes state, the response is already running</a:t>
+            </a:r>
+          </a:p>
+        </p:txBody>
+      </p:sp>
+      <p:sp>
+        <p:nvSpPr>
+          <p:cNvPr id="12" name="TextBox 11"/>
+          <p:cNvSpPr txBox="1"/>
+          <p:nvPr/>
+        </p:nvSpPr>
+        <p:spPr>
+          <a:xfrm>
+            <a:off x="457200" y="4197096"/>
+            <a:ext cx="11247120" cy="438912"/>
           </a:xfrm>
           <a:prstGeom prst="rect">
             <a:avLst/>
@@ -4047,25 +4152,25 @@
             <a:r>
               <a:rPr sz="1800" b="0" i="0">
                 <a:solidFill>
-                  <a:srgbClr val="B0BCCC"/>
-                </a:solidFill>
-                <a:latin typeface="Calibri"/>
-              </a:rPr>
-              <a:t>    •  PATCHes every one back to active in NetBox</a:t>
-            </a:r>
-          </a:p>
-        </p:txBody>
-      </p:sp>
-      <p:sp>
-        <p:nvSpPr>
-          <p:cNvPr id="7" name="TextBox 6"/>
-          <p:cNvSpPr txBox="1"/>
-          <p:nvPr/>
-        </p:nvSpPr>
-        <p:spPr>
-          <a:xfrm>
-            <a:off x="548640" y="2542032"/>
-            <a:ext cx="10515600" cy="502920"/>
+                  <a:srgbClr val="FFFFFF"/>
+                </a:solidFill>
+                <a:latin typeface="Calibri"/>
+              </a:rPr>
+              <a:t>❖  The playbook discovers backup paths dynamically — works for any circuit, any site</a:t>
+            </a:r>
+          </a:p>
+        </p:txBody>
+      </p:sp>
+      <p:sp>
+        <p:nvSpPr>
+          <p:cNvPr id="13" name="TextBox 12"/>
+          <p:cNvSpPr txBox="1"/>
+          <p:nvPr/>
+        </p:nvSpPr>
+        <p:spPr>
+          <a:xfrm>
+            <a:off x="457200" y="4672584"/>
+            <a:ext cx="11247120" cy="438912"/>
           </a:xfrm>
           <a:prstGeom prst="rect">
             <a:avLst/>
@@ -4082,123 +4187,53 @@
             <a:r>
               <a:rPr sz="1800" b="0" i="0">
                 <a:solidFill>
-                  <a:srgbClr val="B0BCCC"/>
-                </a:solidFill>
-                <a:latin typeface="Calibri"/>
-              </a:rPr>
-              <a:t>    •  Visual Explorer returns to starting state</a:t>
-            </a:r>
-          </a:p>
-        </p:txBody>
-      </p:sp>
-      <p:sp>
-        <p:nvSpPr>
-          <p:cNvPr id="8" name="TextBox 7"/>
-          <p:cNvSpPr txBox="1"/>
-          <p:nvPr/>
-        </p:nvSpPr>
-        <p:spPr>
-          <a:xfrm>
-            <a:off x="548640" y="2999232"/>
-            <a:ext cx="10515600" cy="502920"/>
-          </a:xfrm>
-          <a:prstGeom prst="rect">
-            <a:avLst/>
-          </a:prstGeom>
-          <a:noFill/>
-        </p:spPr>
-        <p:txBody>
-          <a:bodyPr wrap="square">
-            <a:spAutoFit/>
-          </a:bodyPr>
-          <a:lstStyle/>
-          <a:p>
-            <a:pPr algn="l"/>
-            <a:r>
-              <a:rPr sz="2200" b="0" i="0">
-                <a:solidFill>
                   <a:srgbClr val="FFFFFF"/>
                 </a:solidFill>
                 <a:latin typeface="Calibri"/>
               </a:rPr>
-              <a:t>•  Or launch the Reset Demo job template in AAP Controller</a:t>
-            </a:r>
-          </a:p>
-        </p:txBody>
-      </p:sp>
-      <p:sp>
-        <p:nvSpPr>
-          <p:cNvPr id="9" name="TextBox 8"/>
-          <p:cNvSpPr txBox="1"/>
-          <p:nvPr/>
-        </p:nvSpPr>
-        <p:spPr>
-          <a:xfrm>
-            <a:off x="548640" y="3529584"/>
-            <a:ext cx="10515600" cy="502920"/>
-          </a:xfrm>
-          <a:prstGeom prst="rect">
-            <a:avLst/>
-          </a:prstGeom>
-          <a:noFill/>
-        </p:spPr>
-        <p:txBody>
-          <a:bodyPr wrap="square">
-            <a:spAutoFit/>
-          </a:bodyPr>
-          <a:lstStyle/>
-          <a:p>
-            <a:pPr algn="l"/>
-            <a:r>
-              <a:rPr sz="2200" b="0" i="0">
+              <a:t>❖  Every failover is logged in NetBox, captured in AAP job history, and published as a report</a:t>
+            </a:r>
+          </a:p>
+        </p:txBody>
+      </p:sp>
+      <p:sp>
+        <p:nvSpPr>
+          <p:cNvPr id="14" name="TextBox 13"/>
+          <p:cNvSpPr txBox="1"/>
+          <p:nvPr/>
+        </p:nvSpPr>
+        <p:spPr>
+          <a:xfrm>
+            <a:off x="457200" y="5148072"/>
+            <a:ext cx="11247120" cy="438912"/>
+          </a:xfrm>
+          <a:prstGeom prst="rect">
+            <a:avLst/>
+          </a:prstGeom>
+          <a:noFill/>
+        </p:spPr>
+        <p:txBody>
+          <a:bodyPr wrap="square">
+            <a:spAutoFit/>
+          </a:bodyPr>
+          <a:lstStyle/>
+          <a:p>
+            <a:pPr algn="l"/>
+            <a:r>
+              <a:rPr sz="1800" b="0" i="0">
                 <a:solidFill>
                   <a:srgbClr val="FFFFFF"/>
                 </a:solidFill>
                 <a:latin typeface="Calibri"/>
               </a:rPr>
-              <a:t>•  Can also run individual circuits: IPLC-GB-JP-PRI, IPLC-GB-RO-PRI, etc.</a:t>
-            </a:r>
-          </a:p>
-        </p:txBody>
-      </p:sp>
-      <p:sp>
-        <p:nvSpPr>
-          <p:cNvPr id="10" name="TextBox 9"/>
-          <p:cNvSpPr txBox="1"/>
-          <p:nvPr/>
-        </p:nvSpPr>
-        <p:spPr>
-          <a:xfrm>
-            <a:off x="548640" y="4059936"/>
-            <a:ext cx="10515600" cy="502920"/>
-          </a:xfrm>
-          <a:prstGeom prst="rect">
-            <a:avLst/>
-          </a:prstGeom>
-          <a:noFill/>
-        </p:spPr>
-        <p:txBody>
-          <a:bodyPr wrap="square">
-            <a:spAutoFit/>
-          </a:bodyPr>
-          <a:lstStyle/>
-          <a:p>
-            <a:pPr algn="l"/>
-            <a:r>
-              <a:rPr sz="2200" b="0" i="0">
-                <a:solidFill>
-                  <a:srgbClr val="FFFFFF"/>
-                </a:solidFill>
-                <a:latin typeface="Calibri"/>
-              </a:rPr>
-              <a:t>•  The demo is fully repeatable — no manual cleanup needed</a:t>
+              <a:t>❖  MCP lets Claude query live NetBox data — confirm outcomes in natural language</a:t>
             </a:r>
           </a:p>
         </p:txBody>
       </p:sp>
       <p:pic>
         <p:nvPicPr>
-          <p:cNvPr id="11" name="Picture 10" descr="netbox_logo_bright.png"/>
+          <p:cNvPr id="15" name="Picture 14" descr="netbox_logo_bright.png"/>
           <p:cNvPicPr>
             <a:picLocks noChangeAspect="1"/>
           </p:cNvPicPr>
@@ -4771,7 +4806,7 @@
                 </a:solidFill>
                 <a:latin typeface="Calibri"/>
               </a:rPr>
-              <a:t>❯  What is the current status of IPLC-GB-PH-PRI?</a:t>
+              <a:t>❯  What is the current status of IPLC-GB-AT-PRI?</a:t>
             </a:r>
           </a:p>
         </p:txBody>
@@ -4806,7 +4841,7 @@
                 </a:solidFill>
                 <a:latin typeface="Calibri"/>
               </a:rPr>
-              <a:t>    Confirms: Deprovisioning — failed circuit is recorded</a:t>
+              <a:t>    Confirms: Offline — the failed circuit is recorded</a:t>
             </a:r>
           </a:p>
         </p:txBody>
@@ -4886,7 +4921,7 @@
                 </a:solidFill>
                 <a:latin typeface="Calibri"/>
               </a:rPr>
-              <a:t>❯  What is the status of IPLC-GB-PH-SEC?</a:t>
+              <a:t>❯  What is the status of IPLC-GB-AT-SEC?</a:t>
             </a:r>
           </a:p>
         </p:txBody>
@@ -4921,7 +4956,7 @@
                 </a:solidFill>
                 <a:latin typeface="Calibri"/>
               </a:rPr>
-              <a:t>    Confirms: Active — backup is live</a:t>
+              <a:t>    Confirms: Active — the backup is live</a:t>
             </a:r>
           </a:p>
         </p:txBody>
@@ -5001,7 +5036,7 @@
                 </a:solidFill>
                 <a:latin typeface="Calibri"/>
               </a:rPr>
-              <a:t>❯  Show me all active circuits between GB-Bristol and PH-Manila-01.</a:t>
+              <a:t>❯  Show me all active circuits between GB-Bristol and US-Atlanta.</a:t>
             </a:r>
           </a:p>
         </p:txBody>
@@ -5036,7 +5071,7 @@
                 </a:solidFill>
                 <a:latin typeface="Calibri"/>
               </a:rPr>
-              <a:t>    Lists surviving circuits on that route</a:t>
+              <a:t>    Lists the surviving circuits on that route</a:t>
             </a:r>
           </a:p>
         </p:txBody>
@@ -5231,7 +5266,7 @@
                 </a:solidFill>
                 <a:latin typeface="Calibri"/>
               </a:rPr>
-              <a:t>❯  When was IPLC-GB-PH-PRI last changed, and by whom?</a:t>
+              <a:t>❯  When was IPLC-GB-AT-PRI last changed, and by whom?</a:t>
             </a:r>
           </a:p>
         </p:txBody>
@@ -5266,7 +5301,7 @@
                 </a:solidFill>
                 <a:latin typeface="Calibri"/>
               </a:rPr>
-              <a:t>    Audit trail: timestamp + username from NetBox change log</a:t>
+              <a:t>    Audit trail: timestamp and username from NetBox change log</a:t>
             </a:r>
           </a:p>
         </p:txBody>
@@ -5372,8 +5407,8 @@
         </p:nvSpPr>
         <p:spPr>
           <a:xfrm>
-            <a:off x="457200" y="228600"/>
-            <a:ext cx="10058400" cy="685800"/>
+            <a:off x="457200" y="182880"/>
+            <a:ext cx="10972800" cy="685800"/>
           </a:xfrm>
           <a:prstGeom prst="rect">
             <a:avLst/>
@@ -5394,294 +5429,269 @@
                 </a:solidFill>
                 <a:latin typeface="Calibri"/>
               </a:rPr>
-              <a:t>The Problem: Manual Failover</a:t>
-            </a:r>
-          </a:p>
-        </p:txBody>
-      </p:sp>
-      <p:sp>
-        <p:nvSpPr>
-          <p:cNvPr id="4" name="TextBox 3"/>
-          <p:cNvSpPr txBox="1"/>
-          <p:nvPr/>
-        </p:nvSpPr>
-        <p:spPr>
-          <a:xfrm>
-            <a:off x="548640" y="1097280"/>
-            <a:ext cx="10515600" cy="502920"/>
-          </a:xfrm>
-          <a:prstGeom prst="rect">
-            <a:avLst/>
-          </a:prstGeom>
-          <a:noFill/>
-        </p:spPr>
-        <p:txBody>
-          <a:bodyPr wrap="square">
-            <a:spAutoFit/>
-          </a:bodyPr>
-          <a:lstStyle/>
-          <a:p>
-            <a:pPr algn="l"/>
-            <a:r>
-              <a:rPr sz="2200" b="0" i="0">
+              <a:t>A Customer Came to Us With a Problem</a:t>
+            </a:r>
+          </a:p>
+        </p:txBody>
+      </p:sp>
+      <p:sp>
+        <p:nvSpPr>
+          <p:cNvPr id="4" name="Rectangle 3"/>
+          <p:cNvSpPr/>
+          <p:nvPr/>
+        </p:nvSpPr>
+        <p:spPr>
+          <a:xfrm>
+            <a:off x="365760" y="1005840"/>
+            <a:ext cx="11430000" cy="3200400"/>
+          </a:xfrm>
+          <a:prstGeom prst="rect">
+            <a:avLst/>
+          </a:prstGeom>
+          <a:solidFill>
+            <a:srgbClr val="142A3E"/>
+          </a:solidFill>
+          <a:ln w="19050">
+            <a:solidFill>
+              <a:srgbClr val="EF4444"/>
+            </a:solidFill>
+          </a:ln>
+        </p:spPr>
+        <p:style>
+          <a:lnRef idx="1">
+            <a:schemeClr val="accent1"/>
+          </a:lnRef>
+          <a:fillRef idx="3">
+            <a:schemeClr val="accent1"/>
+          </a:fillRef>
+          <a:effectRef idx="2">
+            <a:schemeClr val="accent1"/>
+          </a:effectRef>
+          <a:fontRef idx="minor">
+            <a:schemeClr val="lt1"/>
+          </a:fontRef>
+        </p:style>
+        <p:txBody>
+          <a:bodyPr rtlCol="0" anchor="ctr"/>
+          <a:lstStyle/>
+          <a:p>
+            <a:pPr algn="ctr"/>
+          </a:p>
+        </p:txBody>
+      </p:sp>
+      <p:sp>
+        <p:nvSpPr>
+          <p:cNvPr id="5" name="TextBox 4"/>
+          <p:cNvSpPr txBox="1"/>
+          <p:nvPr/>
+        </p:nvSpPr>
+        <p:spPr>
+          <a:xfrm>
+            <a:off x="640080" y="1188720"/>
+            <a:ext cx="10972800" cy="548640"/>
+          </a:xfrm>
+          <a:prstGeom prst="rect">
+            <a:avLst/>
+          </a:prstGeom>
+          <a:noFill/>
+        </p:spPr>
+        <p:txBody>
+          <a:bodyPr wrap="square">
+            <a:spAutoFit/>
+          </a:bodyPr>
+          <a:lstStyle/>
+          <a:p>
+            <a:pPr algn="l"/>
+            <a:r>
+              <a:rPr sz="2000" b="1" i="0">
                 <a:solidFill>
                   <a:srgbClr val="FFFFFF"/>
                 </a:solidFill>
                 <a:latin typeface="Calibri"/>
               </a:rPr>
-              <a:t>•  Global WAN circuits are business-critical — downtime costs revenue</a:t>
-            </a:r>
-          </a:p>
-        </p:txBody>
-      </p:sp>
-      <p:sp>
-        <p:nvSpPr>
-          <p:cNvPr id="5" name="TextBox 4"/>
-          <p:cNvSpPr txBox="1"/>
-          <p:nvPr/>
-        </p:nvSpPr>
-        <p:spPr>
-          <a:xfrm>
-            <a:off x="548640" y="1627632"/>
-            <a:ext cx="10515600" cy="502920"/>
-          </a:xfrm>
-          <a:prstGeom prst="rect">
-            <a:avLst/>
-          </a:prstGeom>
-          <a:noFill/>
-        </p:spPr>
-        <p:txBody>
-          <a:bodyPr wrap="square">
-            <a:spAutoFit/>
-          </a:bodyPr>
-          <a:lstStyle/>
-          <a:p>
-            <a:pPr algn="l"/>
-            <a:r>
-              <a:rPr sz="2200" b="0" i="0">
+              <a:t>“Our intercontinental IPLC link between Bristol and Atlanta went down.</a:t>
+            </a:r>
+          </a:p>
+        </p:txBody>
+      </p:sp>
+      <p:sp>
+        <p:nvSpPr>
+          <p:cNvPr id="6" name="TextBox 5"/>
+          <p:cNvSpPr txBox="1"/>
+          <p:nvPr/>
+        </p:nvSpPr>
+        <p:spPr>
+          <a:xfrm>
+            <a:off x="640080" y="1783080"/>
+            <a:ext cx="10972800" cy="457200"/>
+          </a:xfrm>
+          <a:prstGeom prst="rect">
+            <a:avLst/>
+          </a:prstGeom>
+          <a:noFill/>
+        </p:spPr>
+        <p:txBody>
+          <a:bodyPr wrap="square">
+            <a:spAutoFit/>
+          </a:bodyPr>
+          <a:lstStyle/>
+          <a:p>
+            <a:pPr algn="l"/>
+            <a:r>
+              <a:rPr sz="2000" b="0" i="0">
                 <a:solidFill>
                   <a:srgbClr val="FFFFFF"/>
                 </a:solidFill>
                 <a:latin typeface="Calibri"/>
               </a:rPr>
-              <a:t>•  When a circuit fails, engineers must:</a:t>
-            </a:r>
-          </a:p>
-        </p:txBody>
-      </p:sp>
-      <p:sp>
-        <p:nvSpPr>
-          <p:cNvPr id="6" name="TextBox 5"/>
-          <p:cNvSpPr txBox="1"/>
-          <p:nvPr/>
-        </p:nvSpPr>
-        <p:spPr>
-          <a:xfrm>
-            <a:off x="548640" y="2157984"/>
-            <a:ext cx="10515600" cy="502920"/>
-          </a:xfrm>
-          <a:prstGeom prst="rect">
-            <a:avLst/>
-          </a:prstGeom>
-          <a:noFill/>
-        </p:spPr>
-        <p:txBody>
-          <a:bodyPr wrap="square">
-            <a:spAutoFit/>
-          </a:bodyPr>
-          <a:lstStyle/>
-          <a:p>
-            <a:pPr algn="l"/>
-            <a:r>
-              <a:rPr sz="1800" b="0" i="0">
+              <a:t>We had a secondary link available. But it took our team 45 minutes to find it,</a:t>
+            </a:r>
+          </a:p>
+        </p:txBody>
+      </p:sp>
+      <p:sp>
+        <p:nvSpPr>
+          <p:cNvPr id="7" name="TextBox 6"/>
+          <p:cNvSpPr txBox="1"/>
+          <p:nvPr/>
+        </p:nvSpPr>
+        <p:spPr>
+          <a:xfrm>
+            <a:off x="640080" y="2240280"/>
+            <a:ext cx="10972800" cy="457200"/>
+          </a:xfrm>
+          <a:prstGeom prst="rect">
+            <a:avLst/>
+          </a:prstGeom>
+          <a:noFill/>
+        </p:spPr>
+        <p:txBody>
+          <a:bodyPr wrap="square">
+            <a:spAutoFit/>
+          </a:bodyPr>
+          <a:lstStyle/>
+          <a:p>
+            <a:pPr algn="l"/>
+            <a:r>
+              <a:rPr sz="2000" b="0" i="0">
+                <a:solidFill>
+                  <a:srgbClr val="FFFFFF"/>
+                </a:solidFill>
+                <a:latin typeface="Calibri"/>
+              </a:rPr>
+              <a:t>identify which routers were affected, and manually reconfigure the failover path.</a:t>
+            </a:r>
+          </a:p>
+        </p:txBody>
+      </p:sp>
+      <p:sp>
+        <p:nvSpPr>
+          <p:cNvPr id="8" name="TextBox 7"/>
+          <p:cNvSpPr txBox="1"/>
+          <p:nvPr/>
+        </p:nvSpPr>
+        <p:spPr>
+          <a:xfrm>
+            <a:off x="640080" y="2697480"/>
+            <a:ext cx="10972800" cy="457200"/>
+          </a:xfrm>
+          <a:prstGeom prst="rect">
+            <a:avLst/>
+          </a:prstGeom>
+          <a:noFill/>
+        </p:spPr>
+        <p:txBody>
+          <a:bodyPr wrap="square">
+            <a:spAutoFit/>
+          </a:bodyPr>
+          <a:lstStyle/>
+          <a:p>
+            <a:pPr algn="l"/>
+            <a:r>
+              <a:rPr sz="2000" b="0" i="0">
+                <a:solidFill>
+                  <a:srgbClr val="FFFFFF"/>
+                </a:solidFill>
+                <a:latin typeface="Calibri"/>
+              </a:rPr>
+              <a:t>In that 45 minutes, we lost hundreds of thousands of dollars in business.</a:t>
+            </a:r>
+          </a:p>
+        </p:txBody>
+      </p:sp>
+      <p:sp>
+        <p:nvSpPr>
+          <p:cNvPr id="9" name="TextBox 8"/>
+          <p:cNvSpPr txBox="1"/>
+          <p:nvPr/>
+        </p:nvSpPr>
+        <p:spPr>
+          <a:xfrm>
+            <a:off x="640080" y="3200400"/>
+            <a:ext cx="10972800" cy="457200"/>
+          </a:xfrm>
+          <a:prstGeom prst="rect">
+            <a:avLst/>
+          </a:prstGeom>
+          <a:noFill/>
+        </p:spPr>
+        <p:txBody>
+          <a:bodyPr wrap="square">
+            <a:spAutoFit/>
+          </a:bodyPr>
+          <a:lstStyle/>
+          <a:p>
+            <a:pPr algn="l"/>
+            <a:r>
+              <a:rPr sz="2000" b="1" i="0">
+                <a:solidFill>
+                  <a:srgbClr val="EF4444"/>
+                </a:solidFill>
+                <a:latin typeface="Calibri"/>
+              </a:rPr>
+              <a:t>We need to make sure this never happens again.”</a:t>
+            </a:r>
+          </a:p>
+        </p:txBody>
+      </p:sp>
+      <p:sp>
+        <p:nvSpPr>
+          <p:cNvPr id="10" name="TextBox 9"/>
+          <p:cNvSpPr txBox="1"/>
+          <p:nvPr/>
+        </p:nvSpPr>
+        <p:spPr>
+          <a:xfrm>
+            <a:off x="640080" y="4343400"/>
+            <a:ext cx="9144000" cy="365760"/>
+          </a:xfrm>
+          <a:prstGeom prst="rect">
+            <a:avLst/>
+          </a:prstGeom>
+          <a:noFill/>
+        </p:spPr>
+        <p:txBody>
+          <a:bodyPr wrap="square">
+            <a:spAutoFit/>
+          </a:bodyPr>
+          <a:lstStyle/>
+          <a:p>
+            <a:pPr algn="l"/>
+            <a:r>
+              <a:rPr sz="1400" b="0" i="1">
                 <a:solidFill>
                   <a:srgbClr val="B0BCCC"/>
                 </a:solidFill>
                 <a:latin typeface="Calibri"/>
               </a:rPr>
-              <a:t>    •  Open spreadsheets to find the backup circuit and its endpoints</a:t>
-            </a:r>
-          </a:p>
-        </p:txBody>
-      </p:sp>
-      <p:sp>
-        <p:nvSpPr>
-          <p:cNvPr id="7" name="TextBox 6"/>
-          <p:cNvSpPr txBox="1"/>
-          <p:nvPr/>
-        </p:nvSpPr>
-        <p:spPr>
-          <a:xfrm>
-            <a:off x="548640" y="2615184"/>
-            <a:ext cx="10515600" cy="502920"/>
-          </a:xfrm>
-          <a:prstGeom prst="rect">
-            <a:avLst/>
-          </a:prstGeom>
-          <a:noFill/>
-        </p:spPr>
-        <p:txBody>
-          <a:bodyPr wrap="square">
-            <a:spAutoFit/>
-          </a:bodyPr>
-          <a:lstStyle/>
-          <a:p>
-            <a:pPr algn="l"/>
-            <a:r>
-              <a:rPr sz="1800" b="0" i="0">
-                <a:solidFill>
-                  <a:srgbClr val="B0BCCC"/>
-                </a:solidFill>
-                <a:latin typeface="Calibri"/>
-              </a:rPr>
-              <a:t>    •  Manually determine which routers are affected</a:t>
-            </a:r>
-          </a:p>
-        </p:txBody>
-      </p:sp>
-      <p:sp>
-        <p:nvSpPr>
-          <p:cNvPr id="8" name="TextBox 7"/>
-          <p:cNvSpPr txBox="1"/>
-          <p:nvPr/>
-        </p:nvSpPr>
-        <p:spPr>
-          <a:xfrm>
-            <a:off x="548640" y="3072384"/>
-            <a:ext cx="10515600" cy="502920"/>
-          </a:xfrm>
-          <a:prstGeom prst="rect">
-            <a:avLst/>
-          </a:prstGeom>
-          <a:noFill/>
-        </p:spPr>
-        <p:txBody>
-          <a:bodyPr wrap="square">
-            <a:spAutoFit/>
-          </a:bodyPr>
-          <a:lstStyle/>
-          <a:p>
-            <a:pPr algn="l"/>
-            <a:r>
-              <a:rPr sz="1800" b="0" i="0">
-                <a:solidFill>
-                  <a:srgbClr val="B0BCCC"/>
-                </a:solidFill>
-                <a:latin typeface="Calibri"/>
-              </a:rPr>
-              <a:t>    •  SSH into devices and apply config changes</a:t>
-            </a:r>
-          </a:p>
-        </p:txBody>
-      </p:sp>
-      <p:sp>
-        <p:nvSpPr>
-          <p:cNvPr id="9" name="TextBox 8"/>
-          <p:cNvSpPr txBox="1"/>
-          <p:nvPr/>
-        </p:nvSpPr>
-        <p:spPr>
-          <a:xfrm>
-            <a:off x="548640" y="3529584"/>
-            <a:ext cx="10515600" cy="502920"/>
-          </a:xfrm>
-          <a:prstGeom prst="rect">
-            <a:avLst/>
-          </a:prstGeom>
-          <a:noFill/>
-        </p:spPr>
-        <p:txBody>
-          <a:bodyPr wrap="square">
-            <a:spAutoFit/>
-          </a:bodyPr>
-          <a:lstStyle/>
-          <a:p>
-            <a:pPr algn="l"/>
-            <a:r>
-              <a:rPr sz="1800" b="0" i="0">
-                <a:solidFill>
-                  <a:srgbClr val="B0BCCC"/>
-                </a:solidFill>
-                <a:latin typeface="Calibri"/>
-              </a:rPr>
-              <a:t>    •  Update documentation after the fact</a:t>
-            </a:r>
-          </a:p>
-        </p:txBody>
-      </p:sp>
-      <p:sp>
-        <p:nvSpPr>
-          <p:cNvPr id="10" name="TextBox 9"/>
-          <p:cNvSpPr txBox="1"/>
-          <p:nvPr/>
-        </p:nvSpPr>
-        <p:spPr>
-          <a:xfrm>
-            <a:off x="548640" y="3986784"/>
-            <a:ext cx="10515600" cy="502920"/>
-          </a:xfrm>
-          <a:prstGeom prst="rect">
-            <a:avLst/>
-          </a:prstGeom>
-          <a:noFill/>
-        </p:spPr>
-        <p:txBody>
-          <a:bodyPr wrap="square">
-            <a:spAutoFit/>
-          </a:bodyPr>
-          <a:lstStyle/>
-          <a:p>
-            <a:pPr algn="l"/>
-            <a:r>
-              <a:rPr sz="2200" b="0" i="0">
-                <a:solidFill>
-                  <a:srgbClr val="FFFFFF"/>
-                </a:solidFill>
-                <a:latin typeface="Calibri"/>
-              </a:rPr>
-              <a:t>•  Typical manual failover: 45+ minutes</a:t>
-            </a:r>
-          </a:p>
-        </p:txBody>
-      </p:sp>
-      <p:sp>
-        <p:nvSpPr>
-          <p:cNvPr id="11" name="TextBox 10"/>
-          <p:cNvSpPr txBox="1"/>
-          <p:nvPr/>
-        </p:nvSpPr>
-        <p:spPr>
-          <a:xfrm>
-            <a:off x="548640" y="4517136"/>
-            <a:ext cx="10515600" cy="502920"/>
-          </a:xfrm>
-          <a:prstGeom prst="rect">
-            <a:avLst/>
-          </a:prstGeom>
-          <a:noFill/>
-        </p:spPr>
-        <p:txBody>
-          <a:bodyPr wrap="square">
-            <a:spAutoFit/>
-          </a:bodyPr>
-          <a:lstStyle/>
-          <a:p>
-            <a:pPr algn="l"/>
-            <a:r>
-              <a:rPr sz="2200" b="0" i="0">
-                <a:solidFill>
-                  <a:srgbClr val="FFFFFF"/>
-                </a:solidFill>
-                <a:latin typeface="Calibri"/>
-              </a:rPr>
-              <a:t>•  NetBox without automation is still just a better spreadsheet</a:t>
+              <a:t>Enterprise Network Customer  |  Intercontinental WAN Operations</a:t>
             </a:r>
           </a:p>
         </p:txBody>
       </p:sp>
       <p:pic>
         <p:nvPicPr>
-          <p:cNvPr id="12" name="Picture 11" descr="netbox_logo_bright.png"/>
+          <p:cNvPr id="11" name="Picture 10" descr="netbox_logo_bright.png"/>
           <p:cNvPicPr>
             <a:picLocks noChangeAspect="1"/>
           </p:cNvPicPr>
@@ -5780,8 +5790,8 @@
         </p:nvSpPr>
         <p:spPr>
           <a:xfrm>
-            <a:off x="457200" y="228600"/>
-            <a:ext cx="10058400" cy="685800"/>
+            <a:off x="457200" y="182880"/>
+            <a:ext cx="10972800" cy="685800"/>
           </a:xfrm>
           <a:prstGeom prst="rect">
             <a:avLst/>
@@ -5802,259 +5812,934 @@
                 </a:solidFill>
                 <a:latin typeface="Calibri"/>
               </a:rPr>
-              <a:t>The Solution: NetBox as Active Source of Truth</a:t>
-            </a:r>
-          </a:p>
-        </p:txBody>
-      </p:sp>
-      <p:sp>
-        <p:nvSpPr>
-          <p:cNvPr id="4" name="TextBox 3"/>
-          <p:cNvSpPr txBox="1"/>
-          <p:nvPr/>
-        </p:nvSpPr>
-        <p:spPr>
-          <a:xfrm>
-            <a:off x="548640" y="1097280"/>
-            <a:ext cx="10515600" cy="502920"/>
-          </a:xfrm>
-          <a:prstGeom prst="rect">
-            <a:avLst/>
-          </a:prstGeom>
-          <a:noFill/>
-        </p:spPr>
-        <p:txBody>
-          <a:bodyPr wrap="square">
-            <a:spAutoFit/>
-          </a:bodyPr>
-          <a:lstStyle/>
-          <a:p>
-            <a:pPr algn="l"/>
-            <a:r>
-              <a:rPr sz="2200" b="0" i="0">
+              <a:t>Why Did It Take 45 Minutes?</a:t>
+            </a:r>
+          </a:p>
+        </p:txBody>
+      </p:sp>
+      <p:sp>
+        <p:nvSpPr>
+          <p:cNvPr id="4" name="Rectangle 3"/>
+          <p:cNvSpPr/>
+          <p:nvPr/>
+        </p:nvSpPr>
+        <p:spPr>
+          <a:xfrm>
+            <a:off x="365760" y="1005840"/>
+            <a:ext cx="1097280" cy="384048"/>
+          </a:xfrm>
+          <a:prstGeom prst="rect">
+            <a:avLst/>
+          </a:prstGeom>
+          <a:solidFill>
+            <a:srgbClr val="142A3E"/>
+          </a:solidFill>
+          <a:ln w="19050">
+            <a:solidFill>
+              <a:srgbClr val="EF4444"/>
+            </a:solidFill>
+          </a:ln>
+        </p:spPr>
+        <p:style>
+          <a:lnRef idx="1">
+            <a:schemeClr val="accent1"/>
+          </a:lnRef>
+          <a:fillRef idx="3">
+            <a:schemeClr val="accent1"/>
+          </a:fillRef>
+          <a:effectRef idx="2">
+            <a:schemeClr val="accent1"/>
+          </a:effectRef>
+          <a:fontRef idx="minor">
+            <a:schemeClr val="lt1"/>
+          </a:fontRef>
+        </p:style>
+        <p:txBody>
+          <a:bodyPr rtlCol="0" anchor="ctr"/>
+          <a:lstStyle/>
+          <a:p>
+            <a:pPr algn="ctr"/>
+          </a:p>
+        </p:txBody>
+      </p:sp>
+      <p:sp>
+        <p:nvSpPr>
+          <p:cNvPr id="5" name="TextBox 4"/>
+          <p:cNvSpPr txBox="1"/>
+          <p:nvPr/>
+        </p:nvSpPr>
+        <p:spPr>
+          <a:xfrm>
+            <a:off x="365760" y="1042416"/>
+            <a:ext cx="1097280" cy="347472"/>
+          </a:xfrm>
+          <a:prstGeom prst="rect">
+            <a:avLst/>
+          </a:prstGeom>
+          <a:noFill/>
+        </p:spPr>
+        <p:txBody>
+          <a:bodyPr wrap="square">
+            <a:spAutoFit/>
+          </a:bodyPr>
+          <a:lstStyle/>
+          <a:p>
+            <a:pPr algn="ctr"/>
+            <a:r>
+              <a:rPr sz="1400" b="1" i="0">
+                <a:solidFill>
+                  <a:srgbClr val="EF4444"/>
+                </a:solidFill>
+                <a:latin typeface="Calibri"/>
+              </a:rPr>
+              <a:t>0:00</a:t>
+            </a:r>
+          </a:p>
+        </p:txBody>
+      </p:sp>
+      <p:sp>
+        <p:nvSpPr>
+          <p:cNvPr id="6" name="TextBox 5"/>
+          <p:cNvSpPr txBox="1"/>
+          <p:nvPr/>
+        </p:nvSpPr>
+        <p:spPr>
+          <a:xfrm>
+            <a:off x="1600200" y="1051560"/>
+            <a:ext cx="10058400" cy="347472"/>
+          </a:xfrm>
+          <a:prstGeom prst="rect">
+            <a:avLst/>
+          </a:prstGeom>
+          <a:noFill/>
+        </p:spPr>
+        <p:txBody>
+          <a:bodyPr wrap="square">
+            <a:spAutoFit/>
+          </a:bodyPr>
+          <a:lstStyle/>
+          <a:p>
+            <a:pPr algn="l"/>
+            <a:r>
+              <a:rPr sz="1500" b="0" i="0">
                 <a:solidFill>
                   <a:srgbClr val="FFFFFF"/>
                 </a:solidFill>
                 <a:latin typeface="Calibri"/>
               </a:rPr>
-              <a:t>•  NetBox Cloud holds every circuit, device, and connection</a:t>
-            </a:r>
-          </a:p>
-        </p:txBody>
-      </p:sp>
-      <p:sp>
-        <p:nvSpPr>
-          <p:cNvPr id="5" name="TextBox 4"/>
-          <p:cNvSpPr txBox="1"/>
-          <p:nvPr/>
-        </p:nvSpPr>
-        <p:spPr>
-          <a:xfrm>
-            <a:off x="548640" y="1627632"/>
-            <a:ext cx="10515600" cy="502920"/>
-          </a:xfrm>
-          <a:prstGeom prst="rect">
-            <a:avLst/>
-          </a:prstGeom>
-          <a:noFill/>
-        </p:spPr>
-        <p:txBody>
-          <a:bodyPr wrap="square">
-            <a:spAutoFit/>
-          </a:bodyPr>
-          <a:lstStyle/>
-          <a:p>
-            <a:pPr algn="l"/>
-            <a:r>
-              <a:rPr sz="2200" b="0" i="0">
+              <a:t>Alert fires. Engineers are paged.</a:t>
+            </a:r>
+          </a:p>
+        </p:txBody>
+      </p:sp>
+      <p:sp>
+        <p:nvSpPr>
+          <p:cNvPr id="7" name="Rectangle 6"/>
+          <p:cNvSpPr/>
+          <p:nvPr/>
+        </p:nvSpPr>
+        <p:spPr>
+          <a:xfrm>
+            <a:off x="365760" y="1481328"/>
+            <a:ext cx="1097280" cy="384048"/>
+          </a:xfrm>
+          <a:prstGeom prst="rect">
+            <a:avLst/>
+          </a:prstGeom>
+          <a:solidFill>
+            <a:srgbClr val="142A3E"/>
+          </a:solidFill>
+          <a:ln w="19050">
+            <a:solidFill>
+              <a:srgbClr val="F59E0E"/>
+            </a:solidFill>
+          </a:ln>
+        </p:spPr>
+        <p:style>
+          <a:lnRef idx="1">
+            <a:schemeClr val="accent1"/>
+          </a:lnRef>
+          <a:fillRef idx="3">
+            <a:schemeClr val="accent1"/>
+          </a:fillRef>
+          <a:effectRef idx="2">
+            <a:schemeClr val="accent1"/>
+          </a:effectRef>
+          <a:fontRef idx="minor">
+            <a:schemeClr val="lt1"/>
+          </a:fontRef>
+        </p:style>
+        <p:txBody>
+          <a:bodyPr rtlCol="0" anchor="ctr"/>
+          <a:lstStyle/>
+          <a:p>
+            <a:pPr algn="ctr"/>
+          </a:p>
+        </p:txBody>
+      </p:sp>
+      <p:sp>
+        <p:nvSpPr>
+          <p:cNvPr id="8" name="TextBox 7"/>
+          <p:cNvSpPr txBox="1"/>
+          <p:nvPr/>
+        </p:nvSpPr>
+        <p:spPr>
+          <a:xfrm>
+            <a:off x="365760" y="1517904"/>
+            <a:ext cx="1097280" cy="347472"/>
+          </a:xfrm>
+          <a:prstGeom prst="rect">
+            <a:avLst/>
+          </a:prstGeom>
+          <a:noFill/>
+        </p:spPr>
+        <p:txBody>
+          <a:bodyPr wrap="square">
+            <a:spAutoFit/>
+          </a:bodyPr>
+          <a:lstStyle/>
+          <a:p>
+            <a:pPr algn="ctr"/>
+            <a:r>
+              <a:rPr sz="1400" b="1" i="0">
+                <a:solidFill>
+                  <a:srgbClr val="F59E0E"/>
+                </a:solidFill>
+                <a:latin typeface="Calibri"/>
+              </a:rPr>
+              <a:t>0:05</a:t>
+            </a:r>
+          </a:p>
+        </p:txBody>
+      </p:sp>
+      <p:sp>
+        <p:nvSpPr>
+          <p:cNvPr id="9" name="TextBox 8"/>
+          <p:cNvSpPr txBox="1"/>
+          <p:nvPr/>
+        </p:nvSpPr>
+        <p:spPr>
+          <a:xfrm>
+            <a:off x="1600200" y="1527048"/>
+            <a:ext cx="10058400" cy="347472"/>
+          </a:xfrm>
+          <a:prstGeom prst="rect">
+            <a:avLst/>
+          </a:prstGeom>
+          <a:noFill/>
+        </p:spPr>
+        <p:txBody>
+          <a:bodyPr wrap="square">
+            <a:spAutoFit/>
+          </a:bodyPr>
+          <a:lstStyle/>
+          <a:p>
+            <a:pPr algn="l"/>
+            <a:r>
+              <a:rPr sz="1500" b="0" i="0">
                 <a:solidFill>
                   <a:srgbClr val="FFFFFF"/>
                 </a:solidFill>
                 <a:latin typeface="Calibri"/>
               </a:rPr>
-              <a:t>•  Copilot AI translates operator intent into precise API actions</a:t>
-            </a:r>
-          </a:p>
-        </p:txBody>
-      </p:sp>
-      <p:sp>
-        <p:nvSpPr>
-          <p:cNvPr id="6" name="TextBox 5"/>
-          <p:cNvSpPr txBox="1"/>
-          <p:nvPr/>
-        </p:nvSpPr>
-        <p:spPr>
-          <a:xfrm>
-            <a:off x="548640" y="2157984"/>
-            <a:ext cx="10515600" cy="502920"/>
-          </a:xfrm>
-          <a:prstGeom prst="rect">
-            <a:avLst/>
-          </a:prstGeom>
-          <a:noFill/>
-        </p:spPr>
-        <p:txBody>
-          <a:bodyPr wrap="square">
-            <a:spAutoFit/>
-          </a:bodyPr>
-          <a:lstStyle/>
-          <a:p>
-            <a:pPr algn="l"/>
-            <a:r>
-              <a:rPr sz="2200" b="0" i="0">
+              <a:t>Team opens spreadsheets and old Visio diagrams to find the secondary circuit.</a:t>
+            </a:r>
+          </a:p>
+        </p:txBody>
+      </p:sp>
+      <p:sp>
+        <p:nvSpPr>
+          <p:cNvPr id="10" name="Rectangle 9"/>
+          <p:cNvSpPr/>
+          <p:nvPr/>
+        </p:nvSpPr>
+        <p:spPr>
+          <a:xfrm>
+            <a:off x="365760" y="1956816"/>
+            <a:ext cx="1097280" cy="384048"/>
+          </a:xfrm>
+          <a:prstGeom prst="rect">
+            <a:avLst/>
+          </a:prstGeom>
+          <a:solidFill>
+            <a:srgbClr val="142A3E"/>
+          </a:solidFill>
+          <a:ln w="19050">
+            <a:solidFill>
+              <a:srgbClr val="F59E0E"/>
+            </a:solidFill>
+          </a:ln>
+        </p:spPr>
+        <p:style>
+          <a:lnRef idx="1">
+            <a:schemeClr val="accent1"/>
+          </a:lnRef>
+          <a:fillRef idx="3">
+            <a:schemeClr val="accent1"/>
+          </a:fillRef>
+          <a:effectRef idx="2">
+            <a:schemeClr val="accent1"/>
+          </a:effectRef>
+          <a:fontRef idx="minor">
+            <a:schemeClr val="lt1"/>
+          </a:fontRef>
+        </p:style>
+        <p:txBody>
+          <a:bodyPr rtlCol="0" anchor="ctr"/>
+          <a:lstStyle/>
+          <a:p>
+            <a:pPr algn="ctr"/>
+          </a:p>
+        </p:txBody>
+      </p:sp>
+      <p:sp>
+        <p:nvSpPr>
+          <p:cNvPr id="11" name="TextBox 10"/>
+          <p:cNvSpPr txBox="1"/>
+          <p:nvPr/>
+        </p:nvSpPr>
+        <p:spPr>
+          <a:xfrm>
+            <a:off x="365760" y="1993392"/>
+            <a:ext cx="1097280" cy="347472"/>
+          </a:xfrm>
+          <a:prstGeom prst="rect">
+            <a:avLst/>
+          </a:prstGeom>
+          <a:noFill/>
+        </p:spPr>
+        <p:txBody>
+          <a:bodyPr wrap="square">
+            <a:spAutoFit/>
+          </a:bodyPr>
+          <a:lstStyle/>
+          <a:p>
+            <a:pPr algn="ctr"/>
+            <a:r>
+              <a:rPr sz="1400" b="1" i="0">
+                <a:solidFill>
+                  <a:srgbClr val="F59E0E"/>
+                </a:solidFill>
+                <a:latin typeface="Calibri"/>
+              </a:rPr>
+              <a:t>0:15</a:t>
+            </a:r>
+          </a:p>
+        </p:txBody>
+      </p:sp>
+      <p:sp>
+        <p:nvSpPr>
+          <p:cNvPr id="12" name="TextBox 11"/>
+          <p:cNvSpPr txBox="1"/>
+          <p:nvPr/>
+        </p:nvSpPr>
+        <p:spPr>
+          <a:xfrm>
+            <a:off x="1600200" y="2002536"/>
+            <a:ext cx="10058400" cy="347472"/>
+          </a:xfrm>
+          <a:prstGeom prst="rect">
+            <a:avLst/>
+          </a:prstGeom>
+          <a:noFill/>
+        </p:spPr>
+        <p:txBody>
+          <a:bodyPr wrap="square">
+            <a:spAutoFit/>
+          </a:bodyPr>
+          <a:lstStyle/>
+          <a:p>
+            <a:pPr algn="l"/>
+            <a:r>
+              <a:rPr sz="1500" b="0" i="0">
                 <a:solidFill>
                   <a:srgbClr val="FFFFFF"/>
                 </a:solidFill>
                 <a:latin typeface="Calibri"/>
               </a:rPr>
-              <a:t>•  A circuit status change fires a webhook — no manual trigger needed</a:t>
-            </a:r>
-          </a:p>
-        </p:txBody>
-      </p:sp>
-      <p:sp>
-        <p:nvSpPr>
-          <p:cNvPr id="7" name="TextBox 6"/>
-          <p:cNvSpPr txBox="1"/>
-          <p:nvPr/>
-        </p:nvSpPr>
-        <p:spPr>
-          <a:xfrm>
-            <a:off x="548640" y="2688336"/>
-            <a:ext cx="10515600" cy="502920"/>
-          </a:xfrm>
-          <a:prstGeom prst="rect">
-            <a:avLst/>
-          </a:prstGeom>
-          <a:noFill/>
-        </p:spPr>
-        <p:txBody>
-          <a:bodyPr wrap="square">
-            <a:spAutoFit/>
-          </a:bodyPr>
-          <a:lstStyle/>
-          <a:p>
-            <a:pPr algn="l"/>
-            <a:r>
-              <a:rPr sz="2200" b="0" i="0">
+              <a:t>Secondary circuit details found — but which routers does it use?</a:t>
+            </a:r>
+          </a:p>
+        </p:txBody>
+      </p:sp>
+      <p:sp>
+        <p:nvSpPr>
+          <p:cNvPr id="13" name="Rectangle 12"/>
+          <p:cNvSpPr/>
+          <p:nvPr/>
+        </p:nvSpPr>
+        <p:spPr>
+          <a:xfrm>
+            <a:off x="365760" y="2432304"/>
+            <a:ext cx="1097280" cy="384048"/>
+          </a:xfrm>
+          <a:prstGeom prst="rect">
+            <a:avLst/>
+          </a:prstGeom>
+          <a:solidFill>
+            <a:srgbClr val="142A3E"/>
+          </a:solidFill>
+          <a:ln w="19050">
+            <a:solidFill>
+              <a:srgbClr val="F59E0E"/>
+            </a:solidFill>
+          </a:ln>
+        </p:spPr>
+        <p:style>
+          <a:lnRef idx="1">
+            <a:schemeClr val="accent1"/>
+          </a:lnRef>
+          <a:fillRef idx="3">
+            <a:schemeClr val="accent1"/>
+          </a:fillRef>
+          <a:effectRef idx="2">
+            <a:schemeClr val="accent1"/>
+          </a:effectRef>
+          <a:fontRef idx="minor">
+            <a:schemeClr val="lt1"/>
+          </a:fontRef>
+        </p:style>
+        <p:txBody>
+          <a:bodyPr rtlCol="0" anchor="ctr"/>
+          <a:lstStyle/>
+          <a:p>
+            <a:pPr algn="ctr"/>
+          </a:p>
+        </p:txBody>
+      </p:sp>
+      <p:sp>
+        <p:nvSpPr>
+          <p:cNvPr id="14" name="TextBox 13"/>
+          <p:cNvSpPr txBox="1"/>
+          <p:nvPr/>
+        </p:nvSpPr>
+        <p:spPr>
+          <a:xfrm>
+            <a:off x="365760" y="2468880"/>
+            <a:ext cx="1097280" cy="347472"/>
+          </a:xfrm>
+          <a:prstGeom prst="rect">
+            <a:avLst/>
+          </a:prstGeom>
+          <a:noFill/>
+        </p:spPr>
+        <p:txBody>
+          <a:bodyPr wrap="square">
+            <a:spAutoFit/>
+          </a:bodyPr>
+          <a:lstStyle/>
+          <a:p>
+            <a:pPr algn="ctr"/>
+            <a:r>
+              <a:rPr sz="1400" b="1" i="0">
+                <a:solidFill>
+                  <a:srgbClr val="F59E0E"/>
+                </a:solidFill>
+                <a:latin typeface="Calibri"/>
+              </a:rPr>
+              <a:t>0:22</a:t>
+            </a:r>
+          </a:p>
+        </p:txBody>
+      </p:sp>
+      <p:sp>
+        <p:nvSpPr>
+          <p:cNvPr id="15" name="TextBox 14"/>
+          <p:cNvSpPr txBox="1"/>
+          <p:nvPr/>
+        </p:nvSpPr>
+        <p:spPr>
+          <a:xfrm>
+            <a:off x="1600200" y="2478024"/>
+            <a:ext cx="10058400" cy="347472"/>
+          </a:xfrm>
+          <a:prstGeom prst="rect">
+            <a:avLst/>
+          </a:prstGeom>
+          <a:noFill/>
+        </p:spPr>
+        <p:txBody>
+          <a:bodyPr wrap="square">
+            <a:spAutoFit/>
+          </a:bodyPr>
+          <a:lstStyle/>
+          <a:p>
+            <a:pPr algn="l"/>
+            <a:r>
+              <a:rPr sz="1500" b="0" i="0">
                 <a:solidFill>
                   <a:srgbClr val="FFFFFF"/>
                 </a:solidFill>
                 <a:latin typeface="Calibri"/>
               </a:rPr>
-              <a:t>•  Event-Driven Ansible (EDA) listens and reacts in real time</a:t>
-            </a:r>
-          </a:p>
-        </p:txBody>
-      </p:sp>
-      <p:sp>
-        <p:nvSpPr>
-          <p:cNvPr id="8" name="TextBox 7"/>
-          <p:cNvSpPr txBox="1"/>
-          <p:nvPr/>
-        </p:nvSpPr>
-        <p:spPr>
-          <a:xfrm>
-            <a:off x="548640" y="3218688"/>
-            <a:ext cx="10515600" cy="502920"/>
-          </a:xfrm>
-          <a:prstGeom prst="rect">
-            <a:avLst/>
-          </a:prstGeom>
-          <a:noFill/>
-        </p:spPr>
-        <p:txBody>
-          <a:bodyPr wrap="square">
-            <a:spAutoFit/>
-          </a:bodyPr>
-          <a:lstStyle/>
-          <a:p>
-            <a:pPr algn="l"/>
-            <a:r>
-              <a:rPr sz="2200" b="0" i="0">
+              <a:t>Cross-reference IPAM, check interface logs, ask a colleague who “knows the network”.</a:t>
+            </a:r>
+          </a:p>
+        </p:txBody>
+      </p:sp>
+      <p:sp>
+        <p:nvSpPr>
+          <p:cNvPr id="16" name="Rectangle 15"/>
+          <p:cNvSpPr/>
+          <p:nvPr/>
+        </p:nvSpPr>
+        <p:spPr>
+          <a:xfrm>
+            <a:off x="365760" y="2907792"/>
+            <a:ext cx="1097280" cy="384048"/>
+          </a:xfrm>
+          <a:prstGeom prst="rect">
+            <a:avLst/>
+          </a:prstGeom>
+          <a:solidFill>
+            <a:srgbClr val="142A3E"/>
+          </a:solidFill>
+          <a:ln w="19050">
+            <a:solidFill>
+              <a:srgbClr val="F59E0E"/>
+            </a:solidFill>
+          </a:ln>
+        </p:spPr>
+        <p:style>
+          <a:lnRef idx="1">
+            <a:schemeClr val="accent1"/>
+          </a:lnRef>
+          <a:fillRef idx="3">
+            <a:schemeClr val="accent1"/>
+          </a:fillRef>
+          <a:effectRef idx="2">
+            <a:schemeClr val="accent1"/>
+          </a:effectRef>
+          <a:fontRef idx="minor">
+            <a:schemeClr val="lt1"/>
+          </a:fontRef>
+        </p:style>
+        <p:txBody>
+          <a:bodyPr rtlCol="0" anchor="ctr"/>
+          <a:lstStyle/>
+          <a:p>
+            <a:pPr algn="ctr"/>
+          </a:p>
+        </p:txBody>
+      </p:sp>
+      <p:sp>
+        <p:nvSpPr>
+          <p:cNvPr id="17" name="TextBox 16"/>
+          <p:cNvSpPr txBox="1"/>
+          <p:nvPr/>
+        </p:nvSpPr>
+        <p:spPr>
+          <a:xfrm>
+            <a:off x="365760" y="2944368"/>
+            <a:ext cx="1097280" cy="347472"/>
+          </a:xfrm>
+          <a:prstGeom prst="rect">
+            <a:avLst/>
+          </a:prstGeom>
+          <a:noFill/>
+        </p:spPr>
+        <p:txBody>
+          <a:bodyPr wrap="square">
+            <a:spAutoFit/>
+          </a:bodyPr>
+          <a:lstStyle/>
+          <a:p>
+            <a:pPr algn="ctr"/>
+            <a:r>
+              <a:rPr sz="1400" b="1" i="0">
+                <a:solidFill>
+                  <a:srgbClr val="F59E0E"/>
+                </a:solidFill>
+                <a:latin typeface="Calibri"/>
+              </a:rPr>
+              <a:t>0:30</a:t>
+            </a:r>
+          </a:p>
+        </p:txBody>
+      </p:sp>
+      <p:sp>
+        <p:nvSpPr>
+          <p:cNvPr id="18" name="TextBox 17"/>
+          <p:cNvSpPr txBox="1"/>
+          <p:nvPr/>
+        </p:nvSpPr>
+        <p:spPr>
+          <a:xfrm>
+            <a:off x="1600200" y="2953512"/>
+            <a:ext cx="10058400" cy="347472"/>
+          </a:xfrm>
+          <a:prstGeom prst="rect">
+            <a:avLst/>
+          </a:prstGeom>
+          <a:noFill/>
+        </p:spPr>
+        <p:txBody>
+          <a:bodyPr wrap="square">
+            <a:spAutoFit/>
+          </a:bodyPr>
+          <a:lstStyle/>
+          <a:p>
+            <a:pPr algn="l"/>
+            <a:r>
+              <a:rPr sz="1500" b="0" i="0">
                 <a:solidFill>
                   <a:srgbClr val="FFFFFF"/>
                 </a:solidFill>
                 <a:latin typeface="Calibri"/>
               </a:rPr>
-              <a:t>•  AAP Controller discovers the backup from NetBox and acts</a:t>
-            </a:r>
-          </a:p>
-        </p:txBody>
-      </p:sp>
-      <p:sp>
-        <p:nvSpPr>
-          <p:cNvPr id="9" name="TextBox 8"/>
-          <p:cNvSpPr txBox="1"/>
-          <p:nvPr/>
-        </p:nvSpPr>
-        <p:spPr>
-          <a:xfrm>
-            <a:off x="548640" y="3749040"/>
-            <a:ext cx="10515600" cy="502920"/>
-          </a:xfrm>
-          <a:prstGeom prst="rect">
-            <a:avLst/>
-          </a:prstGeom>
-          <a:noFill/>
-        </p:spPr>
-        <p:txBody>
-          <a:bodyPr wrap="square">
-            <a:spAutoFit/>
-          </a:bodyPr>
-          <a:lstStyle/>
-          <a:p>
-            <a:pPr algn="l"/>
-            <a:r>
-              <a:rPr sz="2200" b="0" i="0">
+              <a:t>SSH into Bristol router. Find the right interface. Apply config.</a:t>
+            </a:r>
+          </a:p>
+        </p:txBody>
+      </p:sp>
+      <p:sp>
+        <p:nvSpPr>
+          <p:cNvPr id="19" name="Rectangle 18"/>
+          <p:cNvSpPr/>
+          <p:nvPr/>
+        </p:nvSpPr>
+        <p:spPr>
+          <a:xfrm>
+            <a:off x="365760" y="3383280"/>
+            <a:ext cx="1097280" cy="384048"/>
+          </a:xfrm>
+          <a:prstGeom prst="rect">
+            <a:avLst/>
+          </a:prstGeom>
+          <a:solidFill>
+            <a:srgbClr val="142A3E"/>
+          </a:solidFill>
+          <a:ln w="19050">
+            <a:solidFill>
+              <a:srgbClr val="F59E0E"/>
+            </a:solidFill>
+          </a:ln>
+        </p:spPr>
+        <p:style>
+          <a:lnRef idx="1">
+            <a:schemeClr val="accent1"/>
+          </a:lnRef>
+          <a:fillRef idx="3">
+            <a:schemeClr val="accent1"/>
+          </a:fillRef>
+          <a:effectRef idx="2">
+            <a:schemeClr val="accent1"/>
+          </a:effectRef>
+          <a:fontRef idx="minor">
+            <a:schemeClr val="lt1"/>
+          </a:fontRef>
+        </p:style>
+        <p:txBody>
+          <a:bodyPr rtlCol="0" anchor="ctr"/>
+          <a:lstStyle/>
+          <a:p>
+            <a:pPr algn="ctr"/>
+          </a:p>
+        </p:txBody>
+      </p:sp>
+      <p:sp>
+        <p:nvSpPr>
+          <p:cNvPr id="20" name="TextBox 19"/>
+          <p:cNvSpPr txBox="1"/>
+          <p:nvPr/>
+        </p:nvSpPr>
+        <p:spPr>
+          <a:xfrm>
+            <a:off x="365760" y="3419856"/>
+            <a:ext cx="1097280" cy="347472"/>
+          </a:xfrm>
+          <a:prstGeom prst="rect">
+            <a:avLst/>
+          </a:prstGeom>
+          <a:noFill/>
+        </p:spPr>
+        <p:txBody>
+          <a:bodyPr wrap="square">
+            <a:spAutoFit/>
+          </a:bodyPr>
+          <a:lstStyle/>
+          <a:p>
+            <a:pPr algn="ctr"/>
+            <a:r>
+              <a:rPr sz="1400" b="1" i="0">
+                <a:solidFill>
+                  <a:srgbClr val="F59E0E"/>
+                </a:solidFill>
+                <a:latin typeface="Calibri"/>
+              </a:rPr>
+              <a:t>0:37</a:t>
+            </a:r>
+          </a:p>
+        </p:txBody>
+      </p:sp>
+      <p:sp>
+        <p:nvSpPr>
+          <p:cNvPr id="21" name="TextBox 20"/>
+          <p:cNvSpPr txBox="1"/>
+          <p:nvPr/>
+        </p:nvSpPr>
+        <p:spPr>
+          <a:xfrm>
+            <a:off x="1600200" y="3429000"/>
+            <a:ext cx="10058400" cy="347472"/>
+          </a:xfrm>
+          <a:prstGeom prst="rect">
+            <a:avLst/>
+          </a:prstGeom>
+          <a:noFill/>
+        </p:spPr>
+        <p:txBody>
+          <a:bodyPr wrap="square">
+            <a:spAutoFit/>
+          </a:bodyPr>
+          <a:lstStyle/>
+          <a:p>
+            <a:pPr algn="l"/>
+            <a:r>
+              <a:rPr sz="1500" b="0" i="0">
                 <a:solidFill>
                   <a:srgbClr val="FFFFFF"/>
                 </a:solidFill>
                 <a:latin typeface="Calibri"/>
               </a:rPr>
-              <a:t>•  Visual Explorer map updates live — no stale diagrams</a:t>
-            </a:r>
-          </a:p>
-        </p:txBody>
-      </p:sp>
-      <p:sp>
-        <p:nvSpPr>
-          <p:cNvPr id="10" name="TextBox 9"/>
-          <p:cNvSpPr txBox="1"/>
-          <p:nvPr/>
-        </p:nvSpPr>
-        <p:spPr>
-          <a:xfrm>
-            <a:off x="548640" y="4279392"/>
-            <a:ext cx="10515600" cy="502920"/>
-          </a:xfrm>
-          <a:prstGeom prst="rect">
-            <a:avLst/>
-          </a:prstGeom>
-          <a:noFill/>
-        </p:spPr>
-        <p:txBody>
-          <a:bodyPr wrap="square">
-            <a:spAutoFit/>
-          </a:bodyPr>
-          <a:lstStyle/>
-          <a:p>
-            <a:pPr algn="l"/>
-            <a:r>
-              <a:rPr sz="2200" b="0" i="0">
+              <a:t>SSH into Atlanta router. Repeat.</a:t>
+            </a:r>
+          </a:p>
+        </p:txBody>
+      </p:sp>
+      <p:sp>
+        <p:nvSpPr>
+          <p:cNvPr id="22" name="Rectangle 21"/>
+          <p:cNvSpPr/>
+          <p:nvPr/>
+        </p:nvSpPr>
+        <p:spPr>
+          <a:xfrm>
+            <a:off x="365760" y="3858768"/>
+            <a:ext cx="1097280" cy="384048"/>
+          </a:xfrm>
+          <a:prstGeom prst="rect">
+            <a:avLst/>
+          </a:prstGeom>
+          <a:solidFill>
+            <a:srgbClr val="142A3E"/>
+          </a:solidFill>
+          <a:ln w="19050">
+            <a:solidFill>
+              <a:srgbClr val="F59E0E"/>
+            </a:solidFill>
+          </a:ln>
+        </p:spPr>
+        <p:style>
+          <a:lnRef idx="1">
+            <a:schemeClr val="accent1"/>
+          </a:lnRef>
+          <a:fillRef idx="3">
+            <a:schemeClr val="accent1"/>
+          </a:fillRef>
+          <a:effectRef idx="2">
+            <a:schemeClr val="accent1"/>
+          </a:effectRef>
+          <a:fontRef idx="minor">
+            <a:schemeClr val="lt1"/>
+          </a:fontRef>
+        </p:style>
+        <p:txBody>
+          <a:bodyPr rtlCol="0" anchor="ctr"/>
+          <a:lstStyle/>
+          <a:p>
+            <a:pPr algn="ctr"/>
+          </a:p>
+        </p:txBody>
+      </p:sp>
+      <p:sp>
+        <p:nvSpPr>
+          <p:cNvPr id="23" name="TextBox 22"/>
+          <p:cNvSpPr txBox="1"/>
+          <p:nvPr/>
+        </p:nvSpPr>
+        <p:spPr>
+          <a:xfrm>
+            <a:off x="365760" y="3895344"/>
+            <a:ext cx="1097280" cy="347472"/>
+          </a:xfrm>
+          <a:prstGeom prst="rect">
+            <a:avLst/>
+          </a:prstGeom>
+          <a:noFill/>
+        </p:spPr>
+        <p:txBody>
+          <a:bodyPr wrap="square">
+            <a:spAutoFit/>
+          </a:bodyPr>
+          <a:lstStyle/>
+          <a:p>
+            <a:pPr algn="ctr"/>
+            <a:r>
+              <a:rPr sz="1400" b="1" i="0">
+                <a:solidFill>
+                  <a:srgbClr val="F59E0E"/>
+                </a:solidFill>
+                <a:latin typeface="Calibri"/>
+              </a:rPr>
+              <a:t>0:43</a:t>
+            </a:r>
+          </a:p>
+        </p:txBody>
+      </p:sp>
+      <p:sp>
+        <p:nvSpPr>
+          <p:cNvPr id="24" name="TextBox 23"/>
+          <p:cNvSpPr txBox="1"/>
+          <p:nvPr/>
+        </p:nvSpPr>
+        <p:spPr>
+          <a:xfrm>
+            <a:off x="1600200" y="3904488"/>
+            <a:ext cx="10058400" cy="347472"/>
+          </a:xfrm>
+          <a:prstGeom prst="rect">
+            <a:avLst/>
+          </a:prstGeom>
+          <a:noFill/>
+        </p:spPr>
+        <p:txBody>
+          <a:bodyPr wrap="square">
+            <a:spAutoFit/>
+          </a:bodyPr>
+          <a:lstStyle/>
+          <a:p>
+            <a:pPr algn="l"/>
+            <a:r>
+              <a:rPr sz="1500" b="0" i="0">
                 <a:solidFill>
                   <a:srgbClr val="FFFFFF"/>
                 </a:solidFill>
                 <a:latin typeface="Calibri"/>
               </a:rPr>
-              <a:t>•  Automated failover: under 30 seconds  ·  Full audit trail</a:t>
+              <a:t>Test connectivity. Something is wrong. Roll back. Try again.</a:t>
+            </a:r>
+          </a:p>
+        </p:txBody>
+      </p:sp>
+      <p:sp>
+        <p:nvSpPr>
+          <p:cNvPr id="25" name="Rectangle 24"/>
+          <p:cNvSpPr/>
+          <p:nvPr/>
+        </p:nvSpPr>
+        <p:spPr>
+          <a:xfrm>
+            <a:off x="365760" y="4334256"/>
+            <a:ext cx="1097280" cy="384048"/>
+          </a:xfrm>
+          <a:prstGeom prst="rect">
+            <a:avLst/>
+          </a:prstGeom>
+          <a:solidFill>
+            <a:srgbClr val="142A3E"/>
+          </a:solidFill>
+          <a:ln w="19050">
+            <a:solidFill>
+              <a:srgbClr val="22C55E"/>
+            </a:solidFill>
+          </a:ln>
+        </p:spPr>
+        <p:style>
+          <a:lnRef idx="1">
+            <a:schemeClr val="accent1"/>
+          </a:lnRef>
+          <a:fillRef idx="3">
+            <a:schemeClr val="accent1"/>
+          </a:fillRef>
+          <a:effectRef idx="2">
+            <a:schemeClr val="accent1"/>
+          </a:effectRef>
+          <a:fontRef idx="minor">
+            <a:schemeClr val="lt1"/>
+          </a:fontRef>
+        </p:style>
+        <p:txBody>
+          <a:bodyPr rtlCol="0" anchor="ctr"/>
+          <a:lstStyle/>
+          <a:p>
+            <a:pPr algn="ctr"/>
+          </a:p>
+        </p:txBody>
+      </p:sp>
+      <p:sp>
+        <p:nvSpPr>
+          <p:cNvPr id="26" name="TextBox 25"/>
+          <p:cNvSpPr txBox="1"/>
+          <p:nvPr/>
+        </p:nvSpPr>
+        <p:spPr>
+          <a:xfrm>
+            <a:off x="365760" y="4370832"/>
+            <a:ext cx="1097280" cy="347472"/>
+          </a:xfrm>
+          <a:prstGeom prst="rect">
+            <a:avLst/>
+          </a:prstGeom>
+          <a:noFill/>
+        </p:spPr>
+        <p:txBody>
+          <a:bodyPr wrap="square">
+            <a:spAutoFit/>
+          </a:bodyPr>
+          <a:lstStyle/>
+          <a:p>
+            <a:pPr algn="ctr"/>
+            <a:r>
+              <a:rPr sz="1400" b="1" i="0">
+                <a:solidFill>
+                  <a:srgbClr val="22C55E"/>
+                </a:solidFill>
+                <a:latin typeface="Calibri"/>
+              </a:rPr>
+              <a:t>0:45</a:t>
+            </a:r>
+          </a:p>
+        </p:txBody>
+      </p:sp>
+      <p:sp>
+        <p:nvSpPr>
+          <p:cNvPr id="27" name="TextBox 26"/>
+          <p:cNvSpPr txBox="1"/>
+          <p:nvPr/>
+        </p:nvSpPr>
+        <p:spPr>
+          <a:xfrm>
+            <a:off x="1600200" y="4379976"/>
+            <a:ext cx="10058400" cy="347472"/>
+          </a:xfrm>
+          <a:prstGeom prst="rect">
+            <a:avLst/>
+          </a:prstGeom>
+          <a:noFill/>
+        </p:spPr>
+        <p:txBody>
+          <a:bodyPr wrap="square">
+            <a:spAutoFit/>
+          </a:bodyPr>
+          <a:lstStyle/>
+          <a:p>
+            <a:pPr algn="l"/>
+            <a:r>
+              <a:rPr sz="1500" b="0" i="0">
+                <a:solidFill>
+                  <a:srgbClr val="FFFFFF"/>
+                </a:solidFill>
+                <a:latin typeface="Calibri"/>
+              </a:rPr>
+              <a:t>Traffic restored. Documentation updated... maybe.</a:t>
             </a:r>
           </a:p>
         </p:txBody>
       </p:sp>
       <p:pic>
         <p:nvPicPr>
-          <p:cNvPr id="11" name="Picture 10" descr="netbox_logo_bright.png"/>
+          <p:cNvPr id="28" name="Picture 27" descr="netbox_logo_bright.png"/>
           <p:cNvPicPr>
             <a:picLocks noChangeAspect="1"/>
           </p:cNvPicPr>
@@ -6153,8 +6838,8 @@
         </p:nvSpPr>
         <p:spPr>
           <a:xfrm>
-            <a:off x="457200" y="228600"/>
-            <a:ext cx="9144000" cy="640080"/>
+            <a:off x="457200" y="182880"/>
+            <a:ext cx="10972800" cy="685800"/>
           </a:xfrm>
           <a:prstGeom prst="rect">
             <a:avLst/>
@@ -6175,14 +6860,394 @@
                 </a:solidFill>
                 <a:latin typeface="Calibri"/>
               </a:rPr>
-              <a:t>Architecture</a:t>
+              <a:t>The Root Cause</a:t>
+            </a:r>
+          </a:p>
+        </p:txBody>
+      </p:sp>
+      <p:sp>
+        <p:nvSpPr>
+          <p:cNvPr id="4" name="Rectangle 3"/>
+          <p:cNvSpPr/>
+          <p:nvPr/>
+        </p:nvSpPr>
+        <p:spPr>
+          <a:xfrm>
+            <a:off x="365760" y="1097280"/>
+            <a:ext cx="3657600" cy="5029200"/>
+          </a:xfrm>
+          <a:prstGeom prst="rect">
+            <a:avLst/>
+          </a:prstGeom>
+          <a:solidFill>
+            <a:srgbClr val="142A3E"/>
+          </a:solidFill>
+          <a:ln w="19050">
+            <a:solidFill>
+              <a:srgbClr val="F59E0E"/>
+            </a:solidFill>
+          </a:ln>
+        </p:spPr>
+        <p:style>
+          <a:lnRef idx="1">
+            <a:schemeClr val="accent1"/>
+          </a:lnRef>
+          <a:fillRef idx="3">
+            <a:schemeClr val="accent1"/>
+          </a:fillRef>
+          <a:effectRef idx="2">
+            <a:schemeClr val="accent1"/>
+          </a:effectRef>
+          <a:fontRef idx="minor">
+            <a:schemeClr val="lt1"/>
+          </a:fontRef>
+        </p:style>
+        <p:txBody>
+          <a:bodyPr rtlCol="0" anchor="ctr"/>
+          <a:lstStyle/>
+          <a:p>
+            <a:pPr algn="ctr"/>
+          </a:p>
+        </p:txBody>
+      </p:sp>
+      <p:sp>
+        <p:nvSpPr>
+          <p:cNvPr id="5" name="TextBox 4"/>
+          <p:cNvSpPr txBox="1"/>
+          <p:nvPr/>
+        </p:nvSpPr>
+        <p:spPr>
+          <a:xfrm>
+            <a:off x="548640" y="1280160"/>
+            <a:ext cx="3291840" cy="640080"/>
+          </a:xfrm>
+          <a:prstGeom prst="rect">
+            <a:avLst/>
+          </a:prstGeom>
+          <a:noFill/>
+        </p:spPr>
+        <p:txBody>
+          <a:bodyPr wrap="square">
+            <a:spAutoFit/>
+          </a:bodyPr>
+          <a:lstStyle/>
+          <a:p>
+            <a:pPr algn="l"/>
+            <a:r>
+              <a:rPr sz="2000" b="1" i="0">
+                <a:solidFill>
+                  <a:srgbClr val="F59E0E"/>
+                </a:solidFill>
+                <a:latin typeface="Calibri"/>
+              </a:rPr>
+              <a:t>No single source of truth</a:t>
+            </a:r>
+          </a:p>
+        </p:txBody>
+      </p:sp>
+      <p:sp>
+        <p:nvSpPr>
+          <p:cNvPr id="6" name="TextBox 5"/>
+          <p:cNvSpPr txBox="1"/>
+          <p:nvPr/>
+        </p:nvSpPr>
+        <p:spPr>
+          <a:xfrm>
+            <a:off x="548640" y="2057400"/>
+            <a:ext cx="3291840" cy="3657600"/>
+          </a:xfrm>
+          <a:prstGeom prst="rect">
+            <a:avLst/>
+          </a:prstGeom>
+          <a:noFill/>
+        </p:spPr>
+        <p:txBody>
+          <a:bodyPr wrap="square">
+            <a:spAutoFit/>
+          </a:bodyPr>
+          <a:lstStyle/>
+          <a:p>
+            <a:pPr algn="l"/>
+            <a:r>
+              <a:rPr sz="1700" b="0" i="0">
+                <a:solidFill>
+                  <a:srgbClr val="FFFFFF"/>
+                </a:solidFill>
+                <a:latin typeface="Calibri"/>
+              </a:rPr>
+              <a:t>Circuit inventory lived in spreadsheets, Visio diagrams, and people’s heads. No one system had the full picture.</a:t>
+            </a:r>
+          </a:p>
+        </p:txBody>
+      </p:sp>
+      <p:sp>
+        <p:nvSpPr>
+          <p:cNvPr id="7" name="Rectangle 6"/>
+          <p:cNvSpPr/>
+          <p:nvPr/>
+        </p:nvSpPr>
+        <p:spPr>
+          <a:xfrm>
+            <a:off x="4434840" y="1097280"/>
+            <a:ext cx="3657600" cy="5029200"/>
+          </a:xfrm>
+          <a:prstGeom prst="rect">
+            <a:avLst/>
+          </a:prstGeom>
+          <a:solidFill>
+            <a:srgbClr val="142A3E"/>
+          </a:solidFill>
+          <a:ln w="19050">
+            <a:solidFill>
+              <a:srgbClr val="EF4444"/>
+            </a:solidFill>
+          </a:ln>
+        </p:spPr>
+        <p:style>
+          <a:lnRef idx="1">
+            <a:schemeClr val="accent1"/>
+          </a:lnRef>
+          <a:fillRef idx="3">
+            <a:schemeClr val="accent1"/>
+          </a:fillRef>
+          <a:effectRef idx="2">
+            <a:schemeClr val="accent1"/>
+          </a:effectRef>
+          <a:fontRef idx="minor">
+            <a:schemeClr val="lt1"/>
+          </a:fontRef>
+        </p:style>
+        <p:txBody>
+          <a:bodyPr rtlCol="0" anchor="ctr"/>
+          <a:lstStyle/>
+          <a:p>
+            <a:pPr algn="ctr"/>
+          </a:p>
+        </p:txBody>
+      </p:sp>
+      <p:sp>
+        <p:nvSpPr>
+          <p:cNvPr id="8" name="TextBox 7"/>
+          <p:cNvSpPr txBox="1"/>
+          <p:nvPr/>
+        </p:nvSpPr>
+        <p:spPr>
+          <a:xfrm>
+            <a:off x="4617720" y="1280160"/>
+            <a:ext cx="3291840" cy="640080"/>
+          </a:xfrm>
+          <a:prstGeom prst="rect">
+            <a:avLst/>
+          </a:prstGeom>
+          <a:noFill/>
+        </p:spPr>
+        <p:txBody>
+          <a:bodyPr wrap="square">
+            <a:spAutoFit/>
+          </a:bodyPr>
+          <a:lstStyle/>
+          <a:p>
+            <a:pPr algn="l"/>
+            <a:r>
+              <a:rPr sz="2000" b="1" i="0">
+                <a:solidFill>
+                  <a:srgbClr val="EF4444"/>
+                </a:solidFill>
+                <a:latin typeface="Calibri"/>
+              </a:rPr>
+              <a:t>No automation</a:t>
+            </a:r>
+          </a:p>
+        </p:txBody>
+      </p:sp>
+      <p:sp>
+        <p:nvSpPr>
+          <p:cNvPr id="9" name="TextBox 8"/>
+          <p:cNvSpPr txBox="1"/>
+          <p:nvPr/>
+        </p:nvSpPr>
+        <p:spPr>
+          <a:xfrm>
+            <a:off x="4617720" y="2057400"/>
+            <a:ext cx="3291840" cy="3657600"/>
+          </a:xfrm>
+          <a:prstGeom prst="rect">
+            <a:avLst/>
+          </a:prstGeom>
+          <a:noFill/>
+        </p:spPr>
+        <p:txBody>
+          <a:bodyPr wrap="square">
+            <a:spAutoFit/>
+          </a:bodyPr>
+          <a:lstStyle/>
+          <a:p>
+            <a:pPr algn="l"/>
+            <a:r>
+              <a:rPr sz="1700" b="0" i="0">
+                <a:solidFill>
+                  <a:srgbClr val="FFFFFF"/>
+                </a:solidFill>
+                <a:latin typeface="Calibri"/>
+              </a:rPr>
+              <a:t>Every failover step was manual: find the backup, identify the routers, SSH in, apply config, test, document.</a:t>
+            </a:r>
+          </a:p>
+        </p:txBody>
+      </p:sp>
+      <p:sp>
+        <p:nvSpPr>
+          <p:cNvPr id="10" name="Rectangle 9"/>
+          <p:cNvSpPr/>
+          <p:nvPr/>
+        </p:nvSpPr>
+        <p:spPr>
+          <a:xfrm>
+            <a:off x="8503920" y="1097280"/>
+            <a:ext cx="3657600" cy="5029200"/>
+          </a:xfrm>
+          <a:prstGeom prst="rect">
+            <a:avLst/>
+          </a:prstGeom>
+          <a:solidFill>
+            <a:srgbClr val="142A3E"/>
+          </a:solidFill>
+          <a:ln w="19050">
+            <a:solidFill>
+              <a:srgbClr val="EF4444"/>
+            </a:solidFill>
+          </a:ln>
+        </p:spPr>
+        <p:style>
+          <a:lnRef idx="1">
+            <a:schemeClr val="accent1"/>
+          </a:lnRef>
+          <a:fillRef idx="3">
+            <a:schemeClr val="accent1"/>
+          </a:fillRef>
+          <a:effectRef idx="2">
+            <a:schemeClr val="accent1"/>
+          </a:effectRef>
+          <a:fontRef idx="minor">
+            <a:schemeClr val="lt1"/>
+          </a:fontRef>
+        </p:style>
+        <p:txBody>
+          <a:bodyPr rtlCol="0" anchor="ctr"/>
+          <a:lstStyle/>
+          <a:p>
+            <a:pPr algn="ctr"/>
+          </a:p>
+        </p:txBody>
+      </p:sp>
+      <p:sp>
+        <p:nvSpPr>
+          <p:cNvPr id="11" name="TextBox 10"/>
+          <p:cNvSpPr txBox="1"/>
+          <p:nvPr/>
+        </p:nvSpPr>
+        <p:spPr>
+          <a:xfrm>
+            <a:off x="8686800" y="1280160"/>
+            <a:ext cx="3291840" cy="640080"/>
+          </a:xfrm>
+          <a:prstGeom prst="rect">
+            <a:avLst/>
+          </a:prstGeom>
+          <a:noFill/>
+        </p:spPr>
+        <p:txBody>
+          <a:bodyPr wrap="square">
+            <a:spAutoFit/>
+          </a:bodyPr>
+          <a:lstStyle/>
+          <a:p>
+            <a:pPr algn="l"/>
+            <a:r>
+              <a:rPr sz="2000" b="1" i="0">
+                <a:solidFill>
+                  <a:srgbClr val="EF4444"/>
+                </a:solidFill>
+                <a:latin typeface="Calibri"/>
+              </a:rPr>
+              <a:t>No audit trail</a:t>
+            </a:r>
+          </a:p>
+        </p:txBody>
+      </p:sp>
+      <p:sp>
+        <p:nvSpPr>
+          <p:cNvPr id="12" name="TextBox 11"/>
+          <p:cNvSpPr txBox="1"/>
+          <p:nvPr/>
+        </p:nvSpPr>
+        <p:spPr>
+          <a:xfrm>
+            <a:off x="8686800" y="2057400"/>
+            <a:ext cx="3291840" cy="3657600"/>
+          </a:xfrm>
+          <a:prstGeom prst="rect">
+            <a:avLst/>
+          </a:prstGeom>
+          <a:noFill/>
+        </p:spPr>
+        <p:txBody>
+          <a:bodyPr wrap="square">
+            <a:spAutoFit/>
+          </a:bodyPr>
+          <a:lstStyle/>
+          <a:p>
+            <a:pPr algn="l"/>
+            <a:r>
+              <a:rPr sz="1700" b="0" i="0">
+                <a:solidFill>
+                  <a:srgbClr val="FFFFFF"/>
+                </a:solidFill>
+                <a:latin typeface="Calibri"/>
+              </a:rPr>
+              <a:t>After the incident, the team couldn’t easily answer: what changed, when, and who made the call?</a:t>
+            </a:r>
+          </a:p>
+        </p:txBody>
+      </p:sp>
+      <p:sp>
+        <p:nvSpPr>
+          <p:cNvPr id="13" name="TextBox 12"/>
+          <p:cNvSpPr txBox="1"/>
+          <p:nvPr/>
+        </p:nvSpPr>
+        <p:spPr>
+          <a:xfrm>
+            <a:off x="457200" y="6309360"/>
+            <a:ext cx="11247120" cy="457200"/>
+          </a:xfrm>
+          <a:prstGeom prst="rect">
+            <a:avLst/>
+          </a:prstGeom>
+          <a:noFill/>
+        </p:spPr>
+        <p:txBody>
+          <a:bodyPr wrap="square">
+            <a:spAutoFit/>
+          </a:bodyPr>
+          <a:lstStyle/>
+          <a:p>
+            <a:pPr algn="ctr"/>
+            <a:r>
+              <a:rPr sz="1800" b="0" i="1">
+                <a:solidFill>
+                  <a:srgbClr val="B0BCCC"/>
+                </a:solidFill>
+                <a:latin typeface="Calibri"/>
+              </a:rPr>
+              <a:t>The technology existed to fix all three of these problems. It just wasn’t joined up.</a:t>
             </a:r>
           </a:p>
         </p:txBody>
       </p:sp>
       <p:pic>
         <p:nvPicPr>
-          <p:cNvPr id="4" name="Picture 3" descr="architecture.png"/>
+          <p:cNvPr id="14" name="Picture 13" descr="netbox_logo_bright.png"/>
           <p:cNvPicPr>
             <a:picLocks noChangeAspect="1"/>
           </p:cNvPicPr>
@@ -6190,30 +7255,6 @@
         </p:nvPicPr>
         <p:blipFill>
           <a:blip r:embed="rId2"/>
-          <a:stretch>
-            <a:fillRect/>
-          </a:stretch>
-        </p:blipFill>
-        <p:spPr>
-          <a:xfrm>
-            <a:off x="274320" y="960120"/>
-            <a:ext cx="10972800" cy="2514600"/>
-          </a:xfrm>
-          <a:prstGeom prst="rect">
-            <a:avLst/>
-          </a:prstGeom>
-        </p:spPr>
-      </p:pic>
-      <p:pic>
-        <p:nvPicPr>
-          <p:cNvPr id="5" name="Picture 4" descr="netbox_logo_bright.png"/>
-          <p:cNvPicPr>
-            <a:picLocks noChangeAspect="1"/>
-          </p:cNvPicPr>
-          <p:nvPr/>
-        </p:nvPicPr>
-        <p:blipFill>
-          <a:blip r:embed="rId3"/>
           <a:stretch>
             <a:fillRect/>
           </a:stretch>
@@ -6305,8 +7346,8 @@
         </p:nvSpPr>
         <p:spPr>
           <a:xfrm>
-            <a:off x="457200" y="228600"/>
-            <a:ext cx="9144000" cy="640080"/>
+            <a:off x="457200" y="182880"/>
+            <a:ext cx="10972800" cy="685800"/>
           </a:xfrm>
           <a:prstGeom prst="rect">
             <a:avLst/>
@@ -6327,14 +7368,839 @@
                 </a:solidFill>
                 <a:latin typeface="Calibri"/>
               </a:rPr>
-              <a:t>Demo Sequence</a:t>
+              <a:t>What We Recommended</a:t>
+            </a:r>
+          </a:p>
+        </p:txBody>
+      </p:sp>
+      <p:sp>
+        <p:nvSpPr>
+          <p:cNvPr id="4" name="Rectangle 3"/>
+          <p:cNvSpPr/>
+          <p:nvPr/>
+        </p:nvSpPr>
+        <p:spPr>
+          <a:xfrm>
+            <a:off x="365760" y="1005840"/>
+            <a:ext cx="3657600" cy="5303520"/>
+          </a:xfrm>
+          <a:prstGeom prst="rect">
+            <a:avLst/>
+          </a:prstGeom>
+          <a:solidFill>
+            <a:srgbClr val="142A3E"/>
+          </a:solidFill>
+          <a:ln w="19050">
+            <a:solidFill>
+              <a:srgbClr val="EF4444"/>
+            </a:solidFill>
+          </a:ln>
+        </p:spPr>
+        <p:style>
+          <a:lnRef idx="1">
+            <a:schemeClr val="accent1"/>
+          </a:lnRef>
+          <a:fillRef idx="3">
+            <a:schemeClr val="accent1"/>
+          </a:fillRef>
+          <a:effectRef idx="2">
+            <a:schemeClr val="accent1"/>
+          </a:effectRef>
+          <a:fontRef idx="minor">
+            <a:schemeClr val="lt1"/>
+          </a:fontRef>
+        </p:style>
+        <p:txBody>
+          <a:bodyPr rtlCol="0" anchor="ctr"/>
+          <a:lstStyle/>
+          <a:p>
+            <a:pPr algn="ctr"/>
+          </a:p>
+        </p:txBody>
+      </p:sp>
+      <p:sp>
+        <p:nvSpPr>
+          <p:cNvPr id="5" name="TextBox 4"/>
+          <p:cNvSpPr txBox="1"/>
+          <p:nvPr/>
+        </p:nvSpPr>
+        <p:spPr>
+          <a:xfrm>
+            <a:off x="548640" y="1143000"/>
+            <a:ext cx="3291840" cy="457200"/>
+          </a:xfrm>
+          <a:prstGeom prst="rect">
+            <a:avLst/>
+          </a:prstGeom>
+          <a:noFill/>
+        </p:spPr>
+        <p:txBody>
+          <a:bodyPr wrap="square">
+            <a:spAutoFit/>
+          </a:bodyPr>
+          <a:lstStyle/>
+          <a:p>
+            <a:pPr algn="l"/>
+            <a:r>
+              <a:rPr sz="1800" b="1" i="0">
+                <a:solidFill>
+                  <a:srgbClr val="EF4444"/>
+                </a:solidFill>
+                <a:latin typeface="Calibri"/>
+              </a:rPr>
+              <a:t>The old world</a:t>
+            </a:r>
+          </a:p>
+        </p:txBody>
+      </p:sp>
+      <p:sp>
+        <p:nvSpPr>
+          <p:cNvPr id="6" name="TextBox 5"/>
+          <p:cNvSpPr txBox="1"/>
+          <p:nvPr/>
+        </p:nvSpPr>
+        <p:spPr>
+          <a:xfrm>
+            <a:off x="548640" y="1737360"/>
+            <a:ext cx="3200400" cy="411480"/>
+          </a:xfrm>
+          <a:prstGeom prst="rect">
+            <a:avLst/>
+          </a:prstGeom>
+          <a:noFill/>
+        </p:spPr>
+        <p:txBody>
+          <a:bodyPr wrap="square">
+            <a:spAutoFit/>
+          </a:bodyPr>
+          <a:lstStyle/>
+          <a:p>
+            <a:pPr algn="l"/>
+            <a:r>
+              <a:rPr sz="1600" b="0" i="0">
+                <a:solidFill>
+                  <a:srgbClr val="B0BCCC"/>
+                </a:solidFill>
+                <a:latin typeface="Calibri"/>
+              </a:rPr>
+              <a:t>✗  Spreadsheet inventory</a:t>
+            </a:r>
+          </a:p>
+        </p:txBody>
+      </p:sp>
+      <p:sp>
+        <p:nvSpPr>
+          <p:cNvPr id="7" name="TextBox 6"/>
+          <p:cNvSpPr txBox="1"/>
+          <p:nvPr/>
+        </p:nvSpPr>
+        <p:spPr>
+          <a:xfrm>
+            <a:off x="548640" y="2194560"/>
+            <a:ext cx="3200400" cy="411480"/>
+          </a:xfrm>
+          <a:prstGeom prst="rect">
+            <a:avLst/>
+          </a:prstGeom>
+          <a:noFill/>
+        </p:spPr>
+        <p:txBody>
+          <a:bodyPr wrap="square">
+            <a:spAutoFit/>
+          </a:bodyPr>
+          <a:lstStyle/>
+          <a:p>
+            <a:pPr algn="l"/>
+            <a:r>
+              <a:rPr sz="1600" b="0" i="0">
+                <a:solidFill>
+                  <a:srgbClr val="B0BCCC"/>
+                </a:solidFill>
+                <a:latin typeface="Calibri"/>
+              </a:rPr>
+              <a:t>✗  Manual failover runbooks</a:t>
+            </a:r>
+          </a:p>
+        </p:txBody>
+      </p:sp>
+      <p:sp>
+        <p:nvSpPr>
+          <p:cNvPr id="8" name="TextBox 7"/>
+          <p:cNvSpPr txBox="1"/>
+          <p:nvPr/>
+        </p:nvSpPr>
+        <p:spPr>
+          <a:xfrm>
+            <a:off x="548640" y="2651760"/>
+            <a:ext cx="3200400" cy="411480"/>
+          </a:xfrm>
+          <a:prstGeom prst="rect">
+            <a:avLst/>
+          </a:prstGeom>
+          <a:noFill/>
+        </p:spPr>
+        <p:txBody>
+          <a:bodyPr wrap="square">
+            <a:spAutoFit/>
+          </a:bodyPr>
+          <a:lstStyle/>
+          <a:p>
+            <a:pPr algn="l"/>
+            <a:r>
+              <a:rPr sz="1600" b="0" i="0">
+                <a:solidFill>
+                  <a:srgbClr val="B0BCCC"/>
+                </a:solidFill>
+                <a:latin typeface="Calibri"/>
+              </a:rPr>
+              <a:t>✗  45+ minute MTTR</a:t>
+            </a:r>
+          </a:p>
+        </p:txBody>
+      </p:sp>
+      <p:sp>
+        <p:nvSpPr>
+          <p:cNvPr id="9" name="TextBox 8"/>
+          <p:cNvSpPr txBox="1"/>
+          <p:nvPr/>
+        </p:nvSpPr>
+        <p:spPr>
+          <a:xfrm>
+            <a:off x="548640" y="3108960"/>
+            <a:ext cx="3200400" cy="411480"/>
+          </a:xfrm>
+          <a:prstGeom prst="rect">
+            <a:avLst/>
+          </a:prstGeom>
+          <a:noFill/>
+        </p:spPr>
+        <p:txBody>
+          <a:bodyPr wrap="square">
+            <a:spAutoFit/>
+          </a:bodyPr>
+          <a:lstStyle/>
+          <a:p>
+            <a:pPr algn="l"/>
+            <a:r>
+              <a:rPr sz="1600" b="0" i="0">
+                <a:solidFill>
+                  <a:srgbClr val="B0BCCC"/>
+                </a:solidFill>
+                <a:latin typeface="Calibri"/>
+              </a:rPr>
+              <a:t>✗  No automation</a:t>
+            </a:r>
+          </a:p>
+        </p:txBody>
+      </p:sp>
+      <p:sp>
+        <p:nvSpPr>
+          <p:cNvPr id="10" name="TextBox 9"/>
+          <p:cNvSpPr txBox="1"/>
+          <p:nvPr/>
+        </p:nvSpPr>
+        <p:spPr>
+          <a:xfrm>
+            <a:off x="548640" y="3566160"/>
+            <a:ext cx="3200400" cy="411480"/>
+          </a:xfrm>
+          <a:prstGeom prst="rect">
+            <a:avLst/>
+          </a:prstGeom>
+          <a:noFill/>
+        </p:spPr>
+        <p:txBody>
+          <a:bodyPr wrap="square">
+            <a:spAutoFit/>
+          </a:bodyPr>
+          <a:lstStyle/>
+          <a:p>
+            <a:pPr algn="l"/>
+            <a:r>
+              <a:rPr sz="1600" b="0" i="0">
+                <a:solidFill>
+                  <a:srgbClr val="B0BCCC"/>
+                </a:solidFill>
+                <a:latin typeface="Calibri"/>
+              </a:rPr>
+              <a:t>✗  Stale documentation</a:t>
+            </a:r>
+          </a:p>
+        </p:txBody>
+      </p:sp>
+      <p:sp>
+        <p:nvSpPr>
+          <p:cNvPr id="11" name="TextBox 10"/>
+          <p:cNvSpPr txBox="1"/>
+          <p:nvPr/>
+        </p:nvSpPr>
+        <p:spPr>
+          <a:xfrm>
+            <a:off x="548640" y="4023360"/>
+            <a:ext cx="3200400" cy="411480"/>
+          </a:xfrm>
+          <a:prstGeom prst="rect">
+            <a:avLst/>
+          </a:prstGeom>
+          <a:noFill/>
+        </p:spPr>
+        <p:txBody>
+          <a:bodyPr wrap="square">
+            <a:spAutoFit/>
+          </a:bodyPr>
+          <a:lstStyle/>
+          <a:p>
+            <a:pPr algn="l"/>
+            <a:r>
+              <a:rPr sz="1600" b="0" i="0">
+                <a:solidFill>
+                  <a:srgbClr val="B0BCCC"/>
+                </a:solidFill>
+                <a:latin typeface="Calibri"/>
+              </a:rPr>
+              <a:t>✗  Errors under pressure</a:t>
+            </a:r>
+          </a:p>
+        </p:txBody>
+      </p:sp>
+      <p:sp>
+        <p:nvSpPr>
+          <p:cNvPr id="12" name="TextBox 11"/>
+          <p:cNvSpPr txBox="1"/>
+          <p:nvPr/>
+        </p:nvSpPr>
+        <p:spPr>
+          <a:xfrm>
+            <a:off x="4160520" y="3383280"/>
+            <a:ext cx="548640" cy="548640"/>
+          </a:xfrm>
+          <a:prstGeom prst="rect">
+            <a:avLst/>
+          </a:prstGeom>
+          <a:noFill/>
+        </p:spPr>
+        <p:txBody>
+          <a:bodyPr wrap="square">
+            <a:spAutoFit/>
+          </a:bodyPr>
+          <a:lstStyle/>
+          <a:p>
+            <a:pPr algn="ctr"/>
+            <a:r>
+              <a:rPr sz="4000" b="1" i="0">
+                <a:solidFill>
+                  <a:srgbClr val="00C2A8"/>
+                </a:solidFill>
+                <a:latin typeface="Calibri"/>
+              </a:rPr>
+              <a:t>→</a:t>
+            </a:r>
+          </a:p>
+        </p:txBody>
+      </p:sp>
+      <p:sp>
+        <p:nvSpPr>
+          <p:cNvPr id="13" name="Rectangle 12"/>
+          <p:cNvSpPr/>
+          <p:nvPr/>
+        </p:nvSpPr>
+        <p:spPr>
+          <a:xfrm>
+            <a:off x="4846320" y="1005840"/>
+            <a:ext cx="6949440" cy="5303520"/>
+          </a:xfrm>
+          <a:prstGeom prst="rect">
+            <a:avLst/>
+          </a:prstGeom>
+          <a:solidFill>
+            <a:srgbClr val="142A3E"/>
+          </a:solidFill>
+          <a:ln w="19050">
+            <a:solidFill>
+              <a:srgbClr val="00C2A8"/>
+            </a:solidFill>
+          </a:ln>
+        </p:spPr>
+        <p:style>
+          <a:lnRef idx="1">
+            <a:schemeClr val="accent1"/>
+          </a:lnRef>
+          <a:fillRef idx="3">
+            <a:schemeClr val="accent1"/>
+          </a:fillRef>
+          <a:effectRef idx="2">
+            <a:schemeClr val="accent1"/>
+          </a:effectRef>
+          <a:fontRef idx="minor">
+            <a:schemeClr val="lt1"/>
+          </a:fontRef>
+        </p:style>
+        <p:txBody>
+          <a:bodyPr rtlCol="0" anchor="ctr"/>
+          <a:lstStyle/>
+          <a:p>
+            <a:pPr algn="ctr"/>
+          </a:p>
+        </p:txBody>
+      </p:sp>
+      <p:sp>
+        <p:nvSpPr>
+          <p:cNvPr id="14" name="TextBox 13"/>
+          <p:cNvSpPr txBox="1"/>
+          <p:nvPr/>
+        </p:nvSpPr>
+        <p:spPr>
+          <a:xfrm>
+            <a:off x="5029200" y="1143000"/>
+            <a:ext cx="6583680" cy="457200"/>
+          </a:xfrm>
+          <a:prstGeom prst="rect">
+            <a:avLst/>
+          </a:prstGeom>
+          <a:noFill/>
+        </p:spPr>
+        <p:txBody>
+          <a:bodyPr wrap="square">
+            <a:spAutoFit/>
+          </a:bodyPr>
+          <a:lstStyle/>
+          <a:p>
+            <a:pPr algn="l"/>
+            <a:r>
+              <a:rPr sz="1800" b="1" i="0">
+                <a:solidFill>
+                  <a:srgbClr val="00C2A8"/>
+                </a:solidFill>
+                <a:latin typeface="Calibri"/>
+              </a:rPr>
+              <a:t>The NetBox + AAP world</a:t>
+            </a:r>
+          </a:p>
+        </p:txBody>
+      </p:sp>
+      <p:sp>
+        <p:nvSpPr>
+          <p:cNvPr id="15" name="TextBox 14"/>
+          <p:cNvSpPr txBox="1"/>
+          <p:nvPr/>
+        </p:nvSpPr>
+        <p:spPr>
+          <a:xfrm>
+            <a:off x="5029200" y="1737360"/>
+            <a:ext cx="2194560" cy="411480"/>
+          </a:xfrm>
+          <a:prstGeom prst="rect">
+            <a:avLst/>
+          </a:prstGeom>
+          <a:noFill/>
+        </p:spPr>
+        <p:txBody>
+          <a:bodyPr wrap="square">
+            <a:spAutoFit/>
+          </a:bodyPr>
+          <a:lstStyle/>
+          <a:p>
+            <a:pPr algn="l"/>
+            <a:r>
+              <a:rPr sz="1600" b="1" i="0">
+                <a:solidFill>
+                  <a:srgbClr val="00C2A8"/>
+                </a:solidFill>
+                <a:latin typeface="Calibri"/>
+              </a:rPr>
+              <a:t>✓  NetBox Cloud</a:t>
+            </a:r>
+          </a:p>
+        </p:txBody>
+      </p:sp>
+      <p:sp>
+        <p:nvSpPr>
+          <p:cNvPr id="16" name="TextBox 15"/>
+          <p:cNvSpPr txBox="1"/>
+          <p:nvPr/>
+        </p:nvSpPr>
+        <p:spPr>
+          <a:xfrm>
+            <a:off x="7223760" y="1737360"/>
+            <a:ext cx="4389120" cy="411480"/>
+          </a:xfrm>
+          <a:prstGeom prst="rect">
+            <a:avLst/>
+          </a:prstGeom>
+          <a:noFill/>
+        </p:spPr>
+        <p:txBody>
+          <a:bodyPr wrap="square">
+            <a:spAutoFit/>
+          </a:bodyPr>
+          <a:lstStyle/>
+          <a:p>
+            <a:pPr algn="l"/>
+            <a:r>
+              <a:rPr sz="1500" b="0" i="0">
+                <a:solidFill>
+                  <a:srgbClr val="FFFFFF"/>
+                </a:solidFill>
+                <a:latin typeface="Calibri"/>
+              </a:rPr>
+              <a:t>Single source of truth for every circuit, device, and connection</a:t>
+            </a:r>
+          </a:p>
+        </p:txBody>
+      </p:sp>
+      <p:sp>
+        <p:nvSpPr>
+          <p:cNvPr id="17" name="TextBox 16"/>
+          <p:cNvSpPr txBox="1"/>
+          <p:nvPr/>
+        </p:nvSpPr>
+        <p:spPr>
+          <a:xfrm>
+            <a:off x="5029200" y="2194560"/>
+            <a:ext cx="2194560" cy="411480"/>
+          </a:xfrm>
+          <a:prstGeom prst="rect">
+            <a:avLst/>
+          </a:prstGeom>
+          <a:noFill/>
+        </p:spPr>
+        <p:txBody>
+          <a:bodyPr wrap="square">
+            <a:spAutoFit/>
+          </a:bodyPr>
+          <a:lstStyle/>
+          <a:p>
+            <a:pPr algn="l"/>
+            <a:r>
+              <a:rPr sz="1600" b="1" i="0">
+                <a:solidFill>
+                  <a:srgbClr val="00C2A8"/>
+                </a:solidFill>
+                <a:latin typeface="Calibri"/>
+              </a:rPr>
+              <a:t>✓  Copilot AI</a:t>
+            </a:r>
+          </a:p>
+        </p:txBody>
+      </p:sp>
+      <p:sp>
+        <p:nvSpPr>
+          <p:cNvPr id="18" name="TextBox 17"/>
+          <p:cNvSpPr txBox="1"/>
+          <p:nvPr/>
+        </p:nvSpPr>
+        <p:spPr>
+          <a:xfrm>
+            <a:off x="7223760" y="2194560"/>
+            <a:ext cx="4389120" cy="411480"/>
+          </a:xfrm>
+          <a:prstGeom prst="rect">
+            <a:avLst/>
+          </a:prstGeom>
+          <a:noFill/>
+        </p:spPr>
+        <p:txBody>
+          <a:bodyPr wrap="square">
+            <a:spAutoFit/>
+          </a:bodyPr>
+          <a:lstStyle/>
+          <a:p>
+            <a:pPr algn="l"/>
+            <a:r>
+              <a:rPr sz="1500" b="0" i="0">
+                <a:solidFill>
+                  <a:srgbClr val="FFFFFF"/>
+                </a:solidFill>
+                <a:latin typeface="Calibri"/>
+              </a:rPr>
+              <a:t>Translate operator intent into precise API actions, no CLI needed</a:t>
+            </a:r>
+          </a:p>
+        </p:txBody>
+      </p:sp>
+      <p:sp>
+        <p:nvSpPr>
+          <p:cNvPr id="19" name="TextBox 18"/>
+          <p:cNvSpPr txBox="1"/>
+          <p:nvPr/>
+        </p:nvSpPr>
+        <p:spPr>
+          <a:xfrm>
+            <a:off x="5029200" y="2651760"/>
+            <a:ext cx="2194560" cy="411480"/>
+          </a:xfrm>
+          <a:prstGeom prst="rect">
+            <a:avLst/>
+          </a:prstGeom>
+          <a:noFill/>
+        </p:spPr>
+        <p:txBody>
+          <a:bodyPr wrap="square">
+            <a:spAutoFit/>
+          </a:bodyPr>
+          <a:lstStyle/>
+          <a:p>
+            <a:pPr algn="l"/>
+            <a:r>
+              <a:rPr sz="1600" b="1" i="0">
+                <a:solidFill>
+                  <a:srgbClr val="00C2A8"/>
+                </a:solidFill>
+                <a:latin typeface="Calibri"/>
+              </a:rPr>
+              <a:t>✓  Event-driven webhook</a:t>
+            </a:r>
+          </a:p>
+        </p:txBody>
+      </p:sp>
+      <p:sp>
+        <p:nvSpPr>
+          <p:cNvPr id="20" name="TextBox 19"/>
+          <p:cNvSpPr txBox="1"/>
+          <p:nvPr/>
+        </p:nvSpPr>
+        <p:spPr>
+          <a:xfrm>
+            <a:off x="7223760" y="2651760"/>
+            <a:ext cx="4389120" cy="411480"/>
+          </a:xfrm>
+          <a:prstGeom prst="rect">
+            <a:avLst/>
+          </a:prstGeom>
+          <a:noFill/>
+        </p:spPr>
+        <p:txBody>
+          <a:bodyPr wrap="square">
+            <a:spAutoFit/>
+          </a:bodyPr>
+          <a:lstStyle/>
+          <a:p>
+            <a:pPr algn="l"/>
+            <a:r>
+              <a:rPr sz="1500" b="0" i="0">
+                <a:solidFill>
+                  <a:srgbClr val="FFFFFF"/>
+                </a:solidFill>
+                <a:latin typeface="Calibri"/>
+              </a:rPr>
+              <a:t>A status change in NetBox triggers automation instantly</a:t>
+            </a:r>
+          </a:p>
+        </p:txBody>
+      </p:sp>
+      <p:sp>
+        <p:nvSpPr>
+          <p:cNvPr id="21" name="TextBox 20"/>
+          <p:cNvSpPr txBox="1"/>
+          <p:nvPr/>
+        </p:nvSpPr>
+        <p:spPr>
+          <a:xfrm>
+            <a:off x="5029200" y="3108960"/>
+            <a:ext cx="2194560" cy="411480"/>
+          </a:xfrm>
+          <a:prstGeom prst="rect">
+            <a:avLst/>
+          </a:prstGeom>
+          <a:noFill/>
+        </p:spPr>
+        <p:txBody>
+          <a:bodyPr wrap="square">
+            <a:spAutoFit/>
+          </a:bodyPr>
+          <a:lstStyle/>
+          <a:p>
+            <a:pPr algn="l"/>
+            <a:r>
+              <a:rPr sz="1600" b="1" i="0">
+                <a:solidFill>
+                  <a:srgbClr val="00C2A8"/>
+                </a:solidFill>
+                <a:latin typeface="Calibri"/>
+              </a:rPr>
+              <a:t>✓  AAP Controller</a:t>
+            </a:r>
+          </a:p>
+        </p:txBody>
+      </p:sp>
+      <p:sp>
+        <p:nvSpPr>
+          <p:cNvPr id="22" name="TextBox 21"/>
+          <p:cNvSpPr txBox="1"/>
+          <p:nvPr/>
+        </p:nvSpPr>
+        <p:spPr>
+          <a:xfrm>
+            <a:off x="7223760" y="3108960"/>
+            <a:ext cx="4389120" cy="411480"/>
+          </a:xfrm>
+          <a:prstGeom prst="rect">
+            <a:avLst/>
+          </a:prstGeom>
+          <a:noFill/>
+        </p:spPr>
+        <p:txBody>
+          <a:bodyPr wrap="square">
+            <a:spAutoFit/>
+          </a:bodyPr>
+          <a:lstStyle/>
+          <a:p>
+            <a:pPr algn="l"/>
+            <a:r>
+              <a:rPr sz="1500" b="0" i="0">
+                <a:solidFill>
+                  <a:srgbClr val="FFFFFF"/>
+                </a:solidFill>
+                <a:latin typeface="Calibri"/>
+              </a:rPr>
+              <a:t>Discovers the backup dynamically, pushes config, updates NetBox</a:t>
+            </a:r>
+          </a:p>
+        </p:txBody>
+      </p:sp>
+      <p:sp>
+        <p:nvSpPr>
+          <p:cNvPr id="23" name="TextBox 22"/>
+          <p:cNvSpPr txBox="1"/>
+          <p:nvPr/>
+        </p:nvSpPr>
+        <p:spPr>
+          <a:xfrm>
+            <a:off x="5029200" y="3566160"/>
+            <a:ext cx="2194560" cy="411480"/>
+          </a:xfrm>
+          <a:prstGeom prst="rect">
+            <a:avLst/>
+          </a:prstGeom>
+          <a:noFill/>
+        </p:spPr>
+        <p:txBody>
+          <a:bodyPr wrap="square">
+            <a:spAutoFit/>
+          </a:bodyPr>
+          <a:lstStyle/>
+          <a:p>
+            <a:pPr algn="l"/>
+            <a:r>
+              <a:rPr sz="1600" b="1" i="0">
+                <a:solidFill>
+                  <a:srgbClr val="00C2A8"/>
+                </a:solidFill>
+                <a:latin typeface="Calibri"/>
+              </a:rPr>
+              <a:t>✓  Visual Explorer</a:t>
+            </a:r>
+          </a:p>
+        </p:txBody>
+      </p:sp>
+      <p:sp>
+        <p:nvSpPr>
+          <p:cNvPr id="24" name="TextBox 23"/>
+          <p:cNvSpPr txBox="1"/>
+          <p:nvPr/>
+        </p:nvSpPr>
+        <p:spPr>
+          <a:xfrm>
+            <a:off x="7223760" y="3566160"/>
+            <a:ext cx="4389120" cy="411480"/>
+          </a:xfrm>
+          <a:prstGeom prst="rect">
+            <a:avLst/>
+          </a:prstGeom>
+          <a:noFill/>
+        </p:spPr>
+        <p:txBody>
+          <a:bodyPr wrap="square">
+            <a:spAutoFit/>
+          </a:bodyPr>
+          <a:lstStyle/>
+          <a:p>
+            <a:pPr algn="l"/>
+            <a:r>
+              <a:rPr sz="1500" b="0" i="0">
+                <a:solidFill>
+                  <a:srgbClr val="FFFFFF"/>
+                </a:solidFill>
+                <a:latin typeface="Calibri"/>
+              </a:rPr>
+              <a:t>Live topology map reflects the new state immediately</a:t>
+            </a:r>
+          </a:p>
+        </p:txBody>
+      </p:sp>
+      <p:sp>
+        <p:nvSpPr>
+          <p:cNvPr id="25" name="TextBox 24"/>
+          <p:cNvSpPr txBox="1"/>
+          <p:nvPr/>
+        </p:nvSpPr>
+        <p:spPr>
+          <a:xfrm>
+            <a:off x="5029200" y="4023360"/>
+            <a:ext cx="2194560" cy="411480"/>
+          </a:xfrm>
+          <a:prstGeom prst="rect">
+            <a:avLst/>
+          </a:prstGeom>
+          <a:noFill/>
+        </p:spPr>
+        <p:txBody>
+          <a:bodyPr wrap="square">
+            <a:spAutoFit/>
+          </a:bodyPr>
+          <a:lstStyle/>
+          <a:p>
+            <a:pPr algn="l"/>
+            <a:r>
+              <a:rPr sz="1600" b="1" i="0">
+                <a:solidFill>
+                  <a:srgbClr val="00C2A8"/>
+                </a:solidFill>
+                <a:latin typeface="Calibri"/>
+              </a:rPr>
+              <a:t>✓  Full audit trail</a:t>
+            </a:r>
+          </a:p>
+        </p:txBody>
+      </p:sp>
+      <p:sp>
+        <p:nvSpPr>
+          <p:cNvPr id="26" name="TextBox 25"/>
+          <p:cNvSpPr txBox="1"/>
+          <p:nvPr/>
+        </p:nvSpPr>
+        <p:spPr>
+          <a:xfrm>
+            <a:off x="7223760" y="4023360"/>
+            <a:ext cx="4389120" cy="411480"/>
+          </a:xfrm>
+          <a:prstGeom prst="rect">
+            <a:avLst/>
+          </a:prstGeom>
+          <a:noFill/>
+        </p:spPr>
+        <p:txBody>
+          <a:bodyPr wrap="square">
+            <a:spAutoFit/>
+          </a:bodyPr>
+          <a:lstStyle/>
+          <a:p>
+            <a:pPr algn="l"/>
+            <a:r>
+              <a:rPr sz="1500" b="0" i="0">
+                <a:solidFill>
+                  <a:srgbClr val="FFFFFF"/>
+                </a:solidFill>
+                <a:latin typeface="Calibri"/>
+              </a:rPr>
+              <a:t>Every change recorded in NetBox and AAP job history</a:t>
             </a:r>
           </a:p>
         </p:txBody>
       </p:sp>
       <p:pic>
         <p:nvPicPr>
-          <p:cNvPr id="4" name="Picture 3" descr="sequence.png"/>
+          <p:cNvPr id="27" name="Picture 26" descr="netbox_logo_bright.png"/>
           <p:cNvPicPr>
             <a:picLocks noChangeAspect="1"/>
           </p:cNvPicPr>
@@ -6342,30 +8208,6 @@
         </p:nvPicPr>
         <p:blipFill>
           <a:blip r:embed="rId2"/>
-          <a:stretch>
-            <a:fillRect/>
-          </a:stretch>
-        </p:blipFill>
-        <p:spPr>
-          <a:xfrm>
-            <a:off x="457200" y="914400"/>
-            <a:ext cx="10789920" cy="3596640"/>
-          </a:xfrm>
-          <a:prstGeom prst="rect">
-            <a:avLst/>
-          </a:prstGeom>
-        </p:spPr>
-      </p:pic>
-      <p:pic>
-        <p:nvPicPr>
-          <p:cNvPr id="5" name="Picture 4" descr="netbox_logo_bright.png"/>
-          <p:cNvPicPr>
-            <a:picLocks noChangeAspect="1"/>
-          </p:cNvPicPr>
-          <p:nvPr/>
-        </p:nvPicPr>
-        <p:blipFill>
-          <a:blip r:embed="rId3"/>
           <a:stretch>
             <a:fillRect/>
           </a:stretch>
@@ -6458,7 +8300,7 @@
         <p:spPr>
           <a:xfrm>
             <a:off x="457200" y="228600"/>
-            <a:ext cx="10058400" cy="640080"/>
+            <a:ext cx="10058400" cy="685800"/>
           </a:xfrm>
           <a:prstGeom prst="rect">
             <a:avLst/>
@@ -6479,51 +8321,43 @@
                 </a:solidFill>
                 <a:latin typeface="Calibri"/>
               </a:rPr>
-              <a:t>Demo Flow — Step by Step</a:t>
-            </a:r>
-          </a:p>
-        </p:txBody>
-      </p:sp>
-      <p:sp>
-        <p:nvSpPr>
-          <p:cNvPr id="4" name="Rectangle 3"/>
-          <p:cNvSpPr/>
-          <p:nvPr/>
-        </p:nvSpPr>
-        <p:spPr>
-          <a:xfrm>
-            <a:off x="320040" y="1051560"/>
-            <a:ext cx="347472" cy="347472"/>
-          </a:xfrm>
-          <a:prstGeom prst="rect">
-            <a:avLst/>
-          </a:prstGeom>
-          <a:solidFill>
-            <a:srgbClr val="00C2A8"/>
-          </a:solidFill>
-          <a:ln>
-            <a:noFill/>
-          </a:ln>
-        </p:spPr>
-        <p:style>
-          <a:lnRef idx="1">
-            <a:schemeClr val="accent1"/>
-          </a:lnRef>
-          <a:fillRef idx="3">
-            <a:schemeClr val="accent1"/>
-          </a:fillRef>
-          <a:effectRef idx="2">
-            <a:schemeClr val="accent1"/>
-          </a:effectRef>
-          <a:fontRef idx="minor">
-            <a:schemeClr val="lt1"/>
-          </a:fontRef>
-        </p:style>
-        <p:txBody>
-          <a:bodyPr rtlCol="0" anchor="ctr"/>
-          <a:lstStyle/>
-          <a:p>
-            <a:pPr algn="ctr"/>
+              <a:t>How It Works</a:t>
+            </a:r>
+          </a:p>
+        </p:txBody>
+      </p:sp>
+      <p:sp>
+        <p:nvSpPr>
+          <p:cNvPr id="4" name="TextBox 3"/>
+          <p:cNvSpPr txBox="1"/>
+          <p:nvPr/>
+        </p:nvSpPr>
+        <p:spPr>
+          <a:xfrm>
+            <a:off x="548640" y="1097280"/>
+            <a:ext cx="10515600" cy="502920"/>
+          </a:xfrm>
+          <a:prstGeom prst="rect">
+            <a:avLst/>
+          </a:prstGeom>
+          <a:noFill/>
+        </p:spPr>
+        <p:txBody>
+          <a:bodyPr wrap="square">
+            <a:spAutoFit/>
+          </a:bodyPr>
+          <a:lstStyle/>
+          <a:p>
+            <a:pPr algn="l"/>
+            <a:r>
+              <a:rPr sz="2200" b="0" i="0">
+                <a:solidFill>
+                  <a:srgbClr val="FFFFFF"/>
+                </a:solidFill>
+                <a:latin typeface="Calibri"/>
+              </a:rPr>
+              <a:t>•  NetBox Cloud holds every circuit, device, and connection as structured data</a:t>
+            </a:r>
           </a:p>
         </p:txBody>
       </p:sp>
@@ -6535,29 +8369,29 @@
         </p:nvSpPr>
         <p:spPr>
           <a:xfrm>
-            <a:off x="329184" y="1024128"/>
-            <a:ext cx="347472" cy="347472"/>
-          </a:xfrm>
-          <a:prstGeom prst="rect">
-            <a:avLst/>
-          </a:prstGeom>
-          <a:noFill/>
-        </p:spPr>
-        <p:txBody>
-          <a:bodyPr wrap="square">
-            <a:spAutoFit/>
-          </a:bodyPr>
-          <a:lstStyle/>
-          <a:p>
-            <a:pPr algn="ctr"/>
-            <a:r>
-              <a:rPr sz="1600" b="1" i="0">
-                <a:solidFill>
-                  <a:srgbClr val="0D1B2A"/>
-                </a:solidFill>
-                <a:latin typeface="Calibri"/>
-              </a:rPr>
-              <a:t>1</a:t>
+            <a:off x="548640" y="1627632"/>
+            <a:ext cx="10515600" cy="502920"/>
+          </a:xfrm>
+          <a:prstGeom prst="rect">
+            <a:avLst/>
+          </a:prstGeom>
+          <a:noFill/>
+        </p:spPr>
+        <p:txBody>
+          <a:bodyPr wrap="square">
+            <a:spAutoFit/>
+          </a:bodyPr>
+          <a:lstStyle/>
+          <a:p>
+            <a:pPr algn="l"/>
+            <a:r>
+              <a:rPr sz="2200" b="0" i="0">
+                <a:solidFill>
+                  <a:srgbClr val="FFFFFF"/>
+                </a:solidFill>
+                <a:latin typeface="Calibri"/>
+              </a:rPr>
+              <a:t>•  Copilot AI translates plain English into a precise API action</a:t>
             </a:r>
           </a:p>
         </p:txBody>
@@ -6570,29 +8404,29 @@
         </p:nvSpPr>
         <p:spPr>
           <a:xfrm>
-            <a:off x="777240" y="1005840"/>
-            <a:ext cx="2011680" cy="411480"/>
-          </a:xfrm>
-          <a:prstGeom prst="rect">
-            <a:avLst/>
-          </a:prstGeom>
-          <a:noFill/>
-        </p:spPr>
-        <p:txBody>
-          <a:bodyPr wrap="square">
-            <a:spAutoFit/>
-          </a:bodyPr>
-          <a:lstStyle/>
-          <a:p>
-            <a:pPr algn="l"/>
-            <a:r>
-              <a:rPr sz="1600" b="1" i="0">
-                <a:solidFill>
-                  <a:srgbClr val="00C2A8"/>
-                </a:solidFill>
-                <a:latin typeface="Calibri"/>
-              </a:rPr>
-              <a:t>Visual Explorer</a:t>
+            <a:off x="548640" y="2157984"/>
+            <a:ext cx="10515600" cy="502920"/>
+          </a:xfrm>
+          <a:prstGeom prst="rect">
+            <a:avLst/>
+          </a:prstGeom>
+          <a:noFill/>
+        </p:spPr>
+        <p:txBody>
+          <a:bodyPr wrap="square">
+            <a:spAutoFit/>
+          </a:bodyPr>
+          <a:lstStyle/>
+          <a:p>
+            <a:pPr algn="l"/>
+            <a:r>
+              <a:rPr sz="2200" b="0" i="0">
+                <a:solidFill>
+                  <a:srgbClr val="FFFFFF"/>
+                </a:solidFill>
+                <a:latin typeface="Calibri"/>
+              </a:rPr>
+              <a:t>•  A circuit status change fires a webhook to AAP automatically</a:t>
             </a:r>
           </a:p>
         </p:txBody>
@@ -6605,73 +8439,65 @@
         </p:nvSpPr>
         <p:spPr>
           <a:xfrm>
-            <a:off x="2834640" y="1005840"/>
-            <a:ext cx="8961120" cy="411480"/>
-          </a:xfrm>
-          <a:prstGeom prst="rect">
-            <a:avLst/>
-          </a:prstGeom>
-          <a:noFill/>
-        </p:spPr>
-        <p:txBody>
-          <a:bodyPr wrap="square">
-            <a:spAutoFit/>
-          </a:bodyPr>
-          <a:lstStyle/>
-          <a:p>
-            <a:pPr algn="l"/>
-            <a:r>
-              <a:rPr sz="1500" b="0" i="0">
+            <a:off x="548640" y="2688336"/>
+            <a:ext cx="10515600" cy="502920"/>
+          </a:xfrm>
+          <a:prstGeom prst="rect">
+            <a:avLst/>
+          </a:prstGeom>
+          <a:noFill/>
+        </p:spPr>
+        <p:txBody>
+          <a:bodyPr wrap="square">
+            <a:spAutoFit/>
+          </a:bodyPr>
+          <a:lstStyle/>
+          <a:p>
+            <a:pPr algn="l"/>
+            <a:r>
+              <a:rPr sz="2200" b="0" i="0">
                 <a:solidFill>
                   <a:srgbClr val="FFFFFF"/>
                 </a:solidFill>
                 <a:latin typeface="Calibri"/>
               </a:rPr>
-              <a:t>Open the global WAN map — GB-Bristol hub with active circuits to Manila, Tokyo, Bucharest, Managua, Sydney, Atlanta</a:t>
-            </a:r>
-          </a:p>
-        </p:txBody>
-      </p:sp>
-      <p:sp>
-        <p:nvSpPr>
-          <p:cNvPr id="8" name="Rectangle 7"/>
-          <p:cNvSpPr/>
-          <p:nvPr/>
-        </p:nvSpPr>
-        <p:spPr>
-          <a:xfrm>
-            <a:off x="320040" y="1527048"/>
-            <a:ext cx="347472" cy="347472"/>
-          </a:xfrm>
-          <a:prstGeom prst="rect">
-            <a:avLst/>
-          </a:prstGeom>
-          <a:solidFill>
-            <a:srgbClr val="00C2A8"/>
-          </a:solidFill>
-          <a:ln>
-            <a:noFill/>
-          </a:ln>
-        </p:spPr>
-        <p:style>
-          <a:lnRef idx="1">
-            <a:schemeClr val="accent1"/>
-          </a:lnRef>
-          <a:fillRef idx="3">
-            <a:schemeClr val="accent1"/>
-          </a:fillRef>
-          <a:effectRef idx="2">
-            <a:schemeClr val="accent1"/>
-          </a:effectRef>
-          <a:fontRef idx="minor">
-            <a:schemeClr val="lt1"/>
-          </a:fontRef>
-        </p:style>
-        <p:txBody>
-          <a:bodyPr rtlCol="0" anchor="ctr"/>
-          <a:lstStyle/>
-          <a:p>
-            <a:pPr algn="ctr"/>
+              <a:t>•  AAP discovers the best backup circuit dynamically from NetBox</a:t>
+            </a:r>
+          </a:p>
+        </p:txBody>
+      </p:sp>
+      <p:sp>
+        <p:nvSpPr>
+          <p:cNvPr id="8" name="TextBox 7"/>
+          <p:cNvSpPr txBox="1"/>
+          <p:nvPr/>
+        </p:nvSpPr>
+        <p:spPr>
+          <a:xfrm>
+            <a:off x="548640" y="3218688"/>
+            <a:ext cx="10515600" cy="502920"/>
+          </a:xfrm>
+          <a:prstGeom prst="rect">
+            <a:avLst/>
+          </a:prstGeom>
+          <a:noFill/>
+        </p:spPr>
+        <p:txBody>
+          <a:bodyPr wrap="square">
+            <a:spAutoFit/>
+          </a:bodyPr>
+          <a:lstStyle/>
+          <a:p>
+            <a:pPr algn="l"/>
+            <a:r>
+              <a:rPr sz="2200" b="0" i="0">
+                <a:solidFill>
+                  <a:srgbClr val="FFFFFF"/>
+                </a:solidFill>
+                <a:latin typeface="Calibri"/>
+              </a:rPr>
+              <a:t>•  Router config is pushed and NetBox is updated in a single workflow</a:t>
+            </a:r>
           </a:p>
         </p:txBody>
       </p:sp>
@@ -6683,29 +8509,29 @@
         </p:nvSpPr>
         <p:spPr>
           <a:xfrm>
-            <a:off x="329184" y="1499616"/>
-            <a:ext cx="347472" cy="347472"/>
-          </a:xfrm>
-          <a:prstGeom prst="rect">
-            <a:avLst/>
-          </a:prstGeom>
-          <a:noFill/>
-        </p:spPr>
-        <p:txBody>
-          <a:bodyPr wrap="square">
-            <a:spAutoFit/>
-          </a:bodyPr>
-          <a:lstStyle/>
-          <a:p>
-            <a:pPr algn="ctr"/>
-            <a:r>
-              <a:rPr sz="1600" b="1" i="0">
-                <a:solidFill>
-                  <a:srgbClr val="0D1B2A"/>
-                </a:solidFill>
-                <a:latin typeface="Calibri"/>
-              </a:rPr>
-              <a:t>2</a:t>
+            <a:off x="548640" y="3749040"/>
+            <a:ext cx="10515600" cy="502920"/>
+          </a:xfrm>
+          <a:prstGeom prst="rect">
+            <a:avLst/>
+          </a:prstGeom>
+          <a:noFill/>
+        </p:spPr>
+        <p:txBody>
+          <a:bodyPr wrap="square">
+            <a:spAutoFit/>
+          </a:bodyPr>
+          <a:lstStyle/>
+          <a:p>
+            <a:pPr algn="l"/>
+            <a:r>
+              <a:rPr sz="2200" b="0" i="0">
+                <a:solidFill>
+                  <a:srgbClr val="FFFFFF"/>
+                </a:solidFill>
+                <a:latin typeface="Calibri"/>
+              </a:rPr>
+              <a:t>•  Visual Explorer map reflects the new topology in real time</a:t>
             </a:r>
           </a:p>
         </p:txBody>
@@ -6718,811 +8544,36 @@
         </p:nvSpPr>
         <p:spPr>
           <a:xfrm>
-            <a:off x="777240" y="1481328"/>
-            <a:ext cx="2011680" cy="411480"/>
-          </a:xfrm>
-          <a:prstGeom prst="rect">
-            <a:avLst/>
-          </a:prstGeom>
-          <a:noFill/>
-        </p:spPr>
-        <p:txBody>
-          <a:bodyPr wrap="square">
-            <a:spAutoFit/>
-          </a:bodyPr>
-          <a:lstStyle/>
-          <a:p>
-            <a:pPr algn="l"/>
-            <a:r>
-              <a:rPr sz="1600" b="1" i="0">
-                <a:solidFill>
-                  <a:srgbClr val="00C2A8"/>
-                </a:solidFill>
-                <a:latin typeface="Calibri"/>
-              </a:rPr>
-              <a:t>Copilot AI</a:t>
-            </a:r>
-          </a:p>
-        </p:txBody>
-      </p:sp>
-      <p:sp>
-        <p:nvSpPr>
-          <p:cNvPr id="11" name="TextBox 10"/>
-          <p:cNvSpPr txBox="1"/>
-          <p:nvPr/>
-        </p:nvSpPr>
-        <p:spPr>
-          <a:xfrm>
-            <a:off x="2834640" y="1481328"/>
-            <a:ext cx="8961120" cy="411480"/>
-          </a:xfrm>
-          <a:prstGeom prst="rect">
-            <a:avLst/>
-          </a:prstGeom>
-          <a:noFill/>
-        </p:spPr>
-        <p:txBody>
-          <a:bodyPr wrap="square">
-            <a:spAutoFit/>
-          </a:bodyPr>
-          <a:lstStyle/>
-          <a:p>
-            <a:pPr algn="l"/>
-            <a:r>
-              <a:rPr sz="1500" b="0" i="0">
+            <a:off x="548640" y="4279392"/>
+            <a:ext cx="10515600" cy="502920"/>
+          </a:xfrm>
+          <a:prstGeom prst="rect">
+            <a:avLst/>
+          </a:prstGeom>
+          <a:noFill/>
+        </p:spPr>
+        <p:txBody>
+          <a:bodyPr wrap="square">
+            <a:spAutoFit/>
+          </a:bodyPr>
+          <a:lstStyle/>
+          <a:p>
+            <a:pPr algn="l"/>
+            <a:r>
+              <a:rPr sz="2200" b="0" i="0">
                 <a:solidFill>
                   <a:srgbClr val="FFFFFF"/>
                 </a:solidFill>
                 <a:latin typeface="Calibri"/>
               </a:rPr>
-              <a:t>Tell Copilot: "IPLC-GB-PH-PRI has failed — set it to deprovisioning"</a:t>
-            </a:r>
-          </a:p>
-        </p:txBody>
-      </p:sp>
-      <p:sp>
-        <p:nvSpPr>
-          <p:cNvPr id="12" name="Rectangle 11"/>
-          <p:cNvSpPr/>
-          <p:nvPr/>
-        </p:nvSpPr>
-        <p:spPr>
-          <a:xfrm>
-            <a:off x="320040" y="2002536"/>
-            <a:ext cx="347472" cy="347472"/>
-          </a:xfrm>
-          <a:prstGeom prst="rect">
-            <a:avLst/>
-          </a:prstGeom>
-          <a:solidFill>
-            <a:srgbClr val="00C2A8"/>
-          </a:solidFill>
-          <a:ln>
-            <a:noFill/>
-          </a:ln>
-        </p:spPr>
-        <p:style>
-          <a:lnRef idx="1">
-            <a:schemeClr val="accent1"/>
-          </a:lnRef>
-          <a:fillRef idx="3">
-            <a:schemeClr val="accent1"/>
-          </a:fillRef>
-          <a:effectRef idx="2">
-            <a:schemeClr val="accent1"/>
-          </a:effectRef>
-          <a:fontRef idx="minor">
-            <a:schemeClr val="lt1"/>
-          </a:fontRef>
-        </p:style>
-        <p:txBody>
-          <a:bodyPr rtlCol="0" anchor="ctr"/>
-          <a:lstStyle/>
-          <a:p>
-            <a:pPr algn="ctr"/>
-          </a:p>
-        </p:txBody>
-      </p:sp>
-      <p:sp>
-        <p:nvSpPr>
-          <p:cNvPr id="13" name="TextBox 12"/>
-          <p:cNvSpPr txBox="1"/>
-          <p:nvPr/>
-        </p:nvSpPr>
-        <p:spPr>
-          <a:xfrm>
-            <a:off x="329184" y="1975104"/>
-            <a:ext cx="347472" cy="347472"/>
-          </a:xfrm>
-          <a:prstGeom prst="rect">
-            <a:avLst/>
-          </a:prstGeom>
-          <a:noFill/>
-        </p:spPr>
-        <p:txBody>
-          <a:bodyPr wrap="square">
-            <a:spAutoFit/>
-          </a:bodyPr>
-          <a:lstStyle/>
-          <a:p>
-            <a:pPr algn="ctr"/>
-            <a:r>
-              <a:rPr sz="1600" b="1" i="0">
-                <a:solidFill>
-                  <a:srgbClr val="0D1B2A"/>
-                </a:solidFill>
-                <a:latin typeface="Calibri"/>
-              </a:rPr>
-              <a:t>3</a:t>
-            </a:r>
-          </a:p>
-        </p:txBody>
-      </p:sp>
-      <p:sp>
-        <p:nvSpPr>
-          <p:cNvPr id="14" name="TextBox 13"/>
-          <p:cNvSpPr txBox="1"/>
-          <p:nvPr/>
-        </p:nvSpPr>
-        <p:spPr>
-          <a:xfrm>
-            <a:off x="777240" y="1956816"/>
-            <a:ext cx="2011680" cy="411480"/>
-          </a:xfrm>
-          <a:prstGeom prst="rect">
-            <a:avLst/>
-          </a:prstGeom>
-          <a:noFill/>
-        </p:spPr>
-        <p:txBody>
-          <a:bodyPr wrap="square">
-            <a:spAutoFit/>
-          </a:bodyPr>
-          <a:lstStyle/>
-          <a:p>
-            <a:pPr algn="l"/>
-            <a:r>
-              <a:rPr sz="1600" b="1" i="0">
-                <a:solidFill>
-                  <a:srgbClr val="00C2A8"/>
-                </a:solidFill>
-                <a:latin typeface="Calibri"/>
-              </a:rPr>
-              <a:t>EDA</a:t>
-            </a:r>
-          </a:p>
-        </p:txBody>
-      </p:sp>
-      <p:sp>
-        <p:nvSpPr>
-          <p:cNvPr id="15" name="TextBox 14"/>
-          <p:cNvSpPr txBox="1"/>
-          <p:nvPr/>
-        </p:nvSpPr>
-        <p:spPr>
-          <a:xfrm>
-            <a:off x="2834640" y="1956816"/>
-            <a:ext cx="8961120" cy="411480"/>
-          </a:xfrm>
-          <a:prstGeom prst="rect">
-            <a:avLst/>
-          </a:prstGeom>
-          <a:noFill/>
-        </p:spPr>
-        <p:txBody>
-          <a:bodyPr wrap="square">
-            <a:spAutoFit/>
-          </a:bodyPr>
-          <a:lstStyle/>
-          <a:p>
-            <a:pPr algn="l"/>
-            <a:r>
-              <a:rPr sz="1500" b="0" i="0">
-                <a:solidFill>
-                  <a:srgbClr val="FFFFFF"/>
-                </a:solidFill>
-                <a:latin typeface="Calibri"/>
-              </a:rPr>
-              <a:t>NetBox webhook fires → EDA event stream → rulebook matches → triggers Circuit Failover job</a:t>
-            </a:r>
-          </a:p>
-        </p:txBody>
-      </p:sp>
-      <p:sp>
-        <p:nvSpPr>
-          <p:cNvPr id="16" name="Rectangle 15"/>
-          <p:cNvSpPr/>
-          <p:nvPr/>
-        </p:nvSpPr>
-        <p:spPr>
-          <a:xfrm>
-            <a:off x="320040" y="2478024"/>
-            <a:ext cx="347472" cy="347472"/>
-          </a:xfrm>
-          <a:prstGeom prst="rect">
-            <a:avLst/>
-          </a:prstGeom>
-          <a:solidFill>
-            <a:srgbClr val="00C2A8"/>
-          </a:solidFill>
-          <a:ln>
-            <a:noFill/>
-          </a:ln>
-        </p:spPr>
-        <p:style>
-          <a:lnRef idx="1">
-            <a:schemeClr val="accent1"/>
-          </a:lnRef>
-          <a:fillRef idx="3">
-            <a:schemeClr val="accent1"/>
-          </a:fillRef>
-          <a:effectRef idx="2">
-            <a:schemeClr val="accent1"/>
-          </a:effectRef>
-          <a:fontRef idx="minor">
-            <a:schemeClr val="lt1"/>
-          </a:fontRef>
-        </p:style>
-        <p:txBody>
-          <a:bodyPr rtlCol="0" anchor="ctr"/>
-          <a:lstStyle/>
-          <a:p>
-            <a:pPr algn="ctr"/>
-          </a:p>
-        </p:txBody>
-      </p:sp>
-      <p:sp>
-        <p:nvSpPr>
-          <p:cNvPr id="17" name="TextBox 16"/>
-          <p:cNvSpPr txBox="1"/>
-          <p:nvPr/>
-        </p:nvSpPr>
-        <p:spPr>
-          <a:xfrm>
-            <a:off x="329184" y="2450592"/>
-            <a:ext cx="347472" cy="347472"/>
-          </a:xfrm>
-          <a:prstGeom prst="rect">
-            <a:avLst/>
-          </a:prstGeom>
-          <a:noFill/>
-        </p:spPr>
-        <p:txBody>
-          <a:bodyPr wrap="square">
-            <a:spAutoFit/>
-          </a:bodyPr>
-          <a:lstStyle/>
-          <a:p>
-            <a:pPr algn="ctr"/>
-            <a:r>
-              <a:rPr sz="1600" b="1" i="0">
-                <a:solidFill>
-                  <a:srgbClr val="0D1B2A"/>
-                </a:solidFill>
-                <a:latin typeface="Calibri"/>
-              </a:rPr>
-              <a:t>4</a:t>
-            </a:r>
-          </a:p>
-        </p:txBody>
-      </p:sp>
-      <p:sp>
-        <p:nvSpPr>
-          <p:cNvPr id="18" name="TextBox 17"/>
-          <p:cNvSpPr txBox="1"/>
-          <p:nvPr/>
-        </p:nvSpPr>
-        <p:spPr>
-          <a:xfrm>
-            <a:off x="777240" y="2432304"/>
-            <a:ext cx="2011680" cy="411480"/>
-          </a:xfrm>
-          <a:prstGeom prst="rect">
-            <a:avLst/>
-          </a:prstGeom>
-          <a:noFill/>
-        </p:spPr>
-        <p:txBody>
-          <a:bodyPr wrap="square">
-            <a:spAutoFit/>
-          </a:bodyPr>
-          <a:lstStyle/>
-          <a:p>
-            <a:pPr algn="l"/>
-            <a:r>
-              <a:rPr sz="1600" b="1" i="0">
-                <a:solidFill>
-                  <a:srgbClr val="00C2A8"/>
-                </a:solidFill>
-                <a:latin typeface="Calibri"/>
-              </a:rPr>
-              <a:t>AAP Controller</a:t>
-            </a:r>
-          </a:p>
-        </p:txBody>
-      </p:sp>
-      <p:sp>
-        <p:nvSpPr>
-          <p:cNvPr id="19" name="TextBox 18"/>
-          <p:cNvSpPr txBox="1"/>
-          <p:nvPr/>
-        </p:nvSpPr>
-        <p:spPr>
-          <a:xfrm>
-            <a:off x="2834640" y="2432304"/>
-            <a:ext cx="8961120" cy="411480"/>
-          </a:xfrm>
-          <a:prstGeom prst="rect">
-            <a:avLst/>
-          </a:prstGeom>
-          <a:noFill/>
-        </p:spPr>
-        <p:txBody>
-          <a:bodyPr wrap="square">
-            <a:spAutoFit/>
-          </a:bodyPr>
-          <a:lstStyle/>
-          <a:p>
-            <a:pPr algn="l"/>
-            <a:r>
-              <a:rPr sz="1500" b="0" i="0">
-                <a:solidFill>
-                  <a:srgbClr val="FFFFFF"/>
-                </a:solidFill>
-                <a:latin typeface="Calibri"/>
-              </a:rPr>
-              <a:t>Queries NetBox for backup circuit (IPLC-GB-PH-SEC), simulates router config push, updates NetBox</a:t>
-            </a:r>
-          </a:p>
-        </p:txBody>
-      </p:sp>
-      <p:sp>
-        <p:nvSpPr>
-          <p:cNvPr id="20" name="Rectangle 19"/>
-          <p:cNvSpPr/>
-          <p:nvPr/>
-        </p:nvSpPr>
-        <p:spPr>
-          <a:xfrm>
-            <a:off x="320040" y="2953512"/>
-            <a:ext cx="347472" cy="347472"/>
-          </a:xfrm>
-          <a:prstGeom prst="rect">
-            <a:avLst/>
-          </a:prstGeom>
-          <a:solidFill>
-            <a:srgbClr val="00C2A8"/>
-          </a:solidFill>
-          <a:ln>
-            <a:noFill/>
-          </a:ln>
-        </p:spPr>
-        <p:style>
-          <a:lnRef idx="1">
-            <a:schemeClr val="accent1"/>
-          </a:lnRef>
-          <a:fillRef idx="3">
-            <a:schemeClr val="accent1"/>
-          </a:fillRef>
-          <a:effectRef idx="2">
-            <a:schemeClr val="accent1"/>
-          </a:effectRef>
-          <a:fontRef idx="minor">
-            <a:schemeClr val="lt1"/>
-          </a:fontRef>
-        </p:style>
-        <p:txBody>
-          <a:bodyPr rtlCol="0" anchor="ctr"/>
-          <a:lstStyle/>
-          <a:p>
-            <a:pPr algn="ctr"/>
-          </a:p>
-        </p:txBody>
-      </p:sp>
-      <p:sp>
-        <p:nvSpPr>
-          <p:cNvPr id="21" name="TextBox 20"/>
-          <p:cNvSpPr txBox="1"/>
-          <p:nvPr/>
-        </p:nvSpPr>
-        <p:spPr>
-          <a:xfrm>
-            <a:off x="329184" y="2926080"/>
-            <a:ext cx="347472" cy="347472"/>
-          </a:xfrm>
-          <a:prstGeom prst="rect">
-            <a:avLst/>
-          </a:prstGeom>
-          <a:noFill/>
-        </p:spPr>
-        <p:txBody>
-          <a:bodyPr wrap="square">
-            <a:spAutoFit/>
-          </a:bodyPr>
-          <a:lstStyle/>
-          <a:p>
-            <a:pPr algn="ctr"/>
-            <a:r>
-              <a:rPr sz="1600" b="1" i="0">
-                <a:solidFill>
-                  <a:srgbClr val="0D1B2A"/>
-                </a:solidFill>
-                <a:latin typeface="Calibri"/>
-              </a:rPr>
-              <a:t>5</a:t>
-            </a:r>
-          </a:p>
-        </p:txBody>
-      </p:sp>
-      <p:sp>
-        <p:nvSpPr>
-          <p:cNvPr id="22" name="TextBox 21"/>
-          <p:cNvSpPr txBox="1"/>
-          <p:nvPr/>
-        </p:nvSpPr>
-        <p:spPr>
-          <a:xfrm>
-            <a:off x="777240" y="2907792"/>
-            <a:ext cx="2011680" cy="411480"/>
-          </a:xfrm>
-          <a:prstGeom prst="rect">
-            <a:avLst/>
-          </a:prstGeom>
-          <a:noFill/>
-        </p:spPr>
-        <p:txBody>
-          <a:bodyPr wrap="square">
-            <a:spAutoFit/>
-          </a:bodyPr>
-          <a:lstStyle/>
-          <a:p>
-            <a:pPr algn="l"/>
-            <a:r>
-              <a:rPr sz="1600" b="1" i="0">
-                <a:solidFill>
-                  <a:srgbClr val="00C2A8"/>
-                </a:solidFill>
-                <a:latin typeface="Calibri"/>
-              </a:rPr>
-              <a:t>Visual Explorer</a:t>
-            </a:r>
-          </a:p>
-        </p:txBody>
-      </p:sp>
-      <p:sp>
-        <p:nvSpPr>
-          <p:cNvPr id="23" name="TextBox 22"/>
-          <p:cNvSpPr txBox="1"/>
-          <p:nvPr/>
-        </p:nvSpPr>
-        <p:spPr>
-          <a:xfrm>
-            <a:off x="2834640" y="2907792"/>
-            <a:ext cx="8961120" cy="411480"/>
-          </a:xfrm>
-          <a:prstGeom prst="rect">
-            <a:avLst/>
-          </a:prstGeom>
-          <a:noFill/>
-        </p:spPr>
-        <p:txBody>
-          <a:bodyPr wrap="square">
-            <a:spAutoFit/>
-          </a:bodyPr>
-          <a:lstStyle/>
-          <a:p>
-            <a:pPr algn="l"/>
-            <a:r>
-              <a:rPr sz="1500" b="0" i="0">
-                <a:solidFill>
-                  <a:srgbClr val="FFFFFF"/>
-                </a:solidFill>
-                <a:latin typeface="Calibri"/>
-              </a:rPr>
-              <a:t>Refresh map — failed circuit line is gone, backup confirmed active</a:t>
-            </a:r>
-          </a:p>
-        </p:txBody>
-      </p:sp>
-      <p:sp>
-        <p:nvSpPr>
-          <p:cNvPr id="24" name="Rectangle 23"/>
-          <p:cNvSpPr/>
-          <p:nvPr/>
-        </p:nvSpPr>
-        <p:spPr>
-          <a:xfrm>
-            <a:off x="320040" y="3429000"/>
-            <a:ext cx="347472" cy="347472"/>
-          </a:xfrm>
-          <a:prstGeom prst="rect">
-            <a:avLst/>
-          </a:prstGeom>
-          <a:solidFill>
-            <a:srgbClr val="00C2A8"/>
-          </a:solidFill>
-          <a:ln>
-            <a:noFill/>
-          </a:ln>
-        </p:spPr>
-        <p:style>
-          <a:lnRef idx="1">
-            <a:schemeClr val="accent1"/>
-          </a:lnRef>
-          <a:fillRef idx="3">
-            <a:schemeClr val="accent1"/>
-          </a:fillRef>
-          <a:effectRef idx="2">
-            <a:schemeClr val="accent1"/>
-          </a:effectRef>
-          <a:fontRef idx="minor">
-            <a:schemeClr val="lt1"/>
-          </a:fontRef>
-        </p:style>
-        <p:txBody>
-          <a:bodyPr rtlCol="0" anchor="ctr"/>
-          <a:lstStyle/>
-          <a:p>
-            <a:pPr algn="ctr"/>
-          </a:p>
-        </p:txBody>
-      </p:sp>
-      <p:sp>
-        <p:nvSpPr>
-          <p:cNvPr id="25" name="TextBox 24"/>
-          <p:cNvSpPr txBox="1"/>
-          <p:nvPr/>
-        </p:nvSpPr>
-        <p:spPr>
-          <a:xfrm>
-            <a:off x="329184" y="3401568"/>
-            <a:ext cx="347472" cy="347472"/>
-          </a:xfrm>
-          <a:prstGeom prst="rect">
-            <a:avLst/>
-          </a:prstGeom>
-          <a:noFill/>
-        </p:spPr>
-        <p:txBody>
-          <a:bodyPr wrap="square">
-            <a:spAutoFit/>
-          </a:bodyPr>
-          <a:lstStyle/>
-          <a:p>
-            <a:pPr algn="ctr"/>
-            <a:r>
-              <a:rPr sz="1600" b="1" i="0">
-                <a:solidFill>
-                  <a:srgbClr val="0D1B2A"/>
-                </a:solidFill>
-                <a:latin typeface="Calibri"/>
-              </a:rPr>
-              <a:t>6</a:t>
-            </a:r>
-          </a:p>
-        </p:txBody>
-      </p:sp>
-      <p:sp>
-        <p:nvSpPr>
-          <p:cNvPr id="26" name="TextBox 25"/>
-          <p:cNvSpPr txBox="1"/>
-          <p:nvPr/>
-        </p:nvSpPr>
-        <p:spPr>
-          <a:xfrm>
-            <a:off x="777240" y="3383280"/>
-            <a:ext cx="2011680" cy="411480"/>
-          </a:xfrm>
-          <a:prstGeom prst="rect">
-            <a:avLst/>
-          </a:prstGeom>
-          <a:noFill/>
-        </p:spPr>
-        <p:txBody>
-          <a:bodyPr wrap="square">
-            <a:spAutoFit/>
-          </a:bodyPr>
-          <a:lstStyle/>
-          <a:p>
-            <a:pPr algn="l"/>
-            <a:r>
-              <a:rPr sz="1600" b="1" i="0">
-                <a:solidFill>
-                  <a:srgbClr val="00C2A8"/>
-                </a:solidFill>
-                <a:latin typeface="Calibri"/>
-              </a:rPr>
-              <a:t>Report</a:t>
-            </a:r>
-          </a:p>
-        </p:txBody>
-      </p:sp>
-      <p:sp>
-        <p:nvSpPr>
-          <p:cNvPr id="27" name="TextBox 26"/>
-          <p:cNvSpPr txBox="1"/>
-          <p:nvPr/>
-        </p:nvSpPr>
-        <p:spPr>
-          <a:xfrm>
-            <a:off x="2834640" y="3383280"/>
-            <a:ext cx="8961120" cy="411480"/>
-          </a:xfrm>
-          <a:prstGeom prst="rect">
-            <a:avLst/>
-          </a:prstGeom>
-          <a:noFill/>
-        </p:spPr>
-        <p:txBody>
-          <a:bodyPr wrap="square">
-            <a:spAutoFit/>
-          </a:bodyPr>
-          <a:lstStyle/>
-          <a:p>
-            <a:pPr algn="l"/>
-            <a:r>
-              <a:rPr sz="1500" b="0" i="0">
-                <a:solidFill>
-                  <a:srgbClr val="FFFFFF"/>
-                </a:solidFill>
-                <a:latin typeface="Calibri"/>
-              </a:rPr>
-              <a:t>Open the failover report: sites, routers, timeline, ROI comparison</a:t>
-            </a:r>
-          </a:p>
-        </p:txBody>
-      </p:sp>
-      <p:sp>
-        <p:nvSpPr>
-          <p:cNvPr id="28" name="Rectangle 27"/>
-          <p:cNvSpPr/>
-          <p:nvPr/>
-        </p:nvSpPr>
-        <p:spPr>
-          <a:xfrm>
-            <a:off x="320040" y="3904488"/>
-            <a:ext cx="347472" cy="347472"/>
-          </a:xfrm>
-          <a:prstGeom prst="rect">
-            <a:avLst/>
-          </a:prstGeom>
-          <a:solidFill>
-            <a:srgbClr val="00C2A8"/>
-          </a:solidFill>
-          <a:ln>
-            <a:noFill/>
-          </a:ln>
-        </p:spPr>
-        <p:style>
-          <a:lnRef idx="1">
-            <a:schemeClr val="accent1"/>
-          </a:lnRef>
-          <a:fillRef idx="3">
-            <a:schemeClr val="accent1"/>
-          </a:fillRef>
-          <a:effectRef idx="2">
-            <a:schemeClr val="accent1"/>
-          </a:effectRef>
-          <a:fontRef idx="minor">
-            <a:schemeClr val="lt1"/>
-          </a:fontRef>
-        </p:style>
-        <p:txBody>
-          <a:bodyPr rtlCol="0" anchor="ctr"/>
-          <a:lstStyle/>
-          <a:p>
-            <a:pPr algn="ctr"/>
-          </a:p>
-        </p:txBody>
-      </p:sp>
-      <p:sp>
-        <p:nvSpPr>
-          <p:cNvPr id="29" name="TextBox 28"/>
-          <p:cNvSpPr txBox="1"/>
-          <p:nvPr/>
-        </p:nvSpPr>
-        <p:spPr>
-          <a:xfrm>
-            <a:off x="329184" y="3877056"/>
-            <a:ext cx="347472" cy="347472"/>
-          </a:xfrm>
-          <a:prstGeom prst="rect">
-            <a:avLst/>
-          </a:prstGeom>
-          <a:noFill/>
-        </p:spPr>
-        <p:txBody>
-          <a:bodyPr wrap="square">
-            <a:spAutoFit/>
-          </a:bodyPr>
-          <a:lstStyle/>
-          <a:p>
-            <a:pPr algn="ctr"/>
-            <a:r>
-              <a:rPr sz="1600" b="1" i="0">
-                <a:solidFill>
-                  <a:srgbClr val="0D1B2A"/>
-                </a:solidFill>
-                <a:latin typeface="Calibri"/>
-              </a:rPr>
-              <a:t>7</a:t>
-            </a:r>
-          </a:p>
-        </p:txBody>
-      </p:sp>
-      <p:sp>
-        <p:nvSpPr>
-          <p:cNvPr id="30" name="TextBox 29"/>
-          <p:cNvSpPr txBox="1"/>
-          <p:nvPr/>
-        </p:nvSpPr>
-        <p:spPr>
-          <a:xfrm>
-            <a:off x="777240" y="3858768"/>
-            <a:ext cx="2011680" cy="411480"/>
-          </a:xfrm>
-          <a:prstGeom prst="rect">
-            <a:avLst/>
-          </a:prstGeom>
-          <a:noFill/>
-        </p:spPr>
-        <p:txBody>
-          <a:bodyPr wrap="square">
-            <a:spAutoFit/>
-          </a:bodyPr>
-          <a:lstStyle/>
-          <a:p>
-            <a:pPr algn="l"/>
-            <a:r>
-              <a:rPr sz="1600" b="1" i="0">
-                <a:solidFill>
-                  <a:srgbClr val="00C2A8"/>
-                </a:solidFill>
-                <a:latin typeface="Calibri"/>
-              </a:rPr>
-              <a:t>Claude + MCP</a:t>
-            </a:r>
-          </a:p>
-        </p:txBody>
-      </p:sp>
-      <p:sp>
-        <p:nvSpPr>
-          <p:cNvPr id="31" name="TextBox 30"/>
-          <p:cNvSpPr txBox="1"/>
-          <p:nvPr/>
-        </p:nvSpPr>
-        <p:spPr>
-          <a:xfrm>
-            <a:off x="2834640" y="3858768"/>
-            <a:ext cx="8961120" cy="411480"/>
-          </a:xfrm>
-          <a:prstGeom prst="rect">
-            <a:avLst/>
-          </a:prstGeom>
-          <a:noFill/>
-        </p:spPr>
-        <p:txBody>
-          <a:bodyPr wrap="square">
-            <a:spAutoFit/>
-          </a:bodyPr>
-          <a:lstStyle/>
-          <a:p>
-            <a:pPr algn="l"/>
-            <a:r>
-              <a:rPr sz="1500" b="0" i="0">
-                <a:solidFill>
-                  <a:srgbClr val="FFFFFF"/>
-                </a:solidFill>
-                <a:latin typeface="Calibri"/>
-              </a:rPr>
-              <a:t>Ask Claude: "What is the status of IPLC-GB-PH-PRI?" — live NetBox data confirms the failover</a:t>
+              <a:t>•  Automated failover: under 30 seconds  ·  Full audit trail</a:t>
             </a:r>
           </a:p>
         </p:txBody>
       </p:sp>
       <p:pic>
         <p:nvPicPr>
-          <p:cNvPr id="32" name="Picture 31" descr="netbox_logo_bright.png"/>
+          <p:cNvPr id="11" name="Picture 10" descr="netbox_logo_bright.png"/>
           <p:cNvPicPr>
             <a:picLocks noChangeAspect="1"/>
           </p:cNvPicPr>
@@ -7622,7 +8673,7 @@
         <p:spPr>
           <a:xfrm>
             <a:off x="457200" y="228600"/>
-            <a:ext cx="10058400" cy="640080"/>
+            <a:ext cx="9144000" cy="640080"/>
           </a:xfrm>
           <a:prstGeom prst="rect">
             <a:avLst/>
@@ -7643,594 +8694,14 @@
                 </a:solidFill>
                 <a:latin typeface="Calibri"/>
               </a:rPr>
-              <a:t>Key Components</a:t>
-            </a:r>
-          </a:p>
-        </p:txBody>
-      </p:sp>
-      <p:sp>
-        <p:nvSpPr>
-          <p:cNvPr id="4" name="Rectangle 3"/>
-          <p:cNvSpPr/>
-          <p:nvPr/>
-        </p:nvSpPr>
-        <p:spPr>
-          <a:xfrm>
-            <a:off x="274320" y="1005840"/>
-            <a:ext cx="4389120" cy="2103120"/>
-          </a:xfrm>
-          <a:prstGeom prst="rect">
-            <a:avLst/>
-          </a:prstGeom>
-          <a:solidFill>
-            <a:srgbClr val="142A3E"/>
-          </a:solidFill>
-          <a:ln w="19050">
-            <a:solidFill>
-              <a:srgbClr val="00C2A8"/>
-            </a:solidFill>
-          </a:ln>
-        </p:spPr>
-        <p:style>
-          <a:lnRef idx="1">
-            <a:schemeClr val="accent1"/>
-          </a:lnRef>
-          <a:fillRef idx="3">
-            <a:schemeClr val="accent1"/>
-          </a:fillRef>
-          <a:effectRef idx="2">
-            <a:schemeClr val="accent1"/>
-          </a:effectRef>
-          <a:fontRef idx="minor">
-            <a:schemeClr val="lt1"/>
-          </a:fontRef>
-        </p:style>
-        <p:txBody>
-          <a:bodyPr rtlCol="0" anchor="ctr"/>
-          <a:lstStyle/>
-          <a:p>
-            <a:pPr algn="ctr"/>
-          </a:p>
-        </p:txBody>
-      </p:sp>
-      <p:sp>
-        <p:nvSpPr>
-          <p:cNvPr id="5" name="TextBox 4"/>
-          <p:cNvSpPr txBox="1"/>
-          <p:nvPr/>
-        </p:nvSpPr>
-        <p:spPr>
-          <a:xfrm>
-            <a:off x="411480" y="1143000"/>
-            <a:ext cx="4206240" cy="457200"/>
-          </a:xfrm>
-          <a:prstGeom prst="rect">
-            <a:avLst/>
-          </a:prstGeom>
-          <a:noFill/>
-        </p:spPr>
-        <p:txBody>
-          <a:bodyPr wrap="square">
-            <a:spAutoFit/>
-          </a:bodyPr>
-          <a:lstStyle/>
-          <a:p>
-            <a:pPr algn="l"/>
-            <a:r>
-              <a:rPr sz="1700" b="1" i="0">
-                <a:solidFill>
-                  <a:srgbClr val="00C2A8"/>
-                </a:solidFill>
-                <a:latin typeface="Calibri"/>
-              </a:rPr>
-              <a:t>NetBox Cloud</a:t>
-            </a:r>
-          </a:p>
-        </p:txBody>
-      </p:sp>
-      <p:sp>
-        <p:nvSpPr>
-          <p:cNvPr id="6" name="TextBox 5"/>
-          <p:cNvSpPr txBox="1"/>
-          <p:nvPr/>
-        </p:nvSpPr>
-        <p:spPr>
-          <a:xfrm>
-            <a:off x="411480" y="1600200"/>
-            <a:ext cx="4206240" cy="1371600"/>
-          </a:xfrm>
-          <a:prstGeom prst="rect">
-            <a:avLst/>
-          </a:prstGeom>
-          <a:noFill/>
-        </p:spPr>
-        <p:txBody>
-          <a:bodyPr wrap="square">
-            <a:spAutoFit/>
-          </a:bodyPr>
-          <a:lstStyle/>
-          <a:p>
-            <a:pPr algn="l"/>
-            <a:r>
-              <a:rPr sz="1400" b="0" i="0">
-                <a:solidFill>
-                  <a:srgbClr val="B0BCCC"/>
-                </a:solidFill>
-                <a:latin typeface="Calibri"/>
-              </a:rPr>
-              <a:t>Source of Truth for every circuit, device, and connection.
-Copilot AI + Visual Explorer + Webhook engine.</a:t>
-            </a:r>
-          </a:p>
-        </p:txBody>
-      </p:sp>
-      <p:sp>
-        <p:nvSpPr>
-          <p:cNvPr id="7" name="Rectangle 6"/>
-          <p:cNvSpPr/>
-          <p:nvPr/>
-        </p:nvSpPr>
-        <p:spPr>
-          <a:xfrm>
-            <a:off x="4480560" y="1005840"/>
-            <a:ext cx="4114800" cy="2103120"/>
-          </a:xfrm>
-          <a:prstGeom prst="rect">
-            <a:avLst/>
-          </a:prstGeom>
-          <a:solidFill>
-            <a:srgbClr val="142A3E"/>
-          </a:solidFill>
-          <a:ln w="19050">
-            <a:solidFill>
-              <a:srgbClr val="EE0000"/>
-            </a:solidFill>
-          </a:ln>
-        </p:spPr>
-        <p:style>
-          <a:lnRef idx="1">
-            <a:schemeClr val="accent1"/>
-          </a:lnRef>
-          <a:fillRef idx="3">
-            <a:schemeClr val="accent1"/>
-          </a:fillRef>
-          <a:effectRef idx="2">
-            <a:schemeClr val="accent1"/>
-          </a:effectRef>
-          <a:fontRef idx="minor">
-            <a:schemeClr val="lt1"/>
-          </a:fontRef>
-        </p:style>
-        <p:txBody>
-          <a:bodyPr rtlCol="0" anchor="ctr"/>
-          <a:lstStyle/>
-          <a:p>
-            <a:pPr algn="ctr"/>
-          </a:p>
-        </p:txBody>
-      </p:sp>
-      <p:sp>
-        <p:nvSpPr>
-          <p:cNvPr id="8" name="TextBox 7"/>
-          <p:cNvSpPr txBox="1"/>
-          <p:nvPr/>
-        </p:nvSpPr>
-        <p:spPr>
-          <a:xfrm>
-            <a:off x="4617720" y="1143000"/>
-            <a:ext cx="3931920" cy="457200"/>
-          </a:xfrm>
-          <a:prstGeom prst="rect">
-            <a:avLst/>
-          </a:prstGeom>
-          <a:noFill/>
-        </p:spPr>
-        <p:txBody>
-          <a:bodyPr wrap="square">
-            <a:spAutoFit/>
-          </a:bodyPr>
-          <a:lstStyle/>
-          <a:p>
-            <a:pPr algn="l"/>
-            <a:r>
-              <a:rPr sz="1700" b="1" i="0">
-                <a:solidFill>
-                  <a:srgbClr val="EE0000"/>
-                </a:solidFill>
-                <a:latin typeface="Calibri"/>
-              </a:rPr>
-              <a:t>Event-Driven Ansible</a:t>
-            </a:r>
-          </a:p>
-        </p:txBody>
-      </p:sp>
-      <p:sp>
-        <p:nvSpPr>
-          <p:cNvPr id="9" name="TextBox 8"/>
-          <p:cNvSpPr txBox="1"/>
-          <p:nvPr/>
-        </p:nvSpPr>
-        <p:spPr>
-          <a:xfrm>
-            <a:off x="4617720" y="1600200"/>
-            <a:ext cx="3931920" cy="1371600"/>
-          </a:xfrm>
-          <a:prstGeom prst="rect">
-            <a:avLst/>
-          </a:prstGeom>
-          <a:noFill/>
-        </p:spPr>
-        <p:txBody>
-          <a:bodyPr wrap="square">
-            <a:spAutoFit/>
-          </a:bodyPr>
-          <a:lstStyle/>
-          <a:p>
-            <a:pPr algn="l"/>
-            <a:r>
-              <a:rPr sz="1400" b="0" i="0">
-                <a:solidFill>
-                  <a:srgbClr val="B0BCCC"/>
-                </a:solidFill>
-                <a:latin typeface="Calibri"/>
-              </a:rPr>
-              <a:t>Listens for circuit status changes via HTTP event stream.
-Rulebook fires run_job_template instantly — no polling.</a:t>
-            </a:r>
-          </a:p>
-        </p:txBody>
-      </p:sp>
-      <p:sp>
-        <p:nvSpPr>
-          <p:cNvPr id="10" name="Rectangle 9"/>
-          <p:cNvSpPr/>
-          <p:nvPr/>
-        </p:nvSpPr>
-        <p:spPr>
-          <a:xfrm>
-            <a:off x="8778240" y="1005840"/>
-            <a:ext cx="3246120" cy="2103120"/>
-          </a:xfrm>
-          <a:prstGeom prst="rect">
-            <a:avLst/>
-          </a:prstGeom>
-          <a:solidFill>
-            <a:srgbClr val="142A3E"/>
-          </a:solidFill>
-          <a:ln w="19050">
-            <a:solidFill>
-              <a:srgbClr val="EE0000"/>
-            </a:solidFill>
-          </a:ln>
-        </p:spPr>
-        <p:style>
-          <a:lnRef idx="1">
-            <a:schemeClr val="accent1"/>
-          </a:lnRef>
-          <a:fillRef idx="3">
-            <a:schemeClr val="accent1"/>
-          </a:fillRef>
-          <a:effectRef idx="2">
-            <a:schemeClr val="accent1"/>
-          </a:effectRef>
-          <a:fontRef idx="minor">
-            <a:schemeClr val="lt1"/>
-          </a:fontRef>
-        </p:style>
-        <p:txBody>
-          <a:bodyPr rtlCol="0" anchor="ctr"/>
-          <a:lstStyle/>
-          <a:p>
-            <a:pPr algn="ctr"/>
-          </a:p>
-        </p:txBody>
-      </p:sp>
-      <p:sp>
-        <p:nvSpPr>
-          <p:cNvPr id="11" name="TextBox 10"/>
-          <p:cNvSpPr txBox="1"/>
-          <p:nvPr/>
-        </p:nvSpPr>
-        <p:spPr>
-          <a:xfrm>
-            <a:off x="8915400" y="1143000"/>
-            <a:ext cx="3063240" cy="457200"/>
-          </a:xfrm>
-          <a:prstGeom prst="rect">
-            <a:avLst/>
-          </a:prstGeom>
-          <a:noFill/>
-        </p:spPr>
-        <p:txBody>
-          <a:bodyPr wrap="square">
-            <a:spAutoFit/>
-          </a:bodyPr>
-          <a:lstStyle/>
-          <a:p>
-            <a:pPr algn="l"/>
-            <a:r>
-              <a:rPr sz="1700" b="1" i="0">
-                <a:solidFill>
-                  <a:srgbClr val="EE0000"/>
-                </a:solidFill>
-                <a:latin typeface="Calibri"/>
-              </a:rPr>
-              <a:t>AAP Controller</a:t>
-            </a:r>
-          </a:p>
-        </p:txBody>
-      </p:sp>
-      <p:sp>
-        <p:nvSpPr>
-          <p:cNvPr id="12" name="TextBox 11"/>
-          <p:cNvSpPr txBox="1"/>
-          <p:nvPr/>
-        </p:nvSpPr>
-        <p:spPr>
-          <a:xfrm>
-            <a:off x="8915400" y="1600200"/>
-            <a:ext cx="3063240" cy="1371600"/>
-          </a:xfrm>
-          <a:prstGeom prst="rect">
-            <a:avLst/>
-          </a:prstGeom>
-          <a:noFill/>
-        </p:spPr>
-        <p:txBody>
-          <a:bodyPr wrap="square">
-            <a:spAutoFit/>
-          </a:bodyPr>
-          <a:lstStyle/>
-          <a:p>
-            <a:pPr algn="l"/>
-            <a:r>
-              <a:rPr sz="1400" b="0" i="0">
-                <a:solidFill>
-                  <a:srgbClr val="B0BCCC"/>
-                </a:solidFill>
-                <a:latin typeface="Calibri"/>
-              </a:rPr>
-              <a:t>Runs the failover playbook. Discovers backup dynamically
-from NetBox — no hardcoded circuit mappings.</a:t>
-            </a:r>
-          </a:p>
-        </p:txBody>
-      </p:sp>
-      <p:sp>
-        <p:nvSpPr>
-          <p:cNvPr id="13" name="Rectangle 12"/>
-          <p:cNvSpPr/>
-          <p:nvPr/>
-        </p:nvSpPr>
-        <p:spPr>
-          <a:xfrm>
-            <a:off x="274320" y="3474720"/>
-            <a:ext cx="4389120" cy="2103120"/>
-          </a:xfrm>
-          <a:prstGeom prst="rect">
-            <a:avLst/>
-          </a:prstGeom>
-          <a:solidFill>
-            <a:srgbClr val="142A3E"/>
-          </a:solidFill>
-          <a:ln w="19050">
-            <a:solidFill>
-              <a:srgbClr val="B0BCCC"/>
-            </a:solidFill>
-          </a:ln>
-        </p:spPr>
-        <p:style>
-          <a:lnRef idx="1">
-            <a:schemeClr val="accent1"/>
-          </a:lnRef>
-          <a:fillRef idx="3">
-            <a:schemeClr val="accent1"/>
-          </a:fillRef>
-          <a:effectRef idx="2">
-            <a:schemeClr val="accent1"/>
-          </a:effectRef>
-          <a:fontRef idx="minor">
-            <a:schemeClr val="lt1"/>
-          </a:fontRef>
-        </p:style>
-        <p:txBody>
-          <a:bodyPr rtlCol="0" anchor="ctr"/>
-          <a:lstStyle/>
-          <a:p>
-            <a:pPr algn="ctr"/>
-          </a:p>
-        </p:txBody>
-      </p:sp>
-      <p:sp>
-        <p:nvSpPr>
-          <p:cNvPr id="14" name="TextBox 13"/>
-          <p:cNvSpPr txBox="1"/>
-          <p:nvPr/>
-        </p:nvSpPr>
-        <p:spPr>
-          <a:xfrm>
-            <a:off x="411480" y="3611880"/>
-            <a:ext cx="4206240" cy="457200"/>
-          </a:xfrm>
-          <a:prstGeom prst="rect">
-            <a:avLst/>
-          </a:prstGeom>
-          <a:noFill/>
-        </p:spPr>
-        <p:txBody>
-          <a:bodyPr wrap="square">
-            <a:spAutoFit/>
-          </a:bodyPr>
-          <a:lstStyle/>
-          <a:p>
-            <a:pPr algn="l"/>
-            <a:r>
-              <a:rPr sz="1700" b="1" i="0">
-                <a:solidFill>
-                  <a:srgbClr val="B0BCCC"/>
-                </a:solidFill>
-                <a:latin typeface="Calibri"/>
-              </a:rPr>
-              <a:t>Report Server (AWS)</a:t>
-            </a:r>
-          </a:p>
-        </p:txBody>
-      </p:sp>
-      <p:sp>
-        <p:nvSpPr>
-          <p:cNvPr id="15" name="TextBox 14"/>
-          <p:cNvSpPr txBox="1"/>
-          <p:nvPr/>
-        </p:nvSpPr>
-        <p:spPr>
-          <a:xfrm>
-            <a:off x="411480" y="4069080"/>
-            <a:ext cx="4206240" cy="1371600"/>
-          </a:xfrm>
-          <a:prstGeom prst="rect">
-            <a:avLst/>
-          </a:prstGeom>
-          <a:noFill/>
-        </p:spPr>
-        <p:txBody>
-          <a:bodyPr wrap="square">
-            <a:spAutoFit/>
-          </a:bodyPr>
-          <a:lstStyle/>
-          <a:p>
-            <a:pPr algn="l"/>
-            <a:r>
-              <a:rPr sz="1400" b="0" i="0">
-                <a:solidFill>
-                  <a:srgbClr val="B0BCCC"/>
-                </a:solidFill>
-                <a:latin typeface="Calibri"/>
-              </a:rPr>
-              <a:t>EC2 t3.micro with nginx + self-signed TLS. AAP uploads
-the HTML failover report after every run.</a:t>
-            </a:r>
-          </a:p>
-        </p:txBody>
-      </p:sp>
-      <p:sp>
-        <p:nvSpPr>
-          <p:cNvPr id="16" name="Rectangle 15"/>
-          <p:cNvSpPr/>
-          <p:nvPr/>
-        </p:nvSpPr>
-        <p:spPr>
-          <a:xfrm>
-            <a:off x="4754880" y="3474720"/>
-            <a:ext cx="6858000" cy="2103120"/>
-          </a:xfrm>
-          <a:prstGeom prst="rect">
-            <a:avLst/>
-          </a:prstGeom>
-          <a:solidFill>
-            <a:srgbClr val="142A3E"/>
-          </a:solidFill>
-          <a:ln w="19050">
-            <a:solidFill>
-              <a:srgbClr val="B0BCCC"/>
-            </a:solidFill>
-          </a:ln>
-        </p:spPr>
-        <p:style>
-          <a:lnRef idx="1">
-            <a:schemeClr val="accent1"/>
-          </a:lnRef>
-          <a:fillRef idx="3">
-            <a:schemeClr val="accent1"/>
-          </a:fillRef>
-          <a:effectRef idx="2">
-            <a:schemeClr val="accent1"/>
-          </a:effectRef>
-          <a:fontRef idx="minor">
-            <a:schemeClr val="lt1"/>
-          </a:fontRef>
-        </p:style>
-        <p:txBody>
-          <a:bodyPr rtlCol="0" anchor="ctr"/>
-          <a:lstStyle/>
-          <a:p>
-            <a:pPr algn="ctr"/>
-          </a:p>
-        </p:txBody>
-      </p:sp>
-      <p:sp>
-        <p:nvSpPr>
-          <p:cNvPr id="17" name="TextBox 16"/>
-          <p:cNvSpPr txBox="1"/>
-          <p:nvPr/>
-        </p:nvSpPr>
-        <p:spPr>
-          <a:xfrm>
-            <a:off x="4892040" y="3611880"/>
-            <a:ext cx="6675120" cy="457200"/>
-          </a:xfrm>
-          <a:prstGeom prst="rect">
-            <a:avLst/>
-          </a:prstGeom>
-          <a:noFill/>
-        </p:spPr>
-        <p:txBody>
-          <a:bodyPr wrap="square">
-            <a:spAutoFit/>
-          </a:bodyPr>
-          <a:lstStyle/>
-          <a:p>
-            <a:pPr algn="l"/>
-            <a:r>
-              <a:rPr sz="1700" b="1" i="0">
-                <a:solidFill>
-                  <a:srgbClr val="B0BCCC"/>
-                </a:solidFill>
-                <a:latin typeface="Calibri"/>
-              </a:rPr>
-              <a:t>MCP Server (AWS)</a:t>
-            </a:r>
-          </a:p>
-        </p:txBody>
-      </p:sp>
-      <p:sp>
-        <p:nvSpPr>
-          <p:cNvPr id="18" name="TextBox 17"/>
-          <p:cNvSpPr txBox="1"/>
-          <p:nvPr/>
-        </p:nvSpPr>
-        <p:spPr>
-          <a:xfrm>
-            <a:off x="4892040" y="4069080"/>
-            <a:ext cx="6675120" cy="1371600"/>
-          </a:xfrm>
-          <a:prstGeom prst="rect">
-            <a:avLst/>
-          </a:prstGeom>
-          <a:noFill/>
-        </p:spPr>
-        <p:txBody>
-          <a:bodyPr wrap="square">
-            <a:spAutoFit/>
-          </a:bodyPr>
-          <a:lstStyle/>
-          <a:p>
-            <a:pPr algn="l"/>
-            <a:r>
-              <a:rPr sz="1400" b="0" i="0">
-                <a:solidFill>
-                  <a:srgbClr val="B0BCCC"/>
-                </a:solidFill>
-                <a:latin typeface="Calibri"/>
-              </a:rPr>
-              <a:t>EC2 t3.micro running netbox-mcp-server via SSH stdio.
-Allows Claude Code to query NetBox in natural language.</a:t>
+              <a:t>Architecture</a:t>
             </a:r>
           </a:p>
         </p:txBody>
       </p:sp>
       <p:pic>
         <p:nvPicPr>
-          <p:cNvPr id="19" name="Picture 18" descr="netbox_logo_bright.png"/>
+          <p:cNvPr id="4" name="Picture 3" descr="architecture.png"/>
           <p:cNvPicPr>
             <a:picLocks noChangeAspect="1"/>
           </p:cNvPicPr>
@@ -8238,6 +8709,30 @@
         </p:nvPicPr>
         <p:blipFill>
           <a:blip r:embed="rId2"/>
+          <a:stretch>
+            <a:fillRect/>
+          </a:stretch>
+        </p:blipFill>
+        <p:spPr>
+          <a:xfrm>
+            <a:off x="274320" y="960120"/>
+            <a:ext cx="10972800" cy="2514600"/>
+          </a:xfrm>
+          <a:prstGeom prst="rect">
+            <a:avLst/>
+          </a:prstGeom>
+        </p:spPr>
+      </p:pic>
+      <p:pic>
+        <p:nvPicPr>
+          <p:cNvPr id="5" name="Picture 4" descr="netbox_logo_bright.png"/>
+          <p:cNvPicPr>
+            <a:picLocks noChangeAspect="1"/>
+          </p:cNvPicPr>
+          <p:nvPr/>
+        </p:nvPicPr>
+        <p:blipFill>
+          <a:blip r:embed="rId3"/>
           <a:stretch>
             <a:fillRect/>
           </a:stretch>
@@ -8330,7 +8825,7 @@
         <p:spPr>
           <a:xfrm>
             <a:off x="457200" y="228600"/>
-            <a:ext cx="10058400" cy="685800"/>
+            <a:ext cx="9144000" cy="640080"/>
           </a:xfrm>
           <a:prstGeom prst="rect">
             <a:avLst/>
@@ -8351,294 +8846,14 @@
                 </a:solidFill>
                 <a:latin typeface="Calibri"/>
               </a:rPr>
-              <a:t>The Playbook: Driven Entirely by NetBox Data</a:t>
-            </a:r>
-          </a:p>
-        </p:txBody>
-      </p:sp>
-      <p:sp>
-        <p:nvSpPr>
-          <p:cNvPr id="4" name="TextBox 3"/>
-          <p:cNvSpPr txBox="1"/>
-          <p:nvPr/>
-        </p:nvSpPr>
-        <p:spPr>
-          <a:xfrm>
-            <a:off x="548640" y="1097280"/>
-            <a:ext cx="10515600" cy="502920"/>
-          </a:xfrm>
-          <a:prstGeom prst="rect">
-            <a:avLst/>
-          </a:prstGeom>
-          <a:noFill/>
-        </p:spPr>
-        <p:txBody>
-          <a:bodyPr wrap="square">
-            <a:spAutoFit/>
-          </a:bodyPr>
-          <a:lstStyle/>
-          <a:p>
-            <a:pPr algn="l"/>
-            <a:r>
-              <a:rPr sz="2200" b="0" i="0">
-                <a:solidFill>
-                  <a:srgbClr val="FFFFFF"/>
-                </a:solidFill>
-                <a:latin typeface="Calibri"/>
-              </a:rPr>
-              <a:t>•  Input: just the failed circuit CID (e.g. IPLC-GB-PH-PRI)</a:t>
-            </a:r>
-          </a:p>
-        </p:txBody>
-      </p:sp>
-      <p:sp>
-        <p:nvSpPr>
-          <p:cNvPr id="5" name="TextBox 4"/>
-          <p:cNvSpPr txBox="1"/>
-          <p:nvPr/>
-        </p:nvSpPr>
-        <p:spPr>
-          <a:xfrm>
-            <a:off x="548640" y="1627632"/>
-            <a:ext cx="10515600" cy="502920"/>
-          </a:xfrm>
-          <a:prstGeom prst="rect">
-            <a:avLst/>
-          </a:prstGeom>
-          <a:noFill/>
-        </p:spPr>
-        <p:txBody>
-          <a:bodyPr wrap="square">
-            <a:spAutoFit/>
-          </a:bodyPr>
-          <a:lstStyle/>
-          <a:p>
-            <a:pPr algn="l"/>
-            <a:r>
-              <a:rPr sz="2200" b="0" i="0">
-                <a:solidFill>
-                  <a:srgbClr val="FFFFFF"/>
-                </a:solidFill>
-                <a:latin typeface="Calibri"/>
-              </a:rPr>
-              <a:t>•  Discovers A-side and Z-side sites from circuit terminations in NetBox</a:t>
-            </a:r>
-          </a:p>
-        </p:txBody>
-      </p:sp>
-      <p:sp>
-        <p:nvSpPr>
-          <p:cNvPr id="6" name="TextBox 5"/>
-          <p:cNvSpPr txBox="1"/>
-          <p:nvPr/>
-        </p:nvSpPr>
-        <p:spPr>
-          <a:xfrm>
-            <a:off x="548640" y="2157984"/>
-            <a:ext cx="10515600" cy="502920"/>
-          </a:xfrm>
-          <a:prstGeom prst="rect">
-            <a:avLst/>
-          </a:prstGeom>
-          <a:noFill/>
-        </p:spPr>
-        <p:txBody>
-          <a:bodyPr wrap="square">
-            <a:spAutoFit/>
-          </a:bodyPr>
-          <a:lstStyle/>
-          <a:p>
-            <a:pPr algn="l"/>
-            <a:r>
-              <a:rPr sz="2200" b="0" i="0">
-                <a:solidFill>
-                  <a:srgbClr val="FFFFFF"/>
-                </a:solidFill>
-                <a:latin typeface="Calibri"/>
-              </a:rPr>
-              <a:t>•  Finds all active circuits between those two sites</a:t>
-            </a:r>
-          </a:p>
-        </p:txBody>
-      </p:sp>
-      <p:sp>
-        <p:nvSpPr>
-          <p:cNvPr id="7" name="TextBox 6"/>
-          <p:cNvSpPr txBox="1"/>
-          <p:nvPr/>
-        </p:nvSpPr>
-        <p:spPr>
-          <a:xfrm>
-            <a:off x="548640" y="2688336"/>
-            <a:ext cx="10515600" cy="502920"/>
-          </a:xfrm>
-          <a:prstGeom prst="rect">
-            <a:avLst/>
-          </a:prstGeom>
-          <a:noFill/>
-        </p:spPr>
-        <p:txBody>
-          <a:bodyPr wrap="square">
-            <a:spAutoFit/>
-          </a:bodyPr>
-          <a:lstStyle/>
-          <a:p>
-            <a:pPr algn="l"/>
-            <a:r>
-              <a:rPr sz="2200" b="0" i="0">
-                <a:solidFill>
-                  <a:srgbClr val="FFFFFF"/>
-                </a:solidFill>
-                <a:latin typeface="Calibri"/>
-              </a:rPr>
-              <a:t>•  Selects the best backup by highest committed bandwidth</a:t>
-            </a:r>
-          </a:p>
-        </p:txBody>
-      </p:sp>
-      <p:sp>
-        <p:nvSpPr>
-          <p:cNvPr id="8" name="TextBox 7"/>
-          <p:cNvSpPr txBox="1"/>
-          <p:nvPr/>
-        </p:nvSpPr>
-        <p:spPr>
-          <a:xfrm>
-            <a:off x="548640" y="3218688"/>
-            <a:ext cx="10515600" cy="502920"/>
-          </a:xfrm>
-          <a:prstGeom prst="rect">
-            <a:avLst/>
-          </a:prstGeom>
-          <a:noFill/>
-        </p:spPr>
-        <p:txBody>
-          <a:bodyPr wrap="square">
-            <a:spAutoFit/>
-          </a:bodyPr>
-          <a:lstStyle/>
-          <a:p>
-            <a:pPr algn="l"/>
-            <a:r>
-              <a:rPr sz="2200" b="0" i="0">
-                <a:solidFill>
-                  <a:srgbClr val="FFFFFF"/>
-                </a:solidFill>
-                <a:latin typeface="Calibri"/>
-              </a:rPr>
-              <a:t>•  No hardcoded backup mappings — add a new circuit to NetBox and it is automatically considered</a:t>
-            </a:r>
-          </a:p>
-        </p:txBody>
-      </p:sp>
-      <p:sp>
-        <p:nvSpPr>
-          <p:cNvPr id="9" name="TextBox 8"/>
-          <p:cNvSpPr txBox="1"/>
-          <p:nvPr/>
-        </p:nvSpPr>
-        <p:spPr>
-          <a:xfrm>
-            <a:off x="548640" y="3749040"/>
-            <a:ext cx="10515600" cy="502920"/>
-          </a:xfrm>
-          <a:prstGeom prst="rect">
-            <a:avLst/>
-          </a:prstGeom>
-          <a:noFill/>
-        </p:spPr>
-        <p:txBody>
-          <a:bodyPr wrap="square">
-            <a:spAutoFit/>
-          </a:bodyPr>
-          <a:lstStyle/>
-          <a:p>
-            <a:pPr algn="l"/>
-            <a:r>
-              <a:rPr sz="2200" b="0" i="0">
-                <a:solidFill>
-                  <a:srgbClr val="FFFFFF"/>
-                </a:solidFill>
-                <a:latin typeface="Calibri"/>
-              </a:rPr>
-              <a:t>•  Simulates router config push (stub tasks — real devices optional)</a:t>
-            </a:r>
-          </a:p>
-        </p:txBody>
-      </p:sp>
-      <p:sp>
-        <p:nvSpPr>
-          <p:cNvPr id="10" name="TextBox 9"/>
-          <p:cNvSpPr txBox="1"/>
-          <p:nvPr/>
-        </p:nvSpPr>
-        <p:spPr>
-          <a:xfrm>
-            <a:off x="548640" y="4279392"/>
-            <a:ext cx="10515600" cy="502920"/>
-          </a:xfrm>
-          <a:prstGeom prst="rect">
-            <a:avLst/>
-          </a:prstGeom>
-          <a:noFill/>
-        </p:spPr>
-        <p:txBody>
-          <a:bodyPr wrap="square">
-            <a:spAutoFit/>
-          </a:bodyPr>
-          <a:lstStyle/>
-          <a:p>
-            <a:pPr algn="l"/>
-            <a:r>
-              <a:rPr sz="2200" b="0" i="0">
-                <a:solidFill>
-                  <a:srgbClr val="FFFFFF"/>
-                </a:solidFill>
-                <a:latin typeface="Calibri"/>
-              </a:rPr>
-              <a:t>•  Writes back to NetBox: primary → deprovisioning, backup confirmed active</a:t>
-            </a:r>
-          </a:p>
-        </p:txBody>
-      </p:sp>
-      <p:sp>
-        <p:nvSpPr>
-          <p:cNvPr id="11" name="TextBox 10"/>
-          <p:cNvSpPr txBox="1"/>
-          <p:nvPr/>
-        </p:nvSpPr>
-        <p:spPr>
-          <a:xfrm>
-            <a:off x="548640" y="4809744"/>
-            <a:ext cx="10515600" cy="502920"/>
-          </a:xfrm>
-          <a:prstGeom prst="rect">
-            <a:avLst/>
-          </a:prstGeom>
-          <a:noFill/>
-        </p:spPr>
-        <p:txBody>
-          <a:bodyPr wrap="square">
-            <a:spAutoFit/>
-          </a:bodyPr>
-          <a:lstStyle/>
-          <a:p>
-            <a:pPr algn="l"/>
-            <a:r>
-              <a:rPr sz="2200" b="0" i="0">
-                <a:solidFill>
-                  <a:srgbClr val="FFFFFF"/>
-                </a:solidFill>
-                <a:latin typeface="Calibri"/>
-              </a:rPr>
-              <a:t>•  Generates and publishes the HTML failover report</a:t>
+              <a:t>Demo Sequence</a:t>
             </a:r>
           </a:p>
         </p:txBody>
       </p:sp>
       <p:pic>
         <p:nvPicPr>
-          <p:cNvPr id="12" name="Picture 11" descr="netbox_logo_bright.png"/>
+          <p:cNvPr id="4" name="Picture 3" descr="sequence.png"/>
           <p:cNvPicPr>
             <a:picLocks noChangeAspect="1"/>
           </p:cNvPicPr>
@@ -8646,6 +8861,30 @@
         </p:nvPicPr>
         <p:blipFill>
           <a:blip r:embed="rId2"/>
+          <a:stretch>
+            <a:fillRect/>
+          </a:stretch>
+        </p:blipFill>
+        <p:spPr>
+          <a:xfrm>
+            <a:off x="457200" y="914400"/>
+            <a:ext cx="10789920" cy="3596640"/>
+          </a:xfrm>
+          <a:prstGeom prst="rect">
+            <a:avLst/>
+          </a:prstGeom>
+        </p:spPr>
+      </p:pic>
+      <p:pic>
+        <p:nvPicPr>
+          <p:cNvPr id="5" name="Picture 4" descr="netbox_logo_bright.png"/>
+          <p:cNvPicPr>
+            <a:picLocks noChangeAspect="1"/>
+          </p:cNvPicPr>
+          <p:nvPr/>
+        </p:nvPicPr>
+        <p:blipFill>
+          <a:blip r:embed="rId3"/>
           <a:stretch>
             <a:fillRect/>
           </a:stretch>
@@ -8738,7 +8977,7 @@
         <p:spPr>
           <a:xfrm>
             <a:off x="457200" y="228600"/>
-            <a:ext cx="10058400" cy="685800"/>
+            <a:ext cx="10058400" cy="640080"/>
           </a:xfrm>
           <a:prstGeom prst="rect">
             <a:avLst/>
@@ -8759,329 +8998,1050 @@
                 </a:solidFill>
                 <a:latin typeface="Calibri"/>
               </a:rPr>
-              <a:t>Infrastructure</a:t>
-            </a:r>
-          </a:p>
-        </p:txBody>
-      </p:sp>
-      <p:sp>
-        <p:nvSpPr>
-          <p:cNvPr id="4" name="TextBox 3"/>
-          <p:cNvSpPr txBox="1"/>
-          <p:nvPr/>
-        </p:nvSpPr>
-        <p:spPr>
-          <a:xfrm>
-            <a:off x="548640" y="1097280"/>
-            <a:ext cx="10515600" cy="502920"/>
-          </a:xfrm>
-          <a:prstGeom prst="rect">
-            <a:avLst/>
-          </a:prstGeom>
-          <a:noFill/>
-        </p:spPr>
-        <p:txBody>
-          <a:bodyPr wrap="square">
-            <a:spAutoFit/>
-          </a:bodyPr>
-          <a:lstStyle/>
-          <a:p>
-            <a:pPr algn="l"/>
-            <a:r>
-              <a:rPr sz="2200" b="0" i="0">
+              <a:t>Demo Flow — Step by Step</a:t>
+            </a:r>
+          </a:p>
+        </p:txBody>
+      </p:sp>
+      <p:sp>
+        <p:nvSpPr>
+          <p:cNvPr id="4" name="Rectangle 3"/>
+          <p:cNvSpPr/>
+          <p:nvPr/>
+        </p:nvSpPr>
+        <p:spPr>
+          <a:xfrm>
+            <a:off x="320040" y="1051560"/>
+            <a:ext cx="347472" cy="347472"/>
+          </a:xfrm>
+          <a:prstGeom prst="rect">
+            <a:avLst/>
+          </a:prstGeom>
+          <a:solidFill>
+            <a:srgbClr val="00C2A8"/>
+          </a:solidFill>
+          <a:ln>
+            <a:noFill/>
+          </a:ln>
+        </p:spPr>
+        <p:style>
+          <a:lnRef idx="1">
+            <a:schemeClr val="accent1"/>
+          </a:lnRef>
+          <a:fillRef idx="3">
+            <a:schemeClr val="accent1"/>
+          </a:fillRef>
+          <a:effectRef idx="2">
+            <a:schemeClr val="accent1"/>
+          </a:effectRef>
+          <a:fontRef idx="minor">
+            <a:schemeClr val="lt1"/>
+          </a:fontRef>
+        </p:style>
+        <p:txBody>
+          <a:bodyPr rtlCol="0" anchor="ctr"/>
+          <a:lstStyle/>
+          <a:p>
+            <a:pPr algn="ctr"/>
+          </a:p>
+        </p:txBody>
+      </p:sp>
+      <p:sp>
+        <p:nvSpPr>
+          <p:cNvPr id="5" name="TextBox 4"/>
+          <p:cNvSpPr txBox="1"/>
+          <p:nvPr/>
+        </p:nvSpPr>
+        <p:spPr>
+          <a:xfrm>
+            <a:off x="329184" y="1024128"/>
+            <a:ext cx="347472" cy="347472"/>
+          </a:xfrm>
+          <a:prstGeom prst="rect">
+            <a:avLst/>
+          </a:prstGeom>
+          <a:noFill/>
+        </p:spPr>
+        <p:txBody>
+          <a:bodyPr wrap="square">
+            <a:spAutoFit/>
+          </a:bodyPr>
+          <a:lstStyle/>
+          <a:p>
+            <a:pPr algn="ctr"/>
+            <a:r>
+              <a:rPr sz="1600" b="1" i="0">
+                <a:solidFill>
+                  <a:srgbClr val="0D1B2A"/>
+                </a:solidFill>
+                <a:latin typeface="Calibri"/>
+              </a:rPr>
+              <a:t>1</a:t>
+            </a:r>
+          </a:p>
+        </p:txBody>
+      </p:sp>
+      <p:sp>
+        <p:nvSpPr>
+          <p:cNvPr id="6" name="TextBox 5"/>
+          <p:cNvSpPr txBox="1"/>
+          <p:nvPr/>
+        </p:nvSpPr>
+        <p:spPr>
+          <a:xfrm>
+            <a:off x="777240" y="1005840"/>
+            <a:ext cx="2011680" cy="411480"/>
+          </a:xfrm>
+          <a:prstGeom prst="rect">
+            <a:avLst/>
+          </a:prstGeom>
+          <a:noFill/>
+        </p:spPr>
+        <p:txBody>
+          <a:bodyPr wrap="square">
+            <a:spAutoFit/>
+          </a:bodyPr>
+          <a:lstStyle/>
+          <a:p>
+            <a:pPr algn="l"/>
+            <a:r>
+              <a:rPr sz="1600" b="1" i="0">
+                <a:solidFill>
+                  <a:srgbClr val="00C2A8"/>
+                </a:solidFill>
+                <a:latin typeface="Calibri"/>
+              </a:rPr>
+              <a:t>Visual Explorer</a:t>
+            </a:r>
+          </a:p>
+        </p:txBody>
+      </p:sp>
+      <p:sp>
+        <p:nvSpPr>
+          <p:cNvPr id="7" name="TextBox 6"/>
+          <p:cNvSpPr txBox="1"/>
+          <p:nvPr/>
+        </p:nvSpPr>
+        <p:spPr>
+          <a:xfrm>
+            <a:off x="2834640" y="1005840"/>
+            <a:ext cx="8961120" cy="411480"/>
+          </a:xfrm>
+          <a:prstGeom prst="rect">
+            <a:avLst/>
+          </a:prstGeom>
+          <a:noFill/>
+        </p:spPr>
+        <p:txBody>
+          <a:bodyPr wrap="square">
+            <a:spAutoFit/>
+          </a:bodyPr>
+          <a:lstStyle/>
+          <a:p>
+            <a:pPr algn="l"/>
+            <a:r>
+              <a:rPr sz="1500" b="0" i="0">
                 <a:solidFill>
                   <a:srgbClr val="FFFFFF"/>
                 </a:solidFill>
                 <a:latin typeface="Calibri"/>
               </a:rPr>
-              <a:t>•  All infrastructure provisioned with Terraform (infra/)</a:t>
-            </a:r>
-          </a:p>
-        </p:txBody>
-      </p:sp>
-      <p:sp>
-        <p:nvSpPr>
-          <p:cNvPr id="5" name="TextBox 4"/>
-          <p:cNvSpPr txBox="1"/>
-          <p:nvPr/>
-        </p:nvSpPr>
-        <p:spPr>
-          <a:xfrm>
-            <a:off x="548640" y="1627632"/>
-            <a:ext cx="10515600" cy="502920"/>
-          </a:xfrm>
-          <a:prstGeom prst="rect">
-            <a:avLst/>
-          </a:prstGeom>
-          <a:noFill/>
-        </p:spPr>
-        <p:txBody>
-          <a:bodyPr wrap="square">
-            <a:spAutoFit/>
-          </a:bodyPr>
-          <a:lstStyle/>
-          <a:p>
-            <a:pPr algn="l"/>
-            <a:r>
-              <a:rPr sz="1800" b="0" i="0">
-                <a:solidFill>
-                  <a:srgbClr val="B0BCCC"/>
-                </a:solidFill>
-                <a:latin typeface="Calibri"/>
-              </a:rPr>
-              <a:t>    •  Two EC2 t3.micro instances in eu-west-2 (London)</a:t>
-            </a:r>
-          </a:p>
-        </p:txBody>
-      </p:sp>
-      <p:sp>
-        <p:nvSpPr>
-          <p:cNvPr id="6" name="TextBox 5"/>
-          <p:cNvSpPr txBox="1"/>
-          <p:nvPr/>
-        </p:nvSpPr>
-        <p:spPr>
-          <a:xfrm>
-            <a:off x="548640" y="2084832"/>
-            <a:ext cx="10515600" cy="502920"/>
-          </a:xfrm>
-          <a:prstGeom prst="rect">
-            <a:avLst/>
-          </a:prstGeom>
-          <a:noFill/>
-        </p:spPr>
-        <p:txBody>
-          <a:bodyPr wrap="square">
-            <a:spAutoFit/>
-          </a:bodyPr>
-          <a:lstStyle/>
-          <a:p>
-            <a:pPr algn="l"/>
-            <a:r>
-              <a:rPr sz="1800" b="0" i="0">
-                <a:solidFill>
-                  <a:srgbClr val="B0BCCC"/>
-                </a:solidFill>
-                <a:latin typeface="Calibri"/>
-              </a:rPr>
-              <a:t>    •  Single SSH key pair generated by Terraform — never stored in Git</a:t>
-            </a:r>
-          </a:p>
-        </p:txBody>
-      </p:sp>
-      <p:sp>
-        <p:nvSpPr>
-          <p:cNvPr id="7" name="TextBox 6"/>
-          <p:cNvSpPr txBox="1"/>
-          <p:nvPr/>
-        </p:nvSpPr>
-        <p:spPr>
-          <a:xfrm>
-            <a:off x="548640" y="2542032"/>
-            <a:ext cx="10515600" cy="502920"/>
-          </a:xfrm>
-          <a:prstGeom prst="rect">
-            <a:avLst/>
-          </a:prstGeom>
-          <a:noFill/>
-        </p:spPr>
-        <p:txBody>
-          <a:bodyPr wrap="square">
-            <a:spAutoFit/>
-          </a:bodyPr>
-          <a:lstStyle/>
-          <a:p>
-            <a:pPr algn="l"/>
-            <a:r>
-              <a:rPr sz="1800" b="0" i="0">
-                <a:solidFill>
-                  <a:srgbClr val="B0BCCC"/>
-                </a:solidFill>
-                <a:latin typeface="Calibri"/>
-              </a:rPr>
-              <a:t>    •  All resources tagged: Name=RedhatSummitEDADemo, owner=myork@netboxlabs.com</a:t>
-            </a:r>
-          </a:p>
-        </p:txBody>
-      </p:sp>
-      <p:sp>
-        <p:nvSpPr>
-          <p:cNvPr id="8" name="TextBox 7"/>
-          <p:cNvSpPr txBox="1"/>
-          <p:nvPr/>
-        </p:nvSpPr>
-        <p:spPr>
-          <a:xfrm>
-            <a:off x="548640" y="2999232"/>
-            <a:ext cx="10515600" cy="502920"/>
-          </a:xfrm>
-          <a:prstGeom prst="rect">
-            <a:avLst/>
-          </a:prstGeom>
-          <a:noFill/>
-        </p:spPr>
-        <p:txBody>
-          <a:bodyPr wrap="square">
-            <a:spAutoFit/>
-          </a:bodyPr>
-          <a:lstStyle/>
-          <a:p>
-            <a:pPr algn="l"/>
-            <a:r>
-              <a:rPr sz="2200" b="0" i="0">
+              <a:t>Open the global WAN map — GB-Bristol hub with active circuit to US-Atlanta via IPLC-GB-AT-PRI</a:t>
+            </a:r>
+          </a:p>
+        </p:txBody>
+      </p:sp>
+      <p:sp>
+        <p:nvSpPr>
+          <p:cNvPr id="8" name="Rectangle 7"/>
+          <p:cNvSpPr/>
+          <p:nvPr/>
+        </p:nvSpPr>
+        <p:spPr>
+          <a:xfrm>
+            <a:off x="320040" y="1527048"/>
+            <a:ext cx="347472" cy="347472"/>
+          </a:xfrm>
+          <a:prstGeom prst="rect">
+            <a:avLst/>
+          </a:prstGeom>
+          <a:solidFill>
+            <a:srgbClr val="00C2A8"/>
+          </a:solidFill>
+          <a:ln>
+            <a:noFill/>
+          </a:ln>
+        </p:spPr>
+        <p:style>
+          <a:lnRef idx="1">
+            <a:schemeClr val="accent1"/>
+          </a:lnRef>
+          <a:fillRef idx="3">
+            <a:schemeClr val="accent1"/>
+          </a:fillRef>
+          <a:effectRef idx="2">
+            <a:schemeClr val="accent1"/>
+          </a:effectRef>
+          <a:fontRef idx="minor">
+            <a:schemeClr val="lt1"/>
+          </a:fontRef>
+        </p:style>
+        <p:txBody>
+          <a:bodyPr rtlCol="0" anchor="ctr"/>
+          <a:lstStyle/>
+          <a:p>
+            <a:pPr algn="ctr"/>
+          </a:p>
+        </p:txBody>
+      </p:sp>
+      <p:sp>
+        <p:nvSpPr>
+          <p:cNvPr id="9" name="TextBox 8"/>
+          <p:cNvSpPr txBox="1"/>
+          <p:nvPr/>
+        </p:nvSpPr>
+        <p:spPr>
+          <a:xfrm>
+            <a:off x="329184" y="1499616"/>
+            <a:ext cx="347472" cy="347472"/>
+          </a:xfrm>
+          <a:prstGeom prst="rect">
+            <a:avLst/>
+          </a:prstGeom>
+          <a:noFill/>
+        </p:spPr>
+        <p:txBody>
+          <a:bodyPr wrap="square">
+            <a:spAutoFit/>
+          </a:bodyPr>
+          <a:lstStyle/>
+          <a:p>
+            <a:pPr algn="ctr"/>
+            <a:r>
+              <a:rPr sz="1600" b="1" i="0">
+                <a:solidFill>
+                  <a:srgbClr val="0D1B2A"/>
+                </a:solidFill>
+                <a:latin typeface="Calibri"/>
+              </a:rPr>
+              <a:t>2</a:t>
+            </a:r>
+          </a:p>
+        </p:txBody>
+      </p:sp>
+      <p:sp>
+        <p:nvSpPr>
+          <p:cNvPr id="10" name="TextBox 9"/>
+          <p:cNvSpPr txBox="1"/>
+          <p:nvPr/>
+        </p:nvSpPr>
+        <p:spPr>
+          <a:xfrm>
+            <a:off x="777240" y="1481328"/>
+            <a:ext cx="2011680" cy="411480"/>
+          </a:xfrm>
+          <a:prstGeom prst="rect">
+            <a:avLst/>
+          </a:prstGeom>
+          <a:noFill/>
+        </p:spPr>
+        <p:txBody>
+          <a:bodyPr wrap="square">
+            <a:spAutoFit/>
+          </a:bodyPr>
+          <a:lstStyle/>
+          <a:p>
+            <a:pPr algn="l"/>
+            <a:r>
+              <a:rPr sz="1600" b="1" i="0">
+                <a:solidFill>
+                  <a:srgbClr val="00C2A8"/>
+                </a:solidFill>
+                <a:latin typeface="Calibri"/>
+              </a:rPr>
+              <a:t>Copilot AI</a:t>
+            </a:r>
+          </a:p>
+        </p:txBody>
+      </p:sp>
+      <p:sp>
+        <p:nvSpPr>
+          <p:cNvPr id="11" name="TextBox 10"/>
+          <p:cNvSpPr txBox="1"/>
+          <p:nvPr/>
+        </p:nvSpPr>
+        <p:spPr>
+          <a:xfrm>
+            <a:off x="2834640" y="1481328"/>
+            <a:ext cx="8961120" cy="411480"/>
+          </a:xfrm>
+          <a:prstGeom prst="rect">
+            <a:avLst/>
+          </a:prstGeom>
+          <a:noFill/>
+        </p:spPr>
+        <p:txBody>
+          <a:bodyPr wrap="square">
+            <a:spAutoFit/>
+          </a:bodyPr>
+          <a:lstStyle/>
+          <a:p>
+            <a:pPr algn="l"/>
+            <a:r>
+              <a:rPr sz="1500" b="0" i="0">
                 <a:solidFill>
                   <a:srgbClr val="FFFFFF"/>
                 </a:solidFill>
                 <a:latin typeface="Calibri"/>
               </a:rPr>
-              <a:t>•  Report server: nginx + self-signed TLS, SSH on port 2222</a:t>
-            </a:r>
-          </a:p>
-        </p:txBody>
-      </p:sp>
-      <p:sp>
-        <p:nvSpPr>
-          <p:cNvPr id="9" name="TextBox 8"/>
-          <p:cNvSpPr txBox="1"/>
-          <p:nvPr/>
-        </p:nvSpPr>
-        <p:spPr>
-          <a:xfrm>
-            <a:off x="548640" y="3529584"/>
-            <a:ext cx="10515600" cy="502920"/>
-          </a:xfrm>
-          <a:prstGeom prst="rect">
-            <a:avLst/>
-          </a:prstGeom>
-          <a:noFill/>
-        </p:spPr>
-        <p:txBody>
-          <a:bodyPr wrap="square">
-            <a:spAutoFit/>
-          </a:bodyPr>
-          <a:lstStyle/>
-          <a:p>
-            <a:pPr algn="l"/>
-            <a:r>
-              <a:rPr sz="2200" b="0" i="0">
+              <a:t>Tell Copilot: “IPLC-GB-AT-PRI has failed — set it to offline”</a:t>
+            </a:r>
+          </a:p>
+        </p:txBody>
+      </p:sp>
+      <p:sp>
+        <p:nvSpPr>
+          <p:cNvPr id="12" name="Rectangle 11"/>
+          <p:cNvSpPr/>
+          <p:nvPr/>
+        </p:nvSpPr>
+        <p:spPr>
+          <a:xfrm>
+            <a:off x="320040" y="2002536"/>
+            <a:ext cx="347472" cy="347472"/>
+          </a:xfrm>
+          <a:prstGeom prst="rect">
+            <a:avLst/>
+          </a:prstGeom>
+          <a:solidFill>
+            <a:srgbClr val="00C2A8"/>
+          </a:solidFill>
+          <a:ln>
+            <a:noFill/>
+          </a:ln>
+        </p:spPr>
+        <p:style>
+          <a:lnRef idx="1">
+            <a:schemeClr val="accent1"/>
+          </a:lnRef>
+          <a:fillRef idx="3">
+            <a:schemeClr val="accent1"/>
+          </a:fillRef>
+          <a:effectRef idx="2">
+            <a:schemeClr val="accent1"/>
+          </a:effectRef>
+          <a:fontRef idx="minor">
+            <a:schemeClr val="lt1"/>
+          </a:fontRef>
+        </p:style>
+        <p:txBody>
+          <a:bodyPr rtlCol="0" anchor="ctr"/>
+          <a:lstStyle/>
+          <a:p>
+            <a:pPr algn="ctr"/>
+          </a:p>
+        </p:txBody>
+      </p:sp>
+      <p:sp>
+        <p:nvSpPr>
+          <p:cNvPr id="13" name="TextBox 12"/>
+          <p:cNvSpPr txBox="1"/>
+          <p:nvPr/>
+        </p:nvSpPr>
+        <p:spPr>
+          <a:xfrm>
+            <a:off x="329184" y="1975104"/>
+            <a:ext cx="347472" cy="347472"/>
+          </a:xfrm>
+          <a:prstGeom prst="rect">
+            <a:avLst/>
+          </a:prstGeom>
+          <a:noFill/>
+        </p:spPr>
+        <p:txBody>
+          <a:bodyPr wrap="square">
+            <a:spAutoFit/>
+          </a:bodyPr>
+          <a:lstStyle/>
+          <a:p>
+            <a:pPr algn="ctr"/>
+            <a:r>
+              <a:rPr sz="1600" b="1" i="0">
+                <a:solidFill>
+                  <a:srgbClr val="0D1B2A"/>
+                </a:solidFill>
+                <a:latin typeface="Calibri"/>
+              </a:rPr>
+              <a:t>3</a:t>
+            </a:r>
+          </a:p>
+        </p:txBody>
+      </p:sp>
+      <p:sp>
+        <p:nvSpPr>
+          <p:cNvPr id="14" name="TextBox 13"/>
+          <p:cNvSpPr txBox="1"/>
+          <p:nvPr/>
+        </p:nvSpPr>
+        <p:spPr>
+          <a:xfrm>
+            <a:off x="777240" y="1956816"/>
+            <a:ext cx="2011680" cy="411480"/>
+          </a:xfrm>
+          <a:prstGeom prst="rect">
+            <a:avLst/>
+          </a:prstGeom>
+          <a:noFill/>
+        </p:spPr>
+        <p:txBody>
+          <a:bodyPr wrap="square">
+            <a:spAutoFit/>
+          </a:bodyPr>
+          <a:lstStyle/>
+          <a:p>
+            <a:pPr algn="l"/>
+            <a:r>
+              <a:rPr sz="1600" b="1" i="0">
+                <a:solidFill>
+                  <a:srgbClr val="00C2A8"/>
+                </a:solidFill>
+                <a:latin typeface="Calibri"/>
+              </a:rPr>
+              <a:t>AAP Workflow</a:t>
+            </a:r>
+          </a:p>
+        </p:txBody>
+      </p:sp>
+      <p:sp>
+        <p:nvSpPr>
+          <p:cNvPr id="15" name="TextBox 14"/>
+          <p:cNvSpPr txBox="1"/>
+          <p:nvPr/>
+        </p:nvSpPr>
+        <p:spPr>
+          <a:xfrm>
+            <a:off x="2834640" y="1956816"/>
+            <a:ext cx="8961120" cy="411480"/>
+          </a:xfrm>
+          <a:prstGeom prst="rect">
+            <a:avLst/>
+          </a:prstGeom>
+          <a:noFill/>
+        </p:spPr>
+        <p:txBody>
+          <a:bodyPr wrap="square">
+            <a:spAutoFit/>
+          </a:bodyPr>
+          <a:lstStyle/>
+          <a:p>
+            <a:pPr algn="l"/>
+            <a:r>
+              <a:rPr sz="1500" b="0" i="0">
                 <a:solidFill>
                   <a:srgbClr val="FFFFFF"/>
                 </a:solidFill>
                 <a:latin typeface="Calibri"/>
               </a:rPr>
-              <a:t>•  MCP server: netbox-mcp-server installed via uv, SSH stdio transport</a:t>
-            </a:r>
-          </a:p>
-        </p:txBody>
-      </p:sp>
-      <p:sp>
-        <p:nvSpPr>
-          <p:cNvPr id="10" name="TextBox 9"/>
-          <p:cNvSpPr txBox="1"/>
-          <p:nvPr/>
-        </p:nvSpPr>
-        <p:spPr>
-          <a:xfrm>
-            <a:off x="548640" y="4059936"/>
-            <a:ext cx="10515600" cy="502920"/>
-          </a:xfrm>
-          <a:prstGeom prst="rect">
-            <a:avLst/>
-          </a:prstGeom>
-          <a:noFill/>
-        </p:spPr>
-        <p:txBody>
-          <a:bodyPr wrap="square">
-            <a:spAutoFit/>
-          </a:bodyPr>
-          <a:lstStyle/>
-          <a:p>
-            <a:pPr algn="l"/>
-            <a:r>
-              <a:rPr sz="2200" b="0" i="0">
+              <a:t>NetBox event rule fires webhook → AAP launches Circuit Failover Workflow automatically</a:t>
+            </a:r>
+          </a:p>
+        </p:txBody>
+      </p:sp>
+      <p:sp>
+        <p:nvSpPr>
+          <p:cNvPr id="16" name="Rectangle 15"/>
+          <p:cNvSpPr/>
+          <p:nvPr/>
+        </p:nvSpPr>
+        <p:spPr>
+          <a:xfrm>
+            <a:off x="320040" y="2478024"/>
+            <a:ext cx="347472" cy="347472"/>
+          </a:xfrm>
+          <a:prstGeom prst="rect">
+            <a:avLst/>
+          </a:prstGeom>
+          <a:solidFill>
+            <a:srgbClr val="00C2A8"/>
+          </a:solidFill>
+          <a:ln>
+            <a:noFill/>
+          </a:ln>
+        </p:spPr>
+        <p:style>
+          <a:lnRef idx="1">
+            <a:schemeClr val="accent1"/>
+          </a:lnRef>
+          <a:fillRef idx="3">
+            <a:schemeClr val="accent1"/>
+          </a:fillRef>
+          <a:effectRef idx="2">
+            <a:schemeClr val="accent1"/>
+          </a:effectRef>
+          <a:fontRef idx="minor">
+            <a:schemeClr val="lt1"/>
+          </a:fontRef>
+        </p:style>
+        <p:txBody>
+          <a:bodyPr rtlCol="0" anchor="ctr"/>
+          <a:lstStyle/>
+          <a:p>
+            <a:pPr algn="ctr"/>
+          </a:p>
+        </p:txBody>
+      </p:sp>
+      <p:sp>
+        <p:nvSpPr>
+          <p:cNvPr id="17" name="TextBox 16"/>
+          <p:cNvSpPr txBox="1"/>
+          <p:nvPr/>
+        </p:nvSpPr>
+        <p:spPr>
+          <a:xfrm>
+            <a:off x="329184" y="2450592"/>
+            <a:ext cx="347472" cy="347472"/>
+          </a:xfrm>
+          <a:prstGeom prst="rect">
+            <a:avLst/>
+          </a:prstGeom>
+          <a:noFill/>
+        </p:spPr>
+        <p:txBody>
+          <a:bodyPr wrap="square">
+            <a:spAutoFit/>
+          </a:bodyPr>
+          <a:lstStyle/>
+          <a:p>
+            <a:pPr algn="ctr"/>
+            <a:r>
+              <a:rPr sz="1600" b="1" i="0">
+                <a:solidFill>
+                  <a:srgbClr val="0D1B2A"/>
+                </a:solidFill>
+                <a:latin typeface="Calibri"/>
+              </a:rPr>
+              <a:t>4</a:t>
+            </a:r>
+          </a:p>
+        </p:txBody>
+      </p:sp>
+      <p:sp>
+        <p:nvSpPr>
+          <p:cNvPr id="18" name="TextBox 17"/>
+          <p:cNvSpPr txBox="1"/>
+          <p:nvPr/>
+        </p:nvSpPr>
+        <p:spPr>
+          <a:xfrm>
+            <a:off x="777240" y="2432304"/>
+            <a:ext cx="2011680" cy="411480"/>
+          </a:xfrm>
+          <a:prstGeom prst="rect">
+            <a:avLst/>
+          </a:prstGeom>
+          <a:noFill/>
+        </p:spPr>
+        <p:txBody>
+          <a:bodyPr wrap="square">
+            <a:spAutoFit/>
+          </a:bodyPr>
+          <a:lstStyle/>
+          <a:p>
+            <a:pPr algn="l"/>
+            <a:r>
+              <a:rPr sz="1600" b="1" i="0">
+                <a:solidFill>
+                  <a:srgbClr val="00C2A8"/>
+                </a:solidFill>
+                <a:latin typeface="Calibri"/>
+              </a:rPr>
+              <a:t>Step 1: Failover</a:t>
+            </a:r>
+          </a:p>
+        </p:txBody>
+      </p:sp>
+      <p:sp>
+        <p:nvSpPr>
+          <p:cNvPr id="19" name="TextBox 18"/>
+          <p:cNvSpPr txBox="1"/>
+          <p:nvPr/>
+        </p:nvSpPr>
+        <p:spPr>
+          <a:xfrm>
+            <a:off x="2834640" y="2432304"/>
+            <a:ext cx="8961120" cy="411480"/>
+          </a:xfrm>
+          <a:prstGeom prst="rect">
+            <a:avLst/>
+          </a:prstGeom>
+          <a:noFill/>
+        </p:spPr>
+        <p:txBody>
+          <a:bodyPr wrap="square">
+            <a:spAutoFit/>
+          </a:bodyPr>
+          <a:lstStyle/>
+          <a:p>
+            <a:pPr algn="l"/>
+            <a:r>
+              <a:rPr sz="1500" b="0" i="0">
                 <a:solidFill>
                   <a:srgbClr val="FFFFFF"/>
                 </a:solidFill>
                 <a:latin typeface="Calibri"/>
               </a:rPr>
-              <a:t>•  AAP wired up by setup_aap.py — idempotent, re-runnable</a:t>
-            </a:r>
-          </a:p>
-        </p:txBody>
-      </p:sp>
-      <p:sp>
-        <p:nvSpPr>
-          <p:cNvPr id="11" name="TextBox 10"/>
-          <p:cNvSpPr txBox="1"/>
-          <p:nvPr/>
-        </p:nvSpPr>
-        <p:spPr>
-          <a:xfrm>
-            <a:off x="548640" y="4590288"/>
-            <a:ext cx="10515600" cy="502920"/>
-          </a:xfrm>
-          <a:prstGeom prst="rect">
-            <a:avLst/>
-          </a:prstGeom>
-          <a:noFill/>
-        </p:spPr>
-        <p:txBody>
-          <a:bodyPr wrap="square">
-            <a:spAutoFit/>
-          </a:bodyPr>
-          <a:lstStyle/>
-          <a:p>
-            <a:pPr algn="l"/>
-            <a:r>
-              <a:rPr sz="2200" b="0" i="0">
+              <a:t>Playbook queries NetBox, finds backup (IPLC-GB-AT-SEC), pushes router config, updates NetBox</a:t>
+            </a:r>
+          </a:p>
+        </p:txBody>
+      </p:sp>
+      <p:sp>
+        <p:nvSpPr>
+          <p:cNvPr id="20" name="Rectangle 19"/>
+          <p:cNvSpPr/>
+          <p:nvPr/>
+        </p:nvSpPr>
+        <p:spPr>
+          <a:xfrm>
+            <a:off x="320040" y="2953512"/>
+            <a:ext cx="347472" cy="347472"/>
+          </a:xfrm>
+          <a:prstGeom prst="rect">
+            <a:avLst/>
+          </a:prstGeom>
+          <a:solidFill>
+            <a:srgbClr val="00C2A8"/>
+          </a:solidFill>
+          <a:ln>
+            <a:noFill/>
+          </a:ln>
+        </p:spPr>
+        <p:style>
+          <a:lnRef idx="1">
+            <a:schemeClr val="accent1"/>
+          </a:lnRef>
+          <a:fillRef idx="3">
+            <a:schemeClr val="accent1"/>
+          </a:fillRef>
+          <a:effectRef idx="2">
+            <a:schemeClr val="accent1"/>
+          </a:effectRef>
+          <a:fontRef idx="minor">
+            <a:schemeClr val="lt1"/>
+          </a:fontRef>
+        </p:style>
+        <p:txBody>
+          <a:bodyPr rtlCol="0" anchor="ctr"/>
+          <a:lstStyle/>
+          <a:p>
+            <a:pPr algn="ctr"/>
+          </a:p>
+        </p:txBody>
+      </p:sp>
+      <p:sp>
+        <p:nvSpPr>
+          <p:cNvPr id="21" name="TextBox 20"/>
+          <p:cNvSpPr txBox="1"/>
+          <p:nvPr/>
+        </p:nvSpPr>
+        <p:spPr>
+          <a:xfrm>
+            <a:off x="329184" y="2926080"/>
+            <a:ext cx="347472" cy="347472"/>
+          </a:xfrm>
+          <a:prstGeom prst="rect">
+            <a:avLst/>
+          </a:prstGeom>
+          <a:noFill/>
+        </p:spPr>
+        <p:txBody>
+          <a:bodyPr wrap="square">
+            <a:spAutoFit/>
+          </a:bodyPr>
+          <a:lstStyle/>
+          <a:p>
+            <a:pPr algn="ctr"/>
+            <a:r>
+              <a:rPr sz="1600" b="1" i="0">
+                <a:solidFill>
+                  <a:srgbClr val="0D1B2A"/>
+                </a:solidFill>
+                <a:latin typeface="Calibri"/>
+              </a:rPr>
+              <a:t>5</a:t>
+            </a:r>
+          </a:p>
+        </p:txBody>
+      </p:sp>
+      <p:sp>
+        <p:nvSpPr>
+          <p:cNvPr id="22" name="TextBox 21"/>
+          <p:cNvSpPr txBox="1"/>
+          <p:nvPr/>
+        </p:nvSpPr>
+        <p:spPr>
+          <a:xfrm>
+            <a:off x="777240" y="2907792"/>
+            <a:ext cx="2011680" cy="411480"/>
+          </a:xfrm>
+          <a:prstGeom prst="rect">
+            <a:avLst/>
+          </a:prstGeom>
+          <a:noFill/>
+        </p:spPr>
+        <p:txBody>
+          <a:bodyPr wrap="square">
+            <a:spAutoFit/>
+          </a:bodyPr>
+          <a:lstStyle/>
+          <a:p>
+            <a:pPr algn="l"/>
+            <a:r>
+              <a:rPr sz="1600" b="1" i="0">
+                <a:solidFill>
+                  <a:srgbClr val="00C2A8"/>
+                </a:solidFill>
+                <a:latin typeface="Calibri"/>
+              </a:rPr>
+              <a:t>Step 2: Report</a:t>
+            </a:r>
+          </a:p>
+        </p:txBody>
+      </p:sp>
+      <p:sp>
+        <p:nvSpPr>
+          <p:cNvPr id="23" name="TextBox 22"/>
+          <p:cNvSpPr txBox="1"/>
+          <p:nvPr/>
+        </p:nvSpPr>
+        <p:spPr>
+          <a:xfrm>
+            <a:off x="2834640" y="2907792"/>
+            <a:ext cx="8961120" cy="411480"/>
+          </a:xfrm>
+          <a:prstGeom prst="rect">
+            <a:avLst/>
+          </a:prstGeom>
+          <a:noFill/>
+        </p:spPr>
+        <p:txBody>
+          <a:bodyPr wrap="square">
+            <a:spAutoFit/>
+          </a:bodyPr>
+          <a:lstStyle/>
+          <a:p>
+            <a:pPr algn="l"/>
+            <a:r>
+              <a:rPr sz="1500" b="0" i="0">
                 <a:solidFill>
                   <a:srgbClr val="FFFFFF"/>
                 </a:solidFill>
                 <a:latin typeface="Calibri"/>
               </a:rPr>
-              <a:t>•  NetBox webhook configured automatically — points to EDA event stream</a:t>
-            </a:r>
-          </a:p>
-        </p:txBody>
-      </p:sp>
-      <p:sp>
-        <p:nvSpPr>
-          <p:cNvPr id="12" name="TextBox 11"/>
-          <p:cNvSpPr txBox="1"/>
-          <p:nvPr/>
-        </p:nvSpPr>
-        <p:spPr>
-          <a:xfrm>
-            <a:off x="548640" y="5120640"/>
-            <a:ext cx="10515600" cy="502920"/>
-          </a:xfrm>
-          <a:prstGeom prst="rect">
-            <a:avLst/>
-          </a:prstGeom>
-          <a:noFill/>
-        </p:spPr>
-        <p:txBody>
-          <a:bodyPr wrap="square">
-            <a:spAutoFit/>
-          </a:bodyPr>
-          <a:lstStyle/>
-          <a:p>
-            <a:pPr algn="l"/>
-            <a:r>
-              <a:rPr sz="2200" b="0" i="0">
+              <a:t>Second workflow step generates HTML incident report and deploys it to the report server</a:t>
+            </a:r>
+          </a:p>
+        </p:txBody>
+      </p:sp>
+      <p:sp>
+        <p:nvSpPr>
+          <p:cNvPr id="24" name="Rectangle 23"/>
+          <p:cNvSpPr/>
+          <p:nvPr/>
+        </p:nvSpPr>
+        <p:spPr>
+          <a:xfrm>
+            <a:off x="320040" y="3429000"/>
+            <a:ext cx="347472" cy="347472"/>
+          </a:xfrm>
+          <a:prstGeom prst="rect">
+            <a:avLst/>
+          </a:prstGeom>
+          <a:solidFill>
+            <a:srgbClr val="00C2A8"/>
+          </a:solidFill>
+          <a:ln>
+            <a:noFill/>
+          </a:ln>
+        </p:spPr>
+        <p:style>
+          <a:lnRef idx="1">
+            <a:schemeClr val="accent1"/>
+          </a:lnRef>
+          <a:fillRef idx="3">
+            <a:schemeClr val="accent1"/>
+          </a:fillRef>
+          <a:effectRef idx="2">
+            <a:schemeClr val="accent1"/>
+          </a:effectRef>
+          <a:fontRef idx="minor">
+            <a:schemeClr val="lt1"/>
+          </a:fontRef>
+        </p:style>
+        <p:txBody>
+          <a:bodyPr rtlCol="0" anchor="ctr"/>
+          <a:lstStyle/>
+          <a:p>
+            <a:pPr algn="ctr"/>
+          </a:p>
+        </p:txBody>
+      </p:sp>
+      <p:sp>
+        <p:nvSpPr>
+          <p:cNvPr id="25" name="TextBox 24"/>
+          <p:cNvSpPr txBox="1"/>
+          <p:nvPr/>
+        </p:nvSpPr>
+        <p:spPr>
+          <a:xfrm>
+            <a:off x="329184" y="3401568"/>
+            <a:ext cx="347472" cy="347472"/>
+          </a:xfrm>
+          <a:prstGeom prst="rect">
+            <a:avLst/>
+          </a:prstGeom>
+          <a:noFill/>
+        </p:spPr>
+        <p:txBody>
+          <a:bodyPr wrap="square">
+            <a:spAutoFit/>
+          </a:bodyPr>
+          <a:lstStyle/>
+          <a:p>
+            <a:pPr algn="ctr"/>
+            <a:r>
+              <a:rPr sz="1600" b="1" i="0">
+                <a:solidFill>
+                  <a:srgbClr val="0D1B2A"/>
+                </a:solidFill>
+                <a:latin typeface="Calibri"/>
+              </a:rPr>
+              <a:t>6</a:t>
+            </a:r>
+          </a:p>
+        </p:txBody>
+      </p:sp>
+      <p:sp>
+        <p:nvSpPr>
+          <p:cNvPr id="26" name="TextBox 25"/>
+          <p:cNvSpPr txBox="1"/>
+          <p:nvPr/>
+        </p:nvSpPr>
+        <p:spPr>
+          <a:xfrm>
+            <a:off x="777240" y="3383280"/>
+            <a:ext cx="2011680" cy="411480"/>
+          </a:xfrm>
+          <a:prstGeom prst="rect">
+            <a:avLst/>
+          </a:prstGeom>
+          <a:noFill/>
+        </p:spPr>
+        <p:txBody>
+          <a:bodyPr wrap="square">
+            <a:spAutoFit/>
+          </a:bodyPr>
+          <a:lstStyle/>
+          <a:p>
+            <a:pPr algn="l"/>
+            <a:r>
+              <a:rPr sz="1600" b="1" i="0">
+                <a:solidFill>
+                  <a:srgbClr val="00C2A8"/>
+                </a:solidFill>
+                <a:latin typeface="Calibri"/>
+              </a:rPr>
+              <a:t>Visual Explorer</a:t>
+            </a:r>
+          </a:p>
+        </p:txBody>
+      </p:sp>
+      <p:sp>
+        <p:nvSpPr>
+          <p:cNvPr id="27" name="TextBox 26"/>
+          <p:cNvSpPr txBox="1"/>
+          <p:nvPr/>
+        </p:nvSpPr>
+        <p:spPr>
+          <a:xfrm>
+            <a:off x="2834640" y="3383280"/>
+            <a:ext cx="8961120" cy="411480"/>
+          </a:xfrm>
+          <a:prstGeom prst="rect">
+            <a:avLst/>
+          </a:prstGeom>
+          <a:noFill/>
+        </p:spPr>
+        <p:txBody>
+          <a:bodyPr wrap="square">
+            <a:spAutoFit/>
+          </a:bodyPr>
+          <a:lstStyle/>
+          <a:p>
+            <a:pPr algn="l"/>
+            <a:r>
+              <a:rPr sz="1500" b="0" i="0">
                 <a:solidFill>
                   <a:srgbClr val="FFFFFF"/>
                 </a:solidFill>
                 <a:latin typeface="Calibri"/>
               </a:rPr>
-              <a:t>•  Teardown: cd infra &amp;&amp; terraform destroy</a:t>
+              <a:t>Refresh map — primary circuit gone, backup confirmed active on new router path</a:t>
+            </a:r>
+          </a:p>
+        </p:txBody>
+      </p:sp>
+      <p:sp>
+        <p:nvSpPr>
+          <p:cNvPr id="28" name="Rectangle 27"/>
+          <p:cNvSpPr/>
+          <p:nvPr/>
+        </p:nvSpPr>
+        <p:spPr>
+          <a:xfrm>
+            <a:off x="320040" y="3904488"/>
+            <a:ext cx="347472" cy="347472"/>
+          </a:xfrm>
+          <a:prstGeom prst="rect">
+            <a:avLst/>
+          </a:prstGeom>
+          <a:solidFill>
+            <a:srgbClr val="00C2A8"/>
+          </a:solidFill>
+          <a:ln>
+            <a:noFill/>
+          </a:ln>
+        </p:spPr>
+        <p:style>
+          <a:lnRef idx="1">
+            <a:schemeClr val="accent1"/>
+          </a:lnRef>
+          <a:fillRef idx="3">
+            <a:schemeClr val="accent1"/>
+          </a:fillRef>
+          <a:effectRef idx="2">
+            <a:schemeClr val="accent1"/>
+          </a:effectRef>
+          <a:fontRef idx="minor">
+            <a:schemeClr val="lt1"/>
+          </a:fontRef>
+        </p:style>
+        <p:txBody>
+          <a:bodyPr rtlCol="0" anchor="ctr"/>
+          <a:lstStyle/>
+          <a:p>
+            <a:pPr algn="ctr"/>
+          </a:p>
+        </p:txBody>
+      </p:sp>
+      <p:sp>
+        <p:nvSpPr>
+          <p:cNvPr id="29" name="TextBox 28"/>
+          <p:cNvSpPr txBox="1"/>
+          <p:nvPr/>
+        </p:nvSpPr>
+        <p:spPr>
+          <a:xfrm>
+            <a:off x="329184" y="3877056"/>
+            <a:ext cx="347472" cy="347472"/>
+          </a:xfrm>
+          <a:prstGeom prst="rect">
+            <a:avLst/>
+          </a:prstGeom>
+          <a:noFill/>
+        </p:spPr>
+        <p:txBody>
+          <a:bodyPr wrap="square">
+            <a:spAutoFit/>
+          </a:bodyPr>
+          <a:lstStyle/>
+          <a:p>
+            <a:pPr algn="ctr"/>
+            <a:r>
+              <a:rPr sz="1600" b="1" i="0">
+                <a:solidFill>
+                  <a:srgbClr val="0D1B2A"/>
+                </a:solidFill>
+                <a:latin typeface="Calibri"/>
+              </a:rPr>
+              <a:t>7</a:t>
+            </a:r>
+          </a:p>
+        </p:txBody>
+      </p:sp>
+      <p:sp>
+        <p:nvSpPr>
+          <p:cNvPr id="30" name="TextBox 29"/>
+          <p:cNvSpPr txBox="1"/>
+          <p:nvPr/>
+        </p:nvSpPr>
+        <p:spPr>
+          <a:xfrm>
+            <a:off x="777240" y="3858768"/>
+            <a:ext cx="2011680" cy="411480"/>
+          </a:xfrm>
+          <a:prstGeom prst="rect">
+            <a:avLst/>
+          </a:prstGeom>
+          <a:noFill/>
+        </p:spPr>
+        <p:txBody>
+          <a:bodyPr wrap="square">
+            <a:spAutoFit/>
+          </a:bodyPr>
+          <a:lstStyle/>
+          <a:p>
+            <a:pPr algn="l"/>
+            <a:r>
+              <a:rPr sz="1600" b="1" i="0">
+                <a:solidFill>
+                  <a:srgbClr val="00C2A8"/>
+                </a:solidFill>
+                <a:latin typeface="Calibri"/>
+              </a:rPr>
+              <a:t>Claude + MCP</a:t>
+            </a:r>
+          </a:p>
+        </p:txBody>
+      </p:sp>
+      <p:sp>
+        <p:nvSpPr>
+          <p:cNvPr id="31" name="TextBox 30"/>
+          <p:cNvSpPr txBox="1"/>
+          <p:nvPr/>
+        </p:nvSpPr>
+        <p:spPr>
+          <a:xfrm>
+            <a:off x="2834640" y="3858768"/>
+            <a:ext cx="8961120" cy="411480"/>
+          </a:xfrm>
+          <a:prstGeom prst="rect">
+            <a:avLst/>
+          </a:prstGeom>
+          <a:noFill/>
+        </p:spPr>
+        <p:txBody>
+          <a:bodyPr wrap="square">
+            <a:spAutoFit/>
+          </a:bodyPr>
+          <a:lstStyle/>
+          <a:p>
+            <a:pPr algn="l"/>
+            <a:r>
+              <a:rPr sz="1500" b="0" i="0">
+                <a:solidFill>
+                  <a:srgbClr val="FFFFFF"/>
+                </a:solidFill>
+                <a:latin typeface="Calibri"/>
+              </a:rPr>
+              <a:t>Ask Claude: “What is the current status of IPLC-GB-AT-PRI?” — live NetBox data confirms</a:t>
             </a:r>
           </a:p>
         </p:txBody>
       </p:sp>
       <p:pic>
         <p:nvPicPr>
-          <p:cNvPr id="13" name="Picture 12" descr="netbox_logo_bright.png"/>
+          <p:cNvPr id="32" name="Picture 31" descr="netbox_logo_bright.png"/>
           <p:cNvPicPr>
             <a:picLocks noChangeAspect="1"/>
           </p:cNvPicPr>

--- a/slides/Summit_Demo_Deck.pptx
+++ b/slides/Summit_Demo_Deck.pptx
@@ -17,6 +17,7 @@
     <p:sldId id="265" r:id="rId16"/>
     <p:sldId id="266" r:id="rId17"/>
     <p:sldId id="267" r:id="rId18"/>
+    <p:sldId id="268" r:id="rId19"/>
   </p:sldIdLst>
   <p:sldSz cx="12188952" cy="6858000" type="screen4x3"/>
   <p:notesSz cx="6858000" cy="9144000"/>
@@ -3392,7 +3393,7 @@
         <p:spPr>
           <a:xfrm>
             <a:off x="457200" y="228600"/>
-            <a:ext cx="10058400" cy="685800"/>
+            <a:ext cx="10058400" cy="640080"/>
           </a:xfrm>
           <a:prstGeom prst="rect">
             <a:avLst/>
@@ -3413,294 +3414,1050 @@
                 </a:solidFill>
                 <a:latin typeface="Calibri"/>
               </a:rPr>
-              <a:t>The Playbook: Driven Entirely by NetBox Data</a:t>
-            </a:r>
-          </a:p>
-        </p:txBody>
-      </p:sp>
-      <p:sp>
-        <p:nvSpPr>
-          <p:cNvPr id="4" name="TextBox 3"/>
-          <p:cNvSpPr txBox="1"/>
-          <p:nvPr/>
-        </p:nvSpPr>
-        <p:spPr>
-          <a:xfrm>
-            <a:off x="548640" y="1097280"/>
-            <a:ext cx="10515600" cy="502920"/>
-          </a:xfrm>
-          <a:prstGeom prst="rect">
-            <a:avLst/>
-          </a:prstGeom>
-          <a:noFill/>
-        </p:spPr>
-        <p:txBody>
-          <a:bodyPr wrap="square">
-            <a:spAutoFit/>
-          </a:bodyPr>
-          <a:lstStyle/>
-          <a:p>
-            <a:pPr algn="l"/>
-            <a:r>
-              <a:rPr sz="2200" b="0" i="0">
+              <a:t>Demo Flow — Step by Step</a:t>
+            </a:r>
+          </a:p>
+        </p:txBody>
+      </p:sp>
+      <p:sp>
+        <p:nvSpPr>
+          <p:cNvPr id="4" name="Rectangle 3"/>
+          <p:cNvSpPr/>
+          <p:nvPr/>
+        </p:nvSpPr>
+        <p:spPr>
+          <a:xfrm>
+            <a:off x="320040" y="1051560"/>
+            <a:ext cx="347472" cy="347472"/>
+          </a:xfrm>
+          <a:prstGeom prst="rect">
+            <a:avLst/>
+          </a:prstGeom>
+          <a:solidFill>
+            <a:srgbClr val="00C2A8"/>
+          </a:solidFill>
+          <a:ln>
+            <a:noFill/>
+          </a:ln>
+        </p:spPr>
+        <p:style>
+          <a:lnRef idx="1">
+            <a:schemeClr val="accent1"/>
+          </a:lnRef>
+          <a:fillRef idx="3">
+            <a:schemeClr val="accent1"/>
+          </a:fillRef>
+          <a:effectRef idx="2">
+            <a:schemeClr val="accent1"/>
+          </a:effectRef>
+          <a:fontRef idx="minor">
+            <a:schemeClr val="lt1"/>
+          </a:fontRef>
+        </p:style>
+        <p:txBody>
+          <a:bodyPr rtlCol="0" anchor="ctr"/>
+          <a:lstStyle/>
+          <a:p>
+            <a:pPr algn="ctr"/>
+          </a:p>
+        </p:txBody>
+      </p:sp>
+      <p:sp>
+        <p:nvSpPr>
+          <p:cNvPr id="5" name="TextBox 4"/>
+          <p:cNvSpPr txBox="1"/>
+          <p:nvPr/>
+        </p:nvSpPr>
+        <p:spPr>
+          <a:xfrm>
+            <a:off x="329184" y="1024128"/>
+            <a:ext cx="347472" cy="347472"/>
+          </a:xfrm>
+          <a:prstGeom prst="rect">
+            <a:avLst/>
+          </a:prstGeom>
+          <a:noFill/>
+        </p:spPr>
+        <p:txBody>
+          <a:bodyPr wrap="square">
+            <a:spAutoFit/>
+          </a:bodyPr>
+          <a:lstStyle/>
+          <a:p>
+            <a:pPr algn="ctr"/>
+            <a:r>
+              <a:rPr sz="1600" b="1" i="0">
+                <a:solidFill>
+                  <a:srgbClr val="0D1B2A"/>
+                </a:solidFill>
+                <a:latin typeface="Calibri"/>
+              </a:rPr>
+              <a:t>1</a:t>
+            </a:r>
+          </a:p>
+        </p:txBody>
+      </p:sp>
+      <p:sp>
+        <p:nvSpPr>
+          <p:cNvPr id="6" name="TextBox 5"/>
+          <p:cNvSpPr txBox="1"/>
+          <p:nvPr/>
+        </p:nvSpPr>
+        <p:spPr>
+          <a:xfrm>
+            <a:off x="777240" y="1005840"/>
+            <a:ext cx="2011680" cy="411480"/>
+          </a:xfrm>
+          <a:prstGeom prst="rect">
+            <a:avLst/>
+          </a:prstGeom>
+          <a:noFill/>
+        </p:spPr>
+        <p:txBody>
+          <a:bodyPr wrap="square">
+            <a:spAutoFit/>
+          </a:bodyPr>
+          <a:lstStyle/>
+          <a:p>
+            <a:pPr algn="l"/>
+            <a:r>
+              <a:rPr sz="1600" b="1" i="0">
+                <a:solidFill>
+                  <a:srgbClr val="00C2A8"/>
+                </a:solidFill>
+                <a:latin typeface="Calibri"/>
+              </a:rPr>
+              <a:t>Visual Explorer</a:t>
+            </a:r>
+          </a:p>
+        </p:txBody>
+      </p:sp>
+      <p:sp>
+        <p:nvSpPr>
+          <p:cNvPr id="7" name="TextBox 6"/>
+          <p:cNvSpPr txBox="1"/>
+          <p:nvPr/>
+        </p:nvSpPr>
+        <p:spPr>
+          <a:xfrm>
+            <a:off x="2834640" y="1005840"/>
+            <a:ext cx="8961120" cy="411480"/>
+          </a:xfrm>
+          <a:prstGeom prst="rect">
+            <a:avLst/>
+          </a:prstGeom>
+          <a:noFill/>
+        </p:spPr>
+        <p:txBody>
+          <a:bodyPr wrap="square">
+            <a:spAutoFit/>
+          </a:bodyPr>
+          <a:lstStyle/>
+          <a:p>
+            <a:pPr algn="l"/>
+            <a:r>
+              <a:rPr sz="1500" b="0" i="0">
                 <a:solidFill>
                   <a:srgbClr val="FFFFFF"/>
                 </a:solidFill>
                 <a:latin typeface="Calibri"/>
               </a:rPr>
-              <a:t>•  Input: just the failed circuit CID (e.g. IPLC-GB-AT-PRI)</a:t>
-            </a:r>
-          </a:p>
-        </p:txBody>
-      </p:sp>
-      <p:sp>
-        <p:nvSpPr>
-          <p:cNvPr id="5" name="TextBox 4"/>
-          <p:cNvSpPr txBox="1"/>
-          <p:nvPr/>
-        </p:nvSpPr>
-        <p:spPr>
-          <a:xfrm>
-            <a:off x="548640" y="1627632"/>
-            <a:ext cx="10515600" cy="502920"/>
-          </a:xfrm>
-          <a:prstGeom prst="rect">
-            <a:avLst/>
-          </a:prstGeom>
-          <a:noFill/>
-        </p:spPr>
-        <p:txBody>
-          <a:bodyPr wrap="square">
-            <a:spAutoFit/>
-          </a:bodyPr>
-          <a:lstStyle/>
-          <a:p>
-            <a:pPr algn="l"/>
-            <a:r>
-              <a:rPr sz="2200" b="0" i="0">
+              <a:t>Open the global WAN map — GB-Bristol hub with active circuit to US-Atlanta via IPLC-GB-AT-PRI</a:t>
+            </a:r>
+          </a:p>
+        </p:txBody>
+      </p:sp>
+      <p:sp>
+        <p:nvSpPr>
+          <p:cNvPr id="8" name="Rectangle 7"/>
+          <p:cNvSpPr/>
+          <p:nvPr/>
+        </p:nvSpPr>
+        <p:spPr>
+          <a:xfrm>
+            <a:off x="320040" y="1527048"/>
+            <a:ext cx="347472" cy="347472"/>
+          </a:xfrm>
+          <a:prstGeom prst="rect">
+            <a:avLst/>
+          </a:prstGeom>
+          <a:solidFill>
+            <a:srgbClr val="00C2A8"/>
+          </a:solidFill>
+          <a:ln>
+            <a:noFill/>
+          </a:ln>
+        </p:spPr>
+        <p:style>
+          <a:lnRef idx="1">
+            <a:schemeClr val="accent1"/>
+          </a:lnRef>
+          <a:fillRef idx="3">
+            <a:schemeClr val="accent1"/>
+          </a:fillRef>
+          <a:effectRef idx="2">
+            <a:schemeClr val="accent1"/>
+          </a:effectRef>
+          <a:fontRef idx="minor">
+            <a:schemeClr val="lt1"/>
+          </a:fontRef>
+        </p:style>
+        <p:txBody>
+          <a:bodyPr rtlCol="0" anchor="ctr"/>
+          <a:lstStyle/>
+          <a:p>
+            <a:pPr algn="ctr"/>
+          </a:p>
+        </p:txBody>
+      </p:sp>
+      <p:sp>
+        <p:nvSpPr>
+          <p:cNvPr id="9" name="TextBox 8"/>
+          <p:cNvSpPr txBox="1"/>
+          <p:nvPr/>
+        </p:nvSpPr>
+        <p:spPr>
+          <a:xfrm>
+            <a:off x="329184" y="1499616"/>
+            <a:ext cx="347472" cy="347472"/>
+          </a:xfrm>
+          <a:prstGeom prst="rect">
+            <a:avLst/>
+          </a:prstGeom>
+          <a:noFill/>
+        </p:spPr>
+        <p:txBody>
+          <a:bodyPr wrap="square">
+            <a:spAutoFit/>
+          </a:bodyPr>
+          <a:lstStyle/>
+          <a:p>
+            <a:pPr algn="ctr"/>
+            <a:r>
+              <a:rPr sz="1600" b="1" i="0">
+                <a:solidFill>
+                  <a:srgbClr val="0D1B2A"/>
+                </a:solidFill>
+                <a:latin typeface="Calibri"/>
+              </a:rPr>
+              <a:t>2</a:t>
+            </a:r>
+          </a:p>
+        </p:txBody>
+      </p:sp>
+      <p:sp>
+        <p:nvSpPr>
+          <p:cNvPr id="10" name="TextBox 9"/>
+          <p:cNvSpPr txBox="1"/>
+          <p:nvPr/>
+        </p:nvSpPr>
+        <p:spPr>
+          <a:xfrm>
+            <a:off x="777240" y="1481328"/>
+            <a:ext cx="2011680" cy="411480"/>
+          </a:xfrm>
+          <a:prstGeom prst="rect">
+            <a:avLst/>
+          </a:prstGeom>
+          <a:noFill/>
+        </p:spPr>
+        <p:txBody>
+          <a:bodyPr wrap="square">
+            <a:spAutoFit/>
+          </a:bodyPr>
+          <a:lstStyle/>
+          <a:p>
+            <a:pPr algn="l"/>
+            <a:r>
+              <a:rPr sz="1600" b="1" i="0">
+                <a:solidFill>
+                  <a:srgbClr val="00C2A8"/>
+                </a:solidFill>
+                <a:latin typeface="Calibri"/>
+              </a:rPr>
+              <a:t>Copilot AI</a:t>
+            </a:r>
+          </a:p>
+        </p:txBody>
+      </p:sp>
+      <p:sp>
+        <p:nvSpPr>
+          <p:cNvPr id="11" name="TextBox 10"/>
+          <p:cNvSpPr txBox="1"/>
+          <p:nvPr/>
+        </p:nvSpPr>
+        <p:spPr>
+          <a:xfrm>
+            <a:off x="2834640" y="1481328"/>
+            <a:ext cx="8961120" cy="411480"/>
+          </a:xfrm>
+          <a:prstGeom prst="rect">
+            <a:avLst/>
+          </a:prstGeom>
+          <a:noFill/>
+        </p:spPr>
+        <p:txBody>
+          <a:bodyPr wrap="square">
+            <a:spAutoFit/>
+          </a:bodyPr>
+          <a:lstStyle/>
+          <a:p>
+            <a:pPr algn="l"/>
+            <a:r>
+              <a:rPr sz="1500" b="0" i="0">
                 <a:solidFill>
                   <a:srgbClr val="FFFFFF"/>
                 </a:solidFill>
                 <a:latin typeface="Calibri"/>
               </a:rPr>
-              <a:t>•  Discovers A-side and Z-side sites from circuit terminations in NetBox</a:t>
-            </a:r>
-          </a:p>
-        </p:txBody>
-      </p:sp>
-      <p:sp>
-        <p:nvSpPr>
-          <p:cNvPr id="6" name="TextBox 5"/>
-          <p:cNvSpPr txBox="1"/>
-          <p:nvPr/>
-        </p:nvSpPr>
-        <p:spPr>
-          <a:xfrm>
-            <a:off x="548640" y="2157984"/>
-            <a:ext cx="10515600" cy="502920"/>
-          </a:xfrm>
-          <a:prstGeom prst="rect">
-            <a:avLst/>
-          </a:prstGeom>
-          <a:noFill/>
-        </p:spPr>
-        <p:txBody>
-          <a:bodyPr wrap="square">
-            <a:spAutoFit/>
-          </a:bodyPr>
-          <a:lstStyle/>
-          <a:p>
-            <a:pPr algn="l"/>
-            <a:r>
-              <a:rPr sz="2200" b="0" i="0">
+              <a:t>Tell Copilot: “IPLC-GB-AT-PRI has failed — set it to offline”</a:t>
+            </a:r>
+          </a:p>
+        </p:txBody>
+      </p:sp>
+      <p:sp>
+        <p:nvSpPr>
+          <p:cNvPr id="12" name="Rectangle 11"/>
+          <p:cNvSpPr/>
+          <p:nvPr/>
+        </p:nvSpPr>
+        <p:spPr>
+          <a:xfrm>
+            <a:off x="320040" y="2002536"/>
+            <a:ext cx="347472" cy="347472"/>
+          </a:xfrm>
+          <a:prstGeom prst="rect">
+            <a:avLst/>
+          </a:prstGeom>
+          <a:solidFill>
+            <a:srgbClr val="00C2A8"/>
+          </a:solidFill>
+          <a:ln>
+            <a:noFill/>
+          </a:ln>
+        </p:spPr>
+        <p:style>
+          <a:lnRef idx="1">
+            <a:schemeClr val="accent1"/>
+          </a:lnRef>
+          <a:fillRef idx="3">
+            <a:schemeClr val="accent1"/>
+          </a:fillRef>
+          <a:effectRef idx="2">
+            <a:schemeClr val="accent1"/>
+          </a:effectRef>
+          <a:fontRef idx="minor">
+            <a:schemeClr val="lt1"/>
+          </a:fontRef>
+        </p:style>
+        <p:txBody>
+          <a:bodyPr rtlCol="0" anchor="ctr"/>
+          <a:lstStyle/>
+          <a:p>
+            <a:pPr algn="ctr"/>
+          </a:p>
+        </p:txBody>
+      </p:sp>
+      <p:sp>
+        <p:nvSpPr>
+          <p:cNvPr id="13" name="TextBox 12"/>
+          <p:cNvSpPr txBox="1"/>
+          <p:nvPr/>
+        </p:nvSpPr>
+        <p:spPr>
+          <a:xfrm>
+            <a:off x="329184" y="1975104"/>
+            <a:ext cx="347472" cy="347472"/>
+          </a:xfrm>
+          <a:prstGeom prst="rect">
+            <a:avLst/>
+          </a:prstGeom>
+          <a:noFill/>
+        </p:spPr>
+        <p:txBody>
+          <a:bodyPr wrap="square">
+            <a:spAutoFit/>
+          </a:bodyPr>
+          <a:lstStyle/>
+          <a:p>
+            <a:pPr algn="ctr"/>
+            <a:r>
+              <a:rPr sz="1600" b="1" i="0">
+                <a:solidFill>
+                  <a:srgbClr val="0D1B2A"/>
+                </a:solidFill>
+                <a:latin typeface="Calibri"/>
+              </a:rPr>
+              <a:t>3</a:t>
+            </a:r>
+          </a:p>
+        </p:txBody>
+      </p:sp>
+      <p:sp>
+        <p:nvSpPr>
+          <p:cNvPr id="14" name="TextBox 13"/>
+          <p:cNvSpPr txBox="1"/>
+          <p:nvPr/>
+        </p:nvSpPr>
+        <p:spPr>
+          <a:xfrm>
+            <a:off x="777240" y="1956816"/>
+            <a:ext cx="2011680" cy="411480"/>
+          </a:xfrm>
+          <a:prstGeom prst="rect">
+            <a:avLst/>
+          </a:prstGeom>
+          <a:noFill/>
+        </p:spPr>
+        <p:txBody>
+          <a:bodyPr wrap="square">
+            <a:spAutoFit/>
+          </a:bodyPr>
+          <a:lstStyle/>
+          <a:p>
+            <a:pPr algn="l"/>
+            <a:r>
+              <a:rPr sz="1600" b="1" i="0">
+                <a:solidFill>
+                  <a:srgbClr val="00C2A8"/>
+                </a:solidFill>
+                <a:latin typeface="Calibri"/>
+              </a:rPr>
+              <a:t>AAP Workflow</a:t>
+            </a:r>
+          </a:p>
+        </p:txBody>
+      </p:sp>
+      <p:sp>
+        <p:nvSpPr>
+          <p:cNvPr id="15" name="TextBox 14"/>
+          <p:cNvSpPr txBox="1"/>
+          <p:nvPr/>
+        </p:nvSpPr>
+        <p:spPr>
+          <a:xfrm>
+            <a:off x="2834640" y="1956816"/>
+            <a:ext cx="8961120" cy="411480"/>
+          </a:xfrm>
+          <a:prstGeom prst="rect">
+            <a:avLst/>
+          </a:prstGeom>
+          <a:noFill/>
+        </p:spPr>
+        <p:txBody>
+          <a:bodyPr wrap="square">
+            <a:spAutoFit/>
+          </a:bodyPr>
+          <a:lstStyle/>
+          <a:p>
+            <a:pPr algn="l"/>
+            <a:r>
+              <a:rPr sz="1500" b="0" i="0">
                 <a:solidFill>
                   <a:srgbClr val="FFFFFF"/>
                 </a:solidFill>
                 <a:latin typeface="Calibri"/>
               </a:rPr>
-              <a:t>•  Finds all active circuits between those two sites tagged for failover</a:t>
-            </a:r>
-          </a:p>
-        </p:txBody>
-      </p:sp>
-      <p:sp>
-        <p:nvSpPr>
-          <p:cNvPr id="7" name="TextBox 6"/>
-          <p:cNvSpPr txBox="1"/>
-          <p:nvPr/>
-        </p:nvSpPr>
-        <p:spPr>
-          <a:xfrm>
-            <a:off x="548640" y="2688336"/>
-            <a:ext cx="10515600" cy="502920"/>
-          </a:xfrm>
-          <a:prstGeom prst="rect">
-            <a:avLst/>
-          </a:prstGeom>
-          <a:noFill/>
-        </p:spPr>
-        <p:txBody>
-          <a:bodyPr wrap="square">
-            <a:spAutoFit/>
-          </a:bodyPr>
-          <a:lstStyle/>
-          <a:p>
-            <a:pPr algn="l"/>
-            <a:r>
-              <a:rPr sz="2200" b="0" i="0">
+              <a:t>NetBox event rule fires webhook → AAP launches Circuit Failover Workflow automatically</a:t>
+            </a:r>
+          </a:p>
+        </p:txBody>
+      </p:sp>
+      <p:sp>
+        <p:nvSpPr>
+          <p:cNvPr id="16" name="Rectangle 15"/>
+          <p:cNvSpPr/>
+          <p:nvPr/>
+        </p:nvSpPr>
+        <p:spPr>
+          <a:xfrm>
+            <a:off x="320040" y="2478024"/>
+            <a:ext cx="347472" cy="347472"/>
+          </a:xfrm>
+          <a:prstGeom prst="rect">
+            <a:avLst/>
+          </a:prstGeom>
+          <a:solidFill>
+            <a:srgbClr val="00C2A8"/>
+          </a:solidFill>
+          <a:ln>
+            <a:noFill/>
+          </a:ln>
+        </p:spPr>
+        <p:style>
+          <a:lnRef idx="1">
+            <a:schemeClr val="accent1"/>
+          </a:lnRef>
+          <a:fillRef idx="3">
+            <a:schemeClr val="accent1"/>
+          </a:fillRef>
+          <a:effectRef idx="2">
+            <a:schemeClr val="accent1"/>
+          </a:effectRef>
+          <a:fontRef idx="minor">
+            <a:schemeClr val="lt1"/>
+          </a:fontRef>
+        </p:style>
+        <p:txBody>
+          <a:bodyPr rtlCol="0" anchor="ctr"/>
+          <a:lstStyle/>
+          <a:p>
+            <a:pPr algn="ctr"/>
+          </a:p>
+        </p:txBody>
+      </p:sp>
+      <p:sp>
+        <p:nvSpPr>
+          <p:cNvPr id="17" name="TextBox 16"/>
+          <p:cNvSpPr txBox="1"/>
+          <p:nvPr/>
+        </p:nvSpPr>
+        <p:spPr>
+          <a:xfrm>
+            <a:off x="329184" y="2450592"/>
+            <a:ext cx="347472" cy="347472"/>
+          </a:xfrm>
+          <a:prstGeom prst="rect">
+            <a:avLst/>
+          </a:prstGeom>
+          <a:noFill/>
+        </p:spPr>
+        <p:txBody>
+          <a:bodyPr wrap="square">
+            <a:spAutoFit/>
+          </a:bodyPr>
+          <a:lstStyle/>
+          <a:p>
+            <a:pPr algn="ctr"/>
+            <a:r>
+              <a:rPr sz="1600" b="1" i="0">
+                <a:solidFill>
+                  <a:srgbClr val="0D1B2A"/>
+                </a:solidFill>
+                <a:latin typeface="Calibri"/>
+              </a:rPr>
+              <a:t>4</a:t>
+            </a:r>
+          </a:p>
+        </p:txBody>
+      </p:sp>
+      <p:sp>
+        <p:nvSpPr>
+          <p:cNvPr id="18" name="TextBox 17"/>
+          <p:cNvSpPr txBox="1"/>
+          <p:nvPr/>
+        </p:nvSpPr>
+        <p:spPr>
+          <a:xfrm>
+            <a:off x="777240" y="2432304"/>
+            <a:ext cx="2011680" cy="411480"/>
+          </a:xfrm>
+          <a:prstGeom prst="rect">
+            <a:avLst/>
+          </a:prstGeom>
+          <a:noFill/>
+        </p:spPr>
+        <p:txBody>
+          <a:bodyPr wrap="square">
+            <a:spAutoFit/>
+          </a:bodyPr>
+          <a:lstStyle/>
+          <a:p>
+            <a:pPr algn="l"/>
+            <a:r>
+              <a:rPr sz="1600" b="1" i="0">
+                <a:solidFill>
+                  <a:srgbClr val="00C2A8"/>
+                </a:solidFill>
+                <a:latin typeface="Calibri"/>
+              </a:rPr>
+              <a:t>Step 1: Failover</a:t>
+            </a:r>
+          </a:p>
+        </p:txBody>
+      </p:sp>
+      <p:sp>
+        <p:nvSpPr>
+          <p:cNvPr id="19" name="TextBox 18"/>
+          <p:cNvSpPr txBox="1"/>
+          <p:nvPr/>
+        </p:nvSpPr>
+        <p:spPr>
+          <a:xfrm>
+            <a:off x="2834640" y="2432304"/>
+            <a:ext cx="8961120" cy="411480"/>
+          </a:xfrm>
+          <a:prstGeom prst="rect">
+            <a:avLst/>
+          </a:prstGeom>
+          <a:noFill/>
+        </p:spPr>
+        <p:txBody>
+          <a:bodyPr wrap="square">
+            <a:spAutoFit/>
+          </a:bodyPr>
+          <a:lstStyle/>
+          <a:p>
+            <a:pPr algn="l"/>
+            <a:r>
+              <a:rPr sz="1500" b="0" i="0">
                 <a:solidFill>
                   <a:srgbClr val="FFFFFF"/>
                 </a:solidFill>
                 <a:latin typeface="Calibri"/>
               </a:rPr>
-              <a:t>•  Selects the best backup by highest committed bandwidth</a:t>
-            </a:r>
-          </a:p>
-        </p:txBody>
-      </p:sp>
-      <p:sp>
-        <p:nvSpPr>
-          <p:cNvPr id="8" name="TextBox 7"/>
-          <p:cNvSpPr txBox="1"/>
-          <p:nvPr/>
-        </p:nvSpPr>
-        <p:spPr>
-          <a:xfrm>
-            <a:off x="548640" y="3218688"/>
-            <a:ext cx="10515600" cy="502920"/>
-          </a:xfrm>
-          <a:prstGeom prst="rect">
-            <a:avLst/>
-          </a:prstGeom>
-          <a:noFill/>
-        </p:spPr>
-        <p:txBody>
-          <a:bodyPr wrap="square">
-            <a:spAutoFit/>
-          </a:bodyPr>
-          <a:lstStyle/>
-          <a:p>
-            <a:pPr algn="l"/>
-            <a:r>
-              <a:rPr sz="2200" b="0" i="0">
+              <a:t>Playbook queries NetBox, finds backup (IPLC-GB-AT-SEC), pushes router config, updates NetBox</a:t>
+            </a:r>
+          </a:p>
+        </p:txBody>
+      </p:sp>
+      <p:sp>
+        <p:nvSpPr>
+          <p:cNvPr id="20" name="Rectangle 19"/>
+          <p:cNvSpPr/>
+          <p:nvPr/>
+        </p:nvSpPr>
+        <p:spPr>
+          <a:xfrm>
+            <a:off x="320040" y="2953512"/>
+            <a:ext cx="347472" cy="347472"/>
+          </a:xfrm>
+          <a:prstGeom prst="rect">
+            <a:avLst/>
+          </a:prstGeom>
+          <a:solidFill>
+            <a:srgbClr val="00C2A8"/>
+          </a:solidFill>
+          <a:ln>
+            <a:noFill/>
+          </a:ln>
+        </p:spPr>
+        <p:style>
+          <a:lnRef idx="1">
+            <a:schemeClr val="accent1"/>
+          </a:lnRef>
+          <a:fillRef idx="3">
+            <a:schemeClr val="accent1"/>
+          </a:fillRef>
+          <a:effectRef idx="2">
+            <a:schemeClr val="accent1"/>
+          </a:effectRef>
+          <a:fontRef idx="minor">
+            <a:schemeClr val="lt1"/>
+          </a:fontRef>
+        </p:style>
+        <p:txBody>
+          <a:bodyPr rtlCol="0" anchor="ctr"/>
+          <a:lstStyle/>
+          <a:p>
+            <a:pPr algn="ctr"/>
+          </a:p>
+        </p:txBody>
+      </p:sp>
+      <p:sp>
+        <p:nvSpPr>
+          <p:cNvPr id="21" name="TextBox 20"/>
+          <p:cNvSpPr txBox="1"/>
+          <p:nvPr/>
+        </p:nvSpPr>
+        <p:spPr>
+          <a:xfrm>
+            <a:off x="329184" y="2926080"/>
+            <a:ext cx="347472" cy="347472"/>
+          </a:xfrm>
+          <a:prstGeom prst="rect">
+            <a:avLst/>
+          </a:prstGeom>
+          <a:noFill/>
+        </p:spPr>
+        <p:txBody>
+          <a:bodyPr wrap="square">
+            <a:spAutoFit/>
+          </a:bodyPr>
+          <a:lstStyle/>
+          <a:p>
+            <a:pPr algn="ctr"/>
+            <a:r>
+              <a:rPr sz="1600" b="1" i="0">
+                <a:solidFill>
+                  <a:srgbClr val="0D1B2A"/>
+                </a:solidFill>
+                <a:latin typeface="Calibri"/>
+              </a:rPr>
+              <a:t>5</a:t>
+            </a:r>
+          </a:p>
+        </p:txBody>
+      </p:sp>
+      <p:sp>
+        <p:nvSpPr>
+          <p:cNvPr id="22" name="TextBox 21"/>
+          <p:cNvSpPr txBox="1"/>
+          <p:nvPr/>
+        </p:nvSpPr>
+        <p:spPr>
+          <a:xfrm>
+            <a:off x="777240" y="2907792"/>
+            <a:ext cx="2011680" cy="411480"/>
+          </a:xfrm>
+          <a:prstGeom prst="rect">
+            <a:avLst/>
+          </a:prstGeom>
+          <a:noFill/>
+        </p:spPr>
+        <p:txBody>
+          <a:bodyPr wrap="square">
+            <a:spAutoFit/>
+          </a:bodyPr>
+          <a:lstStyle/>
+          <a:p>
+            <a:pPr algn="l"/>
+            <a:r>
+              <a:rPr sz="1600" b="1" i="0">
+                <a:solidFill>
+                  <a:srgbClr val="00C2A8"/>
+                </a:solidFill>
+                <a:latin typeface="Calibri"/>
+              </a:rPr>
+              <a:t>Step 2: Report</a:t>
+            </a:r>
+          </a:p>
+        </p:txBody>
+      </p:sp>
+      <p:sp>
+        <p:nvSpPr>
+          <p:cNvPr id="23" name="TextBox 22"/>
+          <p:cNvSpPr txBox="1"/>
+          <p:nvPr/>
+        </p:nvSpPr>
+        <p:spPr>
+          <a:xfrm>
+            <a:off x="2834640" y="2907792"/>
+            <a:ext cx="8961120" cy="411480"/>
+          </a:xfrm>
+          <a:prstGeom prst="rect">
+            <a:avLst/>
+          </a:prstGeom>
+          <a:noFill/>
+        </p:spPr>
+        <p:txBody>
+          <a:bodyPr wrap="square">
+            <a:spAutoFit/>
+          </a:bodyPr>
+          <a:lstStyle/>
+          <a:p>
+            <a:pPr algn="l"/>
+            <a:r>
+              <a:rPr sz="1500" b="0" i="0">
                 <a:solidFill>
                   <a:srgbClr val="FFFFFF"/>
                 </a:solidFill>
                 <a:latin typeface="Calibri"/>
               </a:rPr>
-              <a:t>•  No hardcoded backup mappings — add a new circuit to NetBox and it is automatically considered</a:t>
-            </a:r>
-          </a:p>
-        </p:txBody>
-      </p:sp>
-      <p:sp>
-        <p:nvSpPr>
-          <p:cNvPr id="9" name="TextBox 8"/>
-          <p:cNvSpPr txBox="1"/>
-          <p:nvPr/>
-        </p:nvSpPr>
-        <p:spPr>
-          <a:xfrm>
-            <a:off x="548640" y="3749040"/>
-            <a:ext cx="10515600" cy="502920"/>
-          </a:xfrm>
-          <a:prstGeom prst="rect">
-            <a:avLst/>
-          </a:prstGeom>
-          <a:noFill/>
-        </p:spPr>
-        <p:txBody>
-          <a:bodyPr wrap="square">
-            <a:spAutoFit/>
-          </a:bodyPr>
-          <a:lstStyle/>
-          <a:p>
-            <a:pPr algn="l"/>
-            <a:r>
-              <a:rPr sz="2200" b="0" i="0">
+              <a:t>Second workflow step generates HTML incident report and deploys it to the report server</a:t>
+            </a:r>
+          </a:p>
+        </p:txBody>
+      </p:sp>
+      <p:sp>
+        <p:nvSpPr>
+          <p:cNvPr id="24" name="Rectangle 23"/>
+          <p:cNvSpPr/>
+          <p:nvPr/>
+        </p:nvSpPr>
+        <p:spPr>
+          <a:xfrm>
+            <a:off x="320040" y="3429000"/>
+            <a:ext cx="347472" cy="347472"/>
+          </a:xfrm>
+          <a:prstGeom prst="rect">
+            <a:avLst/>
+          </a:prstGeom>
+          <a:solidFill>
+            <a:srgbClr val="00C2A8"/>
+          </a:solidFill>
+          <a:ln>
+            <a:noFill/>
+          </a:ln>
+        </p:spPr>
+        <p:style>
+          <a:lnRef idx="1">
+            <a:schemeClr val="accent1"/>
+          </a:lnRef>
+          <a:fillRef idx="3">
+            <a:schemeClr val="accent1"/>
+          </a:fillRef>
+          <a:effectRef idx="2">
+            <a:schemeClr val="accent1"/>
+          </a:effectRef>
+          <a:fontRef idx="minor">
+            <a:schemeClr val="lt1"/>
+          </a:fontRef>
+        </p:style>
+        <p:txBody>
+          <a:bodyPr rtlCol="0" anchor="ctr"/>
+          <a:lstStyle/>
+          <a:p>
+            <a:pPr algn="ctr"/>
+          </a:p>
+        </p:txBody>
+      </p:sp>
+      <p:sp>
+        <p:nvSpPr>
+          <p:cNvPr id="25" name="TextBox 24"/>
+          <p:cNvSpPr txBox="1"/>
+          <p:nvPr/>
+        </p:nvSpPr>
+        <p:spPr>
+          <a:xfrm>
+            <a:off x="329184" y="3401568"/>
+            <a:ext cx="347472" cy="347472"/>
+          </a:xfrm>
+          <a:prstGeom prst="rect">
+            <a:avLst/>
+          </a:prstGeom>
+          <a:noFill/>
+        </p:spPr>
+        <p:txBody>
+          <a:bodyPr wrap="square">
+            <a:spAutoFit/>
+          </a:bodyPr>
+          <a:lstStyle/>
+          <a:p>
+            <a:pPr algn="ctr"/>
+            <a:r>
+              <a:rPr sz="1600" b="1" i="0">
+                <a:solidFill>
+                  <a:srgbClr val="0D1B2A"/>
+                </a:solidFill>
+                <a:latin typeface="Calibri"/>
+              </a:rPr>
+              <a:t>6</a:t>
+            </a:r>
+          </a:p>
+        </p:txBody>
+      </p:sp>
+      <p:sp>
+        <p:nvSpPr>
+          <p:cNvPr id="26" name="TextBox 25"/>
+          <p:cNvSpPr txBox="1"/>
+          <p:nvPr/>
+        </p:nvSpPr>
+        <p:spPr>
+          <a:xfrm>
+            <a:off x="777240" y="3383280"/>
+            <a:ext cx="2011680" cy="411480"/>
+          </a:xfrm>
+          <a:prstGeom prst="rect">
+            <a:avLst/>
+          </a:prstGeom>
+          <a:noFill/>
+        </p:spPr>
+        <p:txBody>
+          <a:bodyPr wrap="square">
+            <a:spAutoFit/>
+          </a:bodyPr>
+          <a:lstStyle/>
+          <a:p>
+            <a:pPr algn="l"/>
+            <a:r>
+              <a:rPr sz="1600" b="1" i="0">
+                <a:solidFill>
+                  <a:srgbClr val="00C2A8"/>
+                </a:solidFill>
+                <a:latin typeface="Calibri"/>
+              </a:rPr>
+              <a:t>Visual Explorer</a:t>
+            </a:r>
+          </a:p>
+        </p:txBody>
+      </p:sp>
+      <p:sp>
+        <p:nvSpPr>
+          <p:cNvPr id="27" name="TextBox 26"/>
+          <p:cNvSpPr txBox="1"/>
+          <p:nvPr/>
+        </p:nvSpPr>
+        <p:spPr>
+          <a:xfrm>
+            <a:off x="2834640" y="3383280"/>
+            <a:ext cx="8961120" cy="411480"/>
+          </a:xfrm>
+          <a:prstGeom prst="rect">
+            <a:avLst/>
+          </a:prstGeom>
+          <a:noFill/>
+        </p:spPr>
+        <p:txBody>
+          <a:bodyPr wrap="square">
+            <a:spAutoFit/>
+          </a:bodyPr>
+          <a:lstStyle/>
+          <a:p>
+            <a:pPr algn="l"/>
+            <a:r>
+              <a:rPr sz="1500" b="0" i="0">
                 <a:solidFill>
                   <a:srgbClr val="FFFFFF"/>
                 </a:solidFill>
                 <a:latin typeface="Calibri"/>
               </a:rPr>
-              <a:t>•  Pushes router config changes to all routers at both ends</a:t>
-            </a:r>
-          </a:p>
-        </p:txBody>
-      </p:sp>
-      <p:sp>
-        <p:nvSpPr>
-          <p:cNvPr id="10" name="TextBox 9"/>
-          <p:cNvSpPr txBox="1"/>
-          <p:nvPr/>
-        </p:nvSpPr>
-        <p:spPr>
-          <a:xfrm>
-            <a:off x="548640" y="4279392"/>
-            <a:ext cx="10515600" cy="502920"/>
-          </a:xfrm>
-          <a:prstGeom prst="rect">
-            <a:avLst/>
-          </a:prstGeom>
-          <a:noFill/>
-        </p:spPr>
-        <p:txBody>
-          <a:bodyPr wrap="square">
-            <a:spAutoFit/>
-          </a:bodyPr>
-          <a:lstStyle/>
-          <a:p>
-            <a:pPr algn="l"/>
-            <a:r>
-              <a:rPr sz="2200" b="0" i="0">
+              <a:t>Refresh map — primary circuit gone, backup confirmed active on new router path</a:t>
+            </a:r>
+          </a:p>
+        </p:txBody>
+      </p:sp>
+      <p:sp>
+        <p:nvSpPr>
+          <p:cNvPr id="28" name="Rectangle 27"/>
+          <p:cNvSpPr/>
+          <p:nvPr/>
+        </p:nvSpPr>
+        <p:spPr>
+          <a:xfrm>
+            <a:off x="320040" y="3904488"/>
+            <a:ext cx="347472" cy="347472"/>
+          </a:xfrm>
+          <a:prstGeom prst="rect">
+            <a:avLst/>
+          </a:prstGeom>
+          <a:solidFill>
+            <a:srgbClr val="00C2A8"/>
+          </a:solidFill>
+          <a:ln>
+            <a:noFill/>
+          </a:ln>
+        </p:spPr>
+        <p:style>
+          <a:lnRef idx="1">
+            <a:schemeClr val="accent1"/>
+          </a:lnRef>
+          <a:fillRef idx="3">
+            <a:schemeClr val="accent1"/>
+          </a:fillRef>
+          <a:effectRef idx="2">
+            <a:schemeClr val="accent1"/>
+          </a:effectRef>
+          <a:fontRef idx="minor">
+            <a:schemeClr val="lt1"/>
+          </a:fontRef>
+        </p:style>
+        <p:txBody>
+          <a:bodyPr rtlCol="0" anchor="ctr"/>
+          <a:lstStyle/>
+          <a:p>
+            <a:pPr algn="ctr"/>
+          </a:p>
+        </p:txBody>
+      </p:sp>
+      <p:sp>
+        <p:nvSpPr>
+          <p:cNvPr id="29" name="TextBox 28"/>
+          <p:cNvSpPr txBox="1"/>
+          <p:nvPr/>
+        </p:nvSpPr>
+        <p:spPr>
+          <a:xfrm>
+            <a:off x="329184" y="3877056"/>
+            <a:ext cx="347472" cy="347472"/>
+          </a:xfrm>
+          <a:prstGeom prst="rect">
+            <a:avLst/>
+          </a:prstGeom>
+          <a:noFill/>
+        </p:spPr>
+        <p:txBody>
+          <a:bodyPr wrap="square">
+            <a:spAutoFit/>
+          </a:bodyPr>
+          <a:lstStyle/>
+          <a:p>
+            <a:pPr algn="ctr"/>
+            <a:r>
+              <a:rPr sz="1600" b="1" i="0">
+                <a:solidFill>
+                  <a:srgbClr val="0D1B2A"/>
+                </a:solidFill>
+                <a:latin typeface="Calibri"/>
+              </a:rPr>
+              <a:t>7</a:t>
+            </a:r>
+          </a:p>
+        </p:txBody>
+      </p:sp>
+      <p:sp>
+        <p:nvSpPr>
+          <p:cNvPr id="30" name="TextBox 29"/>
+          <p:cNvSpPr txBox="1"/>
+          <p:nvPr/>
+        </p:nvSpPr>
+        <p:spPr>
+          <a:xfrm>
+            <a:off x="777240" y="3858768"/>
+            <a:ext cx="2011680" cy="411480"/>
+          </a:xfrm>
+          <a:prstGeom prst="rect">
+            <a:avLst/>
+          </a:prstGeom>
+          <a:noFill/>
+        </p:spPr>
+        <p:txBody>
+          <a:bodyPr wrap="square">
+            <a:spAutoFit/>
+          </a:bodyPr>
+          <a:lstStyle/>
+          <a:p>
+            <a:pPr algn="l"/>
+            <a:r>
+              <a:rPr sz="1600" b="1" i="0">
+                <a:solidFill>
+                  <a:srgbClr val="00C2A8"/>
+                </a:solidFill>
+                <a:latin typeface="Calibri"/>
+              </a:rPr>
+              <a:t>Claude + MCP</a:t>
+            </a:r>
+          </a:p>
+        </p:txBody>
+      </p:sp>
+      <p:sp>
+        <p:nvSpPr>
+          <p:cNvPr id="31" name="TextBox 30"/>
+          <p:cNvSpPr txBox="1"/>
+          <p:nvPr/>
+        </p:nvSpPr>
+        <p:spPr>
+          <a:xfrm>
+            <a:off x="2834640" y="3858768"/>
+            <a:ext cx="8961120" cy="411480"/>
+          </a:xfrm>
+          <a:prstGeom prst="rect">
+            <a:avLst/>
+          </a:prstGeom>
+          <a:noFill/>
+        </p:spPr>
+        <p:txBody>
+          <a:bodyPr wrap="square">
+            <a:spAutoFit/>
+          </a:bodyPr>
+          <a:lstStyle/>
+          <a:p>
+            <a:pPr algn="l"/>
+            <a:r>
+              <a:rPr sz="1500" b="0" i="0">
                 <a:solidFill>
                   <a:srgbClr val="FFFFFF"/>
                 </a:solidFill>
                 <a:latin typeface="Calibri"/>
               </a:rPr>
-              <a:t>•  Writes back to NetBox: primary → offline, backup → active</a:t>
-            </a:r>
-          </a:p>
-        </p:txBody>
-      </p:sp>
-      <p:sp>
-        <p:nvSpPr>
-          <p:cNvPr id="11" name="TextBox 10"/>
-          <p:cNvSpPr txBox="1"/>
-          <p:nvPr/>
-        </p:nvSpPr>
-        <p:spPr>
-          <a:xfrm>
-            <a:off x="548640" y="4809744"/>
-            <a:ext cx="10515600" cy="502920"/>
-          </a:xfrm>
-          <a:prstGeom prst="rect">
-            <a:avLst/>
-          </a:prstGeom>
-          <a:noFill/>
-        </p:spPr>
-        <p:txBody>
-          <a:bodyPr wrap="square">
-            <a:spAutoFit/>
-          </a:bodyPr>
-          <a:lstStyle/>
-          <a:p>
-            <a:pPr algn="l"/>
-            <a:r>
-              <a:rPr sz="2200" b="0" i="0">
-                <a:solidFill>
-                  <a:srgbClr val="FFFFFF"/>
-                </a:solidFill>
-                <a:latin typeface="Calibri"/>
-              </a:rPr>
-              <a:t>•  Generates and publishes the HTML failover incident report</a:t>
+              <a:t>Ask Claude: “What is the current status of IPLC-GB-AT-PRI?” — live NetBox data confirms</a:t>
             </a:r>
           </a:p>
         </p:txBody>
       </p:sp>
       <p:pic>
         <p:nvPicPr>
-          <p:cNvPr id="12" name="Picture 11" descr="netbox_logo_bright.png"/>
+          <p:cNvPr id="32" name="Picture 31" descr="netbox_logo_bright.png"/>
           <p:cNvPicPr>
             <a:picLocks noChangeAspect="1"/>
           </p:cNvPicPr>
@@ -3800,7 +4557,7 @@
         <p:spPr>
           <a:xfrm>
             <a:off x="457200" y="228600"/>
-            <a:ext cx="10058400" cy="640080"/>
+            <a:ext cx="10058400" cy="685800"/>
           </a:xfrm>
           <a:prstGeom prst="rect">
             <a:avLst/>
@@ -3821,53 +4578,43 @@
                 </a:solidFill>
                 <a:latin typeface="Calibri"/>
               </a:rPr>
-              <a:t>The Business Case</a:t>
-            </a:r>
-          </a:p>
-        </p:txBody>
-      </p:sp>
-      <p:sp>
-        <p:nvSpPr>
-          <p:cNvPr id="4" name="Rectangle 3"/>
-          <p:cNvSpPr/>
-          <p:nvPr/>
-        </p:nvSpPr>
-        <p:spPr>
-          <a:xfrm>
-            <a:off x="457200" y="1005840"/>
-            <a:ext cx="5394960" cy="2011680"/>
-          </a:xfrm>
-          <a:prstGeom prst="rect">
-            <a:avLst/>
-          </a:prstGeom>
-          <a:solidFill>
-            <a:srgbClr val="142A3E"/>
-          </a:solidFill>
-          <a:ln w="19050">
-            <a:solidFill>
-              <a:srgbClr val="EF4444"/>
-            </a:solidFill>
-          </a:ln>
-        </p:spPr>
-        <p:style>
-          <a:lnRef idx="1">
-            <a:schemeClr val="accent1"/>
-          </a:lnRef>
-          <a:fillRef idx="3">
-            <a:schemeClr val="accent1"/>
-          </a:fillRef>
-          <a:effectRef idx="2">
-            <a:schemeClr val="accent1"/>
-          </a:effectRef>
-          <a:fontRef idx="minor">
-            <a:schemeClr val="lt1"/>
-          </a:fontRef>
-        </p:style>
-        <p:txBody>
-          <a:bodyPr rtlCol="0" anchor="ctr"/>
-          <a:lstStyle/>
-          <a:p>
-            <a:pPr algn="ctr"/>
+              <a:t>The Playbook: Driven Entirely by NetBox Data</a:t>
+            </a:r>
+          </a:p>
+        </p:txBody>
+      </p:sp>
+      <p:sp>
+        <p:nvSpPr>
+          <p:cNvPr id="4" name="TextBox 3"/>
+          <p:cNvSpPr txBox="1"/>
+          <p:nvPr/>
+        </p:nvSpPr>
+        <p:spPr>
+          <a:xfrm>
+            <a:off x="548640" y="1097280"/>
+            <a:ext cx="10515600" cy="502920"/>
+          </a:xfrm>
+          <a:prstGeom prst="rect">
+            <a:avLst/>
+          </a:prstGeom>
+          <a:noFill/>
+        </p:spPr>
+        <p:txBody>
+          <a:bodyPr wrap="square">
+            <a:spAutoFit/>
+          </a:bodyPr>
+          <a:lstStyle/>
+          <a:p>
+            <a:pPr algn="l"/>
+            <a:r>
+              <a:rPr sz="2200" b="0" i="0">
+                <a:solidFill>
+                  <a:srgbClr val="FFFFFF"/>
+                </a:solidFill>
+                <a:latin typeface="Calibri"/>
+              </a:rPr>
+              <a:t>•  Input: just the failed circuit CID (e.g. IPLC-GB-AT-PRI)</a:t>
+            </a:r>
           </a:p>
         </p:txBody>
       </p:sp>
@@ -3879,29 +4626,29 @@
         </p:nvSpPr>
         <p:spPr>
           <a:xfrm>
-            <a:off x="640080" y="1143000"/>
-            <a:ext cx="5029200" cy="1005840"/>
-          </a:xfrm>
-          <a:prstGeom prst="rect">
-            <a:avLst/>
-          </a:prstGeom>
-          <a:noFill/>
-        </p:spPr>
-        <p:txBody>
-          <a:bodyPr wrap="square">
-            <a:spAutoFit/>
-          </a:bodyPr>
-          <a:lstStyle/>
-          <a:p>
-            <a:pPr algn="ctr"/>
-            <a:r>
-              <a:rPr sz="5200" b="1" i="0">
-                <a:solidFill>
-                  <a:srgbClr val="EF4444"/>
-                </a:solidFill>
-                <a:latin typeface="Calibri"/>
-              </a:rPr>
-              <a:t>~45 min</a:t>
+            <a:off x="548640" y="1627632"/>
+            <a:ext cx="10515600" cy="502920"/>
+          </a:xfrm>
+          <a:prstGeom prst="rect">
+            <a:avLst/>
+          </a:prstGeom>
+          <a:noFill/>
+        </p:spPr>
+        <p:txBody>
+          <a:bodyPr wrap="square">
+            <a:spAutoFit/>
+          </a:bodyPr>
+          <a:lstStyle/>
+          <a:p>
+            <a:pPr algn="l"/>
+            <a:r>
+              <a:rPr sz="2200" b="0" i="0">
+                <a:solidFill>
+                  <a:srgbClr val="FFFFFF"/>
+                </a:solidFill>
+                <a:latin typeface="Calibri"/>
+              </a:rPr>
+              <a:t>•  Discovers A-side and Z-side sites from circuit terminations in NetBox</a:t>
             </a:r>
           </a:p>
         </p:txBody>
@@ -3914,75 +4661,65 @@
         </p:nvSpPr>
         <p:spPr>
           <a:xfrm>
-            <a:off x="640080" y="1920240"/>
-            <a:ext cx="5029200" cy="457200"/>
-          </a:xfrm>
-          <a:prstGeom prst="rect">
-            <a:avLst/>
-          </a:prstGeom>
-          <a:noFill/>
-        </p:spPr>
-        <p:txBody>
-          <a:bodyPr wrap="square">
-            <a:spAutoFit/>
-          </a:bodyPr>
-          <a:lstStyle/>
-          <a:p>
-            <a:pPr algn="ctr"/>
-            <a:r>
-              <a:rPr sz="1800" b="0" i="0">
-                <a:solidFill>
-                  <a:srgbClr val="B0BCCC"/>
-                </a:solidFill>
-                <a:latin typeface="Calibri"/>
-              </a:rPr>
-              <a:t>Manual failover</a:t>
-            </a:r>
-          </a:p>
-        </p:txBody>
-      </p:sp>
-      <p:sp>
-        <p:nvSpPr>
-          <p:cNvPr id="7" name="Rectangle 6"/>
-          <p:cNvSpPr/>
-          <p:nvPr/>
-        </p:nvSpPr>
-        <p:spPr>
-          <a:xfrm>
-            <a:off x="6217920" y="1005840"/>
-            <a:ext cx="5394960" cy="2011680"/>
-          </a:xfrm>
-          <a:prstGeom prst="rect">
-            <a:avLst/>
-          </a:prstGeom>
-          <a:solidFill>
-            <a:srgbClr val="142A3E"/>
-          </a:solidFill>
-          <a:ln w="19050">
-            <a:solidFill>
-              <a:srgbClr val="22C55E"/>
-            </a:solidFill>
-          </a:ln>
-        </p:spPr>
-        <p:style>
-          <a:lnRef idx="1">
-            <a:schemeClr val="accent1"/>
-          </a:lnRef>
-          <a:fillRef idx="3">
-            <a:schemeClr val="accent1"/>
-          </a:fillRef>
-          <a:effectRef idx="2">
-            <a:schemeClr val="accent1"/>
-          </a:effectRef>
-          <a:fontRef idx="minor">
-            <a:schemeClr val="lt1"/>
-          </a:fontRef>
-        </p:style>
-        <p:txBody>
-          <a:bodyPr rtlCol="0" anchor="ctr"/>
-          <a:lstStyle/>
-          <a:p>
-            <a:pPr algn="ctr"/>
+            <a:off x="548640" y="2157984"/>
+            <a:ext cx="10515600" cy="502920"/>
+          </a:xfrm>
+          <a:prstGeom prst="rect">
+            <a:avLst/>
+          </a:prstGeom>
+          <a:noFill/>
+        </p:spPr>
+        <p:txBody>
+          <a:bodyPr wrap="square">
+            <a:spAutoFit/>
+          </a:bodyPr>
+          <a:lstStyle/>
+          <a:p>
+            <a:pPr algn="l"/>
+            <a:r>
+              <a:rPr sz="2200" b="0" i="0">
+                <a:solidFill>
+                  <a:srgbClr val="FFFFFF"/>
+                </a:solidFill>
+                <a:latin typeface="Calibri"/>
+              </a:rPr>
+              <a:t>•  Finds all active circuits between those two sites tagged for failover</a:t>
+            </a:r>
+          </a:p>
+        </p:txBody>
+      </p:sp>
+      <p:sp>
+        <p:nvSpPr>
+          <p:cNvPr id="7" name="TextBox 6"/>
+          <p:cNvSpPr txBox="1"/>
+          <p:nvPr/>
+        </p:nvSpPr>
+        <p:spPr>
+          <a:xfrm>
+            <a:off x="548640" y="2688336"/>
+            <a:ext cx="10515600" cy="502920"/>
+          </a:xfrm>
+          <a:prstGeom prst="rect">
+            <a:avLst/>
+          </a:prstGeom>
+          <a:noFill/>
+        </p:spPr>
+        <p:txBody>
+          <a:bodyPr wrap="square">
+            <a:spAutoFit/>
+          </a:bodyPr>
+          <a:lstStyle/>
+          <a:p>
+            <a:pPr algn="l"/>
+            <a:r>
+              <a:rPr sz="2200" b="0" i="0">
+                <a:solidFill>
+                  <a:srgbClr val="FFFFFF"/>
+                </a:solidFill>
+                <a:latin typeface="Calibri"/>
+              </a:rPr>
+              <a:t>•  Selects the best backup by highest committed bandwidth</a:t>
+            </a:r>
           </a:p>
         </p:txBody>
       </p:sp>
@@ -3994,29 +4731,29 @@
         </p:nvSpPr>
         <p:spPr>
           <a:xfrm>
-            <a:off x="6400800" y="1143000"/>
-            <a:ext cx="5029200" cy="1005840"/>
-          </a:xfrm>
-          <a:prstGeom prst="rect">
-            <a:avLst/>
-          </a:prstGeom>
-          <a:noFill/>
-        </p:spPr>
-        <p:txBody>
-          <a:bodyPr wrap="square">
-            <a:spAutoFit/>
-          </a:bodyPr>
-          <a:lstStyle/>
-          <a:p>
-            <a:pPr algn="ctr"/>
-            <a:r>
-              <a:rPr sz="5200" b="1" i="0">
-                <a:solidFill>
-                  <a:srgbClr val="22C55E"/>
-                </a:solidFill>
-                <a:latin typeface="Calibri"/>
-              </a:rPr>
-              <a:t>&lt; 30 sec</a:t>
+            <a:off x="548640" y="3218688"/>
+            <a:ext cx="10515600" cy="502920"/>
+          </a:xfrm>
+          <a:prstGeom prst="rect">
+            <a:avLst/>
+          </a:prstGeom>
+          <a:noFill/>
+        </p:spPr>
+        <p:txBody>
+          <a:bodyPr wrap="square">
+            <a:spAutoFit/>
+          </a:bodyPr>
+          <a:lstStyle/>
+          <a:p>
+            <a:pPr algn="l"/>
+            <a:r>
+              <a:rPr sz="2200" b="0" i="0">
+                <a:solidFill>
+                  <a:srgbClr val="FFFFFF"/>
+                </a:solidFill>
+                <a:latin typeface="Calibri"/>
+              </a:rPr>
+              <a:t>•  No hardcoded backup mappings — add a new circuit to NetBox and it is automatically considered</a:t>
             </a:r>
           </a:p>
         </p:txBody>
@@ -4029,29 +4766,29 @@
         </p:nvSpPr>
         <p:spPr>
           <a:xfrm>
-            <a:off x="6400800" y="1920240"/>
-            <a:ext cx="5029200" cy="457200"/>
-          </a:xfrm>
-          <a:prstGeom prst="rect">
-            <a:avLst/>
-          </a:prstGeom>
-          <a:noFill/>
-        </p:spPr>
-        <p:txBody>
-          <a:bodyPr wrap="square">
-            <a:spAutoFit/>
-          </a:bodyPr>
-          <a:lstStyle/>
-          <a:p>
-            <a:pPr algn="ctr"/>
-            <a:r>
-              <a:rPr sz="1800" b="0" i="0">
-                <a:solidFill>
-                  <a:srgbClr val="B0BCCC"/>
-                </a:solidFill>
-                <a:latin typeface="Calibri"/>
-              </a:rPr>
-              <a:t>Automated failover</a:t>
+            <a:off x="548640" y="3749040"/>
+            <a:ext cx="10515600" cy="502920"/>
+          </a:xfrm>
+          <a:prstGeom prst="rect">
+            <a:avLst/>
+          </a:prstGeom>
+          <a:noFill/>
+        </p:spPr>
+        <p:txBody>
+          <a:bodyPr wrap="square">
+            <a:spAutoFit/>
+          </a:bodyPr>
+          <a:lstStyle/>
+          <a:p>
+            <a:pPr algn="l"/>
+            <a:r>
+              <a:rPr sz="2200" b="0" i="0">
+                <a:solidFill>
+                  <a:srgbClr val="FFFFFF"/>
+                </a:solidFill>
+                <a:latin typeface="Calibri"/>
+              </a:rPr>
+              <a:t>•  Pushes router config changes to all routers at both ends</a:t>
             </a:r>
           </a:p>
         </p:txBody>
@@ -4064,29 +4801,29 @@
         </p:nvSpPr>
         <p:spPr>
           <a:xfrm>
-            <a:off x="457200" y="3246120"/>
-            <a:ext cx="11247120" cy="438912"/>
-          </a:xfrm>
-          <a:prstGeom prst="rect">
-            <a:avLst/>
-          </a:prstGeom>
-          <a:noFill/>
-        </p:spPr>
-        <p:txBody>
-          <a:bodyPr wrap="square">
-            <a:spAutoFit/>
-          </a:bodyPr>
-          <a:lstStyle/>
-          <a:p>
-            <a:pPr algn="l"/>
-            <a:r>
-              <a:rPr sz="1800" b="0" i="0">
+            <a:off x="548640" y="4279392"/>
+            <a:ext cx="10515600" cy="502920"/>
+          </a:xfrm>
+          <a:prstGeom prst="rect">
+            <a:avLst/>
+          </a:prstGeom>
+          <a:noFill/>
+        </p:spPr>
+        <p:txBody>
+          <a:bodyPr wrap="square">
+            <a:spAutoFit/>
+          </a:bodyPr>
+          <a:lstStyle/>
+          <a:p>
+            <a:pPr algn="l"/>
+            <a:r>
+              <a:rPr sz="2200" b="0" i="0">
                 <a:solidFill>
                   <a:srgbClr val="FFFFFF"/>
                 </a:solidFill>
                 <a:latin typeface="Calibri"/>
               </a:rPr>
-              <a:t>❖  NetBox is not just a CMDB — it is an active source of truth that drives automation</a:t>
+              <a:t>•  Writes back to NetBox: primary → offline, backup → active</a:t>
             </a:r>
           </a:p>
         </p:txBody>
@@ -4099,141 +4836,36 @@
         </p:nvSpPr>
         <p:spPr>
           <a:xfrm>
-            <a:off x="457200" y="3721608"/>
-            <a:ext cx="11247120" cy="438912"/>
-          </a:xfrm>
-          <a:prstGeom prst="rect">
-            <a:avLst/>
-          </a:prstGeom>
-          <a:noFill/>
-        </p:spPr>
-        <p:txBody>
-          <a:bodyPr wrap="square">
-            <a:spAutoFit/>
-          </a:bodyPr>
-          <a:lstStyle/>
-          <a:p>
-            <a:pPr algn="l"/>
-            <a:r>
-              <a:rPr sz="1800" b="0" i="0">
+            <a:off x="548640" y="4809744"/>
+            <a:ext cx="10515600" cy="502920"/>
+          </a:xfrm>
+          <a:prstGeom prst="rect">
+            <a:avLst/>
+          </a:prstGeom>
+          <a:noFill/>
+        </p:spPr>
+        <p:txBody>
+          <a:bodyPr wrap="square">
+            <a:spAutoFit/>
+          </a:bodyPr>
+          <a:lstStyle/>
+          <a:p>
+            <a:pPr algn="l"/>
+            <a:r>
+              <a:rPr sz="2200" b="0" i="0">
                 <a:solidFill>
                   <a:srgbClr val="FFFFFF"/>
                 </a:solidFill>
                 <a:latin typeface="Calibri"/>
               </a:rPr>
-              <a:t>❖  The moment a circuit changes state, the response is already running</a:t>
-            </a:r>
-          </a:p>
-        </p:txBody>
-      </p:sp>
-      <p:sp>
-        <p:nvSpPr>
-          <p:cNvPr id="12" name="TextBox 11"/>
-          <p:cNvSpPr txBox="1"/>
-          <p:nvPr/>
-        </p:nvSpPr>
-        <p:spPr>
-          <a:xfrm>
-            <a:off x="457200" y="4197096"/>
-            <a:ext cx="11247120" cy="438912"/>
-          </a:xfrm>
-          <a:prstGeom prst="rect">
-            <a:avLst/>
-          </a:prstGeom>
-          <a:noFill/>
-        </p:spPr>
-        <p:txBody>
-          <a:bodyPr wrap="square">
-            <a:spAutoFit/>
-          </a:bodyPr>
-          <a:lstStyle/>
-          <a:p>
-            <a:pPr algn="l"/>
-            <a:r>
-              <a:rPr sz="1800" b="0" i="0">
-                <a:solidFill>
-                  <a:srgbClr val="FFFFFF"/>
-                </a:solidFill>
-                <a:latin typeface="Calibri"/>
-              </a:rPr>
-              <a:t>❖  The playbook discovers backup paths dynamically — works for any circuit, any site</a:t>
-            </a:r>
-          </a:p>
-        </p:txBody>
-      </p:sp>
-      <p:sp>
-        <p:nvSpPr>
-          <p:cNvPr id="13" name="TextBox 12"/>
-          <p:cNvSpPr txBox="1"/>
-          <p:nvPr/>
-        </p:nvSpPr>
-        <p:spPr>
-          <a:xfrm>
-            <a:off x="457200" y="4672584"/>
-            <a:ext cx="11247120" cy="438912"/>
-          </a:xfrm>
-          <a:prstGeom prst="rect">
-            <a:avLst/>
-          </a:prstGeom>
-          <a:noFill/>
-        </p:spPr>
-        <p:txBody>
-          <a:bodyPr wrap="square">
-            <a:spAutoFit/>
-          </a:bodyPr>
-          <a:lstStyle/>
-          <a:p>
-            <a:pPr algn="l"/>
-            <a:r>
-              <a:rPr sz="1800" b="0" i="0">
-                <a:solidFill>
-                  <a:srgbClr val="FFFFFF"/>
-                </a:solidFill>
-                <a:latin typeface="Calibri"/>
-              </a:rPr>
-              <a:t>❖  Every failover is logged in NetBox, captured in AAP job history, and published as a report</a:t>
-            </a:r>
-          </a:p>
-        </p:txBody>
-      </p:sp>
-      <p:sp>
-        <p:nvSpPr>
-          <p:cNvPr id="14" name="TextBox 13"/>
-          <p:cNvSpPr txBox="1"/>
-          <p:nvPr/>
-        </p:nvSpPr>
-        <p:spPr>
-          <a:xfrm>
-            <a:off x="457200" y="5148072"/>
-            <a:ext cx="11247120" cy="438912"/>
-          </a:xfrm>
-          <a:prstGeom prst="rect">
-            <a:avLst/>
-          </a:prstGeom>
-          <a:noFill/>
-        </p:spPr>
-        <p:txBody>
-          <a:bodyPr wrap="square">
-            <a:spAutoFit/>
-          </a:bodyPr>
-          <a:lstStyle/>
-          <a:p>
-            <a:pPr algn="l"/>
-            <a:r>
-              <a:rPr sz="1800" b="0" i="0">
-                <a:solidFill>
-                  <a:srgbClr val="FFFFFF"/>
-                </a:solidFill>
-                <a:latin typeface="Calibri"/>
-              </a:rPr>
-              <a:t>❖  MCP lets Claude query live NetBox data — confirm outcomes in natural language</a:t>
+              <a:t>•  Generates and publishes the HTML failover incident report</a:t>
             </a:r>
           </a:p>
         </p:txBody>
       </p:sp>
       <p:pic>
         <p:nvPicPr>
-          <p:cNvPr id="15" name="Picture 14" descr="netbox_logo_bright.png"/>
+          <p:cNvPr id="12" name="Picture 11" descr="netbox_logo_bright.png"/>
           <p:cNvPicPr>
             <a:picLocks noChangeAspect="1"/>
           </p:cNvPicPr>
@@ -4333,6 +4965,539 @@
         <p:spPr>
           <a:xfrm>
             <a:off x="457200" y="228600"/>
+            <a:ext cx="10058400" cy="640080"/>
+          </a:xfrm>
+          <a:prstGeom prst="rect">
+            <a:avLst/>
+          </a:prstGeom>
+          <a:noFill/>
+        </p:spPr>
+        <p:txBody>
+          <a:bodyPr wrap="square">
+            <a:spAutoFit/>
+          </a:bodyPr>
+          <a:lstStyle/>
+          <a:p>
+            <a:pPr algn="l"/>
+            <a:r>
+              <a:rPr sz="3200" b="1" i="0">
+                <a:solidFill>
+                  <a:srgbClr val="00C2A8"/>
+                </a:solidFill>
+                <a:latin typeface="Calibri"/>
+              </a:rPr>
+              <a:t>The Business Case</a:t>
+            </a:r>
+          </a:p>
+        </p:txBody>
+      </p:sp>
+      <p:sp>
+        <p:nvSpPr>
+          <p:cNvPr id="4" name="Rectangle 3"/>
+          <p:cNvSpPr/>
+          <p:nvPr/>
+        </p:nvSpPr>
+        <p:spPr>
+          <a:xfrm>
+            <a:off x="457200" y="1005840"/>
+            <a:ext cx="5394960" cy="2011680"/>
+          </a:xfrm>
+          <a:prstGeom prst="rect">
+            <a:avLst/>
+          </a:prstGeom>
+          <a:solidFill>
+            <a:srgbClr val="142A3E"/>
+          </a:solidFill>
+          <a:ln w="19050">
+            <a:solidFill>
+              <a:srgbClr val="EF4444"/>
+            </a:solidFill>
+          </a:ln>
+        </p:spPr>
+        <p:style>
+          <a:lnRef idx="1">
+            <a:schemeClr val="accent1"/>
+          </a:lnRef>
+          <a:fillRef idx="3">
+            <a:schemeClr val="accent1"/>
+          </a:fillRef>
+          <a:effectRef idx="2">
+            <a:schemeClr val="accent1"/>
+          </a:effectRef>
+          <a:fontRef idx="minor">
+            <a:schemeClr val="lt1"/>
+          </a:fontRef>
+        </p:style>
+        <p:txBody>
+          <a:bodyPr rtlCol="0" anchor="ctr"/>
+          <a:lstStyle/>
+          <a:p>
+            <a:pPr algn="ctr"/>
+          </a:p>
+        </p:txBody>
+      </p:sp>
+      <p:sp>
+        <p:nvSpPr>
+          <p:cNvPr id="5" name="TextBox 4"/>
+          <p:cNvSpPr txBox="1"/>
+          <p:nvPr/>
+        </p:nvSpPr>
+        <p:spPr>
+          <a:xfrm>
+            <a:off x="640080" y="1143000"/>
+            <a:ext cx="5029200" cy="1005840"/>
+          </a:xfrm>
+          <a:prstGeom prst="rect">
+            <a:avLst/>
+          </a:prstGeom>
+          <a:noFill/>
+        </p:spPr>
+        <p:txBody>
+          <a:bodyPr wrap="square">
+            <a:spAutoFit/>
+          </a:bodyPr>
+          <a:lstStyle/>
+          <a:p>
+            <a:pPr algn="ctr"/>
+            <a:r>
+              <a:rPr sz="5200" b="1" i="0">
+                <a:solidFill>
+                  <a:srgbClr val="EF4444"/>
+                </a:solidFill>
+                <a:latin typeface="Calibri"/>
+              </a:rPr>
+              <a:t>~45 min</a:t>
+            </a:r>
+          </a:p>
+        </p:txBody>
+      </p:sp>
+      <p:sp>
+        <p:nvSpPr>
+          <p:cNvPr id="6" name="TextBox 5"/>
+          <p:cNvSpPr txBox="1"/>
+          <p:nvPr/>
+        </p:nvSpPr>
+        <p:spPr>
+          <a:xfrm>
+            <a:off x="640080" y="1920240"/>
+            <a:ext cx="5029200" cy="457200"/>
+          </a:xfrm>
+          <a:prstGeom prst="rect">
+            <a:avLst/>
+          </a:prstGeom>
+          <a:noFill/>
+        </p:spPr>
+        <p:txBody>
+          <a:bodyPr wrap="square">
+            <a:spAutoFit/>
+          </a:bodyPr>
+          <a:lstStyle/>
+          <a:p>
+            <a:pPr algn="ctr"/>
+            <a:r>
+              <a:rPr sz="1800" b="0" i="0">
+                <a:solidFill>
+                  <a:srgbClr val="B0BCCC"/>
+                </a:solidFill>
+                <a:latin typeface="Calibri"/>
+              </a:rPr>
+              <a:t>Manual failover</a:t>
+            </a:r>
+          </a:p>
+        </p:txBody>
+      </p:sp>
+      <p:sp>
+        <p:nvSpPr>
+          <p:cNvPr id="7" name="Rectangle 6"/>
+          <p:cNvSpPr/>
+          <p:nvPr/>
+        </p:nvSpPr>
+        <p:spPr>
+          <a:xfrm>
+            <a:off x="6217920" y="1005840"/>
+            <a:ext cx="5394960" cy="2011680"/>
+          </a:xfrm>
+          <a:prstGeom prst="rect">
+            <a:avLst/>
+          </a:prstGeom>
+          <a:solidFill>
+            <a:srgbClr val="142A3E"/>
+          </a:solidFill>
+          <a:ln w="19050">
+            <a:solidFill>
+              <a:srgbClr val="22C55E"/>
+            </a:solidFill>
+          </a:ln>
+        </p:spPr>
+        <p:style>
+          <a:lnRef idx="1">
+            <a:schemeClr val="accent1"/>
+          </a:lnRef>
+          <a:fillRef idx="3">
+            <a:schemeClr val="accent1"/>
+          </a:fillRef>
+          <a:effectRef idx="2">
+            <a:schemeClr val="accent1"/>
+          </a:effectRef>
+          <a:fontRef idx="minor">
+            <a:schemeClr val="lt1"/>
+          </a:fontRef>
+        </p:style>
+        <p:txBody>
+          <a:bodyPr rtlCol="0" anchor="ctr"/>
+          <a:lstStyle/>
+          <a:p>
+            <a:pPr algn="ctr"/>
+          </a:p>
+        </p:txBody>
+      </p:sp>
+      <p:sp>
+        <p:nvSpPr>
+          <p:cNvPr id="8" name="TextBox 7"/>
+          <p:cNvSpPr txBox="1"/>
+          <p:nvPr/>
+        </p:nvSpPr>
+        <p:spPr>
+          <a:xfrm>
+            <a:off x="6400800" y="1143000"/>
+            <a:ext cx="5029200" cy="1005840"/>
+          </a:xfrm>
+          <a:prstGeom prst="rect">
+            <a:avLst/>
+          </a:prstGeom>
+          <a:noFill/>
+        </p:spPr>
+        <p:txBody>
+          <a:bodyPr wrap="square">
+            <a:spAutoFit/>
+          </a:bodyPr>
+          <a:lstStyle/>
+          <a:p>
+            <a:pPr algn="ctr"/>
+            <a:r>
+              <a:rPr sz="5200" b="1" i="0">
+                <a:solidFill>
+                  <a:srgbClr val="22C55E"/>
+                </a:solidFill>
+                <a:latin typeface="Calibri"/>
+              </a:rPr>
+              <a:t>&lt; 30 sec</a:t>
+            </a:r>
+          </a:p>
+        </p:txBody>
+      </p:sp>
+      <p:sp>
+        <p:nvSpPr>
+          <p:cNvPr id="9" name="TextBox 8"/>
+          <p:cNvSpPr txBox="1"/>
+          <p:nvPr/>
+        </p:nvSpPr>
+        <p:spPr>
+          <a:xfrm>
+            <a:off x="6400800" y="1920240"/>
+            <a:ext cx="5029200" cy="457200"/>
+          </a:xfrm>
+          <a:prstGeom prst="rect">
+            <a:avLst/>
+          </a:prstGeom>
+          <a:noFill/>
+        </p:spPr>
+        <p:txBody>
+          <a:bodyPr wrap="square">
+            <a:spAutoFit/>
+          </a:bodyPr>
+          <a:lstStyle/>
+          <a:p>
+            <a:pPr algn="ctr"/>
+            <a:r>
+              <a:rPr sz="1800" b="0" i="0">
+                <a:solidFill>
+                  <a:srgbClr val="B0BCCC"/>
+                </a:solidFill>
+                <a:latin typeface="Calibri"/>
+              </a:rPr>
+              <a:t>Automated failover</a:t>
+            </a:r>
+          </a:p>
+        </p:txBody>
+      </p:sp>
+      <p:sp>
+        <p:nvSpPr>
+          <p:cNvPr id="10" name="TextBox 9"/>
+          <p:cNvSpPr txBox="1"/>
+          <p:nvPr/>
+        </p:nvSpPr>
+        <p:spPr>
+          <a:xfrm>
+            <a:off x="457200" y="3246120"/>
+            <a:ext cx="11247120" cy="438912"/>
+          </a:xfrm>
+          <a:prstGeom prst="rect">
+            <a:avLst/>
+          </a:prstGeom>
+          <a:noFill/>
+        </p:spPr>
+        <p:txBody>
+          <a:bodyPr wrap="square">
+            <a:spAutoFit/>
+          </a:bodyPr>
+          <a:lstStyle/>
+          <a:p>
+            <a:pPr algn="l"/>
+            <a:r>
+              <a:rPr sz="1800" b="0" i="0">
+                <a:solidFill>
+                  <a:srgbClr val="FFFFFF"/>
+                </a:solidFill>
+                <a:latin typeface="Calibri"/>
+              </a:rPr>
+              <a:t>❖  NetBox is not just a CMDB — it is an active source of truth that drives automation</a:t>
+            </a:r>
+          </a:p>
+        </p:txBody>
+      </p:sp>
+      <p:sp>
+        <p:nvSpPr>
+          <p:cNvPr id="11" name="TextBox 10"/>
+          <p:cNvSpPr txBox="1"/>
+          <p:nvPr/>
+        </p:nvSpPr>
+        <p:spPr>
+          <a:xfrm>
+            <a:off x="457200" y="3721608"/>
+            <a:ext cx="11247120" cy="438912"/>
+          </a:xfrm>
+          <a:prstGeom prst="rect">
+            <a:avLst/>
+          </a:prstGeom>
+          <a:noFill/>
+        </p:spPr>
+        <p:txBody>
+          <a:bodyPr wrap="square">
+            <a:spAutoFit/>
+          </a:bodyPr>
+          <a:lstStyle/>
+          <a:p>
+            <a:pPr algn="l"/>
+            <a:r>
+              <a:rPr sz="1800" b="0" i="0">
+                <a:solidFill>
+                  <a:srgbClr val="FFFFFF"/>
+                </a:solidFill>
+                <a:latin typeface="Calibri"/>
+              </a:rPr>
+              <a:t>❖  The moment a circuit changes state, the response is already running</a:t>
+            </a:r>
+          </a:p>
+        </p:txBody>
+      </p:sp>
+      <p:sp>
+        <p:nvSpPr>
+          <p:cNvPr id="12" name="TextBox 11"/>
+          <p:cNvSpPr txBox="1"/>
+          <p:nvPr/>
+        </p:nvSpPr>
+        <p:spPr>
+          <a:xfrm>
+            <a:off x="457200" y="4197096"/>
+            <a:ext cx="11247120" cy="438912"/>
+          </a:xfrm>
+          <a:prstGeom prst="rect">
+            <a:avLst/>
+          </a:prstGeom>
+          <a:noFill/>
+        </p:spPr>
+        <p:txBody>
+          <a:bodyPr wrap="square">
+            <a:spAutoFit/>
+          </a:bodyPr>
+          <a:lstStyle/>
+          <a:p>
+            <a:pPr algn="l"/>
+            <a:r>
+              <a:rPr sz="1800" b="0" i="0">
+                <a:solidFill>
+                  <a:srgbClr val="FFFFFF"/>
+                </a:solidFill>
+                <a:latin typeface="Calibri"/>
+              </a:rPr>
+              <a:t>❖  The playbook discovers backup paths dynamically — works for any circuit, any site</a:t>
+            </a:r>
+          </a:p>
+        </p:txBody>
+      </p:sp>
+      <p:sp>
+        <p:nvSpPr>
+          <p:cNvPr id="13" name="TextBox 12"/>
+          <p:cNvSpPr txBox="1"/>
+          <p:nvPr/>
+        </p:nvSpPr>
+        <p:spPr>
+          <a:xfrm>
+            <a:off x="457200" y="4672584"/>
+            <a:ext cx="11247120" cy="438912"/>
+          </a:xfrm>
+          <a:prstGeom prst="rect">
+            <a:avLst/>
+          </a:prstGeom>
+          <a:noFill/>
+        </p:spPr>
+        <p:txBody>
+          <a:bodyPr wrap="square">
+            <a:spAutoFit/>
+          </a:bodyPr>
+          <a:lstStyle/>
+          <a:p>
+            <a:pPr algn="l"/>
+            <a:r>
+              <a:rPr sz="1800" b="0" i="0">
+                <a:solidFill>
+                  <a:srgbClr val="FFFFFF"/>
+                </a:solidFill>
+                <a:latin typeface="Calibri"/>
+              </a:rPr>
+              <a:t>❖  Every failover is logged in NetBox, captured in AAP job history, and published as a report</a:t>
+            </a:r>
+          </a:p>
+        </p:txBody>
+      </p:sp>
+      <p:sp>
+        <p:nvSpPr>
+          <p:cNvPr id="14" name="TextBox 13"/>
+          <p:cNvSpPr txBox="1"/>
+          <p:nvPr/>
+        </p:nvSpPr>
+        <p:spPr>
+          <a:xfrm>
+            <a:off x="457200" y="5148072"/>
+            <a:ext cx="11247120" cy="438912"/>
+          </a:xfrm>
+          <a:prstGeom prst="rect">
+            <a:avLst/>
+          </a:prstGeom>
+          <a:noFill/>
+        </p:spPr>
+        <p:txBody>
+          <a:bodyPr wrap="square">
+            <a:spAutoFit/>
+          </a:bodyPr>
+          <a:lstStyle/>
+          <a:p>
+            <a:pPr algn="l"/>
+            <a:r>
+              <a:rPr sz="1800" b="0" i="0">
+                <a:solidFill>
+                  <a:srgbClr val="FFFFFF"/>
+                </a:solidFill>
+                <a:latin typeface="Calibri"/>
+              </a:rPr>
+              <a:t>❖  MCP lets Claude query live NetBox data — confirm outcomes in natural language</a:t>
+            </a:r>
+          </a:p>
+        </p:txBody>
+      </p:sp>
+      <p:pic>
+        <p:nvPicPr>
+          <p:cNvPr id="15" name="Picture 14" descr="netbox_logo_bright.png"/>
+          <p:cNvPicPr>
+            <a:picLocks noChangeAspect="1"/>
+          </p:cNvPicPr>
+          <p:nvPr/>
+        </p:nvPicPr>
+        <p:blipFill>
+          <a:blip r:embed="rId2"/>
+          <a:stretch>
+            <a:fillRect/>
+          </a:stretch>
+        </p:blipFill>
+        <p:spPr>
+          <a:xfrm>
+            <a:off x="10680192" y="6053328"/>
+            <a:ext cx="1280160" cy="361645"/>
+          </a:xfrm>
+          <a:prstGeom prst="rect">
+            <a:avLst/>
+          </a:prstGeom>
+        </p:spPr>
+      </p:pic>
+    </p:spTree>
+  </p:cSld>
+  <p:clrMapOvr>
+    <a:masterClrMapping/>
+  </p:clrMapOvr>
+</p:sld>
+</file>
+
+<file path=ppt/slides/slide13.xml><?xml version="1.0" encoding="utf-8"?>
+<p:sld xmlns:a="http://schemas.openxmlformats.org/drawingml/2006/main" xmlns:p="http://schemas.openxmlformats.org/presentationml/2006/main" xmlns:r="http://schemas.openxmlformats.org/officeDocument/2006/relationships">
+  <p:cSld>
+    <p:bg>
+      <p:bgPr>
+        <a:solidFill>
+          <a:srgbClr val="0D1B2A"/>
+        </a:solidFill>
+        <a:effectLst/>
+      </p:bgPr>
+    </p:bg>
+    <p:spTree>
+      <p:nvGrpSpPr>
+        <p:cNvPr id="1" name=""/>
+        <p:cNvGrpSpPr/>
+        <p:nvPr/>
+      </p:nvGrpSpPr>
+      <p:grpSpPr/>
+      <p:sp>
+        <p:nvSpPr>
+          <p:cNvPr id="2" name="Rectangle 1"/>
+          <p:cNvSpPr/>
+          <p:nvPr/>
+        </p:nvSpPr>
+        <p:spPr>
+          <a:xfrm>
+            <a:off x="0" y="73152"/>
+            <a:ext cx="12188952" cy="54864"/>
+          </a:xfrm>
+          <a:prstGeom prst="rect">
+            <a:avLst/>
+          </a:prstGeom>
+          <a:solidFill>
+            <a:srgbClr val="00C2A8"/>
+          </a:solidFill>
+          <a:ln>
+            <a:noFill/>
+          </a:ln>
+        </p:spPr>
+        <p:style>
+          <a:lnRef idx="1">
+            <a:schemeClr val="accent1"/>
+          </a:lnRef>
+          <a:fillRef idx="3">
+            <a:schemeClr val="accent1"/>
+          </a:fillRef>
+          <a:effectRef idx="2">
+            <a:schemeClr val="accent1"/>
+          </a:effectRef>
+          <a:fontRef idx="minor">
+            <a:schemeClr val="lt1"/>
+          </a:fontRef>
+        </p:style>
+        <p:txBody>
+          <a:bodyPr rtlCol="0" anchor="ctr"/>
+          <a:lstStyle/>
+          <a:p>
+            <a:pPr algn="ctr"/>
+          </a:p>
+        </p:txBody>
+      </p:sp>
+      <p:sp>
+        <p:nvSpPr>
+          <p:cNvPr id="3" name="TextBox 2"/>
+          <p:cNvSpPr txBox="1"/>
+          <p:nvPr/>
+        </p:nvSpPr>
+        <p:spPr>
+          <a:xfrm>
+            <a:off x="457200" y="228600"/>
             <a:ext cx="10972800" cy="640080"/>
           </a:xfrm>
           <a:prstGeom prst="rect">
@@ -5791,7 +6956,7 @@
         <p:spPr>
           <a:xfrm>
             <a:off x="457200" y="182880"/>
-            <a:ext cx="10972800" cy="685800"/>
+            <a:ext cx="11430000" cy="685800"/>
           </a:xfrm>
           <a:prstGeom prst="rect">
             <a:avLst/>
@@ -5812,21 +6977,134 @@
                 </a:solidFill>
                 <a:latin typeface="Calibri"/>
               </a:rPr>
-              <a:t>Why Did It Take 45 Minutes?</a:t>
-            </a:r>
-          </a:p>
-        </p:txBody>
-      </p:sp>
-      <p:sp>
-        <p:nvSpPr>
-          <p:cNvPr id="4" name="Rectangle 3"/>
+              <a:t>When a Circuit Fails, Three Things Have to Happen</a:t>
+            </a:r>
+          </a:p>
+        </p:txBody>
+      </p:sp>
+      <p:sp>
+        <p:nvSpPr>
+          <p:cNvPr id="4" name="TextBox 3"/>
+          <p:cNvSpPr txBox="1"/>
+          <p:nvPr/>
+        </p:nvSpPr>
+        <p:spPr>
+          <a:xfrm>
+            <a:off x="457200" y="914400"/>
+            <a:ext cx="10972800" cy="411480"/>
+          </a:xfrm>
+          <a:prstGeom prst="rect">
+            <a:avLst/>
+          </a:prstGeom>
+          <a:noFill/>
+        </p:spPr>
+        <p:txBody>
+          <a:bodyPr wrap="square">
+            <a:spAutoFit/>
+          </a:bodyPr>
+          <a:lstStyle/>
+          <a:p>
+            <a:pPr algn="l"/>
+            <a:r>
+              <a:rPr sz="1800" b="0" i="1">
+                <a:solidFill>
+                  <a:srgbClr val="B0BCCC"/>
+                </a:solidFill>
+                <a:latin typeface="Calibri"/>
+              </a:rPr>
+              <a:t>Every time. Under pressure. With the clock running.</a:t>
+            </a:r>
+          </a:p>
+        </p:txBody>
+      </p:sp>
+      <p:sp>
+        <p:nvSpPr>
+          <p:cNvPr id="5" name="Rectangle 4"/>
           <p:cNvSpPr/>
           <p:nvPr/>
         </p:nvSpPr>
         <p:spPr>
           <a:xfrm>
-            <a:off x="365760" y="1005840"/>
-            <a:ext cx="1097280" cy="384048"/>
+            <a:off x="320040" y="1600200"/>
+            <a:ext cx="502920" cy="502920"/>
+          </a:xfrm>
+          <a:prstGeom prst="rect">
+            <a:avLst/>
+          </a:prstGeom>
+          <a:solidFill>
+            <a:srgbClr val="EF4444"/>
+          </a:solidFill>
+          <a:ln>
+            <a:noFill/>
+          </a:ln>
+        </p:spPr>
+        <p:style>
+          <a:lnRef idx="1">
+            <a:schemeClr val="accent1"/>
+          </a:lnRef>
+          <a:fillRef idx="3">
+            <a:schemeClr val="accent1"/>
+          </a:fillRef>
+          <a:effectRef idx="2">
+            <a:schemeClr val="accent1"/>
+          </a:effectRef>
+          <a:fontRef idx="minor">
+            <a:schemeClr val="lt1"/>
+          </a:fontRef>
+        </p:style>
+        <p:txBody>
+          <a:bodyPr rtlCol="0" anchor="ctr"/>
+          <a:lstStyle/>
+          <a:p>
+            <a:pPr algn="ctr"/>
+          </a:p>
+        </p:txBody>
+      </p:sp>
+      <p:sp>
+        <p:nvSpPr>
+          <p:cNvPr id="6" name="TextBox 5"/>
+          <p:cNvSpPr txBox="1"/>
+          <p:nvPr/>
+        </p:nvSpPr>
+        <p:spPr>
+          <a:xfrm>
+            <a:off x="320040" y="1581912"/>
+            <a:ext cx="502920" cy="502920"/>
+          </a:xfrm>
+          <a:prstGeom prst="rect">
+            <a:avLst/>
+          </a:prstGeom>
+          <a:noFill/>
+        </p:spPr>
+        <p:txBody>
+          <a:bodyPr wrap="square">
+            <a:spAutoFit/>
+          </a:bodyPr>
+          <a:lstStyle/>
+          <a:p>
+            <a:pPr algn="ctr"/>
+            <a:r>
+              <a:rPr sz="2200" b="1" i="0">
+                <a:solidFill>
+                  <a:srgbClr val="0D1B2A"/>
+                </a:solidFill>
+                <a:latin typeface="Calibri"/>
+              </a:rPr>
+              <a:t>1</a:t>
+            </a:r>
+          </a:p>
+        </p:txBody>
+      </p:sp>
+      <p:sp>
+        <p:nvSpPr>
+          <p:cNvPr id="7" name="Rectangle 6"/>
+          <p:cNvSpPr/>
+          <p:nvPr/>
+        </p:nvSpPr>
+        <p:spPr>
+          <a:xfrm>
+            <a:off x="1005840" y="1508760"/>
+            <a:ext cx="10789920" cy="1417320"/>
           </a:xfrm>
           <a:prstGeom prst="rect">
             <a:avLst/>
@@ -5864,84 +7142,163 @@
       </p:sp>
       <p:sp>
         <p:nvSpPr>
-          <p:cNvPr id="5" name="TextBox 4"/>
-          <p:cNvSpPr txBox="1"/>
-          <p:nvPr/>
-        </p:nvSpPr>
-        <p:spPr>
-          <a:xfrm>
-            <a:off x="365760" y="1042416"/>
-            <a:ext cx="1097280" cy="347472"/>
-          </a:xfrm>
-          <a:prstGeom prst="rect">
-            <a:avLst/>
-          </a:prstGeom>
-          <a:noFill/>
-        </p:spPr>
-        <p:txBody>
-          <a:bodyPr wrap="square">
-            <a:spAutoFit/>
-          </a:bodyPr>
+          <p:cNvPr id="8" name="TextBox 7"/>
+          <p:cNvSpPr txBox="1"/>
+          <p:nvPr/>
+        </p:nvSpPr>
+        <p:spPr>
+          <a:xfrm>
+            <a:off x="1188720" y="1600200"/>
+            <a:ext cx="10332720" cy="457200"/>
+          </a:xfrm>
+          <a:prstGeom prst="rect">
+            <a:avLst/>
+          </a:prstGeom>
+          <a:noFill/>
+        </p:spPr>
+        <p:txBody>
+          <a:bodyPr wrap="square">
+            <a:spAutoFit/>
+          </a:bodyPr>
+          <a:lstStyle/>
+          <a:p>
+            <a:pPr algn="l"/>
+            <a:r>
+              <a:rPr sz="2000" b="1" i="0">
+                <a:solidFill>
+                  <a:srgbClr val="EF4444"/>
+                </a:solidFill>
+                <a:latin typeface="Calibri"/>
+              </a:rPr>
+              <a:t>Disable the failed circuit</a:t>
+            </a:r>
+          </a:p>
+        </p:txBody>
+      </p:sp>
+      <p:sp>
+        <p:nvSpPr>
+          <p:cNvPr id="9" name="TextBox 8"/>
+          <p:cNvSpPr txBox="1"/>
+          <p:nvPr/>
+        </p:nvSpPr>
+        <p:spPr>
+          <a:xfrm>
+            <a:off x="1188720" y="2057400"/>
+            <a:ext cx="10332720" cy="777240"/>
+          </a:xfrm>
+          <a:prstGeom prst="rect">
+            <a:avLst/>
+          </a:prstGeom>
+          <a:noFill/>
+        </p:spPr>
+        <p:txBody>
+          <a:bodyPr wrap="square">
+            <a:spAutoFit/>
+          </a:bodyPr>
+          <a:lstStyle/>
+          <a:p>
+            <a:pPr algn="l"/>
+            <a:r>
+              <a:rPr sz="1500" b="0" i="0">
+                <a:solidFill>
+                  <a:srgbClr val="FFFFFF"/>
+                </a:solidFill>
+                <a:latin typeface="Calibri"/>
+              </a:rPr>
+              <a:t>Identify the failed link, confirm it is down, and mark it as offline in your systems.
+With no single source of truth, just finding it can take 10–15 minutes.</a:t>
+            </a:r>
+          </a:p>
+        </p:txBody>
+      </p:sp>
+      <p:sp>
+        <p:nvSpPr>
+          <p:cNvPr id="10" name="Rectangle 9"/>
+          <p:cNvSpPr/>
+          <p:nvPr/>
+        </p:nvSpPr>
+        <p:spPr>
+          <a:xfrm>
+            <a:off x="320040" y="3200400"/>
+            <a:ext cx="502920" cy="502920"/>
+          </a:xfrm>
+          <a:prstGeom prst="rect">
+            <a:avLst/>
+          </a:prstGeom>
+          <a:solidFill>
+            <a:srgbClr val="F59E0E"/>
+          </a:solidFill>
+          <a:ln>
+            <a:noFill/>
+          </a:ln>
+        </p:spPr>
+        <p:style>
+          <a:lnRef idx="1">
+            <a:schemeClr val="accent1"/>
+          </a:lnRef>
+          <a:fillRef idx="3">
+            <a:schemeClr val="accent1"/>
+          </a:fillRef>
+          <a:effectRef idx="2">
+            <a:schemeClr val="accent1"/>
+          </a:effectRef>
+          <a:fontRef idx="minor">
+            <a:schemeClr val="lt1"/>
+          </a:fontRef>
+        </p:style>
+        <p:txBody>
+          <a:bodyPr rtlCol="0" anchor="ctr"/>
           <a:lstStyle/>
           <a:p>
             <a:pPr algn="ctr"/>
-            <a:r>
-              <a:rPr sz="1400" b="1" i="0">
-                <a:solidFill>
-                  <a:srgbClr val="EF4444"/>
-                </a:solidFill>
-                <a:latin typeface="Calibri"/>
-              </a:rPr>
-              <a:t>0:00</a:t>
-            </a:r>
-          </a:p>
-        </p:txBody>
-      </p:sp>
-      <p:sp>
-        <p:nvSpPr>
-          <p:cNvPr id="6" name="TextBox 5"/>
-          <p:cNvSpPr txBox="1"/>
-          <p:nvPr/>
-        </p:nvSpPr>
-        <p:spPr>
-          <a:xfrm>
-            <a:off x="1600200" y="1051560"/>
-            <a:ext cx="10058400" cy="347472"/>
-          </a:xfrm>
-          <a:prstGeom prst="rect">
-            <a:avLst/>
-          </a:prstGeom>
-          <a:noFill/>
-        </p:spPr>
-        <p:txBody>
-          <a:bodyPr wrap="square">
-            <a:spAutoFit/>
-          </a:bodyPr>
-          <a:lstStyle/>
-          <a:p>
-            <a:pPr algn="l"/>
-            <a:r>
-              <a:rPr sz="1500" b="0" i="0">
-                <a:solidFill>
-                  <a:srgbClr val="FFFFFF"/>
-                </a:solidFill>
-                <a:latin typeface="Calibri"/>
-              </a:rPr>
-              <a:t>Alert fires. Engineers are paged.</a:t>
-            </a:r>
-          </a:p>
-        </p:txBody>
-      </p:sp>
-      <p:sp>
-        <p:nvSpPr>
-          <p:cNvPr id="7" name="Rectangle 6"/>
+          </a:p>
+        </p:txBody>
+      </p:sp>
+      <p:sp>
+        <p:nvSpPr>
+          <p:cNvPr id="11" name="TextBox 10"/>
+          <p:cNvSpPr txBox="1"/>
+          <p:nvPr/>
+        </p:nvSpPr>
+        <p:spPr>
+          <a:xfrm>
+            <a:off x="320040" y="3182112"/>
+            <a:ext cx="502920" cy="502920"/>
+          </a:xfrm>
+          <a:prstGeom prst="rect">
+            <a:avLst/>
+          </a:prstGeom>
+          <a:noFill/>
+        </p:spPr>
+        <p:txBody>
+          <a:bodyPr wrap="square">
+            <a:spAutoFit/>
+          </a:bodyPr>
+          <a:lstStyle/>
+          <a:p>
+            <a:pPr algn="ctr"/>
+            <a:r>
+              <a:rPr sz="2200" b="1" i="0">
+                <a:solidFill>
+                  <a:srgbClr val="0D1B2A"/>
+                </a:solidFill>
+                <a:latin typeface="Calibri"/>
+              </a:rPr>
+              <a:t>2</a:t>
+            </a:r>
+          </a:p>
+        </p:txBody>
+      </p:sp>
+      <p:sp>
+        <p:nvSpPr>
+          <p:cNvPr id="12" name="Rectangle 11"/>
           <p:cNvSpPr/>
           <p:nvPr/>
         </p:nvSpPr>
         <p:spPr>
           <a:xfrm>
-            <a:off x="365760" y="1481328"/>
-            <a:ext cx="1097280" cy="384048"/>
+            <a:off x="1005840" y="3108960"/>
+            <a:ext cx="10789920" cy="1417320"/>
           </a:xfrm>
           <a:prstGeom prst="rect">
             <a:avLst/>
@@ -5979,84 +7336,163 @@
       </p:sp>
       <p:sp>
         <p:nvSpPr>
-          <p:cNvPr id="8" name="TextBox 7"/>
-          <p:cNvSpPr txBox="1"/>
-          <p:nvPr/>
-        </p:nvSpPr>
-        <p:spPr>
-          <a:xfrm>
-            <a:off x="365760" y="1517904"/>
-            <a:ext cx="1097280" cy="347472"/>
-          </a:xfrm>
-          <a:prstGeom prst="rect">
-            <a:avLst/>
-          </a:prstGeom>
-          <a:noFill/>
-        </p:spPr>
-        <p:txBody>
-          <a:bodyPr wrap="square">
-            <a:spAutoFit/>
-          </a:bodyPr>
+          <p:cNvPr id="13" name="TextBox 12"/>
+          <p:cNvSpPr txBox="1"/>
+          <p:nvPr/>
+        </p:nvSpPr>
+        <p:spPr>
+          <a:xfrm>
+            <a:off x="1188720" y="3200400"/>
+            <a:ext cx="10332720" cy="457200"/>
+          </a:xfrm>
+          <a:prstGeom prst="rect">
+            <a:avLst/>
+          </a:prstGeom>
+          <a:noFill/>
+        </p:spPr>
+        <p:txBody>
+          <a:bodyPr wrap="square">
+            <a:spAutoFit/>
+          </a:bodyPr>
+          <a:lstStyle/>
+          <a:p>
+            <a:pPr algn="l"/>
+            <a:r>
+              <a:rPr sz="2000" b="1" i="0">
+                <a:solidFill>
+                  <a:srgbClr val="F59E0E"/>
+                </a:solidFill>
+                <a:latin typeface="Calibri"/>
+              </a:rPr>
+              <a:t>Fail over to the most appropriate alternative</a:t>
+            </a:r>
+          </a:p>
+        </p:txBody>
+      </p:sp>
+      <p:sp>
+        <p:nvSpPr>
+          <p:cNvPr id="14" name="TextBox 13"/>
+          <p:cNvSpPr txBox="1"/>
+          <p:nvPr/>
+        </p:nvSpPr>
+        <p:spPr>
+          <a:xfrm>
+            <a:off x="1188720" y="3657600"/>
+            <a:ext cx="10332720" cy="777240"/>
+          </a:xfrm>
+          <a:prstGeom prst="rect">
+            <a:avLst/>
+          </a:prstGeom>
+          <a:noFill/>
+        </p:spPr>
+        <p:txBody>
+          <a:bodyPr wrap="square">
+            <a:spAutoFit/>
+          </a:bodyPr>
+          <a:lstStyle/>
+          <a:p>
+            <a:pPr algn="l"/>
+            <a:r>
+              <a:rPr sz="1500" b="0" i="0">
+                <a:solidFill>
+                  <a:srgbClr val="FFFFFF"/>
+                </a:solidFill>
+                <a:latin typeface="Calibri"/>
+              </a:rPr>
+              <a:t>Find a backup circuit that serves the same sites. Determine which routers are involved.
+Choose the best option based on capacity and cost — manually, from memory or spreadsheets.</a:t>
+            </a:r>
+          </a:p>
+        </p:txBody>
+      </p:sp>
+      <p:sp>
+        <p:nvSpPr>
+          <p:cNvPr id="15" name="Rectangle 14"/>
+          <p:cNvSpPr/>
+          <p:nvPr/>
+        </p:nvSpPr>
+        <p:spPr>
+          <a:xfrm>
+            <a:off x="320040" y="4800600"/>
+            <a:ext cx="502920" cy="502920"/>
+          </a:xfrm>
+          <a:prstGeom prst="rect">
+            <a:avLst/>
+          </a:prstGeom>
+          <a:solidFill>
+            <a:srgbClr val="00C2A8"/>
+          </a:solidFill>
+          <a:ln>
+            <a:noFill/>
+          </a:ln>
+        </p:spPr>
+        <p:style>
+          <a:lnRef idx="1">
+            <a:schemeClr val="accent1"/>
+          </a:lnRef>
+          <a:fillRef idx="3">
+            <a:schemeClr val="accent1"/>
+          </a:fillRef>
+          <a:effectRef idx="2">
+            <a:schemeClr val="accent1"/>
+          </a:effectRef>
+          <a:fontRef idx="minor">
+            <a:schemeClr val="lt1"/>
+          </a:fontRef>
+        </p:style>
+        <p:txBody>
+          <a:bodyPr rtlCol="0" anchor="ctr"/>
           <a:lstStyle/>
           <a:p>
             <a:pPr algn="ctr"/>
-            <a:r>
-              <a:rPr sz="1400" b="1" i="0">
-                <a:solidFill>
-                  <a:srgbClr val="F59E0E"/>
-                </a:solidFill>
-                <a:latin typeface="Calibri"/>
-              </a:rPr>
-              <a:t>0:05</a:t>
-            </a:r>
-          </a:p>
-        </p:txBody>
-      </p:sp>
-      <p:sp>
-        <p:nvSpPr>
-          <p:cNvPr id="9" name="TextBox 8"/>
-          <p:cNvSpPr txBox="1"/>
-          <p:nvPr/>
-        </p:nvSpPr>
-        <p:spPr>
-          <a:xfrm>
-            <a:off x="1600200" y="1527048"/>
-            <a:ext cx="10058400" cy="347472"/>
-          </a:xfrm>
-          <a:prstGeom prst="rect">
-            <a:avLst/>
-          </a:prstGeom>
-          <a:noFill/>
-        </p:spPr>
-        <p:txBody>
-          <a:bodyPr wrap="square">
-            <a:spAutoFit/>
-          </a:bodyPr>
-          <a:lstStyle/>
-          <a:p>
-            <a:pPr algn="l"/>
-            <a:r>
-              <a:rPr sz="1500" b="0" i="0">
-                <a:solidFill>
-                  <a:srgbClr val="FFFFFF"/>
-                </a:solidFill>
-                <a:latin typeface="Calibri"/>
-              </a:rPr>
-              <a:t>Team opens spreadsheets and old Visio diagrams to find the secondary circuit.</a:t>
-            </a:r>
-          </a:p>
-        </p:txBody>
-      </p:sp>
-      <p:sp>
-        <p:nvSpPr>
-          <p:cNvPr id="10" name="Rectangle 9"/>
+          </a:p>
+        </p:txBody>
+      </p:sp>
+      <p:sp>
+        <p:nvSpPr>
+          <p:cNvPr id="16" name="TextBox 15"/>
+          <p:cNvSpPr txBox="1"/>
+          <p:nvPr/>
+        </p:nvSpPr>
+        <p:spPr>
+          <a:xfrm>
+            <a:off x="320040" y="4782312"/>
+            <a:ext cx="502920" cy="502920"/>
+          </a:xfrm>
+          <a:prstGeom prst="rect">
+            <a:avLst/>
+          </a:prstGeom>
+          <a:noFill/>
+        </p:spPr>
+        <p:txBody>
+          <a:bodyPr wrap="square">
+            <a:spAutoFit/>
+          </a:bodyPr>
+          <a:lstStyle/>
+          <a:p>
+            <a:pPr algn="ctr"/>
+            <a:r>
+              <a:rPr sz="2200" b="1" i="0">
+                <a:solidFill>
+                  <a:srgbClr val="0D1B2A"/>
+                </a:solidFill>
+                <a:latin typeface="Calibri"/>
+              </a:rPr>
+              <a:t>3</a:t>
+            </a:r>
+          </a:p>
+        </p:txBody>
+      </p:sp>
+      <p:sp>
+        <p:nvSpPr>
+          <p:cNvPr id="17" name="Rectangle 16"/>
           <p:cNvSpPr/>
           <p:nvPr/>
         </p:nvSpPr>
         <p:spPr>
           <a:xfrm>
-            <a:off x="365760" y="1956816"/>
-            <a:ext cx="1097280" cy="384048"/>
+            <a:off x="1005840" y="4709160"/>
+            <a:ext cx="10789920" cy="1417320"/>
           </a:xfrm>
           <a:prstGeom prst="rect">
             <a:avLst/>
@@ -6066,7 +7502,7 @@
           </a:solidFill>
           <a:ln w="19050">
             <a:solidFill>
-              <a:srgbClr val="F59E0E"/>
+              <a:srgbClr val="00C2A8"/>
             </a:solidFill>
           </a:ln>
         </p:spPr>
@@ -6094,49 +7530,49 @@
       </p:sp>
       <p:sp>
         <p:nvSpPr>
-          <p:cNvPr id="11" name="TextBox 10"/>
-          <p:cNvSpPr txBox="1"/>
-          <p:nvPr/>
-        </p:nvSpPr>
-        <p:spPr>
-          <a:xfrm>
-            <a:off x="365760" y="1993392"/>
-            <a:ext cx="1097280" cy="347472"/>
-          </a:xfrm>
-          <a:prstGeom prst="rect">
-            <a:avLst/>
-          </a:prstGeom>
-          <a:noFill/>
-        </p:spPr>
-        <p:txBody>
-          <a:bodyPr wrap="square">
-            <a:spAutoFit/>
-          </a:bodyPr>
-          <a:lstStyle/>
-          <a:p>
-            <a:pPr algn="ctr"/>
-            <a:r>
-              <a:rPr sz="1400" b="1" i="0">
-                <a:solidFill>
-                  <a:srgbClr val="F59E0E"/>
-                </a:solidFill>
-                <a:latin typeface="Calibri"/>
-              </a:rPr>
-              <a:t>0:15</a:t>
-            </a:r>
-          </a:p>
-        </p:txBody>
-      </p:sp>
-      <p:sp>
-        <p:nvSpPr>
-          <p:cNvPr id="12" name="TextBox 11"/>
-          <p:cNvSpPr txBox="1"/>
-          <p:nvPr/>
-        </p:nvSpPr>
-        <p:spPr>
-          <a:xfrm>
-            <a:off x="1600200" y="2002536"/>
-            <a:ext cx="10058400" cy="347472"/>
+          <p:cNvPr id="18" name="TextBox 17"/>
+          <p:cNvSpPr txBox="1"/>
+          <p:nvPr/>
+        </p:nvSpPr>
+        <p:spPr>
+          <a:xfrm>
+            <a:off x="1188720" y="4800600"/>
+            <a:ext cx="10332720" cy="457200"/>
+          </a:xfrm>
+          <a:prstGeom prst="rect">
+            <a:avLst/>
+          </a:prstGeom>
+          <a:noFill/>
+        </p:spPr>
+        <p:txBody>
+          <a:bodyPr wrap="square">
+            <a:spAutoFit/>
+          </a:bodyPr>
+          <a:lstStyle/>
+          <a:p>
+            <a:pPr algn="l"/>
+            <a:r>
+              <a:rPr sz="2000" b="1" i="0">
+                <a:solidFill>
+                  <a:srgbClr val="00C2A8"/>
+                </a:solidFill>
+                <a:latin typeface="Calibri"/>
+              </a:rPr>
+              <a:t>Document everything for management</a:t>
+            </a:r>
+          </a:p>
+        </p:txBody>
+      </p:sp>
+      <p:sp>
+        <p:nvSpPr>
+          <p:cNvPr id="19" name="TextBox 18"/>
+          <p:cNvSpPr txBox="1"/>
+          <p:nvPr/>
+        </p:nvSpPr>
+        <p:spPr>
+          <a:xfrm>
+            <a:off x="1188720" y="5257800"/>
+            <a:ext cx="10332720" cy="777240"/>
           </a:xfrm>
           <a:prstGeom prst="rect">
             <a:avLst/>
@@ -6157,589 +7593,15 @@
                 </a:solidFill>
                 <a:latin typeface="Calibri"/>
               </a:rPr>
-              <a:t>Secondary circuit details found — but which routers does it use?</a:t>
-            </a:r>
-          </a:p>
-        </p:txBody>
-      </p:sp>
-      <p:sp>
-        <p:nvSpPr>
-          <p:cNvPr id="13" name="Rectangle 12"/>
-          <p:cNvSpPr/>
-          <p:nvPr/>
-        </p:nvSpPr>
-        <p:spPr>
-          <a:xfrm>
-            <a:off x="365760" y="2432304"/>
-            <a:ext cx="1097280" cy="384048"/>
-          </a:xfrm>
-          <a:prstGeom prst="rect">
-            <a:avLst/>
-          </a:prstGeom>
-          <a:solidFill>
-            <a:srgbClr val="142A3E"/>
-          </a:solidFill>
-          <a:ln w="19050">
-            <a:solidFill>
-              <a:srgbClr val="F59E0E"/>
-            </a:solidFill>
-          </a:ln>
-        </p:spPr>
-        <p:style>
-          <a:lnRef idx="1">
-            <a:schemeClr val="accent1"/>
-          </a:lnRef>
-          <a:fillRef idx="3">
-            <a:schemeClr val="accent1"/>
-          </a:fillRef>
-          <a:effectRef idx="2">
-            <a:schemeClr val="accent1"/>
-          </a:effectRef>
-          <a:fontRef idx="minor">
-            <a:schemeClr val="lt1"/>
-          </a:fontRef>
-        </p:style>
-        <p:txBody>
-          <a:bodyPr rtlCol="0" anchor="ctr"/>
-          <a:lstStyle/>
-          <a:p>
-            <a:pPr algn="ctr"/>
-          </a:p>
-        </p:txBody>
-      </p:sp>
-      <p:sp>
-        <p:nvSpPr>
-          <p:cNvPr id="14" name="TextBox 13"/>
-          <p:cNvSpPr txBox="1"/>
-          <p:nvPr/>
-        </p:nvSpPr>
-        <p:spPr>
-          <a:xfrm>
-            <a:off x="365760" y="2468880"/>
-            <a:ext cx="1097280" cy="347472"/>
-          </a:xfrm>
-          <a:prstGeom prst="rect">
-            <a:avLst/>
-          </a:prstGeom>
-          <a:noFill/>
-        </p:spPr>
-        <p:txBody>
-          <a:bodyPr wrap="square">
-            <a:spAutoFit/>
-          </a:bodyPr>
-          <a:lstStyle/>
-          <a:p>
-            <a:pPr algn="ctr"/>
-            <a:r>
-              <a:rPr sz="1400" b="1" i="0">
-                <a:solidFill>
-                  <a:srgbClr val="F59E0E"/>
-                </a:solidFill>
-                <a:latin typeface="Calibri"/>
-              </a:rPr>
-              <a:t>0:22</a:t>
-            </a:r>
-          </a:p>
-        </p:txBody>
-      </p:sp>
-      <p:sp>
-        <p:nvSpPr>
-          <p:cNvPr id="15" name="TextBox 14"/>
-          <p:cNvSpPr txBox="1"/>
-          <p:nvPr/>
-        </p:nvSpPr>
-        <p:spPr>
-          <a:xfrm>
-            <a:off x="1600200" y="2478024"/>
-            <a:ext cx="10058400" cy="347472"/>
-          </a:xfrm>
-          <a:prstGeom prst="rect">
-            <a:avLst/>
-          </a:prstGeom>
-          <a:noFill/>
-        </p:spPr>
-        <p:txBody>
-          <a:bodyPr wrap="square">
-            <a:spAutoFit/>
-          </a:bodyPr>
-          <a:lstStyle/>
-          <a:p>
-            <a:pPr algn="l"/>
-            <a:r>
-              <a:rPr sz="1500" b="0" i="0">
-                <a:solidFill>
-                  <a:srgbClr val="FFFFFF"/>
-                </a:solidFill>
-                <a:latin typeface="Calibri"/>
-              </a:rPr>
-              <a:t>Cross-reference IPAM, check interface logs, ask a colleague who “knows the network”.</a:t>
-            </a:r>
-          </a:p>
-        </p:txBody>
-      </p:sp>
-      <p:sp>
-        <p:nvSpPr>
-          <p:cNvPr id="16" name="Rectangle 15"/>
-          <p:cNvSpPr/>
-          <p:nvPr/>
-        </p:nvSpPr>
-        <p:spPr>
-          <a:xfrm>
-            <a:off x="365760" y="2907792"/>
-            <a:ext cx="1097280" cy="384048"/>
-          </a:xfrm>
-          <a:prstGeom prst="rect">
-            <a:avLst/>
-          </a:prstGeom>
-          <a:solidFill>
-            <a:srgbClr val="142A3E"/>
-          </a:solidFill>
-          <a:ln w="19050">
-            <a:solidFill>
-              <a:srgbClr val="F59E0E"/>
-            </a:solidFill>
-          </a:ln>
-        </p:spPr>
-        <p:style>
-          <a:lnRef idx="1">
-            <a:schemeClr val="accent1"/>
-          </a:lnRef>
-          <a:fillRef idx="3">
-            <a:schemeClr val="accent1"/>
-          </a:fillRef>
-          <a:effectRef idx="2">
-            <a:schemeClr val="accent1"/>
-          </a:effectRef>
-          <a:fontRef idx="minor">
-            <a:schemeClr val="lt1"/>
-          </a:fontRef>
-        </p:style>
-        <p:txBody>
-          <a:bodyPr rtlCol="0" anchor="ctr"/>
-          <a:lstStyle/>
-          <a:p>
-            <a:pPr algn="ctr"/>
-          </a:p>
-        </p:txBody>
-      </p:sp>
-      <p:sp>
-        <p:nvSpPr>
-          <p:cNvPr id="17" name="TextBox 16"/>
-          <p:cNvSpPr txBox="1"/>
-          <p:nvPr/>
-        </p:nvSpPr>
-        <p:spPr>
-          <a:xfrm>
-            <a:off x="365760" y="2944368"/>
-            <a:ext cx="1097280" cy="347472"/>
-          </a:xfrm>
-          <a:prstGeom prst="rect">
-            <a:avLst/>
-          </a:prstGeom>
-          <a:noFill/>
-        </p:spPr>
-        <p:txBody>
-          <a:bodyPr wrap="square">
-            <a:spAutoFit/>
-          </a:bodyPr>
-          <a:lstStyle/>
-          <a:p>
-            <a:pPr algn="ctr"/>
-            <a:r>
-              <a:rPr sz="1400" b="1" i="0">
-                <a:solidFill>
-                  <a:srgbClr val="F59E0E"/>
-                </a:solidFill>
-                <a:latin typeface="Calibri"/>
-              </a:rPr>
-              <a:t>0:30</a:t>
-            </a:r>
-          </a:p>
-        </p:txBody>
-      </p:sp>
-      <p:sp>
-        <p:nvSpPr>
-          <p:cNvPr id="18" name="TextBox 17"/>
-          <p:cNvSpPr txBox="1"/>
-          <p:nvPr/>
-        </p:nvSpPr>
-        <p:spPr>
-          <a:xfrm>
-            <a:off x="1600200" y="2953512"/>
-            <a:ext cx="10058400" cy="347472"/>
-          </a:xfrm>
-          <a:prstGeom prst="rect">
-            <a:avLst/>
-          </a:prstGeom>
-          <a:noFill/>
-        </p:spPr>
-        <p:txBody>
-          <a:bodyPr wrap="square">
-            <a:spAutoFit/>
-          </a:bodyPr>
-          <a:lstStyle/>
-          <a:p>
-            <a:pPr algn="l"/>
-            <a:r>
-              <a:rPr sz="1500" b="0" i="0">
-                <a:solidFill>
-                  <a:srgbClr val="FFFFFF"/>
-                </a:solidFill>
-                <a:latin typeface="Calibri"/>
-              </a:rPr>
-              <a:t>SSH into Bristol router. Find the right interface. Apply config.</a:t>
-            </a:r>
-          </a:p>
-        </p:txBody>
-      </p:sp>
-      <p:sp>
-        <p:nvSpPr>
-          <p:cNvPr id="19" name="Rectangle 18"/>
-          <p:cNvSpPr/>
-          <p:nvPr/>
-        </p:nvSpPr>
-        <p:spPr>
-          <a:xfrm>
-            <a:off x="365760" y="3383280"/>
-            <a:ext cx="1097280" cy="384048"/>
-          </a:xfrm>
-          <a:prstGeom prst="rect">
-            <a:avLst/>
-          </a:prstGeom>
-          <a:solidFill>
-            <a:srgbClr val="142A3E"/>
-          </a:solidFill>
-          <a:ln w="19050">
-            <a:solidFill>
-              <a:srgbClr val="F59E0E"/>
-            </a:solidFill>
-          </a:ln>
-        </p:spPr>
-        <p:style>
-          <a:lnRef idx="1">
-            <a:schemeClr val="accent1"/>
-          </a:lnRef>
-          <a:fillRef idx="3">
-            <a:schemeClr val="accent1"/>
-          </a:fillRef>
-          <a:effectRef idx="2">
-            <a:schemeClr val="accent1"/>
-          </a:effectRef>
-          <a:fontRef idx="minor">
-            <a:schemeClr val="lt1"/>
-          </a:fontRef>
-        </p:style>
-        <p:txBody>
-          <a:bodyPr rtlCol="0" anchor="ctr"/>
-          <a:lstStyle/>
-          <a:p>
-            <a:pPr algn="ctr"/>
-          </a:p>
-        </p:txBody>
-      </p:sp>
-      <p:sp>
-        <p:nvSpPr>
-          <p:cNvPr id="20" name="TextBox 19"/>
-          <p:cNvSpPr txBox="1"/>
-          <p:nvPr/>
-        </p:nvSpPr>
-        <p:spPr>
-          <a:xfrm>
-            <a:off x="365760" y="3419856"/>
-            <a:ext cx="1097280" cy="347472"/>
-          </a:xfrm>
-          <a:prstGeom prst="rect">
-            <a:avLst/>
-          </a:prstGeom>
-          <a:noFill/>
-        </p:spPr>
-        <p:txBody>
-          <a:bodyPr wrap="square">
-            <a:spAutoFit/>
-          </a:bodyPr>
-          <a:lstStyle/>
-          <a:p>
-            <a:pPr algn="ctr"/>
-            <a:r>
-              <a:rPr sz="1400" b="1" i="0">
-                <a:solidFill>
-                  <a:srgbClr val="F59E0E"/>
-                </a:solidFill>
-                <a:latin typeface="Calibri"/>
-              </a:rPr>
-              <a:t>0:37</a:t>
-            </a:r>
-          </a:p>
-        </p:txBody>
-      </p:sp>
-      <p:sp>
-        <p:nvSpPr>
-          <p:cNvPr id="21" name="TextBox 20"/>
-          <p:cNvSpPr txBox="1"/>
-          <p:nvPr/>
-        </p:nvSpPr>
-        <p:spPr>
-          <a:xfrm>
-            <a:off x="1600200" y="3429000"/>
-            <a:ext cx="10058400" cy="347472"/>
-          </a:xfrm>
-          <a:prstGeom prst="rect">
-            <a:avLst/>
-          </a:prstGeom>
-          <a:noFill/>
-        </p:spPr>
-        <p:txBody>
-          <a:bodyPr wrap="square">
-            <a:spAutoFit/>
-          </a:bodyPr>
-          <a:lstStyle/>
-          <a:p>
-            <a:pPr algn="l"/>
-            <a:r>
-              <a:rPr sz="1500" b="0" i="0">
-                <a:solidFill>
-                  <a:srgbClr val="FFFFFF"/>
-                </a:solidFill>
-                <a:latin typeface="Calibri"/>
-              </a:rPr>
-              <a:t>SSH into Atlanta router. Repeat.</a:t>
-            </a:r>
-          </a:p>
-        </p:txBody>
-      </p:sp>
-      <p:sp>
-        <p:nvSpPr>
-          <p:cNvPr id="22" name="Rectangle 21"/>
-          <p:cNvSpPr/>
-          <p:nvPr/>
-        </p:nvSpPr>
-        <p:spPr>
-          <a:xfrm>
-            <a:off x="365760" y="3858768"/>
-            <a:ext cx="1097280" cy="384048"/>
-          </a:xfrm>
-          <a:prstGeom prst="rect">
-            <a:avLst/>
-          </a:prstGeom>
-          <a:solidFill>
-            <a:srgbClr val="142A3E"/>
-          </a:solidFill>
-          <a:ln w="19050">
-            <a:solidFill>
-              <a:srgbClr val="F59E0E"/>
-            </a:solidFill>
-          </a:ln>
-        </p:spPr>
-        <p:style>
-          <a:lnRef idx="1">
-            <a:schemeClr val="accent1"/>
-          </a:lnRef>
-          <a:fillRef idx="3">
-            <a:schemeClr val="accent1"/>
-          </a:fillRef>
-          <a:effectRef idx="2">
-            <a:schemeClr val="accent1"/>
-          </a:effectRef>
-          <a:fontRef idx="minor">
-            <a:schemeClr val="lt1"/>
-          </a:fontRef>
-        </p:style>
-        <p:txBody>
-          <a:bodyPr rtlCol="0" anchor="ctr"/>
-          <a:lstStyle/>
-          <a:p>
-            <a:pPr algn="ctr"/>
-          </a:p>
-        </p:txBody>
-      </p:sp>
-      <p:sp>
-        <p:nvSpPr>
-          <p:cNvPr id="23" name="TextBox 22"/>
-          <p:cNvSpPr txBox="1"/>
-          <p:nvPr/>
-        </p:nvSpPr>
-        <p:spPr>
-          <a:xfrm>
-            <a:off x="365760" y="3895344"/>
-            <a:ext cx="1097280" cy="347472"/>
-          </a:xfrm>
-          <a:prstGeom prst="rect">
-            <a:avLst/>
-          </a:prstGeom>
-          <a:noFill/>
-        </p:spPr>
-        <p:txBody>
-          <a:bodyPr wrap="square">
-            <a:spAutoFit/>
-          </a:bodyPr>
-          <a:lstStyle/>
-          <a:p>
-            <a:pPr algn="ctr"/>
-            <a:r>
-              <a:rPr sz="1400" b="1" i="0">
-                <a:solidFill>
-                  <a:srgbClr val="F59E0E"/>
-                </a:solidFill>
-                <a:latin typeface="Calibri"/>
-              </a:rPr>
-              <a:t>0:43</a:t>
-            </a:r>
-          </a:p>
-        </p:txBody>
-      </p:sp>
-      <p:sp>
-        <p:nvSpPr>
-          <p:cNvPr id="24" name="TextBox 23"/>
-          <p:cNvSpPr txBox="1"/>
-          <p:nvPr/>
-        </p:nvSpPr>
-        <p:spPr>
-          <a:xfrm>
-            <a:off x="1600200" y="3904488"/>
-            <a:ext cx="10058400" cy="347472"/>
-          </a:xfrm>
-          <a:prstGeom prst="rect">
-            <a:avLst/>
-          </a:prstGeom>
-          <a:noFill/>
-        </p:spPr>
-        <p:txBody>
-          <a:bodyPr wrap="square">
-            <a:spAutoFit/>
-          </a:bodyPr>
-          <a:lstStyle/>
-          <a:p>
-            <a:pPr algn="l"/>
-            <a:r>
-              <a:rPr sz="1500" b="0" i="0">
-                <a:solidFill>
-                  <a:srgbClr val="FFFFFF"/>
-                </a:solidFill>
-                <a:latin typeface="Calibri"/>
-              </a:rPr>
-              <a:t>Test connectivity. Something is wrong. Roll back. Try again.</a:t>
-            </a:r>
-          </a:p>
-        </p:txBody>
-      </p:sp>
-      <p:sp>
-        <p:nvSpPr>
-          <p:cNvPr id="25" name="Rectangle 24"/>
-          <p:cNvSpPr/>
-          <p:nvPr/>
-        </p:nvSpPr>
-        <p:spPr>
-          <a:xfrm>
-            <a:off x="365760" y="4334256"/>
-            <a:ext cx="1097280" cy="384048"/>
-          </a:xfrm>
-          <a:prstGeom prst="rect">
-            <a:avLst/>
-          </a:prstGeom>
-          <a:solidFill>
-            <a:srgbClr val="142A3E"/>
-          </a:solidFill>
-          <a:ln w="19050">
-            <a:solidFill>
-              <a:srgbClr val="22C55E"/>
-            </a:solidFill>
-          </a:ln>
-        </p:spPr>
-        <p:style>
-          <a:lnRef idx="1">
-            <a:schemeClr val="accent1"/>
-          </a:lnRef>
-          <a:fillRef idx="3">
-            <a:schemeClr val="accent1"/>
-          </a:fillRef>
-          <a:effectRef idx="2">
-            <a:schemeClr val="accent1"/>
-          </a:effectRef>
-          <a:fontRef idx="minor">
-            <a:schemeClr val="lt1"/>
-          </a:fontRef>
-        </p:style>
-        <p:txBody>
-          <a:bodyPr rtlCol="0" anchor="ctr"/>
-          <a:lstStyle/>
-          <a:p>
-            <a:pPr algn="ctr"/>
-          </a:p>
-        </p:txBody>
-      </p:sp>
-      <p:sp>
-        <p:nvSpPr>
-          <p:cNvPr id="26" name="TextBox 25"/>
-          <p:cNvSpPr txBox="1"/>
-          <p:nvPr/>
-        </p:nvSpPr>
-        <p:spPr>
-          <a:xfrm>
-            <a:off x="365760" y="4370832"/>
-            <a:ext cx="1097280" cy="347472"/>
-          </a:xfrm>
-          <a:prstGeom prst="rect">
-            <a:avLst/>
-          </a:prstGeom>
-          <a:noFill/>
-        </p:spPr>
-        <p:txBody>
-          <a:bodyPr wrap="square">
-            <a:spAutoFit/>
-          </a:bodyPr>
-          <a:lstStyle/>
-          <a:p>
-            <a:pPr algn="ctr"/>
-            <a:r>
-              <a:rPr sz="1400" b="1" i="0">
-                <a:solidFill>
-                  <a:srgbClr val="22C55E"/>
-                </a:solidFill>
-                <a:latin typeface="Calibri"/>
-              </a:rPr>
-              <a:t>0:45</a:t>
-            </a:r>
-          </a:p>
-        </p:txBody>
-      </p:sp>
-      <p:sp>
-        <p:nvSpPr>
-          <p:cNvPr id="27" name="TextBox 26"/>
-          <p:cNvSpPr txBox="1"/>
-          <p:nvPr/>
-        </p:nvSpPr>
-        <p:spPr>
-          <a:xfrm>
-            <a:off x="1600200" y="4379976"/>
-            <a:ext cx="10058400" cy="347472"/>
-          </a:xfrm>
-          <a:prstGeom prst="rect">
-            <a:avLst/>
-          </a:prstGeom>
-          <a:noFill/>
-        </p:spPr>
-        <p:txBody>
-          <a:bodyPr wrap="square">
-            <a:spAutoFit/>
-          </a:bodyPr>
-          <a:lstStyle/>
-          <a:p>
-            <a:pPr algn="l"/>
-            <a:r>
-              <a:rPr sz="1500" b="0" i="0">
-                <a:solidFill>
-                  <a:srgbClr val="FFFFFF"/>
-                </a:solidFill>
-                <a:latin typeface="Calibri"/>
-              </a:rPr>
-              <a:t>Traffic restored. Documentation updated... maybe.</a:t>
+              <a:t>Record what failed, when, what was done, and who made each decision.
+This is often skipped under pressure — or done hours later from memory.</a:t>
             </a:r>
           </a:p>
         </p:txBody>
       </p:sp>
       <p:pic>
         <p:nvPicPr>
-          <p:cNvPr id="28" name="Picture 27" descr="netbox_logo_bright.png"/>
+          <p:cNvPr id="20" name="Picture 19" descr="netbox_logo_bright.png"/>
           <p:cNvPicPr>
             <a:picLocks noChangeAspect="1"/>
           </p:cNvPicPr>
@@ -6860,7 +7722,7 @@
                 </a:solidFill>
                 <a:latin typeface="Calibri"/>
               </a:rPr>
-              <a:t>The Root Cause</a:t>
+              <a:t>Why Did It Take 45 Minutes?</a:t>
             </a:r>
           </a:p>
         </p:txBody>
@@ -6873,8 +7735,123 @@
         </p:nvSpPr>
         <p:spPr>
           <a:xfrm>
-            <a:off x="365760" y="1097280"/>
-            <a:ext cx="3657600" cy="5029200"/>
+            <a:off x="365760" y="1005840"/>
+            <a:ext cx="1097280" cy="384048"/>
+          </a:xfrm>
+          <a:prstGeom prst="rect">
+            <a:avLst/>
+          </a:prstGeom>
+          <a:solidFill>
+            <a:srgbClr val="142A3E"/>
+          </a:solidFill>
+          <a:ln w="19050">
+            <a:solidFill>
+              <a:srgbClr val="EF4444"/>
+            </a:solidFill>
+          </a:ln>
+        </p:spPr>
+        <p:style>
+          <a:lnRef idx="1">
+            <a:schemeClr val="accent1"/>
+          </a:lnRef>
+          <a:fillRef idx="3">
+            <a:schemeClr val="accent1"/>
+          </a:fillRef>
+          <a:effectRef idx="2">
+            <a:schemeClr val="accent1"/>
+          </a:effectRef>
+          <a:fontRef idx="minor">
+            <a:schemeClr val="lt1"/>
+          </a:fontRef>
+        </p:style>
+        <p:txBody>
+          <a:bodyPr rtlCol="0" anchor="ctr"/>
+          <a:lstStyle/>
+          <a:p>
+            <a:pPr algn="ctr"/>
+          </a:p>
+        </p:txBody>
+      </p:sp>
+      <p:sp>
+        <p:nvSpPr>
+          <p:cNvPr id="5" name="TextBox 4"/>
+          <p:cNvSpPr txBox="1"/>
+          <p:nvPr/>
+        </p:nvSpPr>
+        <p:spPr>
+          <a:xfrm>
+            <a:off x="365760" y="1042416"/>
+            <a:ext cx="1097280" cy="347472"/>
+          </a:xfrm>
+          <a:prstGeom prst="rect">
+            <a:avLst/>
+          </a:prstGeom>
+          <a:noFill/>
+        </p:spPr>
+        <p:txBody>
+          <a:bodyPr wrap="square">
+            <a:spAutoFit/>
+          </a:bodyPr>
+          <a:lstStyle/>
+          <a:p>
+            <a:pPr algn="ctr"/>
+            <a:r>
+              <a:rPr sz="1400" b="1" i="0">
+                <a:solidFill>
+                  <a:srgbClr val="EF4444"/>
+                </a:solidFill>
+                <a:latin typeface="Calibri"/>
+              </a:rPr>
+              <a:t>0:00</a:t>
+            </a:r>
+          </a:p>
+        </p:txBody>
+      </p:sp>
+      <p:sp>
+        <p:nvSpPr>
+          <p:cNvPr id="6" name="TextBox 5"/>
+          <p:cNvSpPr txBox="1"/>
+          <p:nvPr/>
+        </p:nvSpPr>
+        <p:spPr>
+          <a:xfrm>
+            <a:off x="1600200" y="1051560"/>
+            <a:ext cx="10058400" cy="347472"/>
+          </a:xfrm>
+          <a:prstGeom prst="rect">
+            <a:avLst/>
+          </a:prstGeom>
+          <a:noFill/>
+        </p:spPr>
+        <p:txBody>
+          <a:bodyPr wrap="square">
+            <a:spAutoFit/>
+          </a:bodyPr>
+          <a:lstStyle/>
+          <a:p>
+            <a:pPr algn="l"/>
+            <a:r>
+              <a:rPr sz="1500" b="0" i="0">
+                <a:solidFill>
+                  <a:srgbClr val="FFFFFF"/>
+                </a:solidFill>
+                <a:latin typeface="Calibri"/>
+              </a:rPr>
+              <a:t>Alert fires. Engineers are paged.</a:t>
+            </a:r>
+          </a:p>
+        </p:txBody>
+      </p:sp>
+      <p:sp>
+        <p:nvSpPr>
+          <p:cNvPr id="7" name="Rectangle 6"/>
+          <p:cNvSpPr/>
+          <p:nvPr/>
+        </p:nvSpPr>
+        <p:spPr>
+          <a:xfrm>
+            <a:off x="365760" y="1481328"/>
+            <a:ext cx="1097280" cy="384048"/>
           </a:xfrm>
           <a:prstGeom prst="rect">
             <a:avLst/>
@@ -6912,84 +7889,84 @@
       </p:sp>
       <p:sp>
         <p:nvSpPr>
-          <p:cNvPr id="5" name="TextBox 4"/>
-          <p:cNvSpPr txBox="1"/>
-          <p:nvPr/>
-        </p:nvSpPr>
-        <p:spPr>
-          <a:xfrm>
-            <a:off x="548640" y="1280160"/>
-            <a:ext cx="3291840" cy="640080"/>
-          </a:xfrm>
-          <a:prstGeom prst="rect">
-            <a:avLst/>
-          </a:prstGeom>
-          <a:noFill/>
-        </p:spPr>
-        <p:txBody>
-          <a:bodyPr wrap="square">
-            <a:spAutoFit/>
-          </a:bodyPr>
-          <a:lstStyle/>
-          <a:p>
-            <a:pPr algn="l"/>
-            <a:r>
-              <a:rPr sz="2000" b="1" i="0">
+          <p:cNvPr id="8" name="TextBox 7"/>
+          <p:cNvSpPr txBox="1"/>
+          <p:nvPr/>
+        </p:nvSpPr>
+        <p:spPr>
+          <a:xfrm>
+            <a:off x="365760" y="1517904"/>
+            <a:ext cx="1097280" cy="347472"/>
+          </a:xfrm>
+          <a:prstGeom prst="rect">
+            <a:avLst/>
+          </a:prstGeom>
+          <a:noFill/>
+        </p:spPr>
+        <p:txBody>
+          <a:bodyPr wrap="square">
+            <a:spAutoFit/>
+          </a:bodyPr>
+          <a:lstStyle/>
+          <a:p>
+            <a:pPr algn="ctr"/>
+            <a:r>
+              <a:rPr sz="1400" b="1" i="0">
                 <a:solidFill>
                   <a:srgbClr val="F59E0E"/>
                 </a:solidFill>
                 <a:latin typeface="Calibri"/>
               </a:rPr>
-              <a:t>No single source of truth</a:t>
-            </a:r>
-          </a:p>
-        </p:txBody>
-      </p:sp>
-      <p:sp>
-        <p:nvSpPr>
-          <p:cNvPr id="6" name="TextBox 5"/>
-          <p:cNvSpPr txBox="1"/>
-          <p:nvPr/>
-        </p:nvSpPr>
-        <p:spPr>
-          <a:xfrm>
-            <a:off x="548640" y="2057400"/>
-            <a:ext cx="3291840" cy="3657600"/>
-          </a:xfrm>
-          <a:prstGeom prst="rect">
-            <a:avLst/>
-          </a:prstGeom>
-          <a:noFill/>
-        </p:spPr>
-        <p:txBody>
-          <a:bodyPr wrap="square">
-            <a:spAutoFit/>
-          </a:bodyPr>
-          <a:lstStyle/>
-          <a:p>
-            <a:pPr algn="l"/>
-            <a:r>
-              <a:rPr sz="1700" b="0" i="0">
+              <a:t>0:05</a:t>
+            </a:r>
+          </a:p>
+        </p:txBody>
+      </p:sp>
+      <p:sp>
+        <p:nvSpPr>
+          <p:cNvPr id="9" name="TextBox 8"/>
+          <p:cNvSpPr txBox="1"/>
+          <p:nvPr/>
+        </p:nvSpPr>
+        <p:spPr>
+          <a:xfrm>
+            <a:off x="1600200" y="1527048"/>
+            <a:ext cx="10058400" cy="347472"/>
+          </a:xfrm>
+          <a:prstGeom prst="rect">
+            <a:avLst/>
+          </a:prstGeom>
+          <a:noFill/>
+        </p:spPr>
+        <p:txBody>
+          <a:bodyPr wrap="square">
+            <a:spAutoFit/>
+          </a:bodyPr>
+          <a:lstStyle/>
+          <a:p>
+            <a:pPr algn="l"/>
+            <a:r>
+              <a:rPr sz="1500" b="0" i="0">
                 <a:solidFill>
                   <a:srgbClr val="FFFFFF"/>
                 </a:solidFill>
                 <a:latin typeface="Calibri"/>
               </a:rPr>
-              <a:t>Circuit inventory lived in spreadsheets, Visio diagrams, and people’s heads. No one system had the full picture.</a:t>
-            </a:r>
-          </a:p>
-        </p:txBody>
-      </p:sp>
-      <p:sp>
-        <p:nvSpPr>
-          <p:cNvPr id="7" name="Rectangle 6"/>
+              <a:t>Team opens spreadsheets and old Visio diagrams to find the secondary circuit.</a:t>
+            </a:r>
+          </a:p>
+        </p:txBody>
+      </p:sp>
+      <p:sp>
+        <p:nvSpPr>
+          <p:cNvPr id="10" name="Rectangle 9"/>
           <p:cNvSpPr/>
           <p:nvPr/>
         </p:nvSpPr>
         <p:spPr>
           <a:xfrm>
-            <a:off x="4434840" y="1097280"/>
-            <a:ext cx="3657600" cy="5029200"/>
+            <a:off x="365760" y="1956816"/>
+            <a:ext cx="1097280" cy="384048"/>
           </a:xfrm>
           <a:prstGeom prst="rect">
             <a:avLst/>
@@ -6999,7 +7976,7 @@
           </a:solidFill>
           <a:ln w="19050">
             <a:solidFill>
-              <a:srgbClr val="EF4444"/>
+              <a:srgbClr val="F59E0E"/>
             </a:solidFill>
           </a:ln>
         </p:spPr>
@@ -7027,84 +8004,84 @@
       </p:sp>
       <p:sp>
         <p:nvSpPr>
-          <p:cNvPr id="8" name="TextBox 7"/>
-          <p:cNvSpPr txBox="1"/>
-          <p:nvPr/>
-        </p:nvSpPr>
-        <p:spPr>
-          <a:xfrm>
-            <a:off x="4617720" y="1280160"/>
-            <a:ext cx="3291840" cy="640080"/>
-          </a:xfrm>
-          <a:prstGeom prst="rect">
-            <a:avLst/>
-          </a:prstGeom>
-          <a:noFill/>
-        </p:spPr>
-        <p:txBody>
-          <a:bodyPr wrap="square">
-            <a:spAutoFit/>
-          </a:bodyPr>
-          <a:lstStyle/>
-          <a:p>
-            <a:pPr algn="l"/>
-            <a:r>
-              <a:rPr sz="2000" b="1" i="0">
-                <a:solidFill>
-                  <a:srgbClr val="EF4444"/>
-                </a:solidFill>
-                <a:latin typeface="Calibri"/>
-              </a:rPr>
-              <a:t>No automation</a:t>
-            </a:r>
-          </a:p>
-        </p:txBody>
-      </p:sp>
-      <p:sp>
-        <p:nvSpPr>
-          <p:cNvPr id="9" name="TextBox 8"/>
-          <p:cNvSpPr txBox="1"/>
-          <p:nvPr/>
-        </p:nvSpPr>
-        <p:spPr>
-          <a:xfrm>
-            <a:off x="4617720" y="2057400"/>
-            <a:ext cx="3291840" cy="3657600"/>
-          </a:xfrm>
-          <a:prstGeom prst="rect">
-            <a:avLst/>
-          </a:prstGeom>
-          <a:noFill/>
-        </p:spPr>
-        <p:txBody>
-          <a:bodyPr wrap="square">
-            <a:spAutoFit/>
-          </a:bodyPr>
-          <a:lstStyle/>
-          <a:p>
-            <a:pPr algn="l"/>
-            <a:r>
-              <a:rPr sz="1700" b="0" i="0">
+          <p:cNvPr id="11" name="TextBox 10"/>
+          <p:cNvSpPr txBox="1"/>
+          <p:nvPr/>
+        </p:nvSpPr>
+        <p:spPr>
+          <a:xfrm>
+            <a:off x="365760" y="1993392"/>
+            <a:ext cx="1097280" cy="347472"/>
+          </a:xfrm>
+          <a:prstGeom prst="rect">
+            <a:avLst/>
+          </a:prstGeom>
+          <a:noFill/>
+        </p:spPr>
+        <p:txBody>
+          <a:bodyPr wrap="square">
+            <a:spAutoFit/>
+          </a:bodyPr>
+          <a:lstStyle/>
+          <a:p>
+            <a:pPr algn="ctr"/>
+            <a:r>
+              <a:rPr sz="1400" b="1" i="0">
+                <a:solidFill>
+                  <a:srgbClr val="F59E0E"/>
+                </a:solidFill>
+                <a:latin typeface="Calibri"/>
+              </a:rPr>
+              <a:t>0:15</a:t>
+            </a:r>
+          </a:p>
+        </p:txBody>
+      </p:sp>
+      <p:sp>
+        <p:nvSpPr>
+          <p:cNvPr id="12" name="TextBox 11"/>
+          <p:cNvSpPr txBox="1"/>
+          <p:nvPr/>
+        </p:nvSpPr>
+        <p:spPr>
+          <a:xfrm>
+            <a:off x="1600200" y="2002536"/>
+            <a:ext cx="10058400" cy="347472"/>
+          </a:xfrm>
+          <a:prstGeom prst="rect">
+            <a:avLst/>
+          </a:prstGeom>
+          <a:noFill/>
+        </p:spPr>
+        <p:txBody>
+          <a:bodyPr wrap="square">
+            <a:spAutoFit/>
+          </a:bodyPr>
+          <a:lstStyle/>
+          <a:p>
+            <a:pPr algn="l"/>
+            <a:r>
+              <a:rPr sz="1500" b="0" i="0">
                 <a:solidFill>
                   <a:srgbClr val="FFFFFF"/>
                 </a:solidFill>
                 <a:latin typeface="Calibri"/>
               </a:rPr>
-              <a:t>Every failover step was manual: find the backup, identify the routers, SSH in, apply config, test, document.</a:t>
-            </a:r>
-          </a:p>
-        </p:txBody>
-      </p:sp>
-      <p:sp>
-        <p:nvSpPr>
-          <p:cNvPr id="10" name="Rectangle 9"/>
+              <a:t>Secondary circuit details found — but which routers does it use?</a:t>
+            </a:r>
+          </a:p>
+        </p:txBody>
+      </p:sp>
+      <p:sp>
+        <p:nvSpPr>
+          <p:cNvPr id="13" name="Rectangle 12"/>
           <p:cNvSpPr/>
           <p:nvPr/>
         </p:nvSpPr>
         <p:spPr>
           <a:xfrm>
-            <a:off x="8503920" y="1097280"/>
-            <a:ext cx="3657600" cy="5029200"/>
+            <a:off x="365760" y="2432304"/>
+            <a:ext cx="1097280" cy="384048"/>
           </a:xfrm>
           <a:prstGeom prst="rect">
             <a:avLst/>
@@ -7114,7 +8091,7 @@
           </a:solidFill>
           <a:ln w="19050">
             <a:solidFill>
-              <a:srgbClr val="EF4444"/>
+              <a:srgbClr val="F59E0E"/>
             </a:solidFill>
           </a:ln>
         </p:spPr>
@@ -7142,112 +8119,537 @@
       </p:sp>
       <p:sp>
         <p:nvSpPr>
-          <p:cNvPr id="11" name="TextBox 10"/>
-          <p:cNvSpPr txBox="1"/>
-          <p:nvPr/>
-        </p:nvSpPr>
-        <p:spPr>
-          <a:xfrm>
-            <a:off x="8686800" y="1280160"/>
-            <a:ext cx="3291840" cy="640080"/>
-          </a:xfrm>
-          <a:prstGeom prst="rect">
-            <a:avLst/>
-          </a:prstGeom>
-          <a:noFill/>
-        </p:spPr>
-        <p:txBody>
-          <a:bodyPr wrap="square">
-            <a:spAutoFit/>
-          </a:bodyPr>
-          <a:lstStyle/>
-          <a:p>
-            <a:pPr algn="l"/>
-            <a:r>
-              <a:rPr sz="2000" b="1" i="0">
-                <a:solidFill>
-                  <a:srgbClr val="EF4444"/>
-                </a:solidFill>
-                <a:latin typeface="Calibri"/>
-              </a:rPr>
-              <a:t>No audit trail</a:t>
-            </a:r>
-          </a:p>
-        </p:txBody>
-      </p:sp>
-      <p:sp>
-        <p:nvSpPr>
-          <p:cNvPr id="12" name="TextBox 11"/>
-          <p:cNvSpPr txBox="1"/>
-          <p:nvPr/>
-        </p:nvSpPr>
-        <p:spPr>
-          <a:xfrm>
-            <a:off x="8686800" y="2057400"/>
-            <a:ext cx="3291840" cy="3657600"/>
-          </a:xfrm>
-          <a:prstGeom prst="rect">
-            <a:avLst/>
-          </a:prstGeom>
-          <a:noFill/>
-        </p:spPr>
-        <p:txBody>
-          <a:bodyPr wrap="square">
-            <a:spAutoFit/>
-          </a:bodyPr>
-          <a:lstStyle/>
-          <a:p>
-            <a:pPr algn="l"/>
-            <a:r>
-              <a:rPr sz="1700" b="0" i="0">
+          <p:cNvPr id="14" name="TextBox 13"/>
+          <p:cNvSpPr txBox="1"/>
+          <p:nvPr/>
+        </p:nvSpPr>
+        <p:spPr>
+          <a:xfrm>
+            <a:off x="365760" y="2468880"/>
+            <a:ext cx="1097280" cy="347472"/>
+          </a:xfrm>
+          <a:prstGeom prst="rect">
+            <a:avLst/>
+          </a:prstGeom>
+          <a:noFill/>
+        </p:spPr>
+        <p:txBody>
+          <a:bodyPr wrap="square">
+            <a:spAutoFit/>
+          </a:bodyPr>
+          <a:lstStyle/>
+          <a:p>
+            <a:pPr algn="ctr"/>
+            <a:r>
+              <a:rPr sz="1400" b="1" i="0">
+                <a:solidFill>
+                  <a:srgbClr val="F59E0E"/>
+                </a:solidFill>
+                <a:latin typeface="Calibri"/>
+              </a:rPr>
+              <a:t>0:22</a:t>
+            </a:r>
+          </a:p>
+        </p:txBody>
+      </p:sp>
+      <p:sp>
+        <p:nvSpPr>
+          <p:cNvPr id="15" name="TextBox 14"/>
+          <p:cNvSpPr txBox="1"/>
+          <p:nvPr/>
+        </p:nvSpPr>
+        <p:spPr>
+          <a:xfrm>
+            <a:off x="1600200" y="2478024"/>
+            <a:ext cx="10058400" cy="347472"/>
+          </a:xfrm>
+          <a:prstGeom prst="rect">
+            <a:avLst/>
+          </a:prstGeom>
+          <a:noFill/>
+        </p:spPr>
+        <p:txBody>
+          <a:bodyPr wrap="square">
+            <a:spAutoFit/>
+          </a:bodyPr>
+          <a:lstStyle/>
+          <a:p>
+            <a:pPr algn="l"/>
+            <a:r>
+              <a:rPr sz="1500" b="0" i="0">
                 <a:solidFill>
                   <a:srgbClr val="FFFFFF"/>
                 </a:solidFill>
                 <a:latin typeface="Calibri"/>
               </a:rPr>
-              <a:t>After the incident, the team couldn’t easily answer: what changed, when, and who made the call?</a:t>
-            </a:r>
-          </a:p>
-        </p:txBody>
-      </p:sp>
-      <p:sp>
-        <p:nvSpPr>
-          <p:cNvPr id="13" name="TextBox 12"/>
-          <p:cNvSpPr txBox="1"/>
-          <p:nvPr/>
-        </p:nvSpPr>
-        <p:spPr>
-          <a:xfrm>
-            <a:off x="457200" y="6309360"/>
-            <a:ext cx="11247120" cy="457200"/>
-          </a:xfrm>
-          <a:prstGeom prst="rect">
-            <a:avLst/>
-          </a:prstGeom>
-          <a:noFill/>
-        </p:spPr>
-        <p:txBody>
-          <a:bodyPr wrap="square">
-            <a:spAutoFit/>
-          </a:bodyPr>
+              <a:t>Cross-reference IPAM, check interface logs, ask a colleague who “knows the network”.</a:t>
+            </a:r>
+          </a:p>
+        </p:txBody>
+      </p:sp>
+      <p:sp>
+        <p:nvSpPr>
+          <p:cNvPr id="16" name="Rectangle 15"/>
+          <p:cNvSpPr/>
+          <p:nvPr/>
+        </p:nvSpPr>
+        <p:spPr>
+          <a:xfrm>
+            <a:off x="365760" y="2907792"/>
+            <a:ext cx="1097280" cy="384048"/>
+          </a:xfrm>
+          <a:prstGeom prst="rect">
+            <a:avLst/>
+          </a:prstGeom>
+          <a:solidFill>
+            <a:srgbClr val="142A3E"/>
+          </a:solidFill>
+          <a:ln w="19050">
+            <a:solidFill>
+              <a:srgbClr val="F59E0E"/>
+            </a:solidFill>
+          </a:ln>
+        </p:spPr>
+        <p:style>
+          <a:lnRef idx="1">
+            <a:schemeClr val="accent1"/>
+          </a:lnRef>
+          <a:fillRef idx="3">
+            <a:schemeClr val="accent1"/>
+          </a:fillRef>
+          <a:effectRef idx="2">
+            <a:schemeClr val="accent1"/>
+          </a:effectRef>
+          <a:fontRef idx="minor">
+            <a:schemeClr val="lt1"/>
+          </a:fontRef>
+        </p:style>
+        <p:txBody>
+          <a:bodyPr rtlCol="0" anchor="ctr"/>
           <a:lstStyle/>
           <a:p>
             <a:pPr algn="ctr"/>
-            <a:r>
-              <a:rPr sz="1800" b="0" i="1">
-                <a:solidFill>
-                  <a:srgbClr val="B0BCCC"/>
-                </a:solidFill>
-                <a:latin typeface="Calibri"/>
-              </a:rPr>
-              <a:t>The technology existed to fix all three of these problems. It just wasn’t joined up.</a:t>
+          </a:p>
+        </p:txBody>
+      </p:sp>
+      <p:sp>
+        <p:nvSpPr>
+          <p:cNvPr id="17" name="TextBox 16"/>
+          <p:cNvSpPr txBox="1"/>
+          <p:nvPr/>
+        </p:nvSpPr>
+        <p:spPr>
+          <a:xfrm>
+            <a:off x="365760" y="2944368"/>
+            <a:ext cx="1097280" cy="347472"/>
+          </a:xfrm>
+          <a:prstGeom prst="rect">
+            <a:avLst/>
+          </a:prstGeom>
+          <a:noFill/>
+        </p:spPr>
+        <p:txBody>
+          <a:bodyPr wrap="square">
+            <a:spAutoFit/>
+          </a:bodyPr>
+          <a:lstStyle/>
+          <a:p>
+            <a:pPr algn="ctr"/>
+            <a:r>
+              <a:rPr sz="1400" b="1" i="0">
+                <a:solidFill>
+                  <a:srgbClr val="F59E0E"/>
+                </a:solidFill>
+                <a:latin typeface="Calibri"/>
+              </a:rPr>
+              <a:t>0:30</a:t>
+            </a:r>
+          </a:p>
+        </p:txBody>
+      </p:sp>
+      <p:sp>
+        <p:nvSpPr>
+          <p:cNvPr id="18" name="TextBox 17"/>
+          <p:cNvSpPr txBox="1"/>
+          <p:nvPr/>
+        </p:nvSpPr>
+        <p:spPr>
+          <a:xfrm>
+            <a:off x="1600200" y="2953512"/>
+            <a:ext cx="10058400" cy="347472"/>
+          </a:xfrm>
+          <a:prstGeom prst="rect">
+            <a:avLst/>
+          </a:prstGeom>
+          <a:noFill/>
+        </p:spPr>
+        <p:txBody>
+          <a:bodyPr wrap="square">
+            <a:spAutoFit/>
+          </a:bodyPr>
+          <a:lstStyle/>
+          <a:p>
+            <a:pPr algn="l"/>
+            <a:r>
+              <a:rPr sz="1500" b="0" i="0">
+                <a:solidFill>
+                  <a:srgbClr val="FFFFFF"/>
+                </a:solidFill>
+                <a:latin typeface="Calibri"/>
+              </a:rPr>
+              <a:t>SSH into Bristol router. Find the right interface. Apply config.</a:t>
+            </a:r>
+          </a:p>
+        </p:txBody>
+      </p:sp>
+      <p:sp>
+        <p:nvSpPr>
+          <p:cNvPr id="19" name="Rectangle 18"/>
+          <p:cNvSpPr/>
+          <p:nvPr/>
+        </p:nvSpPr>
+        <p:spPr>
+          <a:xfrm>
+            <a:off x="365760" y="3383280"/>
+            <a:ext cx="1097280" cy="384048"/>
+          </a:xfrm>
+          <a:prstGeom prst="rect">
+            <a:avLst/>
+          </a:prstGeom>
+          <a:solidFill>
+            <a:srgbClr val="142A3E"/>
+          </a:solidFill>
+          <a:ln w="19050">
+            <a:solidFill>
+              <a:srgbClr val="F59E0E"/>
+            </a:solidFill>
+          </a:ln>
+        </p:spPr>
+        <p:style>
+          <a:lnRef idx="1">
+            <a:schemeClr val="accent1"/>
+          </a:lnRef>
+          <a:fillRef idx="3">
+            <a:schemeClr val="accent1"/>
+          </a:fillRef>
+          <a:effectRef idx="2">
+            <a:schemeClr val="accent1"/>
+          </a:effectRef>
+          <a:fontRef idx="minor">
+            <a:schemeClr val="lt1"/>
+          </a:fontRef>
+        </p:style>
+        <p:txBody>
+          <a:bodyPr rtlCol="0" anchor="ctr"/>
+          <a:lstStyle/>
+          <a:p>
+            <a:pPr algn="ctr"/>
+          </a:p>
+        </p:txBody>
+      </p:sp>
+      <p:sp>
+        <p:nvSpPr>
+          <p:cNvPr id="20" name="TextBox 19"/>
+          <p:cNvSpPr txBox="1"/>
+          <p:nvPr/>
+        </p:nvSpPr>
+        <p:spPr>
+          <a:xfrm>
+            <a:off x="365760" y="3419856"/>
+            <a:ext cx="1097280" cy="347472"/>
+          </a:xfrm>
+          <a:prstGeom prst="rect">
+            <a:avLst/>
+          </a:prstGeom>
+          <a:noFill/>
+        </p:spPr>
+        <p:txBody>
+          <a:bodyPr wrap="square">
+            <a:spAutoFit/>
+          </a:bodyPr>
+          <a:lstStyle/>
+          <a:p>
+            <a:pPr algn="ctr"/>
+            <a:r>
+              <a:rPr sz="1400" b="1" i="0">
+                <a:solidFill>
+                  <a:srgbClr val="F59E0E"/>
+                </a:solidFill>
+                <a:latin typeface="Calibri"/>
+              </a:rPr>
+              <a:t>0:37</a:t>
+            </a:r>
+          </a:p>
+        </p:txBody>
+      </p:sp>
+      <p:sp>
+        <p:nvSpPr>
+          <p:cNvPr id="21" name="TextBox 20"/>
+          <p:cNvSpPr txBox="1"/>
+          <p:nvPr/>
+        </p:nvSpPr>
+        <p:spPr>
+          <a:xfrm>
+            <a:off x="1600200" y="3429000"/>
+            <a:ext cx="10058400" cy="347472"/>
+          </a:xfrm>
+          <a:prstGeom prst="rect">
+            <a:avLst/>
+          </a:prstGeom>
+          <a:noFill/>
+        </p:spPr>
+        <p:txBody>
+          <a:bodyPr wrap="square">
+            <a:spAutoFit/>
+          </a:bodyPr>
+          <a:lstStyle/>
+          <a:p>
+            <a:pPr algn="l"/>
+            <a:r>
+              <a:rPr sz="1500" b="0" i="0">
+                <a:solidFill>
+                  <a:srgbClr val="FFFFFF"/>
+                </a:solidFill>
+                <a:latin typeface="Calibri"/>
+              </a:rPr>
+              <a:t>SSH into Atlanta router. Repeat.</a:t>
+            </a:r>
+          </a:p>
+        </p:txBody>
+      </p:sp>
+      <p:sp>
+        <p:nvSpPr>
+          <p:cNvPr id="22" name="Rectangle 21"/>
+          <p:cNvSpPr/>
+          <p:nvPr/>
+        </p:nvSpPr>
+        <p:spPr>
+          <a:xfrm>
+            <a:off x="365760" y="3858768"/>
+            <a:ext cx="1097280" cy="384048"/>
+          </a:xfrm>
+          <a:prstGeom prst="rect">
+            <a:avLst/>
+          </a:prstGeom>
+          <a:solidFill>
+            <a:srgbClr val="142A3E"/>
+          </a:solidFill>
+          <a:ln w="19050">
+            <a:solidFill>
+              <a:srgbClr val="F59E0E"/>
+            </a:solidFill>
+          </a:ln>
+        </p:spPr>
+        <p:style>
+          <a:lnRef idx="1">
+            <a:schemeClr val="accent1"/>
+          </a:lnRef>
+          <a:fillRef idx="3">
+            <a:schemeClr val="accent1"/>
+          </a:fillRef>
+          <a:effectRef idx="2">
+            <a:schemeClr val="accent1"/>
+          </a:effectRef>
+          <a:fontRef idx="minor">
+            <a:schemeClr val="lt1"/>
+          </a:fontRef>
+        </p:style>
+        <p:txBody>
+          <a:bodyPr rtlCol="0" anchor="ctr"/>
+          <a:lstStyle/>
+          <a:p>
+            <a:pPr algn="ctr"/>
+          </a:p>
+        </p:txBody>
+      </p:sp>
+      <p:sp>
+        <p:nvSpPr>
+          <p:cNvPr id="23" name="TextBox 22"/>
+          <p:cNvSpPr txBox="1"/>
+          <p:nvPr/>
+        </p:nvSpPr>
+        <p:spPr>
+          <a:xfrm>
+            <a:off x="365760" y="3895344"/>
+            <a:ext cx="1097280" cy="347472"/>
+          </a:xfrm>
+          <a:prstGeom prst="rect">
+            <a:avLst/>
+          </a:prstGeom>
+          <a:noFill/>
+        </p:spPr>
+        <p:txBody>
+          <a:bodyPr wrap="square">
+            <a:spAutoFit/>
+          </a:bodyPr>
+          <a:lstStyle/>
+          <a:p>
+            <a:pPr algn="ctr"/>
+            <a:r>
+              <a:rPr sz="1400" b="1" i="0">
+                <a:solidFill>
+                  <a:srgbClr val="F59E0E"/>
+                </a:solidFill>
+                <a:latin typeface="Calibri"/>
+              </a:rPr>
+              <a:t>0:43</a:t>
+            </a:r>
+          </a:p>
+        </p:txBody>
+      </p:sp>
+      <p:sp>
+        <p:nvSpPr>
+          <p:cNvPr id="24" name="TextBox 23"/>
+          <p:cNvSpPr txBox="1"/>
+          <p:nvPr/>
+        </p:nvSpPr>
+        <p:spPr>
+          <a:xfrm>
+            <a:off x="1600200" y="3904488"/>
+            <a:ext cx="10058400" cy="347472"/>
+          </a:xfrm>
+          <a:prstGeom prst="rect">
+            <a:avLst/>
+          </a:prstGeom>
+          <a:noFill/>
+        </p:spPr>
+        <p:txBody>
+          <a:bodyPr wrap="square">
+            <a:spAutoFit/>
+          </a:bodyPr>
+          <a:lstStyle/>
+          <a:p>
+            <a:pPr algn="l"/>
+            <a:r>
+              <a:rPr sz="1500" b="0" i="0">
+                <a:solidFill>
+                  <a:srgbClr val="FFFFFF"/>
+                </a:solidFill>
+                <a:latin typeface="Calibri"/>
+              </a:rPr>
+              <a:t>Test connectivity. Something is wrong. Roll back. Try again.</a:t>
+            </a:r>
+          </a:p>
+        </p:txBody>
+      </p:sp>
+      <p:sp>
+        <p:nvSpPr>
+          <p:cNvPr id="25" name="Rectangle 24"/>
+          <p:cNvSpPr/>
+          <p:nvPr/>
+        </p:nvSpPr>
+        <p:spPr>
+          <a:xfrm>
+            <a:off x="365760" y="4334256"/>
+            <a:ext cx="1097280" cy="384048"/>
+          </a:xfrm>
+          <a:prstGeom prst="rect">
+            <a:avLst/>
+          </a:prstGeom>
+          <a:solidFill>
+            <a:srgbClr val="142A3E"/>
+          </a:solidFill>
+          <a:ln w="19050">
+            <a:solidFill>
+              <a:srgbClr val="22C55E"/>
+            </a:solidFill>
+          </a:ln>
+        </p:spPr>
+        <p:style>
+          <a:lnRef idx="1">
+            <a:schemeClr val="accent1"/>
+          </a:lnRef>
+          <a:fillRef idx="3">
+            <a:schemeClr val="accent1"/>
+          </a:fillRef>
+          <a:effectRef idx="2">
+            <a:schemeClr val="accent1"/>
+          </a:effectRef>
+          <a:fontRef idx="minor">
+            <a:schemeClr val="lt1"/>
+          </a:fontRef>
+        </p:style>
+        <p:txBody>
+          <a:bodyPr rtlCol="0" anchor="ctr"/>
+          <a:lstStyle/>
+          <a:p>
+            <a:pPr algn="ctr"/>
+          </a:p>
+        </p:txBody>
+      </p:sp>
+      <p:sp>
+        <p:nvSpPr>
+          <p:cNvPr id="26" name="TextBox 25"/>
+          <p:cNvSpPr txBox="1"/>
+          <p:nvPr/>
+        </p:nvSpPr>
+        <p:spPr>
+          <a:xfrm>
+            <a:off x="365760" y="4370832"/>
+            <a:ext cx="1097280" cy="347472"/>
+          </a:xfrm>
+          <a:prstGeom prst="rect">
+            <a:avLst/>
+          </a:prstGeom>
+          <a:noFill/>
+        </p:spPr>
+        <p:txBody>
+          <a:bodyPr wrap="square">
+            <a:spAutoFit/>
+          </a:bodyPr>
+          <a:lstStyle/>
+          <a:p>
+            <a:pPr algn="ctr"/>
+            <a:r>
+              <a:rPr sz="1400" b="1" i="0">
+                <a:solidFill>
+                  <a:srgbClr val="22C55E"/>
+                </a:solidFill>
+                <a:latin typeface="Calibri"/>
+              </a:rPr>
+              <a:t>0:45</a:t>
+            </a:r>
+          </a:p>
+        </p:txBody>
+      </p:sp>
+      <p:sp>
+        <p:nvSpPr>
+          <p:cNvPr id="27" name="TextBox 26"/>
+          <p:cNvSpPr txBox="1"/>
+          <p:nvPr/>
+        </p:nvSpPr>
+        <p:spPr>
+          <a:xfrm>
+            <a:off x="1600200" y="4379976"/>
+            <a:ext cx="10058400" cy="347472"/>
+          </a:xfrm>
+          <a:prstGeom prst="rect">
+            <a:avLst/>
+          </a:prstGeom>
+          <a:noFill/>
+        </p:spPr>
+        <p:txBody>
+          <a:bodyPr wrap="square">
+            <a:spAutoFit/>
+          </a:bodyPr>
+          <a:lstStyle/>
+          <a:p>
+            <a:pPr algn="l"/>
+            <a:r>
+              <a:rPr sz="1500" b="0" i="0">
+                <a:solidFill>
+                  <a:srgbClr val="FFFFFF"/>
+                </a:solidFill>
+                <a:latin typeface="Calibri"/>
+              </a:rPr>
+              <a:t>Traffic restored. Documentation updated... maybe.</a:t>
             </a:r>
           </a:p>
         </p:txBody>
       </p:sp>
       <p:pic>
         <p:nvPicPr>
-          <p:cNvPr id="14" name="Picture 13" descr="netbox_logo_bright.png"/>
+          <p:cNvPr id="28" name="Picture 27" descr="netbox_logo_bright.png"/>
           <p:cNvPicPr>
             <a:picLocks noChangeAspect="1"/>
           </p:cNvPicPr>
@@ -7368,7 +8770,7 @@
                 </a:solidFill>
                 <a:latin typeface="Calibri"/>
               </a:rPr>
-              <a:t>What We Recommended</a:t>
+              <a:t>The Root Cause</a:t>
             </a:r>
           </a:p>
         </p:txBody>
@@ -7381,8 +8783,123 @@
         </p:nvSpPr>
         <p:spPr>
           <a:xfrm>
-            <a:off x="365760" y="1005840"/>
-            <a:ext cx="3657600" cy="5303520"/>
+            <a:off x="365760" y="1097280"/>
+            <a:ext cx="3657600" cy="5029200"/>
+          </a:xfrm>
+          <a:prstGeom prst="rect">
+            <a:avLst/>
+          </a:prstGeom>
+          <a:solidFill>
+            <a:srgbClr val="142A3E"/>
+          </a:solidFill>
+          <a:ln w="19050">
+            <a:solidFill>
+              <a:srgbClr val="F59E0E"/>
+            </a:solidFill>
+          </a:ln>
+        </p:spPr>
+        <p:style>
+          <a:lnRef idx="1">
+            <a:schemeClr val="accent1"/>
+          </a:lnRef>
+          <a:fillRef idx="3">
+            <a:schemeClr val="accent1"/>
+          </a:fillRef>
+          <a:effectRef idx="2">
+            <a:schemeClr val="accent1"/>
+          </a:effectRef>
+          <a:fontRef idx="minor">
+            <a:schemeClr val="lt1"/>
+          </a:fontRef>
+        </p:style>
+        <p:txBody>
+          <a:bodyPr rtlCol="0" anchor="ctr"/>
+          <a:lstStyle/>
+          <a:p>
+            <a:pPr algn="ctr"/>
+          </a:p>
+        </p:txBody>
+      </p:sp>
+      <p:sp>
+        <p:nvSpPr>
+          <p:cNvPr id="5" name="TextBox 4"/>
+          <p:cNvSpPr txBox="1"/>
+          <p:nvPr/>
+        </p:nvSpPr>
+        <p:spPr>
+          <a:xfrm>
+            <a:off x="548640" y="1280160"/>
+            <a:ext cx="3291840" cy="640080"/>
+          </a:xfrm>
+          <a:prstGeom prst="rect">
+            <a:avLst/>
+          </a:prstGeom>
+          <a:noFill/>
+        </p:spPr>
+        <p:txBody>
+          <a:bodyPr wrap="square">
+            <a:spAutoFit/>
+          </a:bodyPr>
+          <a:lstStyle/>
+          <a:p>
+            <a:pPr algn="l"/>
+            <a:r>
+              <a:rPr sz="2000" b="1" i="0">
+                <a:solidFill>
+                  <a:srgbClr val="F59E0E"/>
+                </a:solidFill>
+                <a:latin typeface="Calibri"/>
+              </a:rPr>
+              <a:t>No single source of truth</a:t>
+            </a:r>
+          </a:p>
+        </p:txBody>
+      </p:sp>
+      <p:sp>
+        <p:nvSpPr>
+          <p:cNvPr id="6" name="TextBox 5"/>
+          <p:cNvSpPr txBox="1"/>
+          <p:nvPr/>
+        </p:nvSpPr>
+        <p:spPr>
+          <a:xfrm>
+            <a:off x="548640" y="2057400"/>
+            <a:ext cx="3291840" cy="3657600"/>
+          </a:xfrm>
+          <a:prstGeom prst="rect">
+            <a:avLst/>
+          </a:prstGeom>
+          <a:noFill/>
+        </p:spPr>
+        <p:txBody>
+          <a:bodyPr wrap="square">
+            <a:spAutoFit/>
+          </a:bodyPr>
+          <a:lstStyle/>
+          <a:p>
+            <a:pPr algn="l"/>
+            <a:r>
+              <a:rPr sz="1700" b="0" i="0">
+                <a:solidFill>
+                  <a:srgbClr val="FFFFFF"/>
+                </a:solidFill>
+                <a:latin typeface="Calibri"/>
+              </a:rPr>
+              <a:t>Circuit inventory lived in spreadsheets, Visio diagrams, and people’s heads. No one system had the full picture.</a:t>
+            </a:r>
+          </a:p>
+        </p:txBody>
+      </p:sp>
+      <p:sp>
+        <p:nvSpPr>
+          <p:cNvPr id="7" name="Rectangle 6"/>
+          <p:cNvSpPr/>
+          <p:nvPr/>
+        </p:nvSpPr>
+        <p:spPr>
+          <a:xfrm>
+            <a:off x="4434840" y="1097280"/>
+            <a:ext cx="3657600" cy="5029200"/>
           </a:xfrm>
           <a:prstGeom prst="rect">
             <a:avLst/>
@@ -7420,140 +8937,35 @@
       </p:sp>
       <p:sp>
         <p:nvSpPr>
-          <p:cNvPr id="5" name="TextBox 4"/>
-          <p:cNvSpPr txBox="1"/>
-          <p:nvPr/>
-        </p:nvSpPr>
-        <p:spPr>
-          <a:xfrm>
-            <a:off x="548640" y="1143000"/>
-            <a:ext cx="3291840" cy="457200"/>
-          </a:xfrm>
-          <a:prstGeom prst="rect">
-            <a:avLst/>
-          </a:prstGeom>
-          <a:noFill/>
-        </p:spPr>
-        <p:txBody>
-          <a:bodyPr wrap="square">
-            <a:spAutoFit/>
-          </a:bodyPr>
-          <a:lstStyle/>
-          <a:p>
-            <a:pPr algn="l"/>
-            <a:r>
-              <a:rPr sz="1800" b="1" i="0">
+          <p:cNvPr id="8" name="TextBox 7"/>
+          <p:cNvSpPr txBox="1"/>
+          <p:nvPr/>
+        </p:nvSpPr>
+        <p:spPr>
+          <a:xfrm>
+            <a:off x="4617720" y="1280160"/>
+            <a:ext cx="3291840" cy="640080"/>
+          </a:xfrm>
+          <a:prstGeom prst="rect">
+            <a:avLst/>
+          </a:prstGeom>
+          <a:noFill/>
+        </p:spPr>
+        <p:txBody>
+          <a:bodyPr wrap="square">
+            <a:spAutoFit/>
+          </a:bodyPr>
+          <a:lstStyle/>
+          <a:p>
+            <a:pPr algn="l"/>
+            <a:r>
+              <a:rPr sz="2000" b="1" i="0">
                 <a:solidFill>
                   <a:srgbClr val="EF4444"/>
                 </a:solidFill>
                 <a:latin typeface="Calibri"/>
               </a:rPr>
-              <a:t>The old world</a:t>
-            </a:r>
-          </a:p>
-        </p:txBody>
-      </p:sp>
-      <p:sp>
-        <p:nvSpPr>
-          <p:cNvPr id="6" name="TextBox 5"/>
-          <p:cNvSpPr txBox="1"/>
-          <p:nvPr/>
-        </p:nvSpPr>
-        <p:spPr>
-          <a:xfrm>
-            <a:off x="548640" y="1737360"/>
-            <a:ext cx="3200400" cy="411480"/>
-          </a:xfrm>
-          <a:prstGeom prst="rect">
-            <a:avLst/>
-          </a:prstGeom>
-          <a:noFill/>
-        </p:spPr>
-        <p:txBody>
-          <a:bodyPr wrap="square">
-            <a:spAutoFit/>
-          </a:bodyPr>
-          <a:lstStyle/>
-          <a:p>
-            <a:pPr algn="l"/>
-            <a:r>
-              <a:rPr sz="1600" b="0" i="0">
-                <a:solidFill>
-                  <a:srgbClr val="B0BCCC"/>
-                </a:solidFill>
-                <a:latin typeface="Calibri"/>
-              </a:rPr>
-              <a:t>✗  Spreadsheet inventory</a:t>
-            </a:r>
-          </a:p>
-        </p:txBody>
-      </p:sp>
-      <p:sp>
-        <p:nvSpPr>
-          <p:cNvPr id="7" name="TextBox 6"/>
-          <p:cNvSpPr txBox="1"/>
-          <p:nvPr/>
-        </p:nvSpPr>
-        <p:spPr>
-          <a:xfrm>
-            <a:off x="548640" y="2194560"/>
-            <a:ext cx="3200400" cy="411480"/>
-          </a:xfrm>
-          <a:prstGeom prst="rect">
-            <a:avLst/>
-          </a:prstGeom>
-          <a:noFill/>
-        </p:spPr>
-        <p:txBody>
-          <a:bodyPr wrap="square">
-            <a:spAutoFit/>
-          </a:bodyPr>
-          <a:lstStyle/>
-          <a:p>
-            <a:pPr algn="l"/>
-            <a:r>
-              <a:rPr sz="1600" b="0" i="0">
-                <a:solidFill>
-                  <a:srgbClr val="B0BCCC"/>
-                </a:solidFill>
-                <a:latin typeface="Calibri"/>
-              </a:rPr>
-              <a:t>✗  Manual failover runbooks</a:t>
-            </a:r>
-          </a:p>
-        </p:txBody>
-      </p:sp>
-      <p:sp>
-        <p:nvSpPr>
-          <p:cNvPr id="8" name="TextBox 7"/>
-          <p:cNvSpPr txBox="1"/>
-          <p:nvPr/>
-        </p:nvSpPr>
-        <p:spPr>
-          <a:xfrm>
-            <a:off x="548640" y="2651760"/>
-            <a:ext cx="3200400" cy="411480"/>
-          </a:xfrm>
-          <a:prstGeom prst="rect">
-            <a:avLst/>
-          </a:prstGeom>
-          <a:noFill/>
-        </p:spPr>
-        <p:txBody>
-          <a:bodyPr wrap="square">
-            <a:spAutoFit/>
-          </a:bodyPr>
-          <a:lstStyle/>
-          <a:p>
-            <a:pPr algn="l"/>
-            <a:r>
-              <a:rPr sz="1600" b="0" i="0">
-                <a:solidFill>
-                  <a:srgbClr val="B0BCCC"/>
-                </a:solidFill>
-                <a:latin typeface="Calibri"/>
-              </a:rPr>
-              <a:t>✗  45+ minute MTTR</a:t>
+              <a:t>No automation</a:t>
             </a:r>
           </a:p>
         </p:txBody>
@@ -7566,148 +8978,43 @@
         </p:nvSpPr>
         <p:spPr>
           <a:xfrm>
-            <a:off x="548640" y="3108960"/>
-            <a:ext cx="3200400" cy="411480"/>
-          </a:xfrm>
-          <a:prstGeom prst="rect">
-            <a:avLst/>
-          </a:prstGeom>
-          <a:noFill/>
-        </p:spPr>
-        <p:txBody>
-          <a:bodyPr wrap="square">
-            <a:spAutoFit/>
-          </a:bodyPr>
-          <a:lstStyle/>
-          <a:p>
-            <a:pPr algn="l"/>
-            <a:r>
-              <a:rPr sz="1600" b="0" i="0">
-                <a:solidFill>
-                  <a:srgbClr val="B0BCCC"/>
-                </a:solidFill>
-                <a:latin typeface="Calibri"/>
-              </a:rPr>
-              <a:t>✗  No automation</a:t>
-            </a:r>
-          </a:p>
-        </p:txBody>
-      </p:sp>
-      <p:sp>
-        <p:nvSpPr>
-          <p:cNvPr id="10" name="TextBox 9"/>
-          <p:cNvSpPr txBox="1"/>
-          <p:nvPr/>
-        </p:nvSpPr>
-        <p:spPr>
-          <a:xfrm>
-            <a:off x="548640" y="3566160"/>
-            <a:ext cx="3200400" cy="411480"/>
-          </a:xfrm>
-          <a:prstGeom prst="rect">
-            <a:avLst/>
-          </a:prstGeom>
-          <a:noFill/>
-        </p:spPr>
-        <p:txBody>
-          <a:bodyPr wrap="square">
-            <a:spAutoFit/>
-          </a:bodyPr>
-          <a:lstStyle/>
-          <a:p>
-            <a:pPr algn="l"/>
-            <a:r>
-              <a:rPr sz="1600" b="0" i="0">
-                <a:solidFill>
-                  <a:srgbClr val="B0BCCC"/>
-                </a:solidFill>
-                <a:latin typeface="Calibri"/>
-              </a:rPr>
-              <a:t>✗  Stale documentation</a:t>
-            </a:r>
-          </a:p>
-        </p:txBody>
-      </p:sp>
-      <p:sp>
-        <p:nvSpPr>
-          <p:cNvPr id="11" name="TextBox 10"/>
-          <p:cNvSpPr txBox="1"/>
-          <p:nvPr/>
-        </p:nvSpPr>
-        <p:spPr>
-          <a:xfrm>
-            <a:off x="548640" y="4023360"/>
-            <a:ext cx="3200400" cy="411480"/>
-          </a:xfrm>
-          <a:prstGeom prst="rect">
-            <a:avLst/>
-          </a:prstGeom>
-          <a:noFill/>
-        </p:spPr>
-        <p:txBody>
-          <a:bodyPr wrap="square">
-            <a:spAutoFit/>
-          </a:bodyPr>
-          <a:lstStyle/>
-          <a:p>
-            <a:pPr algn="l"/>
-            <a:r>
-              <a:rPr sz="1600" b="0" i="0">
-                <a:solidFill>
-                  <a:srgbClr val="B0BCCC"/>
-                </a:solidFill>
-                <a:latin typeface="Calibri"/>
-              </a:rPr>
-              <a:t>✗  Errors under pressure</a:t>
-            </a:r>
-          </a:p>
-        </p:txBody>
-      </p:sp>
-      <p:sp>
-        <p:nvSpPr>
-          <p:cNvPr id="12" name="TextBox 11"/>
-          <p:cNvSpPr txBox="1"/>
-          <p:nvPr/>
-        </p:nvSpPr>
-        <p:spPr>
-          <a:xfrm>
-            <a:off x="4160520" y="3383280"/>
-            <a:ext cx="548640" cy="548640"/>
-          </a:xfrm>
-          <a:prstGeom prst="rect">
-            <a:avLst/>
-          </a:prstGeom>
-          <a:noFill/>
-        </p:spPr>
-        <p:txBody>
-          <a:bodyPr wrap="square">
-            <a:spAutoFit/>
-          </a:bodyPr>
-          <a:lstStyle/>
-          <a:p>
-            <a:pPr algn="ctr"/>
-            <a:r>
-              <a:rPr sz="4000" b="1" i="0">
-                <a:solidFill>
-                  <a:srgbClr val="00C2A8"/>
-                </a:solidFill>
-                <a:latin typeface="Calibri"/>
-              </a:rPr>
-              <a:t>→</a:t>
-            </a:r>
-          </a:p>
-        </p:txBody>
-      </p:sp>
-      <p:sp>
-        <p:nvSpPr>
-          <p:cNvPr id="13" name="Rectangle 12"/>
+            <a:off x="4617720" y="2057400"/>
+            <a:ext cx="3291840" cy="3657600"/>
+          </a:xfrm>
+          <a:prstGeom prst="rect">
+            <a:avLst/>
+          </a:prstGeom>
+          <a:noFill/>
+        </p:spPr>
+        <p:txBody>
+          <a:bodyPr wrap="square">
+            <a:spAutoFit/>
+          </a:bodyPr>
+          <a:lstStyle/>
+          <a:p>
+            <a:pPr algn="l"/>
+            <a:r>
+              <a:rPr sz="1700" b="0" i="0">
+                <a:solidFill>
+                  <a:srgbClr val="FFFFFF"/>
+                </a:solidFill>
+                <a:latin typeface="Calibri"/>
+              </a:rPr>
+              <a:t>Every failover step was manual: find the backup, identify the routers, SSH in, apply config, test, document.</a:t>
+            </a:r>
+          </a:p>
+        </p:txBody>
+      </p:sp>
+      <p:sp>
+        <p:nvSpPr>
+          <p:cNvPr id="10" name="Rectangle 9"/>
           <p:cNvSpPr/>
           <p:nvPr/>
         </p:nvSpPr>
         <p:spPr>
           <a:xfrm>
-            <a:off x="4846320" y="1005840"/>
-            <a:ext cx="6949440" cy="5303520"/>
+            <a:off x="8503920" y="1097280"/>
+            <a:ext cx="3657600" cy="5029200"/>
           </a:xfrm>
           <a:prstGeom prst="rect">
             <a:avLst/>
@@ -7717,7 +9024,7 @@
           </a:solidFill>
           <a:ln w="19050">
             <a:solidFill>
-              <a:srgbClr val="00C2A8"/>
+              <a:srgbClr val="EF4444"/>
             </a:solidFill>
           </a:ln>
         </p:spPr>
@@ -7745,462 +9052,112 @@
       </p:sp>
       <p:sp>
         <p:nvSpPr>
-          <p:cNvPr id="14" name="TextBox 13"/>
-          <p:cNvSpPr txBox="1"/>
-          <p:nvPr/>
-        </p:nvSpPr>
-        <p:spPr>
-          <a:xfrm>
-            <a:off x="5029200" y="1143000"/>
-            <a:ext cx="6583680" cy="457200"/>
-          </a:xfrm>
-          <a:prstGeom prst="rect">
-            <a:avLst/>
-          </a:prstGeom>
-          <a:noFill/>
-        </p:spPr>
-        <p:txBody>
-          <a:bodyPr wrap="square">
-            <a:spAutoFit/>
-          </a:bodyPr>
-          <a:lstStyle/>
-          <a:p>
-            <a:pPr algn="l"/>
-            <a:r>
-              <a:rPr sz="1800" b="1" i="0">
-                <a:solidFill>
-                  <a:srgbClr val="00C2A8"/>
-                </a:solidFill>
-                <a:latin typeface="Calibri"/>
-              </a:rPr>
-              <a:t>The NetBox + AAP world</a:t>
-            </a:r>
-          </a:p>
-        </p:txBody>
-      </p:sp>
-      <p:sp>
-        <p:nvSpPr>
-          <p:cNvPr id="15" name="TextBox 14"/>
-          <p:cNvSpPr txBox="1"/>
-          <p:nvPr/>
-        </p:nvSpPr>
-        <p:spPr>
-          <a:xfrm>
-            <a:off x="5029200" y="1737360"/>
-            <a:ext cx="2194560" cy="411480"/>
-          </a:xfrm>
-          <a:prstGeom prst="rect">
-            <a:avLst/>
-          </a:prstGeom>
-          <a:noFill/>
-        </p:spPr>
-        <p:txBody>
-          <a:bodyPr wrap="square">
-            <a:spAutoFit/>
-          </a:bodyPr>
-          <a:lstStyle/>
-          <a:p>
-            <a:pPr algn="l"/>
-            <a:r>
-              <a:rPr sz="1600" b="1" i="0">
-                <a:solidFill>
-                  <a:srgbClr val="00C2A8"/>
-                </a:solidFill>
-                <a:latin typeface="Calibri"/>
-              </a:rPr>
-              <a:t>✓  NetBox Cloud</a:t>
-            </a:r>
-          </a:p>
-        </p:txBody>
-      </p:sp>
-      <p:sp>
-        <p:nvSpPr>
-          <p:cNvPr id="16" name="TextBox 15"/>
-          <p:cNvSpPr txBox="1"/>
-          <p:nvPr/>
-        </p:nvSpPr>
-        <p:spPr>
-          <a:xfrm>
-            <a:off x="7223760" y="1737360"/>
-            <a:ext cx="4389120" cy="411480"/>
-          </a:xfrm>
-          <a:prstGeom prst="rect">
-            <a:avLst/>
-          </a:prstGeom>
-          <a:noFill/>
-        </p:spPr>
-        <p:txBody>
-          <a:bodyPr wrap="square">
-            <a:spAutoFit/>
-          </a:bodyPr>
-          <a:lstStyle/>
-          <a:p>
-            <a:pPr algn="l"/>
-            <a:r>
-              <a:rPr sz="1500" b="0" i="0">
+          <p:cNvPr id="11" name="TextBox 10"/>
+          <p:cNvSpPr txBox="1"/>
+          <p:nvPr/>
+        </p:nvSpPr>
+        <p:spPr>
+          <a:xfrm>
+            <a:off x="8686800" y="1280160"/>
+            <a:ext cx="3291840" cy="640080"/>
+          </a:xfrm>
+          <a:prstGeom prst="rect">
+            <a:avLst/>
+          </a:prstGeom>
+          <a:noFill/>
+        </p:spPr>
+        <p:txBody>
+          <a:bodyPr wrap="square">
+            <a:spAutoFit/>
+          </a:bodyPr>
+          <a:lstStyle/>
+          <a:p>
+            <a:pPr algn="l"/>
+            <a:r>
+              <a:rPr sz="2000" b="1" i="0">
+                <a:solidFill>
+                  <a:srgbClr val="EF4444"/>
+                </a:solidFill>
+                <a:latin typeface="Calibri"/>
+              </a:rPr>
+              <a:t>No audit trail</a:t>
+            </a:r>
+          </a:p>
+        </p:txBody>
+      </p:sp>
+      <p:sp>
+        <p:nvSpPr>
+          <p:cNvPr id="12" name="TextBox 11"/>
+          <p:cNvSpPr txBox="1"/>
+          <p:nvPr/>
+        </p:nvSpPr>
+        <p:spPr>
+          <a:xfrm>
+            <a:off x="8686800" y="2057400"/>
+            <a:ext cx="3291840" cy="3657600"/>
+          </a:xfrm>
+          <a:prstGeom prst="rect">
+            <a:avLst/>
+          </a:prstGeom>
+          <a:noFill/>
+        </p:spPr>
+        <p:txBody>
+          <a:bodyPr wrap="square">
+            <a:spAutoFit/>
+          </a:bodyPr>
+          <a:lstStyle/>
+          <a:p>
+            <a:pPr algn="l"/>
+            <a:r>
+              <a:rPr sz="1700" b="0" i="0">
                 <a:solidFill>
                   <a:srgbClr val="FFFFFF"/>
                 </a:solidFill>
                 <a:latin typeface="Calibri"/>
               </a:rPr>
-              <a:t>Single source of truth for every circuit, device, and connection</a:t>
-            </a:r>
-          </a:p>
-        </p:txBody>
-      </p:sp>
-      <p:sp>
-        <p:nvSpPr>
-          <p:cNvPr id="17" name="TextBox 16"/>
-          <p:cNvSpPr txBox="1"/>
-          <p:nvPr/>
-        </p:nvSpPr>
-        <p:spPr>
-          <a:xfrm>
-            <a:off x="5029200" y="2194560"/>
-            <a:ext cx="2194560" cy="411480"/>
-          </a:xfrm>
-          <a:prstGeom prst="rect">
-            <a:avLst/>
-          </a:prstGeom>
-          <a:noFill/>
-        </p:spPr>
-        <p:txBody>
-          <a:bodyPr wrap="square">
-            <a:spAutoFit/>
-          </a:bodyPr>
-          <a:lstStyle/>
-          <a:p>
-            <a:pPr algn="l"/>
-            <a:r>
-              <a:rPr sz="1600" b="1" i="0">
-                <a:solidFill>
-                  <a:srgbClr val="00C2A8"/>
-                </a:solidFill>
-                <a:latin typeface="Calibri"/>
-              </a:rPr>
-              <a:t>✓  Copilot AI</a:t>
-            </a:r>
-          </a:p>
-        </p:txBody>
-      </p:sp>
-      <p:sp>
-        <p:nvSpPr>
-          <p:cNvPr id="18" name="TextBox 17"/>
-          <p:cNvSpPr txBox="1"/>
-          <p:nvPr/>
-        </p:nvSpPr>
-        <p:spPr>
-          <a:xfrm>
-            <a:off x="7223760" y="2194560"/>
-            <a:ext cx="4389120" cy="411480"/>
-          </a:xfrm>
-          <a:prstGeom prst="rect">
-            <a:avLst/>
-          </a:prstGeom>
-          <a:noFill/>
-        </p:spPr>
-        <p:txBody>
-          <a:bodyPr wrap="square">
-            <a:spAutoFit/>
-          </a:bodyPr>
-          <a:lstStyle/>
-          <a:p>
-            <a:pPr algn="l"/>
-            <a:r>
-              <a:rPr sz="1500" b="0" i="0">
-                <a:solidFill>
-                  <a:srgbClr val="FFFFFF"/>
-                </a:solidFill>
-                <a:latin typeface="Calibri"/>
-              </a:rPr>
-              <a:t>Translate operator intent into precise API actions, no CLI needed</a:t>
-            </a:r>
-          </a:p>
-        </p:txBody>
-      </p:sp>
-      <p:sp>
-        <p:nvSpPr>
-          <p:cNvPr id="19" name="TextBox 18"/>
-          <p:cNvSpPr txBox="1"/>
-          <p:nvPr/>
-        </p:nvSpPr>
-        <p:spPr>
-          <a:xfrm>
-            <a:off x="5029200" y="2651760"/>
-            <a:ext cx="2194560" cy="411480"/>
-          </a:xfrm>
-          <a:prstGeom prst="rect">
-            <a:avLst/>
-          </a:prstGeom>
-          <a:noFill/>
-        </p:spPr>
-        <p:txBody>
-          <a:bodyPr wrap="square">
-            <a:spAutoFit/>
-          </a:bodyPr>
-          <a:lstStyle/>
-          <a:p>
-            <a:pPr algn="l"/>
-            <a:r>
-              <a:rPr sz="1600" b="1" i="0">
-                <a:solidFill>
-                  <a:srgbClr val="00C2A8"/>
-                </a:solidFill>
-                <a:latin typeface="Calibri"/>
-              </a:rPr>
-              <a:t>✓  Event-driven webhook</a:t>
-            </a:r>
-          </a:p>
-        </p:txBody>
-      </p:sp>
-      <p:sp>
-        <p:nvSpPr>
-          <p:cNvPr id="20" name="TextBox 19"/>
-          <p:cNvSpPr txBox="1"/>
-          <p:nvPr/>
-        </p:nvSpPr>
-        <p:spPr>
-          <a:xfrm>
-            <a:off x="7223760" y="2651760"/>
-            <a:ext cx="4389120" cy="411480"/>
-          </a:xfrm>
-          <a:prstGeom prst="rect">
-            <a:avLst/>
-          </a:prstGeom>
-          <a:noFill/>
-        </p:spPr>
-        <p:txBody>
-          <a:bodyPr wrap="square">
-            <a:spAutoFit/>
-          </a:bodyPr>
-          <a:lstStyle/>
-          <a:p>
-            <a:pPr algn="l"/>
-            <a:r>
-              <a:rPr sz="1500" b="0" i="0">
-                <a:solidFill>
-                  <a:srgbClr val="FFFFFF"/>
-                </a:solidFill>
-                <a:latin typeface="Calibri"/>
-              </a:rPr>
-              <a:t>A status change in NetBox triggers automation instantly</a:t>
-            </a:r>
-          </a:p>
-        </p:txBody>
-      </p:sp>
-      <p:sp>
-        <p:nvSpPr>
-          <p:cNvPr id="21" name="TextBox 20"/>
-          <p:cNvSpPr txBox="1"/>
-          <p:nvPr/>
-        </p:nvSpPr>
-        <p:spPr>
-          <a:xfrm>
-            <a:off x="5029200" y="3108960"/>
-            <a:ext cx="2194560" cy="411480"/>
-          </a:xfrm>
-          <a:prstGeom prst="rect">
-            <a:avLst/>
-          </a:prstGeom>
-          <a:noFill/>
-        </p:spPr>
-        <p:txBody>
-          <a:bodyPr wrap="square">
-            <a:spAutoFit/>
-          </a:bodyPr>
-          <a:lstStyle/>
-          <a:p>
-            <a:pPr algn="l"/>
-            <a:r>
-              <a:rPr sz="1600" b="1" i="0">
-                <a:solidFill>
-                  <a:srgbClr val="00C2A8"/>
-                </a:solidFill>
-                <a:latin typeface="Calibri"/>
-              </a:rPr>
-              <a:t>✓  AAP Controller</a:t>
-            </a:r>
-          </a:p>
-        </p:txBody>
-      </p:sp>
-      <p:sp>
-        <p:nvSpPr>
-          <p:cNvPr id="22" name="TextBox 21"/>
-          <p:cNvSpPr txBox="1"/>
-          <p:nvPr/>
-        </p:nvSpPr>
-        <p:spPr>
-          <a:xfrm>
-            <a:off x="7223760" y="3108960"/>
-            <a:ext cx="4389120" cy="411480"/>
-          </a:xfrm>
-          <a:prstGeom prst="rect">
-            <a:avLst/>
-          </a:prstGeom>
-          <a:noFill/>
-        </p:spPr>
-        <p:txBody>
-          <a:bodyPr wrap="square">
-            <a:spAutoFit/>
-          </a:bodyPr>
-          <a:lstStyle/>
-          <a:p>
-            <a:pPr algn="l"/>
-            <a:r>
-              <a:rPr sz="1500" b="0" i="0">
-                <a:solidFill>
-                  <a:srgbClr val="FFFFFF"/>
-                </a:solidFill>
-                <a:latin typeface="Calibri"/>
-              </a:rPr>
-              <a:t>Discovers the backup dynamically, pushes config, updates NetBox</a:t>
-            </a:r>
-          </a:p>
-        </p:txBody>
-      </p:sp>
-      <p:sp>
-        <p:nvSpPr>
-          <p:cNvPr id="23" name="TextBox 22"/>
-          <p:cNvSpPr txBox="1"/>
-          <p:nvPr/>
-        </p:nvSpPr>
-        <p:spPr>
-          <a:xfrm>
-            <a:off x="5029200" y="3566160"/>
-            <a:ext cx="2194560" cy="411480"/>
-          </a:xfrm>
-          <a:prstGeom prst="rect">
-            <a:avLst/>
-          </a:prstGeom>
-          <a:noFill/>
-        </p:spPr>
-        <p:txBody>
-          <a:bodyPr wrap="square">
-            <a:spAutoFit/>
-          </a:bodyPr>
-          <a:lstStyle/>
-          <a:p>
-            <a:pPr algn="l"/>
-            <a:r>
-              <a:rPr sz="1600" b="1" i="0">
-                <a:solidFill>
-                  <a:srgbClr val="00C2A8"/>
-                </a:solidFill>
-                <a:latin typeface="Calibri"/>
-              </a:rPr>
-              <a:t>✓  Visual Explorer</a:t>
-            </a:r>
-          </a:p>
-        </p:txBody>
-      </p:sp>
-      <p:sp>
-        <p:nvSpPr>
-          <p:cNvPr id="24" name="TextBox 23"/>
-          <p:cNvSpPr txBox="1"/>
-          <p:nvPr/>
-        </p:nvSpPr>
-        <p:spPr>
-          <a:xfrm>
-            <a:off x="7223760" y="3566160"/>
-            <a:ext cx="4389120" cy="411480"/>
-          </a:xfrm>
-          <a:prstGeom prst="rect">
-            <a:avLst/>
-          </a:prstGeom>
-          <a:noFill/>
-        </p:spPr>
-        <p:txBody>
-          <a:bodyPr wrap="square">
-            <a:spAutoFit/>
-          </a:bodyPr>
-          <a:lstStyle/>
-          <a:p>
-            <a:pPr algn="l"/>
-            <a:r>
-              <a:rPr sz="1500" b="0" i="0">
-                <a:solidFill>
-                  <a:srgbClr val="FFFFFF"/>
-                </a:solidFill>
-                <a:latin typeface="Calibri"/>
-              </a:rPr>
-              <a:t>Live topology map reflects the new state immediately</a:t>
-            </a:r>
-          </a:p>
-        </p:txBody>
-      </p:sp>
-      <p:sp>
-        <p:nvSpPr>
-          <p:cNvPr id="25" name="TextBox 24"/>
-          <p:cNvSpPr txBox="1"/>
-          <p:nvPr/>
-        </p:nvSpPr>
-        <p:spPr>
-          <a:xfrm>
-            <a:off x="5029200" y="4023360"/>
-            <a:ext cx="2194560" cy="411480"/>
-          </a:xfrm>
-          <a:prstGeom prst="rect">
-            <a:avLst/>
-          </a:prstGeom>
-          <a:noFill/>
-        </p:spPr>
-        <p:txBody>
-          <a:bodyPr wrap="square">
-            <a:spAutoFit/>
-          </a:bodyPr>
-          <a:lstStyle/>
-          <a:p>
-            <a:pPr algn="l"/>
-            <a:r>
-              <a:rPr sz="1600" b="1" i="0">
-                <a:solidFill>
-                  <a:srgbClr val="00C2A8"/>
-                </a:solidFill>
-                <a:latin typeface="Calibri"/>
-              </a:rPr>
-              <a:t>✓  Full audit trail</a:t>
-            </a:r>
-          </a:p>
-        </p:txBody>
-      </p:sp>
-      <p:sp>
-        <p:nvSpPr>
-          <p:cNvPr id="26" name="TextBox 25"/>
-          <p:cNvSpPr txBox="1"/>
-          <p:nvPr/>
-        </p:nvSpPr>
-        <p:spPr>
-          <a:xfrm>
-            <a:off x="7223760" y="4023360"/>
-            <a:ext cx="4389120" cy="411480"/>
-          </a:xfrm>
-          <a:prstGeom prst="rect">
-            <a:avLst/>
-          </a:prstGeom>
-          <a:noFill/>
-        </p:spPr>
-        <p:txBody>
-          <a:bodyPr wrap="square">
-            <a:spAutoFit/>
-          </a:bodyPr>
-          <a:lstStyle/>
-          <a:p>
-            <a:pPr algn="l"/>
-            <a:r>
-              <a:rPr sz="1500" b="0" i="0">
-                <a:solidFill>
-                  <a:srgbClr val="FFFFFF"/>
-                </a:solidFill>
-                <a:latin typeface="Calibri"/>
-              </a:rPr>
-              <a:t>Every change recorded in NetBox and AAP job history</a:t>
+              <a:t>After the incident, the team couldn’t easily answer: what changed, when, and who made the call?</a:t>
+            </a:r>
+          </a:p>
+        </p:txBody>
+      </p:sp>
+      <p:sp>
+        <p:nvSpPr>
+          <p:cNvPr id="13" name="TextBox 12"/>
+          <p:cNvSpPr txBox="1"/>
+          <p:nvPr/>
+        </p:nvSpPr>
+        <p:spPr>
+          <a:xfrm>
+            <a:off x="457200" y="6309360"/>
+            <a:ext cx="11247120" cy="457200"/>
+          </a:xfrm>
+          <a:prstGeom prst="rect">
+            <a:avLst/>
+          </a:prstGeom>
+          <a:noFill/>
+        </p:spPr>
+        <p:txBody>
+          <a:bodyPr wrap="square">
+            <a:spAutoFit/>
+          </a:bodyPr>
+          <a:lstStyle/>
+          <a:p>
+            <a:pPr algn="ctr"/>
+            <a:r>
+              <a:rPr sz="1800" b="0" i="1">
+                <a:solidFill>
+                  <a:srgbClr val="B0BCCC"/>
+                </a:solidFill>
+                <a:latin typeface="Calibri"/>
+              </a:rPr>
+              <a:t>The technology existed to fix all three of these problems. It just wasn’t joined up.</a:t>
             </a:r>
           </a:p>
         </p:txBody>
       </p:sp>
       <p:pic>
         <p:nvPicPr>
-          <p:cNvPr id="27" name="Picture 26" descr="netbox_logo_bright.png"/>
+          <p:cNvPr id="14" name="Picture 13" descr="netbox_logo_bright.png"/>
           <p:cNvPicPr>
             <a:picLocks noChangeAspect="1"/>
           </p:cNvPicPr>
@@ -8299,8 +9256,8 @@
         </p:nvSpPr>
         <p:spPr>
           <a:xfrm>
-            <a:off x="457200" y="228600"/>
-            <a:ext cx="10058400" cy="685800"/>
+            <a:off x="457200" y="182880"/>
+            <a:ext cx="10972800" cy="685800"/>
           </a:xfrm>
           <a:prstGeom prst="rect">
             <a:avLst/>
@@ -8321,259 +9278,839 @@
                 </a:solidFill>
                 <a:latin typeface="Calibri"/>
               </a:rPr>
-              <a:t>How It Works</a:t>
-            </a:r>
-          </a:p>
-        </p:txBody>
-      </p:sp>
-      <p:sp>
-        <p:nvSpPr>
-          <p:cNvPr id="4" name="TextBox 3"/>
-          <p:cNvSpPr txBox="1"/>
-          <p:nvPr/>
-        </p:nvSpPr>
-        <p:spPr>
-          <a:xfrm>
-            <a:off x="548640" y="1097280"/>
-            <a:ext cx="10515600" cy="502920"/>
-          </a:xfrm>
-          <a:prstGeom prst="rect">
-            <a:avLst/>
-          </a:prstGeom>
-          <a:noFill/>
-        </p:spPr>
-        <p:txBody>
-          <a:bodyPr wrap="square">
-            <a:spAutoFit/>
-          </a:bodyPr>
-          <a:lstStyle/>
-          <a:p>
-            <a:pPr algn="l"/>
-            <a:r>
-              <a:rPr sz="2200" b="0" i="0">
+              <a:t>What We Recommended</a:t>
+            </a:r>
+          </a:p>
+        </p:txBody>
+      </p:sp>
+      <p:sp>
+        <p:nvSpPr>
+          <p:cNvPr id="4" name="Rectangle 3"/>
+          <p:cNvSpPr/>
+          <p:nvPr/>
+        </p:nvSpPr>
+        <p:spPr>
+          <a:xfrm>
+            <a:off x="365760" y="1005840"/>
+            <a:ext cx="3657600" cy="5303520"/>
+          </a:xfrm>
+          <a:prstGeom prst="rect">
+            <a:avLst/>
+          </a:prstGeom>
+          <a:solidFill>
+            <a:srgbClr val="142A3E"/>
+          </a:solidFill>
+          <a:ln w="19050">
+            <a:solidFill>
+              <a:srgbClr val="EF4444"/>
+            </a:solidFill>
+          </a:ln>
+        </p:spPr>
+        <p:style>
+          <a:lnRef idx="1">
+            <a:schemeClr val="accent1"/>
+          </a:lnRef>
+          <a:fillRef idx="3">
+            <a:schemeClr val="accent1"/>
+          </a:fillRef>
+          <a:effectRef idx="2">
+            <a:schemeClr val="accent1"/>
+          </a:effectRef>
+          <a:fontRef idx="minor">
+            <a:schemeClr val="lt1"/>
+          </a:fontRef>
+        </p:style>
+        <p:txBody>
+          <a:bodyPr rtlCol="0" anchor="ctr"/>
+          <a:lstStyle/>
+          <a:p>
+            <a:pPr algn="ctr"/>
+          </a:p>
+        </p:txBody>
+      </p:sp>
+      <p:sp>
+        <p:nvSpPr>
+          <p:cNvPr id="5" name="TextBox 4"/>
+          <p:cNvSpPr txBox="1"/>
+          <p:nvPr/>
+        </p:nvSpPr>
+        <p:spPr>
+          <a:xfrm>
+            <a:off x="548640" y="1143000"/>
+            <a:ext cx="3291840" cy="457200"/>
+          </a:xfrm>
+          <a:prstGeom prst="rect">
+            <a:avLst/>
+          </a:prstGeom>
+          <a:noFill/>
+        </p:spPr>
+        <p:txBody>
+          <a:bodyPr wrap="square">
+            <a:spAutoFit/>
+          </a:bodyPr>
+          <a:lstStyle/>
+          <a:p>
+            <a:pPr algn="l"/>
+            <a:r>
+              <a:rPr sz="1800" b="1" i="0">
+                <a:solidFill>
+                  <a:srgbClr val="EF4444"/>
+                </a:solidFill>
+                <a:latin typeface="Calibri"/>
+              </a:rPr>
+              <a:t>The old world</a:t>
+            </a:r>
+          </a:p>
+        </p:txBody>
+      </p:sp>
+      <p:sp>
+        <p:nvSpPr>
+          <p:cNvPr id="6" name="TextBox 5"/>
+          <p:cNvSpPr txBox="1"/>
+          <p:nvPr/>
+        </p:nvSpPr>
+        <p:spPr>
+          <a:xfrm>
+            <a:off x="548640" y="1737360"/>
+            <a:ext cx="3200400" cy="411480"/>
+          </a:xfrm>
+          <a:prstGeom prst="rect">
+            <a:avLst/>
+          </a:prstGeom>
+          <a:noFill/>
+        </p:spPr>
+        <p:txBody>
+          <a:bodyPr wrap="square">
+            <a:spAutoFit/>
+          </a:bodyPr>
+          <a:lstStyle/>
+          <a:p>
+            <a:pPr algn="l"/>
+            <a:r>
+              <a:rPr sz="1600" b="0" i="0">
+                <a:solidFill>
+                  <a:srgbClr val="B0BCCC"/>
+                </a:solidFill>
+                <a:latin typeface="Calibri"/>
+              </a:rPr>
+              <a:t>✗  Spreadsheet inventory</a:t>
+            </a:r>
+          </a:p>
+        </p:txBody>
+      </p:sp>
+      <p:sp>
+        <p:nvSpPr>
+          <p:cNvPr id="7" name="TextBox 6"/>
+          <p:cNvSpPr txBox="1"/>
+          <p:nvPr/>
+        </p:nvSpPr>
+        <p:spPr>
+          <a:xfrm>
+            <a:off x="548640" y="2194560"/>
+            <a:ext cx="3200400" cy="411480"/>
+          </a:xfrm>
+          <a:prstGeom prst="rect">
+            <a:avLst/>
+          </a:prstGeom>
+          <a:noFill/>
+        </p:spPr>
+        <p:txBody>
+          <a:bodyPr wrap="square">
+            <a:spAutoFit/>
+          </a:bodyPr>
+          <a:lstStyle/>
+          <a:p>
+            <a:pPr algn="l"/>
+            <a:r>
+              <a:rPr sz="1600" b="0" i="0">
+                <a:solidFill>
+                  <a:srgbClr val="B0BCCC"/>
+                </a:solidFill>
+                <a:latin typeface="Calibri"/>
+              </a:rPr>
+              <a:t>✗  Manual failover runbooks</a:t>
+            </a:r>
+          </a:p>
+        </p:txBody>
+      </p:sp>
+      <p:sp>
+        <p:nvSpPr>
+          <p:cNvPr id="8" name="TextBox 7"/>
+          <p:cNvSpPr txBox="1"/>
+          <p:nvPr/>
+        </p:nvSpPr>
+        <p:spPr>
+          <a:xfrm>
+            <a:off x="548640" y="2651760"/>
+            <a:ext cx="3200400" cy="411480"/>
+          </a:xfrm>
+          <a:prstGeom prst="rect">
+            <a:avLst/>
+          </a:prstGeom>
+          <a:noFill/>
+        </p:spPr>
+        <p:txBody>
+          <a:bodyPr wrap="square">
+            <a:spAutoFit/>
+          </a:bodyPr>
+          <a:lstStyle/>
+          <a:p>
+            <a:pPr algn="l"/>
+            <a:r>
+              <a:rPr sz="1600" b="0" i="0">
+                <a:solidFill>
+                  <a:srgbClr val="B0BCCC"/>
+                </a:solidFill>
+                <a:latin typeface="Calibri"/>
+              </a:rPr>
+              <a:t>✗  45+ minute MTTR</a:t>
+            </a:r>
+          </a:p>
+        </p:txBody>
+      </p:sp>
+      <p:sp>
+        <p:nvSpPr>
+          <p:cNvPr id="9" name="TextBox 8"/>
+          <p:cNvSpPr txBox="1"/>
+          <p:nvPr/>
+        </p:nvSpPr>
+        <p:spPr>
+          <a:xfrm>
+            <a:off x="548640" y="3108960"/>
+            <a:ext cx="3200400" cy="411480"/>
+          </a:xfrm>
+          <a:prstGeom prst="rect">
+            <a:avLst/>
+          </a:prstGeom>
+          <a:noFill/>
+        </p:spPr>
+        <p:txBody>
+          <a:bodyPr wrap="square">
+            <a:spAutoFit/>
+          </a:bodyPr>
+          <a:lstStyle/>
+          <a:p>
+            <a:pPr algn="l"/>
+            <a:r>
+              <a:rPr sz="1600" b="0" i="0">
+                <a:solidFill>
+                  <a:srgbClr val="B0BCCC"/>
+                </a:solidFill>
+                <a:latin typeface="Calibri"/>
+              </a:rPr>
+              <a:t>✗  No automation</a:t>
+            </a:r>
+          </a:p>
+        </p:txBody>
+      </p:sp>
+      <p:sp>
+        <p:nvSpPr>
+          <p:cNvPr id="10" name="TextBox 9"/>
+          <p:cNvSpPr txBox="1"/>
+          <p:nvPr/>
+        </p:nvSpPr>
+        <p:spPr>
+          <a:xfrm>
+            <a:off x="548640" y="3566160"/>
+            <a:ext cx="3200400" cy="411480"/>
+          </a:xfrm>
+          <a:prstGeom prst="rect">
+            <a:avLst/>
+          </a:prstGeom>
+          <a:noFill/>
+        </p:spPr>
+        <p:txBody>
+          <a:bodyPr wrap="square">
+            <a:spAutoFit/>
+          </a:bodyPr>
+          <a:lstStyle/>
+          <a:p>
+            <a:pPr algn="l"/>
+            <a:r>
+              <a:rPr sz="1600" b="0" i="0">
+                <a:solidFill>
+                  <a:srgbClr val="B0BCCC"/>
+                </a:solidFill>
+                <a:latin typeface="Calibri"/>
+              </a:rPr>
+              <a:t>✗  Stale documentation</a:t>
+            </a:r>
+          </a:p>
+        </p:txBody>
+      </p:sp>
+      <p:sp>
+        <p:nvSpPr>
+          <p:cNvPr id="11" name="TextBox 10"/>
+          <p:cNvSpPr txBox="1"/>
+          <p:nvPr/>
+        </p:nvSpPr>
+        <p:spPr>
+          <a:xfrm>
+            <a:off x="548640" y="4023360"/>
+            <a:ext cx="3200400" cy="411480"/>
+          </a:xfrm>
+          <a:prstGeom prst="rect">
+            <a:avLst/>
+          </a:prstGeom>
+          <a:noFill/>
+        </p:spPr>
+        <p:txBody>
+          <a:bodyPr wrap="square">
+            <a:spAutoFit/>
+          </a:bodyPr>
+          <a:lstStyle/>
+          <a:p>
+            <a:pPr algn="l"/>
+            <a:r>
+              <a:rPr sz="1600" b="0" i="0">
+                <a:solidFill>
+                  <a:srgbClr val="B0BCCC"/>
+                </a:solidFill>
+                <a:latin typeface="Calibri"/>
+              </a:rPr>
+              <a:t>✗  Errors under pressure</a:t>
+            </a:r>
+          </a:p>
+        </p:txBody>
+      </p:sp>
+      <p:sp>
+        <p:nvSpPr>
+          <p:cNvPr id="12" name="TextBox 11"/>
+          <p:cNvSpPr txBox="1"/>
+          <p:nvPr/>
+        </p:nvSpPr>
+        <p:spPr>
+          <a:xfrm>
+            <a:off x="4160520" y="3383280"/>
+            <a:ext cx="548640" cy="548640"/>
+          </a:xfrm>
+          <a:prstGeom prst="rect">
+            <a:avLst/>
+          </a:prstGeom>
+          <a:noFill/>
+        </p:spPr>
+        <p:txBody>
+          <a:bodyPr wrap="square">
+            <a:spAutoFit/>
+          </a:bodyPr>
+          <a:lstStyle/>
+          <a:p>
+            <a:pPr algn="ctr"/>
+            <a:r>
+              <a:rPr sz="4000" b="1" i="0">
+                <a:solidFill>
+                  <a:srgbClr val="00C2A8"/>
+                </a:solidFill>
+                <a:latin typeface="Calibri"/>
+              </a:rPr>
+              <a:t>→</a:t>
+            </a:r>
+          </a:p>
+        </p:txBody>
+      </p:sp>
+      <p:sp>
+        <p:nvSpPr>
+          <p:cNvPr id="13" name="Rectangle 12"/>
+          <p:cNvSpPr/>
+          <p:nvPr/>
+        </p:nvSpPr>
+        <p:spPr>
+          <a:xfrm>
+            <a:off x="4846320" y="1005840"/>
+            <a:ext cx="6949440" cy="5303520"/>
+          </a:xfrm>
+          <a:prstGeom prst="rect">
+            <a:avLst/>
+          </a:prstGeom>
+          <a:solidFill>
+            <a:srgbClr val="142A3E"/>
+          </a:solidFill>
+          <a:ln w="19050">
+            <a:solidFill>
+              <a:srgbClr val="00C2A8"/>
+            </a:solidFill>
+          </a:ln>
+        </p:spPr>
+        <p:style>
+          <a:lnRef idx="1">
+            <a:schemeClr val="accent1"/>
+          </a:lnRef>
+          <a:fillRef idx="3">
+            <a:schemeClr val="accent1"/>
+          </a:fillRef>
+          <a:effectRef idx="2">
+            <a:schemeClr val="accent1"/>
+          </a:effectRef>
+          <a:fontRef idx="minor">
+            <a:schemeClr val="lt1"/>
+          </a:fontRef>
+        </p:style>
+        <p:txBody>
+          <a:bodyPr rtlCol="0" anchor="ctr"/>
+          <a:lstStyle/>
+          <a:p>
+            <a:pPr algn="ctr"/>
+          </a:p>
+        </p:txBody>
+      </p:sp>
+      <p:sp>
+        <p:nvSpPr>
+          <p:cNvPr id="14" name="TextBox 13"/>
+          <p:cNvSpPr txBox="1"/>
+          <p:nvPr/>
+        </p:nvSpPr>
+        <p:spPr>
+          <a:xfrm>
+            <a:off x="5029200" y="1143000"/>
+            <a:ext cx="6583680" cy="457200"/>
+          </a:xfrm>
+          <a:prstGeom prst="rect">
+            <a:avLst/>
+          </a:prstGeom>
+          <a:noFill/>
+        </p:spPr>
+        <p:txBody>
+          <a:bodyPr wrap="square">
+            <a:spAutoFit/>
+          </a:bodyPr>
+          <a:lstStyle/>
+          <a:p>
+            <a:pPr algn="l"/>
+            <a:r>
+              <a:rPr sz="1800" b="1" i="0">
+                <a:solidFill>
+                  <a:srgbClr val="00C2A8"/>
+                </a:solidFill>
+                <a:latin typeface="Calibri"/>
+              </a:rPr>
+              <a:t>The NetBox + AAP world</a:t>
+            </a:r>
+          </a:p>
+        </p:txBody>
+      </p:sp>
+      <p:sp>
+        <p:nvSpPr>
+          <p:cNvPr id="15" name="TextBox 14"/>
+          <p:cNvSpPr txBox="1"/>
+          <p:nvPr/>
+        </p:nvSpPr>
+        <p:spPr>
+          <a:xfrm>
+            <a:off x="5029200" y="1737360"/>
+            <a:ext cx="2194560" cy="411480"/>
+          </a:xfrm>
+          <a:prstGeom prst="rect">
+            <a:avLst/>
+          </a:prstGeom>
+          <a:noFill/>
+        </p:spPr>
+        <p:txBody>
+          <a:bodyPr wrap="square">
+            <a:spAutoFit/>
+          </a:bodyPr>
+          <a:lstStyle/>
+          <a:p>
+            <a:pPr algn="l"/>
+            <a:r>
+              <a:rPr sz="1600" b="1" i="0">
+                <a:solidFill>
+                  <a:srgbClr val="00C2A8"/>
+                </a:solidFill>
+                <a:latin typeface="Calibri"/>
+              </a:rPr>
+              <a:t>✓  1. Disable the failed circuit</a:t>
+            </a:r>
+          </a:p>
+        </p:txBody>
+      </p:sp>
+      <p:sp>
+        <p:nvSpPr>
+          <p:cNvPr id="16" name="TextBox 15"/>
+          <p:cNvSpPr txBox="1"/>
+          <p:nvPr/>
+        </p:nvSpPr>
+        <p:spPr>
+          <a:xfrm>
+            <a:off x="7223760" y="1737360"/>
+            <a:ext cx="4389120" cy="411480"/>
+          </a:xfrm>
+          <a:prstGeom prst="rect">
+            <a:avLst/>
+          </a:prstGeom>
+          <a:noFill/>
+        </p:spPr>
+        <p:txBody>
+          <a:bodyPr wrap="square">
+            <a:spAutoFit/>
+          </a:bodyPr>
+          <a:lstStyle/>
+          <a:p>
+            <a:pPr algn="l"/>
+            <a:r>
+              <a:rPr sz="1500" b="0" i="0">
                 <a:solidFill>
                   <a:srgbClr val="FFFFFF"/>
                 </a:solidFill>
                 <a:latin typeface="Calibri"/>
               </a:rPr>
-              <a:t>•  NetBox Cloud holds every circuit, device, and connection as structured data</a:t>
-            </a:r>
-          </a:p>
-        </p:txBody>
-      </p:sp>
-      <p:sp>
-        <p:nvSpPr>
-          <p:cNvPr id="5" name="TextBox 4"/>
-          <p:cNvSpPr txBox="1"/>
-          <p:nvPr/>
-        </p:nvSpPr>
-        <p:spPr>
-          <a:xfrm>
-            <a:off x="548640" y="1627632"/>
-            <a:ext cx="10515600" cy="502920"/>
-          </a:xfrm>
-          <a:prstGeom prst="rect">
-            <a:avLst/>
-          </a:prstGeom>
-          <a:noFill/>
-        </p:spPr>
-        <p:txBody>
-          <a:bodyPr wrap="square">
-            <a:spAutoFit/>
-          </a:bodyPr>
-          <a:lstStyle/>
-          <a:p>
-            <a:pPr algn="l"/>
-            <a:r>
-              <a:rPr sz="2200" b="0" i="0">
+              <a:t>Copilot AI marks it offline in NetBox with a single sentence. No spreadsheet hunting.</a:t>
+            </a:r>
+          </a:p>
+        </p:txBody>
+      </p:sp>
+      <p:sp>
+        <p:nvSpPr>
+          <p:cNvPr id="17" name="TextBox 16"/>
+          <p:cNvSpPr txBox="1"/>
+          <p:nvPr/>
+        </p:nvSpPr>
+        <p:spPr>
+          <a:xfrm>
+            <a:off x="5029200" y="2194560"/>
+            <a:ext cx="2194560" cy="411480"/>
+          </a:xfrm>
+          <a:prstGeom prst="rect">
+            <a:avLst/>
+          </a:prstGeom>
+          <a:noFill/>
+        </p:spPr>
+        <p:txBody>
+          <a:bodyPr wrap="square">
+            <a:spAutoFit/>
+          </a:bodyPr>
+          <a:lstStyle/>
+          <a:p>
+            <a:pPr algn="l"/>
+            <a:r>
+              <a:rPr sz="1600" b="1" i="0">
+                <a:solidFill>
+                  <a:srgbClr val="00C2A8"/>
+                </a:solidFill>
+                <a:latin typeface="Calibri"/>
+              </a:rPr>
+              <a:t>✓  2. Fail over to the best alternative</a:t>
+            </a:r>
+          </a:p>
+        </p:txBody>
+      </p:sp>
+      <p:sp>
+        <p:nvSpPr>
+          <p:cNvPr id="18" name="TextBox 17"/>
+          <p:cNvSpPr txBox="1"/>
+          <p:nvPr/>
+        </p:nvSpPr>
+        <p:spPr>
+          <a:xfrm>
+            <a:off x="7223760" y="2194560"/>
+            <a:ext cx="4389120" cy="411480"/>
+          </a:xfrm>
+          <a:prstGeom prst="rect">
+            <a:avLst/>
+          </a:prstGeom>
+          <a:noFill/>
+        </p:spPr>
+        <p:txBody>
+          <a:bodyPr wrap="square">
+            <a:spAutoFit/>
+          </a:bodyPr>
+          <a:lstStyle/>
+          <a:p>
+            <a:pPr algn="l"/>
+            <a:r>
+              <a:rPr sz="1500" b="0" i="0">
                 <a:solidFill>
                   <a:srgbClr val="FFFFFF"/>
                 </a:solidFill>
                 <a:latin typeface="Calibri"/>
               </a:rPr>
-              <a:t>•  Copilot AI translates plain English into a precise API action</a:t>
-            </a:r>
-          </a:p>
-        </p:txBody>
-      </p:sp>
-      <p:sp>
-        <p:nvSpPr>
-          <p:cNvPr id="6" name="TextBox 5"/>
-          <p:cNvSpPr txBox="1"/>
-          <p:nvPr/>
-        </p:nvSpPr>
-        <p:spPr>
-          <a:xfrm>
-            <a:off x="548640" y="2157984"/>
-            <a:ext cx="10515600" cy="502920"/>
-          </a:xfrm>
-          <a:prstGeom prst="rect">
-            <a:avLst/>
-          </a:prstGeom>
-          <a:noFill/>
-        </p:spPr>
-        <p:txBody>
-          <a:bodyPr wrap="square">
-            <a:spAutoFit/>
-          </a:bodyPr>
-          <a:lstStyle/>
-          <a:p>
-            <a:pPr algn="l"/>
-            <a:r>
-              <a:rPr sz="2200" b="0" i="0">
+              <a:t>AAP queries NetBox, finds the highest-capacity backup, pushes router config automatically.</a:t>
+            </a:r>
+          </a:p>
+        </p:txBody>
+      </p:sp>
+      <p:sp>
+        <p:nvSpPr>
+          <p:cNvPr id="19" name="TextBox 18"/>
+          <p:cNvSpPr txBox="1"/>
+          <p:nvPr/>
+        </p:nvSpPr>
+        <p:spPr>
+          <a:xfrm>
+            <a:off x="5029200" y="2651760"/>
+            <a:ext cx="2194560" cy="411480"/>
+          </a:xfrm>
+          <a:prstGeom prst="rect">
+            <a:avLst/>
+          </a:prstGeom>
+          <a:noFill/>
+        </p:spPr>
+        <p:txBody>
+          <a:bodyPr wrap="square">
+            <a:spAutoFit/>
+          </a:bodyPr>
+          <a:lstStyle/>
+          <a:p>
+            <a:pPr algn="l"/>
+            <a:r>
+              <a:rPr sz="1600" b="1" i="0">
+                <a:solidFill>
+                  <a:srgbClr val="00C2A8"/>
+                </a:solidFill>
+                <a:latin typeface="Calibri"/>
+              </a:rPr>
+              <a:t>✓  3. Document for management</a:t>
+            </a:r>
+          </a:p>
+        </p:txBody>
+      </p:sp>
+      <p:sp>
+        <p:nvSpPr>
+          <p:cNvPr id="20" name="TextBox 19"/>
+          <p:cNvSpPr txBox="1"/>
+          <p:nvPr/>
+        </p:nvSpPr>
+        <p:spPr>
+          <a:xfrm>
+            <a:off x="7223760" y="2651760"/>
+            <a:ext cx="4389120" cy="411480"/>
+          </a:xfrm>
+          <a:prstGeom prst="rect">
+            <a:avLst/>
+          </a:prstGeom>
+          <a:noFill/>
+        </p:spPr>
+        <p:txBody>
+          <a:bodyPr wrap="square">
+            <a:spAutoFit/>
+          </a:bodyPr>
+          <a:lstStyle/>
+          <a:p>
+            <a:pPr algn="l"/>
+            <a:r>
+              <a:rPr sz="1500" b="0" i="0">
                 <a:solidFill>
                   <a:srgbClr val="FFFFFF"/>
                 </a:solidFill>
                 <a:latin typeface="Calibri"/>
               </a:rPr>
-              <a:t>•  A circuit status change fires a webhook to AAP automatically</a:t>
-            </a:r>
-          </a:p>
-        </p:txBody>
-      </p:sp>
-      <p:sp>
-        <p:nvSpPr>
-          <p:cNvPr id="7" name="TextBox 6"/>
-          <p:cNvSpPr txBox="1"/>
-          <p:nvPr/>
-        </p:nvSpPr>
-        <p:spPr>
-          <a:xfrm>
-            <a:off x="548640" y="2688336"/>
-            <a:ext cx="10515600" cy="502920"/>
-          </a:xfrm>
-          <a:prstGeom prst="rect">
-            <a:avLst/>
-          </a:prstGeom>
-          <a:noFill/>
-        </p:spPr>
-        <p:txBody>
-          <a:bodyPr wrap="square">
-            <a:spAutoFit/>
-          </a:bodyPr>
-          <a:lstStyle/>
-          <a:p>
-            <a:pPr algn="l"/>
-            <a:r>
-              <a:rPr sz="2200" b="0" i="0">
+              <a:t>AAP generates a full incident report: what failed, what ran, who triggered it, timestamps.</a:t>
+            </a:r>
+          </a:p>
+        </p:txBody>
+      </p:sp>
+      <p:sp>
+        <p:nvSpPr>
+          <p:cNvPr id="21" name="TextBox 20"/>
+          <p:cNvSpPr txBox="1"/>
+          <p:nvPr/>
+        </p:nvSpPr>
+        <p:spPr>
+          <a:xfrm>
+            <a:off x="5029200" y="3108960"/>
+            <a:ext cx="2194560" cy="411480"/>
+          </a:xfrm>
+          <a:prstGeom prst="rect">
+            <a:avLst/>
+          </a:prstGeom>
+          <a:noFill/>
+        </p:spPr>
+        <p:txBody>
+          <a:bodyPr wrap="square">
+            <a:spAutoFit/>
+          </a:bodyPr>
+          <a:lstStyle/>
+          <a:p>
+            <a:pPr algn="l"/>
+            <a:r>
+              <a:rPr sz="1600" b="1" i="0">
+                <a:solidFill>
+                  <a:srgbClr val="00C2A8"/>
+                </a:solidFill>
+                <a:latin typeface="Calibri"/>
+              </a:rPr>
+              <a:t>✓  </a:t>
+            </a:r>
+          </a:p>
+        </p:txBody>
+      </p:sp>
+      <p:sp>
+        <p:nvSpPr>
+          <p:cNvPr id="22" name="TextBox 21"/>
+          <p:cNvSpPr txBox="1"/>
+          <p:nvPr/>
+        </p:nvSpPr>
+        <p:spPr>
+          <a:xfrm>
+            <a:off x="7223760" y="3108960"/>
+            <a:ext cx="4389120" cy="411480"/>
+          </a:xfrm>
+          <a:prstGeom prst="rect">
+            <a:avLst/>
+          </a:prstGeom>
+          <a:noFill/>
+        </p:spPr>
+        <p:txBody>
+          <a:bodyPr wrap="square">
+            <a:spAutoFit/>
+          </a:bodyPr>
+          <a:lstStyle/>
+          <a:p>
+            <a:pPr algn="l"/>
+            <a:r>
+              <a:rPr sz="1500" b="0" i="0">
                 <a:solidFill>
                   <a:srgbClr val="FFFFFF"/>
                 </a:solidFill>
                 <a:latin typeface="Calibri"/>
               </a:rPr>
-              <a:t>•  AAP discovers the best backup circuit dynamically from NetBox</a:t>
-            </a:r>
-          </a:p>
-        </p:txBody>
-      </p:sp>
-      <p:sp>
-        <p:nvSpPr>
-          <p:cNvPr id="8" name="TextBox 7"/>
-          <p:cNvSpPr txBox="1"/>
-          <p:nvPr/>
-        </p:nvSpPr>
-        <p:spPr>
-          <a:xfrm>
-            <a:off x="548640" y="3218688"/>
-            <a:ext cx="10515600" cy="502920"/>
-          </a:xfrm>
-          <a:prstGeom prst="rect">
-            <a:avLst/>
-          </a:prstGeom>
-          <a:noFill/>
-        </p:spPr>
-        <p:txBody>
-          <a:bodyPr wrap="square">
-            <a:spAutoFit/>
-          </a:bodyPr>
-          <a:lstStyle/>
-          <a:p>
-            <a:pPr algn="l"/>
-            <a:r>
-              <a:rPr sz="2200" b="0" i="0">
+              <a:t/>
+            </a:r>
+          </a:p>
+        </p:txBody>
+      </p:sp>
+      <p:sp>
+        <p:nvSpPr>
+          <p:cNvPr id="23" name="TextBox 22"/>
+          <p:cNvSpPr txBox="1"/>
+          <p:nvPr/>
+        </p:nvSpPr>
+        <p:spPr>
+          <a:xfrm>
+            <a:off x="5029200" y="3566160"/>
+            <a:ext cx="2194560" cy="411480"/>
+          </a:xfrm>
+          <a:prstGeom prst="rect">
+            <a:avLst/>
+          </a:prstGeom>
+          <a:noFill/>
+        </p:spPr>
+        <p:txBody>
+          <a:bodyPr wrap="square">
+            <a:spAutoFit/>
+          </a:bodyPr>
+          <a:lstStyle/>
+          <a:p>
+            <a:pPr algn="l"/>
+            <a:r>
+              <a:rPr sz="1600" b="1" i="0">
+                <a:solidFill>
+                  <a:srgbClr val="00C2A8"/>
+                </a:solidFill>
+                <a:latin typeface="Calibri"/>
+              </a:rPr>
+              <a:t>✓  Visual Explorer</a:t>
+            </a:r>
+          </a:p>
+        </p:txBody>
+      </p:sp>
+      <p:sp>
+        <p:nvSpPr>
+          <p:cNvPr id="24" name="TextBox 23"/>
+          <p:cNvSpPr txBox="1"/>
+          <p:nvPr/>
+        </p:nvSpPr>
+        <p:spPr>
+          <a:xfrm>
+            <a:off x="7223760" y="3566160"/>
+            <a:ext cx="4389120" cy="411480"/>
+          </a:xfrm>
+          <a:prstGeom prst="rect">
+            <a:avLst/>
+          </a:prstGeom>
+          <a:noFill/>
+        </p:spPr>
+        <p:txBody>
+          <a:bodyPr wrap="square">
+            <a:spAutoFit/>
+          </a:bodyPr>
+          <a:lstStyle/>
+          <a:p>
+            <a:pPr algn="l"/>
+            <a:r>
+              <a:rPr sz="1500" b="0" i="0">
                 <a:solidFill>
                   <a:srgbClr val="FFFFFF"/>
                 </a:solidFill>
                 <a:latin typeface="Calibri"/>
               </a:rPr>
-              <a:t>•  Router config is pushed and NetBox is updated in a single workflow</a:t>
-            </a:r>
-          </a:p>
-        </p:txBody>
-      </p:sp>
-      <p:sp>
-        <p:nvSpPr>
-          <p:cNvPr id="9" name="TextBox 8"/>
-          <p:cNvSpPr txBox="1"/>
-          <p:nvPr/>
-        </p:nvSpPr>
-        <p:spPr>
-          <a:xfrm>
-            <a:off x="548640" y="3749040"/>
-            <a:ext cx="10515600" cy="502920"/>
-          </a:xfrm>
-          <a:prstGeom prst="rect">
-            <a:avLst/>
-          </a:prstGeom>
-          <a:noFill/>
-        </p:spPr>
-        <p:txBody>
-          <a:bodyPr wrap="square">
-            <a:spAutoFit/>
-          </a:bodyPr>
-          <a:lstStyle/>
-          <a:p>
-            <a:pPr algn="l"/>
-            <a:r>
-              <a:rPr sz="2200" b="0" i="0">
+              <a:t>Live topology map shows the new state the moment the workflow completes.</a:t>
+            </a:r>
+          </a:p>
+        </p:txBody>
+      </p:sp>
+      <p:sp>
+        <p:nvSpPr>
+          <p:cNvPr id="25" name="TextBox 24"/>
+          <p:cNvSpPr txBox="1"/>
+          <p:nvPr/>
+        </p:nvSpPr>
+        <p:spPr>
+          <a:xfrm>
+            <a:off x="5029200" y="4023360"/>
+            <a:ext cx="2194560" cy="411480"/>
+          </a:xfrm>
+          <a:prstGeom prst="rect">
+            <a:avLst/>
+          </a:prstGeom>
+          <a:noFill/>
+        </p:spPr>
+        <p:txBody>
+          <a:bodyPr wrap="square">
+            <a:spAutoFit/>
+          </a:bodyPr>
+          <a:lstStyle/>
+          <a:p>
+            <a:pPr algn="l"/>
+            <a:r>
+              <a:rPr sz="1600" b="1" i="0">
+                <a:solidFill>
+                  <a:srgbClr val="00C2A8"/>
+                </a:solidFill>
+                <a:latin typeface="Calibri"/>
+              </a:rPr>
+              <a:t>✓  Full audit trail</a:t>
+            </a:r>
+          </a:p>
+        </p:txBody>
+      </p:sp>
+      <p:sp>
+        <p:nvSpPr>
+          <p:cNvPr id="26" name="TextBox 25"/>
+          <p:cNvSpPr txBox="1"/>
+          <p:nvPr/>
+        </p:nvSpPr>
+        <p:spPr>
+          <a:xfrm>
+            <a:off x="7223760" y="4023360"/>
+            <a:ext cx="4389120" cy="411480"/>
+          </a:xfrm>
+          <a:prstGeom prst="rect">
+            <a:avLst/>
+          </a:prstGeom>
+          <a:noFill/>
+        </p:spPr>
+        <p:txBody>
+          <a:bodyPr wrap="square">
+            <a:spAutoFit/>
+          </a:bodyPr>
+          <a:lstStyle/>
+          <a:p>
+            <a:pPr algn="l"/>
+            <a:r>
+              <a:rPr sz="1500" b="0" i="0">
                 <a:solidFill>
                   <a:srgbClr val="FFFFFF"/>
                 </a:solidFill>
                 <a:latin typeface="Calibri"/>
               </a:rPr>
-              <a:t>•  Visual Explorer map reflects the new topology in real time</a:t>
-            </a:r>
-          </a:p>
-        </p:txBody>
-      </p:sp>
-      <p:sp>
-        <p:nvSpPr>
-          <p:cNvPr id="10" name="TextBox 9"/>
-          <p:cNvSpPr txBox="1"/>
-          <p:nvPr/>
-        </p:nvSpPr>
-        <p:spPr>
-          <a:xfrm>
-            <a:off x="548640" y="4279392"/>
-            <a:ext cx="10515600" cy="502920"/>
-          </a:xfrm>
-          <a:prstGeom prst="rect">
-            <a:avLst/>
-          </a:prstGeom>
-          <a:noFill/>
-        </p:spPr>
-        <p:txBody>
-          <a:bodyPr wrap="square">
-            <a:spAutoFit/>
-          </a:bodyPr>
-          <a:lstStyle/>
-          <a:p>
-            <a:pPr algn="l"/>
-            <a:r>
-              <a:rPr sz="2200" b="0" i="0">
-                <a:solidFill>
-                  <a:srgbClr val="FFFFFF"/>
-                </a:solidFill>
-                <a:latin typeface="Calibri"/>
-              </a:rPr>
-              <a:t>•  Automated failover: under 30 seconds  ·  Full audit trail</a:t>
+              <a:t>Every action recorded in NetBox change log and AAP job history.</a:t>
             </a:r>
           </a:p>
         </p:txBody>
       </p:sp>
       <p:pic>
         <p:nvPicPr>
-          <p:cNvPr id="11" name="Picture 10" descr="netbox_logo_bright.png"/>
+          <p:cNvPr id="27" name="Picture 26" descr="netbox_logo_bright.png"/>
           <p:cNvPicPr>
             <a:picLocks noChangeAspect="1"/>
           </p:cNvPicPr>
@@ -8673,7 +10210,7 @@
         <p:spPr>
           <a:xfrm>
             <a:off x="457200" y="228600"/>
-            <a:ext cx="9144000" cy="640080"/>
+            <a:ext cx="10058400" cy="685800"/>
           </a:xfrm>
           <a:prstGeom prst="rect">
             <a:avLst/>
@@ -8694,14 +10231,259 @@
                 </a:solidFill>
                 <a:latin typeface="Calibri"/>
               </a:rPr>
-              <a:t>Architecture</a:t>
+              <a:t>How It Works</a:t>
+            </a:r>
+          </a:p>
+        </p:txBody>
+      </p:sp>
+      <p:sp>
+        <p:nvSpPr>
+          <p:cNvPr id="4" name="TextBox 3"/>
+          <p:cNvSpPr txBox="1"/>
+          <p:nvPr/>
+        </p:nvSpPr>
+        <p:spPr>
+          <a:xfrm>
+            <a:off x="548640" y="1097280"/>
+            <a:ext cx="10515600" cy="502920"/>
+          </a:xfrm>
+          <a:prstGeom prst="rect">
+            <a:avLst/>
+          </a:prstGeom>
+          <a:noFill/>
+        </p:spPr>
+        <p:txBody>
+          <a:bodyPr wrap="square">
+            <a:spAutoFit/>
+          </a:bodyPr>
+          <a:lstStyle/>
+          <a:p>
+            <a:pPr algn="l"/>
+            <a:r>
+              <a:rPr sz="2200" b="0" i="0">
+                <a:solidFill>
+                  <a:srgbClr val="FFFFFF"/>
+                </a:solidFill>
+                <a:latin typeface="Calibri"/>
+              </a:rPr>
+              <a:t>•  NetBox Cloud holds every circuit, device, and connection as structured data</a:t>
+            </a:r>
+          </a:p>
+        </p:txBody>
+      </p:sp>
+      <p:sp>
+        <p:nvSpPr>
+          <p:cNvPr id="5" name="TextBox 4"/>
+          <p:cNvSpPr txBox="1"/>
+          <p:nvPr/>
+        </p:nvSpPr>
+        <p:spPr>
+          <a:xfrm>
+            <a:off x="548640" y="1627632"/>
+            <a:ext cx="10515600" cy="502920"/>
+          </a:xfrm>
+          <a:prstGeom prst="rect">
+            <a:avLst/>
+          </a:prstGeom>
+          <a:noFill/>
+        </p:spPr>
+        <p:txBody>
+          <a:bodyPr wrap="square">
+            <a:spAutoFit/>
+          </a:bodyPr>
+          <a:lstStyle/>
+          <a:p>
+            <a:pPr algn="l"/>
+            <a:r>
+              <a:rPr sz="2200" b="0" i="0">
+                <a:solidFill>
+                  <a:srgbClr val="FFFFFF"/>
+                </a:solidFill>
+                <a:latin typeface="Calibri"/>
+              </a:rPr>
+              <a:t>•  Copilot AI translates plain English into a precise API action</a:t>
+            </a:r>
+          </a:p>
+        </p:txBody>
+      </p:sp>
+      <p:sp>
+        <p:nvSpPr>
+          <p:cNvPr id="6" name="TextBox 5"/>
+          <p:cNvSpPr txBox="1"/>
+          <p:nvPr/>
+        </p:nvSpPr>
+        <p:spPr>
+          <a:xfrm>
+            <a:off x="548640" y="2157984"/>
+            <a:ext cx="10515600" cy="502920"/>
+          </a:xfrm>
+          <a:prstGeom prst="rect">
+            <a:avLst/>
+          </a:prstGeom>
+          <a:noFill/>
+        </p:spPr>
+        <p:txBody>
+          <a:bodyPr wrap="square">
+            <a:spAutoFit/>
+          </a:bodyPr>
+          <a:lstStyle/>
+          <a:p>
+            <a:pPr algn="l"/>
+            <a:r>
+              <a:rPr sz="2200" b="0" i="0">
+                <a:solidFill>
+                  <a:srgbClr val="FFFFFF"/>
+                </a:solidFill>
+                <a:latin typeface="Calibri"/>
+              </a:rPr>
+              <a:t>•  A circuit status change fires a webhook to AAP automatically</a:t>
+            </a:r>
+          </a:p>
+        </p:txBody>
+      </p:sp>
+      <p:sp>
+        <p:nvSpPr>
+          <p:cNvPr id="7" name="TextBox 6"/>
+          <p:cNvSpPr txBox="1"/>
+          <p:nvPr/>
+        </p:nvSpPr>
+        <p:spPr>
+          <a:xfrm>
+            <a:off x="548640" y="2688336"/>
+            <a:ext cx="10515600" cy="502920"/>
+          </a:xfrm>
+          <a:prstGeom prst="rect">
+            <a:avLst/>
+          </a:prstGeom>
+          <a:noFill/>
+        </p:spPr>
+        <p:txBody>
+          <a:bodyPr wrap="square">
+            <a:spAutoFit/>
+          </a:bodyPr>
+          <a:lstStyle/>
+          <a:p>
+            <a:pPr algn="l"/>
+            <a:r>
+              <a:rPr sz="2200" b="0" i="0">
+                <a:solidFill>
+                  <a:srgbClr val="FFFFFF"/>
+                </a:solidFill>
+                <a:latin typeface="Calibri"/>
+              </a:rPr>
+              <a:t>•  AAP discovers the best backup circuit dynamically from NetBox</a:t>
+            </a:r>
+          </a:p>
+        </p:txBody>
+      </p:sp>
+      <p:sp>
+        <p:nvSpPr>
+          <p:cNvPr id="8" name="TextBox 7"/>
+          <p:cNvSpPr txBox="1"/>
+          <p:nvPr/>
+        </p:nvSpPr>
+        <p:spPr>
+          <a:xfrm>
+            <a:off x="548640" y="3218688"/>
+            <a:ext cx="10515600" cy="502920"/>
+          </a:xfrm>
+          <a:prstGeom prst="rect">
+            <a:avLst/>
+          </a:prstGeom>
+          <a:noFill/>
+        </p:spPr>
+        <p:txBody>
+          <a:bodyPr wrap="square">
+            <a:spAutoFit/>
+          </a:bodyPr>
+          <a:lstStyle/>
+          <a:p>
+            <a:pPr algn="l"/>
+            <a:r>
+              <a:rPr sz="2200" b="0" i="0">
+                <a:solidFill>
+                  <a:srgbClr val="FFFFFF"/>
+                </a:solidFill>
+                <a:latin typeface="Calibri"/>
+              </a:rPr>
+              <a:t>•  Router config is pushed and NetBox is updated in a single workflow</a:t>
+            </a:r>
+          </a:p>
+        </p:txBody>
+      </p:sp>
+      <p:sp>
+        <p:nvSpPr>
+          <p:cNvPr id="9" name="TextBox 8"/>
+          <p:cNvSpPr txBox="1"/>
+          <p:nvPr/>
+        </p:nvSpPr>
+        <p:spPr>
+          <a:xfrm>
+            <a:off x="548640" y="3749040"/>
+            <a:ext cx="10515600" cy="502920"/>
+          </a:xfrm>
+          <a:prstGeom prst="rect">
+            <a:avLst/>
+          </a:prstGeom>
+          <a:noFill/>
+        </p:spPr>
+        <p:txBody>
+          <a:bodyPr wrap="square">
+            <a:spAutoFit/>
+          </a:bodyPr>
+          <a:lstStyle/>
+          <a:p>
+            <a:pPr algn="l"/>
+            <a:r>
+              <a:rPr sz="2200" b="0" i="0">
+                <a:solidFill>
+                  <a:srgbClr val="FFFFFF"/>
+                </a:solidFill>
+                <a:latin typeface="Calibri"/>
+              </a:rPr>
+              <a:t>•  Visual Explorer map reflects the new topology in real time</a:t>
+            </a:r>
+          </a:p>
+        </p:txBody>
+      </p:sp>
+      <p:sp>
+        <p:nvSpPr>
+          <p:cNvPr id="10" name="TextBox 9"/>
+          <p:cNvSpPr txBox="1"/>
+          <p:nvPr/>
+        </p:nvSpPr>
+        <p:spPr>
+          <a:xfrm>
+            <a:off x="548640" y="4279392"/>
+            <a:ext cx="10515600" cy="502920"/>
+          </a:xfrm>
+          <a:prstGeom prst="rect">
+            <a:avLst/>
+          </a:prstGeom>
+          <a:noFill/>
+        </p:spPr>
+        <p:txBody>
+          <a:bodyPr wrap="square">
+            <a:spAutoFit/>
+          </a:bodyPr>
+          <a:lstStyle/>
+          <a:p>
+            <a:pPr algn="l"/>
+            <a:r>
+              <a:rPr sz="2200" b="0" i="0">
+                <a:solidFill>
+                  <a:srgbClr val="FFFFFF"/>
+                </a:solidFill>
+                <a:latin typeface="Calibri"/>
+              </a:rPr>
+              <a:t>•  Automated failover: under 30 seconds  ·  Full audit trail</a:t>
             </a:r>
           </a:p>
         </p:txBody>
       </p:sp>
       <p:pic>
         <p:nvPicPr>
-          <p:cNvPr id="4" name="Picture 3" descr="architecture.png"/>
+          <p:cNvPr id="11" name="Picture 10" descr="netbox_logo_bright.png"/>
           <p:cNvPicPr>
             <a:picLocks noChangeAspect="1"/>
           </p:cNvPicPr>
@@ -8709,30 +10491,6 @@
         </p:nvPicPr>
         <p:blipFill>
           <a:blip r:embed="rId2"/>
-          <a:stretch>
-            <a:fillRect/>
-          </a:stretch>
-        </p:blipFill>
-        <p:spPr>
-          <a:xfrm>
-            <a:off x="274320" y="960120"/>
-            <a:ext cx="10972800" cy="2514600"/>
-          </a:xfrm>
-          <a:prstGeom prst="rect">
-            <a:avLst/>
-          </a:prstGeom>
-        </p:spPr>
-      </p:pic>
-      <p:pic>
-        <p:nvPicPr>
-          <p:cNvPr id="5" name="Picture 4" descr="netbox_logo_bright.png"/>
-          <p:cNvPicPr>
-            <a:picLocks noChangeAspect="1"/>
-          </p:cNvPicPr>
-          <p:nvPr/>
-        </p:nvPicPr>
-        <p:blipFill>
-          <a:blip r:embed="rId3"/>
           <a:stretch>
             <a:fillRect/>
           </a:stretch>
@@ -8846,14 +10604,14 @@
                 </a:solidFill>
                 <a:latin typeface="Calibri"/>
               </a:rPr>
-              <a:t>Demo Sequence</a:t>
+              <a:t>Architecture</a:t>
             </a:r>
           </a:p>
         </p:txBody>
       </p:sp>
       <p:pic>
         <p:nvPicPr>
-          <p:cNvPr id="4" name="Picture 3" descr="sequence.png"/>
+          <p:cNvPr id="4" name="Picture 3" descr="architecture.png"/>
           <p:cNvPicPr>
             <a:picLocks noChangeAspect="1"/>
           </p:cNvPicPr>
@@ -8867,8 +10625,8 @@
         </p:blipFill>
         <p:spPr>
           <a:xfrm>
-            <a:off x="457200" y="914400"/>
-            <a:ext cx="10789920" cy="3596640"/>
+            <a:off x="274320" y="960120"/>
+            <a:ext cx="10972800" cy="2514600"/>
           </a:xfrm>
           <a:prstGeom prst="rect">
             <a:avLst/>
@@ -8977,7 +10735,7 @@
         <p:spPr>
           <a:xfrm>
             <a:off x="457200" y="228600"/>
-            <a:ext cx="10058400" cy="640080"/>
+            <a:ext cx="9144000" cy="640080"/>
           </a:xfrm>
           <a:prstGeom prst="rect">
             <a:avLst/>
@@ -8998,1050 +10756,14 @@
                 </a:solidFill>
                 <a:latin typeface="Calibri"/>
               </a:rPr>
-              <a:t>Demo Flow — Step by Step</a:t>
-            </a:r>
-          </a:p>
-        </p:txBody>
-      </p:sp>
-      <p:sp>
-        <p:nvSpPr>
-          <p:cNvPr id="4" name="Rectangle 3"/>
-          <p:cNvSpPr/>
-          <p:nvPr/>
-        </p:nvSpPr>
-        <p:spPr>
-          <a:xfrm>
-            <a:off x="320040" y="1051560"/>
-            <a:ext cx="347472" cy="347472"/>
-          </a:xfrm>
-          <a:prstGeom prst="rect">
-            <a:avLst/>
-          </a:prstGeom>
-          <a:solidFill>
-            <a:srgbClr val="00C2A8"/>
-          </a:solidFill>
-          <a:ln>
-            <a:noFill/>
-          </a:ln>
-        </p:spPr>
-        <p:style>
-          <a:lnRef idx="1">
-            <a:schemeClr val="accent1"/>
-          </a:lnRef>
-          <a:fillRef idx="3">
-            <a:schemeClr val="accent1"/>
-          </a:fillRef>
-          <a:effectRef idx="2">
-            <a:schemeClr val="accent1"/>
-          </a:effectRef>
-          <a:fontRef idx="minor">
-            <a:schemeClr val="lt1"/>
-          </a:fontRef>
-        </p:style>
-        <p:txBody>
-          <a:bodyPr rtlCol="0" anchor="ctr"/>
-          <a:lstStyle/>
-          <a:p>
-            <a:pPr algn="ctr"/>
-          </a:p>
-        </p:txBody>
-      </p:sp>
-      <p:sp>
-        <p:nvSpPr>
-          <p:cNvPr id="5" name="TextBox 4"/>
-          <p:cNvSpPr txBox="1"/>
-          <p:nvPr/>
-        </p:nvSpPr>
-        <p:spPr>
-          <a:xfrm>
-            <a:off x="329184" y="1024128"/>
-            <a:ext cx="347472" cy="347472"/>
-          </a:xfrm>
-          <a:prstGeom prst="rect">
-            <a:avLst/>
-          </a:prstGeom>
-          <a:noFill/>
-        </p:spPr>
-        <p:txBody>
-          <a:bodyPr wrap="square">
-            <a:spAutoFit/>
-          </a:bodyPr>
-          <a:lstStyle/>
-          <a:p>
-            <a:pPr algn="ctr"/>
-            <a:r>
-              <a:rPr sz="1600" b="1" i="0">
-                <a:solidFill>
-                  <a:srgbClr val="0D1B2A"/>
-                </a:solidFill>
-                <a:latin typeface="Calibri"/>
-              </a:rPr>
-              <a:t>1</a:t>
-            </a:r>
-          </a:p>
-        </p:txBody>
-      </p:sp>
-      <p:sp>
-        <p:nvSpPr>
-          <p:cNvPr id="6" name="TextBox 5"/>
-          <p:cNvSpPr txBox="1"/>
-          <p:nvPr/>
-        </p:nvSpPr>
-        <p:spPr>
-          <a:xfrm>
-            <a:off x="777240" y="1005840"/>
-            <a:ext cx="2011680" cy="411480"/>
-          </a:xfrm>
-          <a:prstGeom prst="rect">
-            <a:avLst/>
-          </a:prstGeom>
-          <a:noFill/>
-        </p:spPr>
-        <p:txBody>
-          <a:bodyPr wrap="square">
-            <a:spAutoFit/>
-          </a:bodyPr>
-          <a:lstStyle/>
-          <a:p>
-            <a:pPr algn="l"/>
-            <a:r>
-              <a:rPr sz="1600" b="1" i="0">
-                <a:solidFill>
-                  <a:srgbClr val="00C2A8"/>
-                </a:solidFill>
-                <a:latin typeface="Calibri"/>
-              </a:rPr>
-              <a:t>Visual Explorer</a:t>
-            </a:r>
-          </a:p>
-        </p:txBody>
-      </p:sp>
-      <p:sp>
-        <p:nvSpPr>
-          <p:cNvPr id="7" name="TextBox 6"/>
-          <p:cNvSpPr txBox="1"/>
-          <p:nvPr/>
-        </p:nvSpPr>
-        <p:spPr>
-          <a:xfrm>
-            <a:off x="2834640" y="1005840"/>
-            <a:ext cx="8961120" cy="411480"/>
-          </a:xfrm>
-          <a:prstGeom prst="rect">
-            <a:avLst/>
-          </a:prstGeom>
-          <a:noFill/>
-        </p:spPr>
-        <p:txBody>
-          <a:bodyPr wrap="square">
-            <a:spAutoFit/>
-          </a:bodyPr>
-          <a:lstStyle/>
-          <a:p>
-            <a:pPr algn="l"/>
-            <a:r>
-              <a:rPr sz="1500" b="0" i="0">
-                <a:solidFill>
-                  <a:srgbClr val="FFFFFF"/>
-                </a:solidFill>
-                <a:latin typeface="Calibri"/>
-              </a:rPr>
-              <a:t>Open the global WAN map — GB-Bristol hub with active circuit to US-Atlanta via IPLC-GB-AT-PRI</a:t>
-            </a:r>
-          </a:p>
-        </p:txBody>
-      </p:sp>
-      <p:sp>
-        <p:nvSpPr>
-          <p:cNvPr id="8" name="Rectangle 7"/>
-          <p:cNvSpPr/>
-          <p:nvPr/>
-        </p:nvSpPr>
-        <p:spPr>
-          <a:xfrm>
-            <a:off x="320040" y="1527048"/>
-            <a:ext cx="347472" cy="347472"/>
-          </a:xfrm>
-          <a:prstGeom prst="rect">
-            <a:avLst/>
-          </a:prstGeom>
-          <a:solidFill>
-            <a:srgbClr val="00C2A8"/>
-          </a:solidFill>
-          <a:ln>
-            <a:noFill/>
-          </a:ln>
-        </p:spPr>
-        <p:style>
-          <a:lnRef idx="1">
-            <a:schemeClr val="accent1"/>
-          </a:lnRef>
-          <a:fillRef idx="3">
-            <a:schemeClr val="accent1"/>
-          </a:fillRef>
-          <a:effectRef idx="2">
-            <a:schemeClr val="accent1"/>
-          </a:effectRef>
-          <a:fontRef idx="minor">
-            <a:schemeClr val="lt1"/>
-          </a:fontRef>
-        </p:style>
-        <p:txBody>
-          <a:bodyPr rtlCol="0" anchor="ctr"/>
-          <a:lstStyle/>
-          <a:p>
-            <a:pPr algn="ctr"/>
-          </a:p>
-        </p:txBody>
-      </p:sp>
-      <p:sp>
-        <p:nvSpPr>
-          <p:cNvPr id="9" name="TextBox 8"/>
-          <p:cNvSpPr txBox="1"/>
-          <p:nvPr/>
-        </p:nvSpPr>
-        <p:spPr>
-          <a:xfrm>
-            <a:off x="329184" y="1499616"/>
-            <a:ext cx="347472" cy="347472"/>
-          </a:xfrm>
-          <a:prstGeom prst="rect">
-            <a:avLst/>
-          </a:prstGeom>
-          <a:noFill/>
-        </p:spPr>
-        <p:txBody>
-          <a:bodyPr wrap="square">
-            <a:spAutoFit/>
-          </a:bodyPr>
-          <a:lstStyle/>
-          <a:p>
-            <a:pPr algn="ctr"/>
-            <a:r>
-              <a:rPr sz="1600" b="1" i="0">
-                <a:solidFill>
-                  <a:srgbClr val="0D1B2A"/>
-                </a:solidFill>
-                <a:latin typeface="Calibri"/>
-              </a:rPr>
-              <a:t>2</a:t>
-            </a:r>
-          </a:p>
-        </p:txBody>
-      </p:sp>
-      <p:sp>
-        <p:nvSpPr>
-          <p:cNvPr id="10" name="TextBox 9"/>
-          <p:cNvSpPr txBox="1"/>
-          <p:nvPr/>
-        </p:nvSpPr>
-        <p:spPr>
-          <a:xfrm>
-            <a:off x="777240" y="1481328"/>
-            <a:ext cx="2011680" cy="411480"/>
-          </a:xfrm>
-          <a:prstGeom prst="rect">
-            <a:avLst/>
-          </a:prstGeom>
-          <a:noFill/>
-        </p:spPr>
-        <p:txBody>
-          <a:bodyPr wrap="square">
-            <a:spAutoFit/>
-          </a:bodyPr>
-          <a:lstStyle/>
-          <a:p>
-            <a:pPr algn="l"/>
-            <a:r>
-              <a:rPr sz="1600" b="1" i="0">
-                <a:solidFill>
-                  <a:srgbClr val="00C2A8"/>
-                </a:solidFill>
-                <a:latin typeface="Calibri"/>
-              </a:rPr>
-              <a:t>Copilot AI</a:t>
-            </a:r>
-          </a:p>
-        </p:txBody>
-      </p:sp>
-      <p:sp>
-        <p:nvSpPr>
-          <p:cNvPr id="11" name="TextBox 10"/>
-          <p:cNvSpPr txBox="1"/>
-          <p:nvPr/>
-        </p:nvSpPr>
-        <p:spPr>
-          <a:xfrm>
-            <a:off x="2834640" y="1481328"/>
-            <a:ext cx="8961120" cy="411480"/>
-          </a:xfrm>
-          <a:prstGeom prst="rect">
-            <a:avLst/>
-          </a:prstGeom>
-          <a:noFill/>
-        </p:spPr>
-        <p:txBody>
-          <a:bodyPr wrap="square">
-            <a:spAutoFit/>
-          </a:bodyPr>
-          <a:lstStyle/>
-          <a:p>
-            <a:pPr algn="l"/>
-            <a:r>
-              <a:rPr sz="1500" b="0" i="0">
-                <a:solidFill>
-                  <a:srgbClr val="FFFFFF"/>
-                </a:solidFill>
-                <a:latin typeface="Calibri"/>
-              </a:rPr>
-              <a:t>Tell Copilot: “IPLC-GB-AT-PRI has failed — set it to offline”</a:t>
-            </a:r>
-          </a:p>
-        </p:txBody>
-      </p:sp>
-      <p:sp>
-        <p:nvSpPr>
-          <p:cNvPr id="12" name="Rectangle 11"/>
-          <p:cNvSpPr/>
-          <p:nvPr/>
-        </p:nvSpPr>
-        <p:spPr>
-          <a:xfrm>
-            <a:off x="320040" y="2002536"/>
-            <a:ext cx="347472" cy="347472"/>
-          </a:xfrm>
-          <a:prstGeom prst="rect">
-            <a:avLst/>
-          </a:prstGeom>
-          <a:solidFill>
-            <a:srgbClr val="00C2A8"/>
-          </a:solidFill>
-          <a:ln>
-            <a:noFill/>
-          </a:ln>
-        </p:spPr>
-        <p:style>
-          <a:lnRef idx="1">
-            <a:schemeClr val="accent1"/>
-          </a:lnRef>
-          <a:fillRef idx="3">
-            <a:schemeClr val="accent1"/>
-          </a:fillRef>
-          <a:effectRef idx="2">
-            <a:schemeClr val="accent1"/>
-          </a:effectRef>
-          <a:fontRef idx="minor">
-            <a:schemeClr val="lt1"/>
-          </a:fontRef>
-        </p:style>
-        <p:txBody>
-          <a:bodyPr rtlCol="0" anchor="ctr"/>
-          <a:lstStyle/>
-          <a:p>
-            <a:pPr algn="ctr"/>
-          </a:p>
-        </p:txBody>
-      </p:sp>
-      <p:sp>
-        <p:nvSpPr>
-          <p:cNvPr id="13" name="TextBox 12"/>
-          <p:cNvSpPr txBox="1"/>
-          <p:nvPr/>
-        </p:nvSpPr>
-        <p:spPr>
-          <a:xfrm>
-            <a:off x="329184" y="1975104"/>
-            <a:ext cx="347472" cy="347472"/>
-          </a:xfrm>
-          <a:prstGeom prst="rect">
-            <a:avLst/>
-          </a:prstGeom>
-          <a:noFill/>
-        </p:spPr>
-        <p:txBody>
-          <a:bodyPr wrap="square">
-            <a:spAutoFit/>
-          </a:bodyPr>
-          <a:lstStyle/>
-          <a:p>
-            <a:pPr algn="ctr"/>
-            <a:r>
-              <a:rPr sz="1600" b="1" i="0">
-                <a:solidFill>
-                  <a:srgbClr val="0D1B2A"/>
-                </a:solidFill>
-                <a:latin typeface="Calibri"/>
-              </a:rPr>
-              <a:t>3</a:t>
-            </a:r>
-          </a:p>
-        </p:txBody>
-      </p:sp>
-      <p:sp>
-        <p:nvSpPr>
-          <p:cNvPr id="14" name="TextBox 13"/>
-          <p:cNvSpPr txBox="1"/>
-          <p:nvPr/>
-        </p:nvSpPr>
-        <p:spPr>
-          <a:xfrm>
-            <a:off x="777240" y="1956816"/>
-            <a:ext cx="2011680" cy="411480"/>
-          </a:xfrm>
-          <a:prstGeom prst="rect">
-            <a:avLst/>
-          </a:prstGeom>
-          <a:noFill/>
-        </p:spPr>
-        <p:txBody>
-          <a:bodyPr wrap="square">
-            <a:spAutoFit/>
-          </a:bodyPr>
-          <a:lstStyle/>
-          <a:p>
-            <a:pPr algn="l"/>
-            <a:r>
-              <a:rPr sz="1600" b="1" i="0">
-                <a:solidFill>
-                  <a:srgbClr val="00C2A8"/>
-                </a:solidFill>
-                <a:latin typeface="Calibri"/>
-              </a:rPr>
-              <a:t>AAP Workflow</a:t>
-            </a:r>
-          </a:p>
-        </p:txBody>
-      </p:sp>
-      <p:sp>
-        <p:nvSpPr>
-          <p:cNvPr id="15" name="TextBox 14"/>
-          <p:cNvSpPr txBox="1"/>
-          <p:nvPr/>
-        </p:nvSpPr>
-        <p:spPr>
-          <a:xfrm>
-            <a:off x="2834640" y="1956816"/>
-            <a:ext cx="8961120" cy="411480"/>
-          </a:xfrm>
-          <a:prstGeom prst="rect">
-            <a:avLst/>
-          </a:prstGeom>
-          <a:noFill/>
-        </p:spPr>
-        <p:txBody>
-          <a:bodyPr wrap="square">
-            <a:spAutoFit/>
-          </a:bodyPr>
-          <a:lstStyle/>
-          <a:p>
-            <a:pPr algn="l"/>
-            <a:r>
-              <a:rPr sz="1500" b="0" i="0">
-                <a:solidFill>
-                  <a:srgbClr val="FFFFFF"/>
-                </a:solidFill>
-                <a:latin typeface="Calibri"/>
-              </a:rPr>
-              <a:t>NetBox event rule fires webhook → AAP launches Circuit Failover Workflow automatically</a:t>
-            </a:r>
-          </a:p>
-        </p:txBody>
-      </p:sp>
-      <p:sp>
-        <p:nvSpPr>
-          <p:cNvPr id="16" name="Rectangle 15"/>
-          <p:cNvSpPr/>
-          <p:nvPr/>
-        </p:nvSpPr>
-        <p:spPr>
-          <a:xfrm>
-            <a:off x="320040" y="2478024"/>
-            <a:ext cx="347472" cy="347472"/>
-          </a:xfrm>
-          <a:prstGeom prst="rect">
-            <a:avLst/>
-          </a:prstGeom>
-          <a:solidFill>
-            <a:srgbClr val="00C2A8"/>
-          </a:solidFill>
-          <a:ln>
-            <a:noFill/>
-          </a:ln>
-        </p:spPr>
-        <p:style>
-          <a:lnRef idx="1">
-            <a:schemeClr val="accent1"/>
-          </a:lnRef>
-          <a:fillRef idx="3">
-            <a:schemeClr val="accent1"/>
-          </a:fillRef>
-          <a:effectRef idx="2">
-            <a:schemeClr val="accent1"/>
-          </a:effectRef>
-          <a:fontRef idx="minor">
-            <a:schemeClr val="lt1"/>
-          </a:fontRef>
-        </p:style>
-        <p:txBody>
-          <a:bodyPr rtlCol="0" anchor="ctr"/>
-          <a:lstStyle/>
-          <a:p>
-            <a:pPr algn="ctr"/>
-          </a:p>
-        </p:txBody>
-      </p:sp>
-      <p:sp>
-        <p:nvSpPr>
-          <p:cNvPr id="17" name="TextBox 16"/>
-          <p:cNvSpPr txBox="1"/>
-          <p:nvPr/>
-        </p:nvSpPr>
-        <p:spPr>
-          <a:xfrm>
-            <a:off x="329184" y="2450592"/>
-            <a:ext cx="347472" cy="347472"/>
-          </a:xfrm>
-          <a:prstGeom prst="rect">
-            <a:avLst/>
-          </a:prstGeom>
-          <a:noFill/>
-        </p:spPr>
-        <p:txBody>
-          <a:bodyPr wrap="square">
-            <a:spAutoFit/>
-          </a:bodyPr>
-          <a:lstStyle/>
-          <a:p>
-            <a:pPr algn="ctr"/>
-            <a:r>
-              <a:rPr sz="1600" b="1" i="0">
-                <a:solidFill>
-                  <a:srgbClr val="0D1B2A"/>
-                </a:solidFill>
-                <a:latin typeface="Calibri"/>
-              </a:rPr>
-              <a:t>4</a:t>
-            </a:r>
-          </a:p>
-        </p:txBody>
-      </p:sp>
-      <p:sp>
-        <p:nvSpPr>
-          <p:cNvPr id="18" name="TextBox 17"/>
-          <p:cNvSpPr txBox="1"/>
-          <p:nvPr/>
-        </p:nvSpPr>
-        <p:spPr>
-          <a:xfrm>
-            <a:off x="777240" y="2432304"/>
-            <a:ext cx="2011680" cy="411480"/>
-          </a:xfrm>
-          <a:prstGeom prst="rect">
-            <a:avLst/>
-          </a:prstGeom>
-          <a:noFill/>
-        </p:spPr>
-        <p:txBody>
-          <a:bodyPr wrap="square">
-            <a:spAutoFit/>
-          </a:bodyPr>
-          <a:lstStyle/>
-          <a:p>
-            <a:pPr algn="l"/>
-            <a:r>
-              <a:rPr sz="1600" b="1" i="0">
-                <a:solidFill>
-                  <a:srgbClr val="00C2A8"/>
-                </a:solidFill>
-                <a:latin typeface="Calibri"/>
-              </a:rPr>
-              <a:t>Step 1: Failover</a:t>
-            </a:r>
-          </a:p>
-        </p:txBody>
-      </p:sp>
-      <p:sp>
-        <p:nvSpPr>
-          <p:cNvPr id="19" name="TextBox 18"/>
-          <p:cNvSpPr txBox="1"/>
-          <p:nvPr/>
-        </p:nvSpPr>
-        <p:spPr>
-          <a:xfrm>
-            <a:off x="2834640" y="2432304"/>
-            <a:ext cx="8961120" cy="411480"/>
-          </a:xfrm>
-          <a:prstGeom prst="rect">
-            <a:avLst/>
-          </a:prstGeom>
-          <a:noFill/>
-        </p:spPr>
-        <p:txBody>
-          <a:bodyPr wrap="square">
-            <a:spAutoFit/>
-          </a:bodyPr>
-          <a:lstStyle/>
-          <a:p>
-            <a:pPr algn="l"/>
-            <a:r>
-              <a:rPr sz="1500" b="0" i="0">
-                <a:solidFill>
-                  <a:srgbClr val="FFFFFF"/>
-                </a:solidFill>
-                <a:latin typeface="Calibri"/>
-              </a:rPr>
-              <a:t>Playbook queries NetBox, finds backup (IPLC-GB-AT-SEC), pushes router config, updates NetBox</a:t>
-            </a:r>
-          </a:p>
-        </p:txBody>
-      </p:sp>
-      <p:sp>
-        <p:nvSpPr>
-          <p:cNvPr id="20" name="Rectangle 19"/>
-          <p:cNvSpPr/>
-          <p:nvPr/>
-        </p:nvSpPr>
-        <p:spPr>
-          <a:xfrm>
-            <a:off x="320040" y="2953512"/>
-            <a:ext cx="347472" cy="347472"/>
-          </a:xfrm>
-          <a:prstGeom prst="rect">
-            <a:avLst/>
-          </a:prstGeom>
-          <a:solidFill>
-            <a:srgbClr val="00C2A8"/>
-          </a:solidFill>
-          <a:ln>
-            <a:noFill/>
-          </a:ln>
-        </p:spPr>
-        <p:style>
-          <a:lnRef idx="1">
-            <a:schemeClr val="accent1"/>
-          </a:lnRef>
-          <a:fillRef idx="3">
-            <a:schemeClr val="accent1"/>
-          </a:fillRef>
-          <a:effectRef idx="2">
-            <a:schemeClr val="accent1"/>
-          </a:effectRef>
-          <a:fontRef idx="minor">
-            <a:schemeClr val="lt1"/>
-          </a:fontRef>
-        </p:style>
-        <p:txBody>
-          <a:bodyPr rtlCol="0" anchor="ctr"/>
-          <a:lstStyle/>
-          <a:p>
-            <a:pPr algn="ctr"/>
-          </a:p>
-        </p:txBody>
-      </p:sp>
-      <p:sp>
-        <p:nvSpPr>
-          <p:cNvPr id="21" name="TextBox 20"/>
-          <p:cNvSpPr txBox="1"/>
-          <p:nvPr/>
-        </p:nvSpPr>
-        <p:spPr>
-          <a:xfrm>
-            <a:off x="329184" y="2926080"/>
-            <a:ext cx="347472" cy="347472"/>
-          </a:xfrm>
-          <a:prstGeom prst="rect">
-            <a:avLst/>
-          </a:prstGeom>
-          <a:noFill/>
-        </p:spPr>
-        <p:txBody>
-          <a:bodyPr wrap="square">
-            <a:spAutoFit/>
-          </a:bodyPr>
-          <a:lstStyle/>
-          <a:p>
-            <a:pPr algn="ctr"/>
-            <a:r>
-              <a:rPr sz="1600" b="1" i="0">
-                <a:solidFill>
-                  <a:srgbClr val="0D1B2A"/>
-                </a:solidFill>
-                <a:latin typeface="Calibri"/>
-              </a:rPr>
-              <a:t>5</a:t>
-            </a:r>
-          </a:p>
-        </p:txBody>
-      </p:sp>
-      <p:sp>
-        <p:nvSpPr>
-          <p:cNvPr id="22" name="TextBox 21"/>
-          <p:cNvSpPr txBox="1"/>
-          <p:nvPr/>
-        </p:nvSpPr>
-        <p:spPr>
-          <a:xfrm>
-            <a:off x="777240" y="2907792"/>
-            <a:ext cx="2011680" cy="411480"/>
-          </a:xfrm>
-          <a:prstGeom prst="rect">
-            <a:avLst/>
-          </a:prstGeom>
-          <a:noFill/>
-        </p:spPr>
-        <p:txBody>
-          <a:bodyPr wrap="square">
-            <a:spAutoFit/>
-          </a:bodyPr>
-          <a:lstStyle/>
-          <a:p>
-            <a:pPr algn="l"/>
-            <a:r>
-              <a:rPr sz="1600" b="1" i="0">
-                <a:solidFill>
-                  <a:srgbClr val="00C2A8"/>
-                </a:solidFill>
-                <a:latin typeface="Calibri"/>
-              </a:rPr>
-              <a:t>Step 2: Report</a:t>
-            </a:r>
-          </a:p>
-        </p:txBody>
-      </p:sp>
-      <p:sp>
-        <p:nvSpPr>
-          <p:cNvPr id="23" name="TextBox 22"/>
-          <p:cNvSpPr txBox="1"/>
-          <p:nvPr/>
-        </p:nvSpPr>
-        <p:spPr>
-          <a:xfrm>
-            <a:off x="2834640" y="2907792"/>
-            <a:ext cx="8961120" cy="411480"/>
-          </a:xfrm>
-          <a:prstGeom prst="rect">
-            <a:avLst/>
-          </a:prstGeom>
-          <a:noFill/>
-        </p:spPr>
-        <p:txBody>
-          <a:bodyPr wrap="square">
-            <a:spAutoFit/>
-          </a:bodyPr>
-          <a:lstStyle/>
-          <a:p>
-            <a:pPr algn="l"/>
-            <a:r>
-              <a:rPr sz="1500" b="0" i="0">
-                <a:solidFill>
-                  <a:srgbClr val="FFFFFF"/>
-                </a:solidFill>
-                <a:latin typeface="Calibri"/>
-              </a:rPr>
-              <a:t>Second workflow step generates HTML incident report and deploys it to the report server</a:t>
-            </a:r>
-          </a:p>
-        </p:txBody>
-      </p:sp>
-      <p:sp>
-        <p:nvSpPr>
-          <p:cNvPr id="24" name="Rectangle 23"/>
-          <p:cNvSpPr/>
-          <p:nvPr/>
-        </p:nvSpPr>
-        <p:spPr>
-          <a:xfrm>
-            <a:off x="320040" y="3429000"/>
-            <a:ext cx="347472" cy="347472"/>
-          </a:xfrm>
-          <a:prstGeom prst="rect">
-            <a:avLst/>
-          </a:prstGeom>
-          <a:solidFill>
-            <a:srgbClr val="00C2A8"/>
-          </a:solidFill>
-          <a:ln>
-            <a:noFill/>
-          </a:ln>
-        </p:spPr>
-        <p:style>
-          <a:lnRef idx="1">
-            <a:schemeClr val="accent1"/>
-          </a:lnRef>
-          <a:fillRef idx="3">
-            <a:schemeClr val="accent1"/>
-          </a:fillRef>
-          <a:effectRef idx="2">
-            <a:schemeClr val="accent1"/>
-          </a:effectRef>
-          <a:fontRef idx="minor">
-            <a:schemeClr val="lt1"/>
-          </a:fontRef>
-        </p:style>
-        <p:txBody>
-          <a:bodyPr rtlCol="0" anchor="ctr"/>
-          <a:lstStyle/>
-          <a:p>
-            <a:pPr algn="ctr"/>
-          </a:p>
-        </p:txBody>
-      </p:sp>
-      <p:sp>
-        <p:nvSpPr>
-          <p:cNvPr id="25" name="TextBox 24"/>
-          <p:cNvSpPr txBox="1"/>
-          <p:nvPr/>
-        </p:nvSpPr>
-        <p:spPr>
-          <a:xfrm>
-            <a:off x="329184" y="3401568"/>
-            <a:ext cx="347472" cy="347472"/>
-          </a:xfrm>
-          <a:prstGeom prst="rect">
-            <a:avLst/>
-          </a:prstGeom>
-          <a:noFill/>
-        </p:spPr>
-        <p:txBody>
-          <a:bodyPr wrap="square">
-            <a:spAutoFit/>
-          </a:bodyPr>
-          <a:lstStyle/>
-          <a:p>
-            <a:pPr algn="ctr"/>
-            <a:r>
-              <a:rPr sz="1600" b="1" i="0">
-                <a:solidFill>
-                  <a:srgbClr val="0D1B2A"/>
-                </a:solidFill>
-                <a:latin typeface="Calibri"/>
-              </a:rPr>
-              <a:t>6</a:t>
-            </a:r>
-          </a:p>
-        </p:txBody>
-      </p:sp>
-      <p:sp>
-        <p:nvSpPr>
-          <p:cNvPr id="26" name="TextBox 25"/>
-          <p:cNvSpPr txBox="1"/>
-          <p:nvPr/>
-        </p:nvSpPr>
-        <p:spPr>
-          <a:xfrm>
-            <a:off x="777240" y="3383280"/>
-            <a:ext cx="2011680" cy="411480"/>
-          </a:xfrm>
-          <a:prstGeom prst="rect">
-            <a:avLst/>
-          </a:prstGeom>
-          <a:noFill/>
-        </p:spPr>
-        <p:txBody>
-          <a:bodyPr wrap="square">
-            <a:spAutoFit/>
-          </a:bodyPr>
-          <a:lstStyle/>
-          <a:p>
-            <a:pPr algn="l"/>
-            <a:r>
-              <a:rPr sz="1600" b="1" i="0">
-                <a:solidFill>
-                  <a:srgbClr val="00C2A8"/>
-                </a:solidFill>
-                <a:latin typeface="Calibri"/>
-              </a:rPr>
-              <a:t>Visual Explorer</a:t>
-            </a:r>
-          </a:p>
-        </p:txBody>
-      </p:sp>
-      <p:sp>
-        <p:nvSpPr>
-          <p:cNvPr id="27" name="TextBox 26"/>
-          <p:cNvSpPr txBox="1"/>
-          <p:nvPr/>
-        </p:nvSpPr>
-        <p:spPr>
-          <a:xfrm>
-            <a:off x="2834640" y="3383280"/>
-            <a:ext cx="8961120" cy="411480"/>
-          </a:xfrm>
-          <a:prstGeom prst="rect">
-            <a:avLst/>
-          </a:prstGeom>
-          <a:noFill/>
-        </p:spPr>
-        <p:txBody>
-          <a:bodyPr wrap="square">
-            <a:spAutoFit/>
-          </a:bodyPr>
-          <a:lstStyle/>
-          <a:p>
-            <a:pPr algn="l"/>
-            <a:r>
-              <a:rPr sz="1500" b="0" i="0">
-                <a:solidFill>
-                  <a:srgbClr val="FFFFFF"/>
-                </a:solidFill>
-                <a:latin typeface="Calibri"/>
-              </a:rPr>
-              <a:t>Refresh map — primary circuit gone, backup confirmed active on new router path</a:t>
-            </a:r>
-          </a:p>
-        </p:txBody>
-      </p:sp>
-      <p:sp>
-        <p:nvSpPr>
-          <p:cNvPr id="28" name="Rectangle 27"/>
-          <p:cNvSpPr/>
-          <p:nvPr/>
-        </p:nvSpPr>
-        <p:spPr>
-          <a:xfrm>
-            <a:off x="320040" y="3904488"/>
-            <a:ext cx="347472" cy="347472"/>
-          </a:xfrm>
-          <a:prstGeom prst="rect">
-            <a:avLst/>
-          </a:prstGeom>
-          <a:solidFill>
-            <a:srgbClr val="00C2A8"/>
-          </a:solidFill>
-          <a:ln>
-            <a:noFill/>
-          </a:ln>
-        </p:spPr>
-        <p:style>
-          <a:lnRef idx="1">
-            <a:schemeClr val="accent1"/>
-          </a:lnRef>
-          <a:fillRef idx="3">
-            <a:schemeClr val="accent1"/>
-          </a:fillRef>
-          <a:effectRef idx="2">
-            <a:schemeClr val="accent1"/>
-          </a:effectRef>
-          <a:fontRef idx="minor">
-            <a:schemeClr val="lt1"/>
-          </a:fontRef>
-        </p:style>
-        <p:txBody>
-          <a:bodyPr rtlCol="0" anchor="ctr"/>
-          <a:lstStyle/>
-          <a:p>
-            <a:pPr algn="ctr"/>
-          </a:p>
-        </p:txBody>
-      </p:sp>
-      <p:sp>
-        <p:nvSpPr>
-          <p:cNvPr id="29" name="TextBox 28"/>
-          <p:cNvSpPr txBox="1"/>
-          <p:nvPr/>
-        </p:nvSpPr>
-        <p:spPr>
-          <a:xfrm>
-            <a:off x="329184" y="3877056"/>
-            <a:ext cx="347472" cy="347472"/>
-          </a:xfrm>
-          <a:prstGeom prst="rect">
-            <a:avLst/>
-          </a:prstGeom>
-          <a:noFill/>
-        </p:spPr>
-        <p:txBody>
-          <a:bodyPr wrap="square">
-            <a:spAutoFit/>
-          </a:bodyPr>
-          <a:lstStyle/>
-          <a:p>
-            <a:pPr algn="ctr"/>
-            <a:r>
-              <a:rPr sz="1600" b="1" i="0">
-                <a:solidFill>
-                  <a:srgbClr val="0D1B2A"/>
-                </a:solidFill>
-                <a:latin typeface="Calibri"/>
-              </a:rPr>
-              <a:t>7</a:t>
-            </a:r>
-          </a:p>
-        </p:txBody>
-      </p:sp>
-      <p:sp>
-        <p:nvSpPr>
-          <p:cNvPr id="30" name="TextBox 29"/>
-          <p:cNvSpPr txBox="1"/>
-          <p:nvPr/>
-        </p:nvSpPr>
-        <p:spPr>
-          <a:xfrm>
-            <a:off x="777240" y="3858768"/>
-            <a:ext cx="2011680" cy="411480"/>
-          </a:xfrm>
-          <a:prstGeom prst="rect">
-            <a:avLst/>
-          </a:prstGeom>
-          <a:noFill/>
-        </p:spPr>
-        <p:txBody>
-          <a:bodyPr wrap="square">
-            <a:spAutoFit/>
-          </a:bodyPr>
-          <a:lstStyle/>
-          <a:p>
-            <a:pPr algn="l"/>
-            <a:r>
-              <a:rPr sz="1600" b="1" i="0">
-                <a:solidFill>
-                  <a:srgbClr val="00C2A8"/>
-                </a:solidFill>
-                <a:latin typeface="Calibri"/>
-              </a:rPr>
-              <a:t>Claude + MCP</a:t>
-            </a:r>
-          </a:p>
-        </p:txBody>
-      </p:sp>
-      <p:sp>
-        <p:nvSpPr>
-          <p:cNvPr id="31" name="TextBox 30"/>
-          <p:cNvSpPr txBox="1"/>
-          <p:nvPr/>
-        </p:nvSpPr>
-        <p:spPr>
-          <a:xfrm>
-            <a:off x="2834640" y="3858768"/>
-            <a:ext cx="8961120" cy="411480"/>
-          </a:xfrm>
-          <a:prstGeom prst="rect">
-            <a:avLst/>
-          </a:prstGeom>
-          <a:noFill/>
-        </p:spPr>
-        <p:txBody>
-          <a:bodyPr wrap="square">
-            <a:spAutoFit/>
-          </a:bodyPr>
-          <a:lstStyle/>
-          <a:p>
-            <a:pPr algn="l"/>
-            <a:r>
-              <a:rPr sz="1500" b="0" i="0">
-                <a:solidFill>
-                  <a:srgbClr val="FFFFFF"/>
-                </a:solidFill>
-                <a:latin typeface="Calibri"/>
-              </a:rPr>
-              <a:t>Ask Claude: “What is the current status of IPLC-GB-AT-PRI?” — live NetBox data confirms</a:t>
+              <a:t>Demo Sequence</a:t>
             </a:r>
           </a:p>
         </p:txBody>
       </p:sp>
       <p:pic>
         <p:nvPicPr>
-          <p:cNvPr id="32" name="Picture 31" descr="netbox_logo_bright.png"/>
+          <p:cNvPr id="4" name="Picture 3" descr="sequence.png"/>
           <p:cNvPicPr>
             <a:picLocks noChangeAspect="1"/>
           </p:cNvPicPr>
@@ -10049,6 +10771,30 @@
         </p:nvPicPr>
         <p:blipFill>
           <a:blip r:embed="rId2"/>
+          <a:stretch>
+            <a:fillRect/>
+          </a:stretch>
+        </p:blipFill>
+        <p:spPr>
+          <a:xfrm>
+            <a:off x="457200" y="914400"/>
+            <a:ext cx="10789920" cy="3596640"/>
+          </a:xfrm>
+          <a:prstGeom prst="rect">
+            <a:avLst/>
+          </a:prstGeom>
+        </p:spPr>
+      </p:pic>
+      <p:pic>
+        <p:nvPicPr>
+          <p:cNvPr id="5" name="Picture 4" descr="netbox_logo_bright.png"/>
+          <p:cNvPicPr>
+            <a:picLocks noChangeAspect="1"/>
+          </p:cNvPicPr>
+          <p:nvPr/>
+        </p:nvPicPr>
+        <p:blipFill>
+          <a:blip r:embed="rId3"/>
           <a:stretch>
             <a:fillRect/>
           </a:stretch>
